--- a/EAP_HCI_Plus_2025.pptx
+++ b/EAP_HCI_Plus_2025.pptx
@@ -11,6 +11,7 @@
     <p:sldId id="259" r:id="rId10"/>
     <p:sldId id="260" r:id="rId11"/>
     <p:sldId id="261" r:id="rId12"/>
+    <p:sldId id="262" r:id="rId13"/>
   </p:sldIdLst>
   <p:sldSz cx="12191695" cy="6858000" type="screen4x3"/>
   <p:notesSz cx="6858000" cy="9144000"/>
@@ -407,25 +408,25 @@
                   <c:v>5</c:v>
                 </c:pt>
                 <c:pt idx="4">
-                  <c:v>3</c:v>
+                  <c:v>5</c:v>
                 </c:pt>
                 <c:pt idx="5">
-                  <c:v>3</c:v>
+                  <c:v>5</c:v>
                 </c:pt>
                 <c:pt idx="6">
-                  <c:v>3</c:v>
+                  <c:v>5</c:v>
                 </c:pt>
                 <c:pt idx="7">
-                  <c:v>3</c:v>
+                  <c:v>5</c:v>
                 </c:pt>
                 <c:pt idx="8">
-                  <c:v>3</c:v>
+                  <c:v>5</c:v>
                 </c:pt>
                 <c:pt idx="9">
-                  <c:v>3</c:v>
+                  <c:v>5</c:v>
                 </c:pt>
                 <c:pt idx="10">
-                  <c:v>3</c:v>
+                  <c:v>5</c:v>
                 </c:pt>
                 <c:pt idx="11">
                   <c:v>5</c:v>
@@ -434,34 +435,34 @@
                   <c:v>5</c:v>
                 </c:pt>
                 <c:pt idx="13">
-                  <c:v>3</c:v>
+                  <c:v>5</c:v>
                 </c:pt>
                 <c:pt idx="14">
-                  <c:v>3</c:v>
+                  <c:v>5</c:v>
                 </c:pt>
                 <c:pt idx="15">
-                  <c:v>3</c:v>
+                  <c:v>5</c:v>
                 </c:pt>
                 <c:pt idx="16">
                   <c:v>5</c:v>
                 </c:pt>
                 <c:pt idx="17">
-                  <c:v>3</c:v>
+                  <c:v>5</c:v>
                 </c:pt>
                 <c:pt idx="18">
-                  <c:v>3</c:v>
+                  <c:v>5</c:v>
                 </c:pt>
                 <c:pt idx="19">
-                  <c:v>3</c:v>
+                  <c:v>5</c:v>
                 </c:pt>
                 <c:pt idx="20">
-                  <c:v>3</c:v>
+                  <c:v>5</c:v>
                 </c:pt>
                 <c:pt idx="21">
-                  <c:v>3</c:v>
+                  <c:v>5</c:v>
                 </c:pt>
                 <c:pt idx="22">
-                  <c:v>8</c:v>
+                  <c:v>5</c:v>
                 </c:pt>
                 <c:pt idx="23">
                   <c:v>5</c:v>
@@ -473,37 +474,37 @@
                   <c:v>5</c:v>
                 </c:pt>
                 <c:pt idx="26">
-                  <c:v>3</c:v>
+                  <c:v>5</c:v>
                 </c:pt>
                 <c:pt idx="27">
-                  <c:v>3</c:v>
+                  <c:v>5</c:v>
                 </c:pt>
                 <c:pt idx="28">
-                  <c:v>10</c:v>
+                  <c:v>5</c:v>
                 </c:pt>
                 <c:pt idx="29">
                   <c:v>5</c:v>
                 </c:pt>
                 <c:pt idx="30">
-                  <c:v>3</c:v>
+                  <c:v>5</c:v>
                 </c:pt>
                 <c:pt idx="31">
                   <c:v>5</c:v>
                 </c:pt>
                 <c:pt idx="32">
-                  <c:v>3</c:v>
+                  <c:v>5</c:v>
                 </c:pt>
                 <c:pt idx="33">
                   <c:v>5</c:v>
                 </c:pt>
                 <c:pt idx="34">
-                  <c:v>3</c:v>
+                  <c:v>5</c:v>
                 </c:pt>
                 <c:pt idx="35">
                   <c:v>5</c:v>
                 </c:pt>
                 <c:pt idx="36">
-                  <c:v>8</c:v>
+                  <c:v>5</c:v>
                 </c:pt>
                 <c:pt idx="37">
                   <c:v>5</c:v>
@@ -696,10 +697,10 @@
                 <c:formatCode>General</c:formatCode>
                 <c:ptCount val="23"/>
                 <c:pt idx="0">
-                  <c:v>8</c:v>
+                  <c:v>5</c:v>
                 </c:pt>
                 <c:pt idx="1">
-                  <c:v>3</c:v>
+                  <c:v>5</c:v>
                 </c:pt>
                 <c:pt idx="2">
                   <c:v>5</c:v>
@@ -708,25 +709,25 @@
                   <c:v>5</c:v>
                 </c:pt>
                 <c:pt idx="4">
-                  <c:v>3</c:v>
+                  <c:v>5</c:v>
                 </c:pt>
                 <c:pt idx="5">
-                  <c:v>3</c:v>
+                  <c:v>5</c:v>
                 </c:pt>
                 <c:pt idx="6">
-                  <c:v>3</c:v>
+                  <c:v>5</c:v>
                 </c:pt>
                 <c:pt idx="7">
-                  <c:v>12</c:v>
+                  <c:v>5</c:v>
                 </c:pt>
                 <c:pt idx="8">
                   <c:v>5</c:v>
                 </c:pt>
                 <c:pt idx="9">
-                  <c:v>3</c:v>
+                  <c:v>5</c:v>
                 </c:pt>
                 <c:pt idx="10">
-                  <c:v>3</c:v>
+                  <c:v>5</c:v>
                 </c:pt>
                 <c:pt idx="11">
                   <c:v>5</c:v>
@@ -735,22 +736,22 @@
                   <c:v>5</c:v>
                 </c:pt>
                 <c:pt idx="13">
-                  <c:v>3</c:v>
+                  <c:v>5</c:v>
                 </c:pt>
                 <c:pt idx="14">
-                  <c:v>10</c:v>
+                  <c:v>5</c:v>
                 </c:pt>
                 <c:pt idx="15">
                   <c:v>5</c:v>
                 </c:pt>
                 <c:pt idx="16">
-                  <c:v>3</c:v>
+                  <c:v>5</c:v>
                 </c:pt>
                 <c:pt idx="17">
-                  <c:v>3</c:v>
+                  <c:v>5</c:v>
                 </c:pt>
                 <c:pt idx="18">
-                  <c:v>3</c:v>
+                  <c:v>5</c:v>
                 </c:pt>
                 <c:pt idx="19">
                   <c:v>5</c:v>
@@ -759,10 +760,10 @@
                   <c:v>5</c:v>
                 </c:pt>
                 <c:pt idx="21">
-                  <c:v>3</c:v>
+                  <c:v>5</c:v>
                 </c:pt>
                 <c:pt idx="22">
-                  <c:v>3</c:v>
+                  <c:v>5</c:v>
                 </c:pt>
               </c:numCache>
             </c:numRef>
@@ -1362,6 +1363,54 @@
               </a:solidFill>
             </c:spPr>
           </c:dPt>
+          <c:dPt>
+            <c:idx val="6"/>
+            <c:spPr>
+              <a:solidFill>
+                <a:srgbClr val="E05A4F"/>
+              </a:solidFill>
+            </c:spPr>
+          </c:dPt>
+          <c:dPt>
+            <c:idx val="7"/>
+            <c:spPr>
+              <a:solidFill>
+                <a:srgbClr val="E05A4F"/>
+              </a:solidFill>
+            </c:spPr>
+          </c:dPt>
+          <c:dPt>
+            <c:idx val="8"/>
+            <c:spPr>
+              <a:solidFill>
+                <a:srgbClr val="E05A4F"/>
+              </a:solidFill>
+            </c:spPr>
+          </c:dPt>
+          <c:dPt>
+            <c:idx val="9"/>
+            <c:spPr>
+              <a:solidFill>
+                <a:srgbClr val="E05A4F"/>
+              </a:solidFill>
+            </c:spPr>
+          </c:dPt>
+          <c:dPt>
+            <c:idx val="10"/>
+            <c:spPr>
+              <a:solidFill>
+                <a:srgbClr val="E05A4F"/>
+              </a:solidFill>
+            </c:spPr>
+          </c:dPt>
+          <c:dPt>
+            <c:idx val="11"/>
+            <c:spPr>
+              <a:solidFill>
+                <a:srgbClr val="E05A4F"/>
+              </a:solidFill>
+            </c:spPr>
+          </c:dPt>
           <c:dLbls>
             <c:numFmt formatCode="0.0" sourceLinked="0"/>
             <c:txPr>
@@ -1369,7 +1418,7 @@
               <a:lstStyle/>
               <a:p>
                 <a:pPr>
-                  <a:defRPr sz="700" b="1">
+                  <a:defRPr sz="600" b="1">
                     <a:latin typeface="Calibri"/>
                   </a:defRPr>
                 </a:pPr>
@@ -1385,9 +1434,9 @@
           </c:dLbls>
           <c:cat>
             <c:strRef>
-              <c:f>Sheet1!$A$2:$A$21</c:f>
+              <c:f>Sheet1!$A$2:$A$28</c:f>
               <c:strCache>
-                <c:ptCount val="20"/>
+                <c:ptCount val="27"/>
                 <c:pt idx="0">
                   <c:v>Lao PDR</c:v>
                 </c:pt>
@@ -1398,54 +1447,75 @@
                   <c:v>Cambodia</c:v>
                 </c:pt>
                 <c:pt idx="3">
+                  <c:v>Marshall Is.</c:v>
+                </c:pt>
+                <c:pt idx="4">
                   <c:v>Myanmar</c:v>
                 </c:pt>
-                <c:pt idx="4">
+                <c:pt idx="5">
+                  <c:v>Nauru</c:v>
+                </c:pt>
+                <c:pt idx="6">
+                  <c:v>Kiribati</c:v>
+                </c:pt>
+                <c:pt idx="7">
+                  <c:v>Samoa</c:v>
+                </c:pt>
+                <c:pt idx="8">
+                  <c:v>Tuvalu</c:v>
+                </c:pt>
+                <c:pt idx="9">
+                  <c:v>Tonga</c:v>
+                </c:pt>
+                <c:pt idx="10">
                   <c:v>Indonesia</c:v>
                 </c:pt>
-                <c:pt idx="5">
+                <c:pt idx="11">
                   <c:v>Philippines</c:v>
                 </c:pt>
-                <c:pt idx="6">
+                <c:pt idx="12">
                   <c:v>Fiji</c:v>
                 </c:pt>
-                <c:pt idx="7">
+                <c:pt idx="13">
+                  <c:v>Malaysia</c:v>
+                </c:pt>
+                <c:pt idx="14">
                   <c:v>Thailand</c:v>
                 </c:pt>
-                <c:pt idx="8">
-                  <c:v>Malaysia</c:v>
-                </c:pt>
-                <c:pt idx="9">
+                <c:pt idx="15">
+                  <c:v>Brunei</c:v>
+                </c:pt>
+                <c:pt idx="16">
                   <c:v>Mongolia</c:v>
                 </c:pt>
-                <c:pt idx="10">
+                <c:pt idx="17">
                   <c:v>Vietnam</c:v>
                 </c:pt>
-                <c:pt idx="11">
+                <c:pt idx="18">
                   <c:v>China</c:v>
                 </c:pt>
-                <c:pt idx="12">
+                <c:pt idx="19">
                   <c:v>Palau</c:v>
                 </c:pt>
-                <c:pt idx="13">
+                <c:pt idx="20">
                   <c:v>Macao</c:v>
                 </c:pt>
-                <c:pt idx="14">
+                <c:pt idx="21">
                   <c:v>Hong Kong</c:v>
                 </c:pt>
-                <c:pt idx="15">
+                <c:pt idx="22">
                   <c:v>New Zealand</c:v>
                 </c:pt>
-                <c:pt idx="16">
+                <c:pt idx="23">
                   <c:v>Korea, Rep.</c:v>
                 </c:pt>
-                <c:pt idx="17">
+                <c:pt idx="24">
                   <c:v>Australia</c:v>
                 </c:pt>
-                <c:pt idx="18">
+                <c:pt idx="25">
                   <c:v>Singapore</c:v>
                 </c:pt>
-                <c:pt idx="19">
+                <c:pt idx="26">
                   <c:v>Japan</c:v>
                 </c:pt>
               </c:strCache>
@@ -1453,10 +1523,10 @@
           </c:cat>
           <c:val>
             <c:numRef>
-              <c:f>Sheet1!$B$2:$B$21</c:f>
+              <c:f>Sheet1!$B$2:$B$28</c:f>
               <c:numCache>
                 <c:formatCode>General</c:formatCode>
-                <c:ptCount val="20"/>
+                <c:ptCount val="27"/>
                 <c:pt idx="0">
                   <c:v>135.6</c:v>
                 </c:pt>
@@ -1467,61 +1537,82 @@
                   <c:v>138.9</c:v>
                 </c:pt>
                 <c:pt idx="3">
+                  <c:v>145.2</c:v>
+                </c:pt>
+                <c:pt idx="4">
                   <c:v>149.2</c:v>
                 </c:pt>
-                <c:pt idx="4">
+                <c:pt idx="5">
+                  <c:v>161.6</c:v>
+                </c:pt>
+                <c:pt idx="6">
+                  <c:v>161.9</c:v>
+                </c:pt>
+                <c:pt idx="7">
+                  <c:v>164.4</c:v>
+                </c:pt>
+                <c:pt idx="8">
+                  <c:v>166.1</c:v>
+                </c:pt>
+                <c:pt idx="9">
+                  <c:v>175.8</c:v>
+                </c:pt>
+                <c:pt idx="10">
                   <c:v>175.4</c:v>
                 </c:pt>
-                <c:pt idx="5">
+                <c:pt idx="11">
                   <c:v>175.4</c:v>
                 </c:pt>
-                <c:pt idx="6">
+                <c:pt idx="12">
                   <c:v>192.8</c:v>
                 </c:pt>
-                <c:pt idx="7">
+                <c:pt idx="13">
+                  <c:v>201.3</c:v>
+                </c:pt>
+                <c:pt idx="14">
                   <c:v>202.3</c:v>
                 </c:pt>
-                <c:pt idx="8">
-                  <c:v>201.3</c:v>
-                </c:pt>
-                <c:pt idx="9">
+                <c:pt idx="15">
+                  <c:v>207.6</c:v>
+                </c:pt>
+                <c:pt idx="16">
                   <c:v>209.5</c:v>
                 </c:pt>
-                <c:pt idx="10">
+                <c:pt idx="17">
                   <c:v>215.8</c:v>
                 </c:pt>
-                <c:pt idx="11">
+                <c:pt idx="18">
                   <c:v>219.8</c:v>
                 </c:pt>
-                <c:pt idx="12">
+                <c:pt idx="19">
                   <c:v>228.6</c:v>
                 </c:pt>
-                <c:pt idx="13">
+                <c:pt idx="20">
                   <c:v>255.9</c:v>
                 </c:pt>
-                <c:pt idx="14">
+                <c:pt idx="21">
                   <c:v>258.4</c:v>
                 </c:pt>
-                <c:pt idx="15">
+                <c:pt idx="22">
                   <c:v>263.1</c:v>
                 </c:pt>
-                <c:pt idx="16">
+                <c:pt idx="23">
                   <c:v>266.9</c:v>
                 </c:pt>
-                <c:pt idx="17">
+                <c:pt idx="24">
                   <c:v>270.0</c:v>
                 </c:pt>
-                <c:pt idx="18">
+                <c:pt idx="25">
                   <c:v>282.4</c:v>
                 </c:pt>
-                <c:pt idx="19">
+                <c:pt idx="26">
                   <c:v>284.3</c:v>
                 </c:pt>
               </c:numCache>
             </c:numRef>
           </c:val>
         </c:ser>
-        <c:gapWidth val="30"/>
+        <c:gapWidth val="20"/>
         <c:axId val="-2068027336"/>
         <c:axId val="-2113994440"/>
       </c:barChart>
@@ -1540,7 +1631,7 @@
           <a:lstStyle/>
           <a:p>
             <a:pPr>
-              <a:defRPr sz="800">
+              <a:defRPr sz="700">
                 <a:latin typeface="Calibri"/>
               </a:defRPr>
             </a:pPr>
@@ -1584,7 +1675,7 @@
           <a:lstStyle/>
           <a:p>
             <a:pPr>
-              <a:defRPr sz="800"/>
+              <a:defRPr sz="700"/>
             </a:pPr>
           </a:p>
         </c:txPr>
@@ -1611,6 +1702,717 @@
 </file>
 
 <file path=ppt/charts/chart4.xml><?xml version="1.0" encoding="utf-8"?>
+<c:chartSpace xmlns:c="http://schemas.openxmlformats.org/drawingml/2006/chart" xmlns:a="http://schemas.openxmlformats.org/drawingml/2006/main" xmlns:r="http://schemas.openxmlformats.org/officeDocument/2006/relationships">
+  <c:date1904 val="0"/>
+  <c:chart>
+    <c:autoTitleDeleted val="0"/>
+    <c:plotArea>
+      <c:barChart>
+        <c:barDir val="bar"/>
+        <c:grouping val="stacked"/>
+        <c:ser>
+          <c:idx val="0"/>
+          <c:order val="0"/>
+          <c:tx>
+            <c:strRef>
+              <c:f>Sheet1!$B$1</c:f>
+              <c:strCache>
+                <c:ptCount val="1"/>
+                <c:pt idx="0">
+                  <c:v>Health</c:v>
+                </c:pt>
+              </c:strCache>
+            </c:strRef>
+          </c:tx>
+          <c:spPr>
+            <a:solidFill>
+              <a:srgbClr val="00889E"/>
+            </a:solidFill>
+          </c:spPr>
+          <c:cat>
+            <c:strRef>
+              <c:f>Sheet1!$A$2:$A$28</c:f>
+              <c:strCache>
+                <c:ptCount val="27"/>
+                <c:pt idx="0">
+                  <c:v>Lao PDR</c:v>
+                </c:pt>
+                <c:pt idx="1">
+                  <c:v>Vanuatu</c:v>
+                </c:pt>
+                <c:pt idx="2">
+                  <c:v>Cambodia</c:v>
+                </c:pt>
+                <c:pt idx="3">
+                  <c:v>Marshall Is.</c:v>
+                </c:pt>
+                <c:pt idx="4">
+                  <c:v>Myanmar</c:v>
+                </c:pt>
+                <c:pt idx="5">
+                  <c:v>Nauru</c:v>
+                </c:pt>
+                <c:pt idx="6">
+                  <c:v>Kiribati</c:v>
+                </c:pt>
+                <c:pt idx="7">
+                  <c:v>Samoa</c:v>
+                </c:pt>
+                <c:pt idx="8">
+                  <c:v>Tuvalu</c:v>
+                </c:pt>
+                <c:pt idx="9">
+                  <c:v>Tonga</c:v>
+                </c:pt>
+                <c:pt idx="10">
+                  <c:v>Indonesia</c:v>
+                </c:pt>
+                <c:pt idx="11">
+                  <c:v>Philippines</c:v>
+                </c:pt>
+                <c:pt idx="12">
+                  <c:v>Fiji</c:v>
+                </c:pt>
+                <c:pt idx="13">
+                  <c:v>Malaysia</c:v>
+                </c:pt>
+                <c:pt idx="14">
+                  <c:v>Thailand</c:v>
+                </c:pt>
+                <c:pt idx="15">
+                  <c:v>Brunei</c:v>
+                </c:pt>
+                <c:pt idx="16">
+                  <c:v>Mongolia</c:v>
+                </c:pt>
+                <c:pt idx="17">
+                  <c:v>Vietnam</c:v>
+                </c:pt>
+                <c:pt idx="18">
+                  <c:v>China</c:v>
+                </c:pt>
+                <c:pt idx="19">
+                  <c:v>Palau</c:v>
+                </c:pt>
+                <c:pt idx="20">
+                  <c:v>Macao</c:v>
+                </c:pt>
+                <c:pt idx="21">
+                  <c:v>Hong Kong</c:v>
+                </c:pt>
+                <c:pt idx="22">
+                  <c:v>New Zealand</c:v>
+                </c:pt>
+                <c:pt idx="23">
+                  <c:v>Korea, Rep.</c:v>
+                </c:pt>
+                <c:pt idx="24">
+                  <c:v>Australia</c:v>
+                </c:pt>
+                <c:pt idx="25">
+                  <c:v>Singapore</c:v>
+                </c:pt>
+                <c:pt idx="26">
+                  <c:v>Japan</c:v>
+                </c:pt>
+              </c:strCache>
+            </c:strRef>
+          </c:cat>
+          <c:val>
+            <c:numRef>
+              <c:f>Sheet1!$B$2:$B$28</c:f>
+              <c:numCache>
+                <c:formatCode>General</c:formatCode>
+                <c:ptCount val="27"/>
+                <c:pt idx="0">
+                  <c:v>38.8</c:v>
+                </c:pt>
+                <c:pt idx="1">
+                  <c:v>39.3</c:v>
+                </c:pt>
+                <c:pt idx="2">
+                  <c:v>40.6</c:v>
+                </c:pt>
+                <c:pt idx="3">
+                  <c:v>36.4</c:v>
+                </c:pt>
+                <c:pt idx="4">
+                  <c:v>38.5</c:v>
+                </c:pt>
+                <c:pt idx="5">
+                  <c:v>35.9</c:v>
+                </c:pt>
+                <c:pt idx="6">
+                  <c:v>41.0</c:v>
+                </c:pt>
+                <c:pt idx="7">
+                  <c:v>43.3</c:v>
+                </c:pt>
+                <c:pt idx="8">
+                  <c:v>40.7</c:v>
+                </c:pt>
+                <c:pt idx="9">
+                  <c:v>44.4</c:v>
+                </c:pt>
+                <c:pt idx="10">
+                  <c:v>40.7</c:v>
+                </c:pt>
+                <c:pt idx="11">
+                  <c:v>40.0</c:v>
+                </c:pt>
+                <c:pt idx="12">
+                  <c:v>41.7</c:v>
+                </c:pt>
+                <c:pt idx="13">
+                  <c:v>42.4</c:v>
+                </c:pt>
+                <c:pt idx="14">
+                  <c:v>42.5</c:v>
+                </c:pt>
+                <c:pt idx="15">
+                  <c:v>44.4</c:v>
+                </c:pt>
+                <c:pt idx="16">
+                  <c:v>42.5</c:v>
+                </c:pt>
+                <c:pt idx="17">
+                  <c:v>42.5</c:v>
+                </c:pt>
+                <c:pt idx="18">
+                  <c:v>46.5</c:v>
+                </c:pt>
+                <c:pt idx="19">
+                  <c:v>41.0</c:v>
+                </c:pt>
+                <c:pt idx="20">
+                  <c:v>47.9</c:v>
+                </c:pt>
+                <c:pt idx="21">
+                  <c:v>47.4</c:v>
+                </c:pt>
+                <c:pt idx="22">
+                  <c:v>46.6</c:v>
+                </c:pt>
+                <c:pt idx="23">
+                  <c:v>48.8</c:v>
+                </c:pt>
+                <c:pt idx="24">
+                  <c:v>48.0</c:v>
+                </c:pt>
+                <c:pt idx="25">
+                  <c:v>47.7</c:v>
+                </c:pt>
+                <c:pt idx="26">
+                  <c:v>47.5</c:v>
+                </c:pt>
+              </c:numCache>
+            </c:numRef>
+          </c:val>
+        </c:ser>
+        <c:ser>
+          <c:idx val="1"/>
+          <c:order val="1"/>
+          <c:tx>
+            <c:strRef>
+              <c:f>Sheet1!$C$1</c:f>
+              <c:strCache>
+                <c:ptCount val="1"/>
+                <c:pt idx="0">
+                  <c:v>Education</c:v>
+                </c:pt>
+              </c:strCache>
+            </c:strRef>
+          </c:tx>
+          <c:spPr>
+            <a:solidFill>
+              <a:srgbClr val="006EAF"/>
+            </a:solidFill>
+          </c:spPr>
+          <c:cat>
+            <c:strRef>
+              <c:f>Sheet1!$A$2:$A$28</c:f>
+              <c:strCache>
+                <c:ptCount val="27"/>
+                <c:pt idx="0">
+                  <c:v>Lao PDR</c:v>
+                </c:pt>
+                <c:pt idx="1">
+                  <c:v>Vanuatu</c:v>
+                </c:pt>
+                <c:pt idx="2">
+                  <c:v>Cambodia</c:v>
+                </c:pt>
+                <c:pt idx="3">
+                  <c:v>Marshall Is.</c:v>
+                </c:pt>
+                <c:pt idx="4">
+                  <c:v>Myanmar</c:v>
+                </c:pt>
+                <c:pt idx="5">
+                  <c:v>Nauru</c:v>
+                </c:pt>
+                <c:pt idx="6">
+                  <c:v>Kiribati</c:v>
+                </c:pt>
+                <c:pt idx="7">
+                  <c:v>Samoa</c:v>
+                </c:pt>
+                <c:pt idx="8">
+                  <c:v>Tuvalu</c:v>
+                </c:pt>
+                <c:pt idx="9">
+                  <c:v>Tonga</c:v>
+                </c:pt>
+                <c:pt idx="10">
+                  <c:v>Indonesia</c:v>
+                </c:pt>
+                <c:pt idx="11">
+                  <c:v>Philippines</c:v>
+                </c:pt>
+                <c:pt idx="12">
+                  <c:v>Fiji</c:v>
+                </c:pt>
+                <c:pt idx="13">
+                  <c:v>Malaysia</c:v>
+                </c:pt>
+                <c:pt idx="14">
+                  <c:v>Thailand</c:v>
+                </c:pt>
+                <c:pt idx="15">
+                  <c:v>Brunei</c:v>
+                </c:pt>
+                <c:pt idx="16">
+                  <c:v>Mongolia</c:v>
+                </c:pt>
+                <c:pt idx="17">
+                  <c:v>Vietnam</c:v>
+                </c:pt>
+                <c:pt idx="18">
+                  <c:v>China</c:v>
+                </c:pt>
+                <c:pt idx="19">
+                  <c:v>Palau</c:v>
+                </c:pt>
+                <c:pt idx="20">
+                  <c:v>Macao</c:v>
+                </c:pt>
+                <c:pt idx="21">
+                  <c:v>Hong Kong</c:v>
+                </c:pt>
+                <c:pt idx="22">
+                  <c:v>New Zealand</c:v>
+                </c:pt>
+                <c:pt idx="23">
+                  <c:v>Korea, Rep.</c:v>
+                </c:pt>
+                <c:pt idx="24">
+                  <c:v>Australia</c:v>
+                </c:pt>
+                <c:pt idx="25">
+                  <c:v>Singapore</c:v>
+                </c:pt>
+                <c:pt idx="26">
+                  <c:v>Japan</c:v>
+                </c:pt>
+              </c:strCache>
+            </c:strRef>
+          </c:cat>
+          <c:val>
+            <c:numRef>
+              <c:f>Sheet1!$C$2:$C$28</c:f>
+              <c:numCache>
+                <c:formatCode>General</c:formatCode>
+                <c:ptCount val="27"/>
+                <c:pt idx="0">
+                  <c:v>66.5</c:v>
+                </c:pt>
+                <c:pt idx="1">
+                  <c:v>84.2</c:v>
+                </c:pt>
+                <c:pt idx="2">
+                  <c:v>69.9</c:v>
+                </c:pt>
+                <c:pt idx="3">
+                  <c:v>88.8</c:v>
+                </c:pt>
+                <c:pt idx="4">
+                  <c:v>76.3</c:v>
+                </c:pt>
+                <c:pt idx="5">
+                  <c:v>82.2</c:v>
+                </c:pt>
+                <c:pt idx="6">
+                  <c:v>96.7</c:v>
+                </c:pt>
+                <c:pt idx="7">
+                  <c:v>102.8</c:v>
+                </c:pt>
+                <c:pt idx="8">
+                  <c:v>102.5</c:v>
+                </c:pt>
+                <c:pt idx="9">
+                  <c:v>100.4</c:v>
+                </c:pt>
+                <c:pt idx="10">
+                  <c:v>96.5</c:v>
+                </c:pt>
+                <c:pt idx="11">
+                  <c:v>98.4</c:v>
+                </c:pt>
+                <c:pt idx="12">
+                  <c:v>120.3</c:v>
+                </c:pt>
+                <c:pt idx="13">
+                  <c:v>111.1</c:v>
+                </c:pt>
+                <c:pt idx="14">
+                  <c:v>114.3</c:v>
+                </c:pt>
+                <c:pt idx="15">
+                  <c:v>117.4</c:v>
+                </c:pt>
+                <c:pt idx="16">
+                  <c:v>128.1</c:v>
+                </c:pt>
+                <c:pt idx="17">
+                  <c:v>123.8</c:v>
+                </c:pt>
+                <c:pt idx="18">
+                  <c:v>127.5</c:v>
+                </c:pt>
+                <c:pt idx="19">
+                  <c:v>132.6</c:v>
+                </c:pt>
+                <c:pt idx="20">
+                  <c:v>147.9</c:v>
+                </c:pt>
+                <c:pt idx="21">
+                  <c:v>162.5</c:v>
+                </c:pt>
+                <c:pt idx="22">
+                  <c:v>155.0</c:v>
+                </c:pt>
+                <c:pt idx="23">
+                  <c:v>170.8</c:v>
+                </c:pt>
+                <c:pt idx="24">
+                  <c:v>160.8</c:v>
+                </c:pt>
+                <c:pt idx="25">
+                  <c:v>179.4</c:v>
+                </c:pt>
+                <c:pt idx="26">
+                  <c:v>172.5</c:v>
+                </c:pt>
+              </c:numCache>
+            </c:numRef>
+          </c:val>
+        </c:ser>
+        <c:ser>
+          <c:idx val="2"/>
+          <c:order val="2"/>
+          <c:tx>
+            <c:strRef>
+              <c:f>Sheet1!$D$1</c:f>
+              <c:strCache>
+                <c:ptCount val="1"/>
+                <c:pt idx="0">
+                  <c:v>Employment</c:v>
+                </c:pt>
+              </c:strCache>
+            </c:strRef>
+          </c:tx>
+          <c:spPr>
+            <a:solidFill>
+              <a:srgbClr val="E87D1E"/>
+            </a:solidFill>
+          </c:spPr>
+          <c:cat>
+            <c:strRef>
+              <c:f>Sheet1!$A$2:$A$28</c:f>
+              <c:strCache>
+                <c:ptCount val="27"/>
+                <c:pt idx="0">
+                  <c:v>Lao PDR</c:v>
+                </c:pt>
+                <c:pt idx="1">
+                  <c:v>Vanuatu</c:v>
+                </c:pt>
+                <c:pt idx="2">
+                  <c:v>Cambodia</c:v>
+                </c:pt>
+                <c:pt idx="3">
+                  <c:v>Marshall Is.</c:v>
+                </c:pt>
+                <c:pt idx="4">
+                  <c:v>Myanmar</c:v>
+                </c:pt>
+                <c:pt idx="5">
+                  <c:v>Nauru</c:v>
+                </c:pt>
+                <c:pt idx="6">
+                  <c:v>Kiribati</c:v>
+                </c:pt>
+                <c:pt idx="7">
+                  <c:v>Samoa</c:v>
+                </c:pt>
+                <c:pt idx="8">
+                  <c:v>Tuvalu</c:v>
+                </c:pt>
+                <c:pt idx="9">
+                  <c:v>Tonga</c:v>
+                </c:pt>
+                <c:pt idx="10">
+                  <c:v>Indonesia</c:v>
+                </c:pt>
+                <c:pt idx="11">
+                  <c:v>Philippines</c:v>
+                </c:pt>
+                <c:pt idx="12">
+                  <c:v>Fiji</c:v>
+                </c:pt>
+                <c:pt idx="13">
+                  <c:v>Malaysia</c:v>
+                </c:pt>
+                <c:pt idx="14">
+                  <c:v>Thailand</c:v>
+                </c:pt>
+                <c:pt idx="15">
+                  <c:v>Brunei</c:v>
+                </c:pt>
+                <c:pt idx="16">
+                  <c:v>Mongolia</c:v>
+                </c:pt>
+                <c:pt idx="17">
+                  <c:v>Vietnam</c:v>
+                </c:pt>
+                <c:pt idx="18">
+                  <c:v>China</c:v>
+                </c:pt>
+                <c:pt idx="19">
+                  <c:v>Palau</c:v>
+                </c:pt>
+                <c:pt idx="20">
+                  <c:v>Macao</c:v>
+                </c:pt>
+                <c:pt idx="21">
+                  <c:v>Hong Kong</c:v>
+                </c:pt>
+                <c:pt idx="22">
+                  <c:v>New Zealand</c:v>
+                </c:pt>
+                <c:pt idx="23">
+                  <c:v>Korea, Rep.</c:v>
+                </c:pt>
+                <c:pt idx="24">
+                  <c:v>Australia</c:v>
+                </c:pt>
+                <c:pt idx="25">
+                  <c:v>Singapore</c:v>
+                </c:pt>
+                <c:pt idx="26">
+                  <c:v>Japan</c:v>
+                </c:pt>
+              </c:strCache>
+            </c:strRef>
+          </c:cat>
+          <c:val>
+            <c:numRef>
+              <c:f>Sheet1!$D$2:$D$28</c:f>
+              <c:numCache>
+                <c:formatCode>General</c:formatCode>
+                <c:ptCount val="27"/>
+                <c:pt idx="0">
+                  <c:v>30.3</c:v>
+                </c:pt>
+                <c:pt idx="1">
+                  <c:v>13.0</c:v>
+                </c:pt>
+                <c:pt idx="2">
+                  <c:v>28.4</c:v>
+                </c:pt>
+                <c:pt idx="3">
+                  <c:v>20.0</c:v>
+                </c:pt>
+                <c:pt idx="4">
+                  <c:v>34.3</c:v>
+                </c:pt>
+                <c:pt idx="5">
+                  <c:v>43.5</c:v>
+                </c:pt>
+                <c:pt idx="6">
+                  <c:v>24.2</c:v>
+                </c:pt>
+                <c:pt idx="7">
+                  <c:v>18.3</c:v>
+                </c:pt>
+                <c:pt idx="8">
+                  <c:v>23.0</c:v>
+                </c:pt>
+                <c:pt idx="9">
+                  <c:v>31.0</c:v>
+                </c:pt>
+                <c:pt idx="10">
+                  <c:v>38.1</c:v>
+                </c:pt>
+                <c:pt idx="11">
+                  <c:v>37.1</c:v>
+                </c:pt>
+                <c:pt idx="12">
+                  <c:v>30.8</c:v>
+                </c:pt>
+                <c:pt idx="13">
+                  <c:v>47.8</c:v>
+                </c:pt>
+                <c:pt idx="14">
+                  <c:v>45.5</c:v>
+                </c:pt>
+                <c:pt idx="15">
+                  <c:v>45.8</c:v>
+                </c:pt>
+                <c:pt idx="16">
+                  <c:v>38.9</c:v>
+                </c:pt>
+                <c:pt idx="17">
+                  <c:v>49.5</c:v>
+                </c:pt>
+                <c:pt idx="18">
+                  <c:v>45.8</c:v>
+                </c:pt>
+                <c:pt idx="19">
+                  <c:v>55.0</c:v>
+                </c:pt>
+                <c:pt idx="20">
+                  <c:v>60.1</c:v>
+                </c:pt>
+                <c:pt idx="21">
+                  <c:v>48.5</c:v>
+                </c:pt>
+                <c:pt idx="22">
+                  <c:v>61.5</c:v>
+                </c:pt>
+                <c:pt idx="23">
+                  <c:v>47.4</c:v>
+                </c:pt>
+                <c:pt idx="24">
+                  <c:v>61.2</c:v>
+                </c:pt>
+                <c:pt idx="25">
+                  <c:v>55.3</c:v>
+                </c:pt>
+                <c:pt idx="26">
+                  <c:v>64.4</c:v>
+                </c:pt>
+              </c:numCache>
+            </c:numRef>
+          </c:val>
+        </c:ser>
+        <c:gapWidth val="20"/>
+        <c:overlap val="100"/>
+        <c:axId val="-2068027336"/>
+        <c:axId val="-2113994440"/>
+      </c:barChart>
+      <c:catAx>
+        <c:axId val="-2068027336"/>
+        <c:scaling>
+          <c:orientation val="minMax"/>
+        </c:scaling>
+        <c:delete val="0"/>
+        <c:axPos val="l"/>
+        <c:majorTickMark val="out"/>
+        <c:minorTickMark val="none"/>
+        <c:tickLblPos val="nextTo"/>
+        <c:txPr>
+          <a:bodyPr/>
+          <a:lstStyle/>
+          <a:p>
+            <a:pPr>
+              <a:defRPr sz="700">
+                <a:latin typeface="Calibri"/>
+              </a:defRPr>
+            </a:pPr>
+          </a:p>
+        </c:txPr>
+        <c:crossAx val="-2113994440"/>
+        <c:crosses val="autoZero"/>
+        <c:auto val="1"/>
+        <c:lblAlgn val="ctr"/>
+        <c:lblOffset val="100"/>
+        <c:noMultiLvlLbl val="0"/>
+      </c:catAx>
+      <c:valAx>
+        <c:axId val="-2113994440"/>
+        <c:scaling>
+          <c:max val="300.0"/>
+        </c:scaling>
+        <c:delete val="0"/>
+        <c:axPos val="b"/>
+        <c:majorGridlines>
+          <c:spPr>
+            <a:ln>
+              <a:solidFill>
+                <a:srgbClr val="EEEEEE"/>
+              </a:solidFill>
+            </a:ln>
+          </c:spPr>
+        </c:majorGridlines>
+        <c:majorTickMark val="out"/>
+        <c:minorTickMark val="none"/>
+        <c:tickLblPos val="nextTo"/>
+        <c:spPr>
+          <a:ln>
+            <a:solidFill>
+              <a:srgbClr val="D0D5DD"/>
+            </a:solidFill>
+          </a:ln>
+        </c:spPr>
+        <c:txPr>
+          <a:bodyPr/>
+          <a:lstStyle/>
+          <a:p>
+            <a:pPr>
+              <a:defRPr sz="800"/>
+            </a:pPr>
+          </a:p>
+        </c:txPr>
+        <c:crossAx val="-2068027336"/>
+        <c:crosses val="autoZero"/>
+      </c:valAx>
+    </c:plotArea>
+    <c:legend>
+      <c:legendPos val="b"/>
+      <c:overlay val="0"/>
+      <c:txPr>
+        <a:bodyPr/>
+        <a:lstStyle/>
+        <a:p>
+          <a:pPr>
+            <a:defRPr sz="900">
+              <a:latin typeface="Calibri"/>
+            </a:defRPr>
+          </a:pPr>
+        </a:p>
+      </c:txPr>
+    </c:legend>
+    <c:dispBlanksAs val="gap"/>
+  </c:chart>
+  <c:txPr>
+    <a:bodyPr/>
+    <a:lstStyle/>
+    <a:p>
+      <a:pPr>
+        <a:defRPr sz="1800"/>
+      </a:pPr>
+      <a:endParaRPr lang="en-US"/>
+    </a:p>
+  </c:txPr>
+  <c:externalData r:id="rId1">
+    <c:autoUpdate val="0"/>
+  </c:externalData>
+</c:chartSpace>
+</file>
+
+<file path=ppt/charts/chart5.xml><?xml version="1.0" encoding="utf-8"?>
 <c:chartSpace xmlns:c="http://schemas.openxmlformats.org/drawingml/2006/chart" xmlns:a="http://schemas.openxmlformats.org/drawingml/2006/main" xmlns:r="http://schemas.openxmlformats.org/officeDocument/2006/relationships">
   <c:date1904 val="0"/>
   <c:chart>
@@ -1760,194 +2562,6 @@
               <a:defRPr sz="900">
                 <a:latin typeface="Calibri"/>
               </a:defRPr>
-            </a:pPr>
-          </a:p>
-        </c:txPr>
-        <c:crossAx val="-2113994440"/>
-        <c:crosses val="autoZero"/>
-        <c:auto val="1"/>
-        <c:lblAlgn val="ctr"/>
-        <c:lblOffset val="100"/>
-        <c:noMultiLvlLbl val="0"/>
-      </c:catAx>
-      <c:valAx>
-        <c:axId val="-2113994440"/>
-        <c:scaling/>
-        <c:delete/>
-        <c:axPos val="b"/>
-        <c:majorTickMark val="out"/>
-        <c:minorTickMark val="none"/>
-        <c:tickLblPos val="nextTo"/>
-        <c:crossAx val="-2068027336"/>
-        <c:crosses val="autoZero"/>
-      </c:valAx>
-    </c:plotArea>
-    <c:dispBlanksAs val="gap"/>
-  </c:chart>
-  <c:txPr>
-    <a:bodyPr/>
-    <a:lstStyle/>
-    <a:p>
-      <a:pPr>
-        <a:defRPr sz="1800"/>
-      </a:pPr>
-      <a:endParaRPr lang="en-US"/>
-    </a:p>
-  </c:txPr>
-  <c:externalData r:id="rId1">
-    <c:autoUpdate val="0"/>
-  </c:externalData>
-</c:chartSpace>
-</file>
-
-<file path=ppt/charts/chart5.xml><?xml version="1.0" encoding="utf-8"?>
-<c:chartSpace xmlns:c="http://schemas.openxmlformats.org/drawingml/2006/chart" xmlns:a="http://schemas.openxmlformats.org/drawingml/2006/main" xmlns:r="http://schemas.openxmlformats.org/officeDocument/2006/relationships">
-  <c:date1904 val="0"/>
-  <c:chart>
-    <c:autoTitleDeleted val="0"/>
-    <c:plotArea>
-      <c:barChart>
-        <c:barDir val="bar"/>
-        <c:grouping val="clustered"/>
-        <c:ser>
-          <c:idx val="0"/>
-          <c:order val="0"/>
-          <c:tx>
-            <c:strRef>
-              <c:f>Sheet1!$B$1</c:f>
-              <c:strCache>
-                <c:ptCount val="1"/>
-                <c:pt idx="0">
-                  <c:v>Education Score</c:v>
-                </c:pt>
-              </c:strCache>
-            </c:strRef>
-          </c:tx>
-          <c:spPr>
-            <a:solidFill>
-              <a:srgbClr val="006EAF"/>
-            </a:solidFill>
-          </c:spPr>
-          <c:dPt>
-            <c:idx val="4"/>
-            <c:spPr>
-              <a:solidFill>
-                <a:srgbClr val="006EAF"/>
-              </a:solidFill>
-            </c:spPr>
-          </c:dPt>
-          <c:dPt>
-            <c:idx val="6"/>
-            <c:spPr>
-              <a:solidFill>
-                <a:srgbClr val="7A7A8C"/>
-              </a:solidFill>
-            </c:spPr>
-          </c:dPt>
-          <c:dLbls>
-            <c:numFmt formatCode="0.0" sourceLinked="0"/>
-            <c:txPr>
-              <a:bodyPr/>
-              <a:lstStyle/>
-              <a:p>
-                <a:pPr>
-                  <a:defRPr sz="900" b="1"/>
-                </a:pPr>
-              </a:p>
-            </c:txPr>
-            <c:showLegendKey val="0"/>
-            <c:showVal val="0"/>
-            <c:showCatName val="0"/>
-            <c:showSerName val="0"/>
-            <c:showPercent val="0"/>
-            <c:showBubbleSize val="0"/>
-            <c:showLeaderLines val="1"/>
-          </c:dLbls>
-          <c:cat>
-            <c:strRef>
-              <c:f>Sheet1!$A$2:$A$8</c:f>
-              <c:strCache>
-                <c:ptCount val="7"/>
-                <c:pt idx="0">
-                  <c:v>Sub-Saharan
-Africa</c:v>
-                </c:pt>
-                <c:pt idx="1">
-                  <c:v>South
-Asia</c:v>
-                </c:pt>
-                <c:pt idx="2">
-                  <c:v>Latin America
-&amp; Caribbean</c:v>
-                </c:pt>
-                <c:pt idx="3">
-                  <c:v>MENA+</c:v>
-                </c:pt>
-                <c:pt idx="4">
-                  <c:v>East Asia
-&amp; Pacific</c:v>
-                </c:pt>
-                <c:pt idx="5">
-                  <c:v>Europe &amp;
-Central Asia</c:v>
-                </c:pt>
-                <c:pt idx="6">
-                  <c:v>World</c:v>
-                </c:pt>
-              </c:strCache>
-            </c:strRef>
-          </c:cat>
-          <c:val>
-            <c:numRef>
-              <c:f>Sheet1!$B$2:$B$8</c:f>
-              <c:numCache>
-                <c:formatCode>General</c:formatCode>
-                <c:ptCount val="7"/>
-                <c:pt idx="0">
-                  <c:v>64.1</c:v>
-                </c:pt>
-                <c:pt idx="1">
-                  <c:v>83.0</c:v>
-                </c:pt>
-                <c:pt idx="2">
-                  <c:v>98.3</c:v>
-                </c:pt>
-                <c:pt idx="3">
-                  <c:v>105.8</c:v>
-                </c:pt>
-                <c:pt idx="4">
-                  <c:v>118.1</c:v>
-                </c:pt>
-                <c:pt idx="5">
-                  <c:v>140.8</c:v>
-                </c:pt>
-                <c:pt idx="6">
-                  <c:v>107.4</c:v>
-                </c:pt>
-              </c:numCache>
-            </c:numRef>
-          </c:val>
-        </c:ser>
-        <c:gapWidth val="50"/>
-        <c:axId val="-2068027336"/>
-        <c:axId val="-2113994440"/>
-      </c:barChart>
-      <c:catAx>
-        <c:axId val="-2068027336"/>
-        <c:scaling>
-          <c:orientation val="minMax"/>
-        </c:scaling>
-        <c:delete val="0"/>
-        <c:axPos val="l"/>
-        <c:majorTickMark val="out"/>
-        <c:minorTickMark val="none"/>
-        <c:tickLblPos val="nextTo"/>
-        <c:txPr>
-          <a:bodyPr/>
-          <a:lstStyle/>
-          <a:p>
-            <a:pPr>
-              <a:defRPr sz="900"/>
             </a:pPr>
           </a:p>
         </c:txPr>
@@ -2006,6 +2620,194 @@
               <c:strCache>
                 <c:ptCount val="1"/>
                 <c:pt idx="0">
+                  <c:v>Education Score</c:v>
+                </c:pt>
+              </c:strCache>
+            </c:strRef>
+          </c:tx>
+          <c:spPr>
+            <a:solidFill>
+              <a:srgbClr val="006EAF"/>
+            </a:solidFill>
+          </c:spPr>
+          <c:dPt>
+            <c:idx val="4"/>
+            <c:spPr>
+              <a:solidFill>
+                <a:srgbClr val="006EAF"/>
+              </a:solidFill>
+            </c:spPr>
+          </c:dPt>
+          <c:dPt>
+            <c:idx val="6"/>
+            <c:spPr>
+              <a:solidFill>
+                <a:srgbClr val="7A7A8C"/>
+              </a:solidFill>
+            </c:spPr>
+          </c:dPt>
+          <c:dLbls>
+            <c:numFmt formatCode="0.0" sourceLinked="0"/>
+            <c:txPr>
+              <a:bodyPr/>
+              <a:lstStyle/>
+              <a:p>
+                <a:pPr>
+                  <a:defRPr sz="900" b="1"/>
+                </a:pPr>
+              </a:p>
+            </c:txPr>
+            <c:showLegendKey val="0"/>
+            <c:showVal val="0"/>
+            <c:showCatName val="0"/>
+            <c:showSerName val="0"/>
+            <c:showPercent val="0"/>
+            <c:showBubbleSize val="0"/>
+            <c:showLeaderLines val="1"/>
+          </c:dLbls>
+          <c:cat>
+            <c:strRef>
+              <c:f>Sheet1!$A$2:$A$8</c:f>
+              <c:strCache>
+                <c:ptCount val="7"/>
+                <c:pt idx="0">
+                  <c:v>Sub-Saharan
+Africa</c:v>
+                </c:pt>
+                <c:pt idx="1">
+                  <c:v>South
+Asia</c:v>
+                </c:pt>
+                <c:pt idx="2">
+                  <c:v>Latin America
+&amp; Caribbean</c:v>
+                </c:pt>
+                <c:pt idx="3">
+                  <c:v>MENA+</c:v>
+                </c:pt>
+                <c:pt idx="4">
+                  <c:v>East Asia
+&amp; Pacific</c:v>
+                </c:pt>
+                <c:pt idx="5">
+                  <c:v>Europe &amp;
+Central Asia</c:v>
+                </c:pt>
+                <c:pt idx="6">
+                  <c:v>World</c:v>
+                </c:pt>
+              </c:strCache>
+            </c:strRef>
+          </c:cat>
+          <c:val>
+            <c:numRef>
+              <c:f>Sheet1!$B$2:$B$8</c:f>
+              <c:numCache>
+                <c:formatCode>General</c:formatCode>
+                <c:ptCount val="7"/>
+                <c:pt idx="0">
+                  <c:v>64.1</c:v>
+                </c:pt>
+                <c:pt idx="1">
+                  <c:v>83.0</c:v>
+                </c:pt>
+                <c:pt idx="2">
+                  <c:v>98.3</c:v>
+                </c:pt>
+                <c:pt idx="3">
+                  <c:v>105.8</c:v>
+                </c:pt>
+                <c:pt idx="4">
+                  <c:v>118.1</c:v>
+                </c:pt>
+                <c:pt idx="5">
+                  <c:v>140.8</c:v>
+                </c:pt>
+                <c:pt idx="6">
+                  <c:v>107.4</c:v>
+                </c:pt>
+              </c:numCache>
+            </c:numRef>
+          </c:val>
+        </c:ser>
+        <c:gapWidth val="50"/>
+        <c:axId val="-2068027336"/>
+        <c:axId val="-2113994440"/>
+      </c:barChart>
+      <c:catAx>
+        <c:axId val="-2068027336"/>
+        <c:scaling>
+          <c:orientation val="minMax"/>
+        </c:scaling>
+        <c:delete val="0"/>
+        <c:axPos val="l"/>
+        <c:majorTickMark val="out"/>
+        <c:minorTickMark val="none"/>
+        <c:tickLblPos val="nextTo"/>
+        <c:txPr>
+          <a:bodyPr/>
+          <a:lstStyle/>
+          <a:p>
+            <a:pPr>
+              <a:defRPr sz="900"/>
+            </a:pPr>
+          </a:p>
+        </c:txPr>
+        <c:crossAx val="-2113994440"/>
+        <c:crosses val="autoZero"/>
+        <c:auto val="1"/>
+        <c:lblAlgn val="ctr"/>
+        <c:lblOffset val="100"/>
+        <c:noMultiLvlLbl val="0"/>
+      </c:catAx>
+      <c:valAx>
+        <c:axId val="-2113994440"/>
+        <c:scaling/>
+        <c:delete/>
+        <c:axPos val="b"/>
+        <c:majorTickMark val="out"/>
+        <c:minorTickMark val="none"/>
+        <c:tickLblPos val="nextTo"/>
+        <c:crossAx val="-2068027336"/>
+        <c:crosses val="autoZero"/>
+      </c:valAx>
+    </c:plotArea>
+    <c:dispBlanksAs val="gap"/>
+  </c:chart>
+  <c:txPr>
+    <a:bodyPr/>
+    <a:lstStyle/>
+    <a:p>
+      <a:pPr>
+        <a:defRPr sz="1800"/>
+      </a:pPr>
+      <a:endParaRPr lang="en-US"/>
+    </a:p>
+  </c:txPr>
+  <c:externalData r:id="rId1">
+    <c:autoUpdate val="0"/>
+  </c:externalData>
+</c:chartSpace>
+</file>
+
+<file path=ppt/charts/chart7.xml><?xml version="1.0" encoding="utf-8"?>
+<c:chartSpace xmlns:c="http://schemas.openxmlformats.org/drawingml/2006/chart" xmlns:a="http://schemas.openxmlformats.org/drawingml/2006/main" xmlns:r="http://schemas.openxmlformats.org/officeDocument/2006/relationships">
+  <c:date1904 val="0"/>
+  <c:chart>
+    <c:autoTitleDeleted val="0"/>
+    <c:plotArea>
+      <c:barChart>
+        <c:barDir val="bar"/>
+        <c:grouping val="clustered"/>
+        <c:ser>
+          <c:idx val="0"/>
+          <c:order val="0"/>
+          <c:tx>
+            <c:strRef>
+              <c:f>Sheet1!$B$1</c:f>
+              <c:strCache>
+                <c:ptCount val="1"/>
+                <c:pt idx="0">
                   <c:v>Gender Gap</c:v>
                 </c:pt>
               </c:strCache>
@@ -2190,7 +2992,7 @@
 </c:chartSpace>
 </file>
 
-<file path=ppt/charts/chart7.xml><?xml version="1.0" encoding="utf-8"?>
+<file path=ppt/charts/chart8.xml><?xml version="1.0" encoding="utf-8"?>
 <c:chartSpace xmlns:c="http://schemas.openxmlformats.org/drawingml/2006/chart" xmlns:a="http://schemas.openxmlformats.org/drawingml/2006/main" xmlns:r="http://schemas.openxmlformats.org/officeDocument/2006/relationships">
   <c:date1904 val="0"/>
   <c:chart>
@@ -8999,7 +9801,7 @@
               </a:defRPr>
             </a:pPr>
             <a:r>
-              <a:t>TOP EAP ECONOMIES BY HCI+ SCORE</a:t>
+              <a:t>ALL EAP ECONOMIES BY HCI+ SCORE</a:t>
             </a:r>
           </a:p>
         </p:txBody>
@@ -9057,7 +9859,7 @@
         </p:nvGraphicFramePr>
         <p:xfrm>
           <a:off x="6492240" y="1828800"/>
-          <a:ext cx="4937760" cy="3200400"/>
+          <a:ext cx="4937760" cy="3840480"/>
         </p:xfrm>
         <a:graphic>
           <a:graphicData uri="http://schemas.openxmlformats.org/drawingml/2006/chart">
@@ -9073,7 +9875,7 @@
         </p:nvSpPr>
         <p:spPr>
           <a:xfrm>
-            <a:off x="6492240" y="5166360"/>
+            <a:off x="6492240" y="5760720"/>
             <a:ext cx="228600" cy="109728"/>
           </a:xfrm>
           <a:prstGeom prst="rect">
@@ -9116,7 +9918,7 @@
         </p:nvSpPr>
         <p:spPr>
           <a:xfrm>
-            <a:off x="6812280" y="5120640"/>
+            <a:off x="6812280" y="5715000"/>
             <a:ext cx="1371600" cy="182880"/>
           </a:xfrm>
           <a:prstGeom prst="rect">
@@ -9137,7 +9939,7 @@
               </a:defRPr>
             </a:pPr>
             <a:r>
-              <a:t>Above world avg</a:t>
+              <a:t>Above world avg (188.5)</a:t>
             </a:r>
           </a:p>
         </p:txBody>
@@ -9150,7 +9952,7 @@
         </p:nvSpPr>
         <p:spPr>
           <a:xfrm>
-            <a:off x="8229600" y="5166360"/>
+            <a:off x="8503920" y="5760720"/>
             <a:ext cx="228600" cy="109728"/>
           </a:xfrm>
           <a:prstGeom prst="rect">
@@ -9193,7 +9995,7 @@
         </p:nvSpPr>
         <p:spPr>
           <a:xfrm>
-            <a:off x="8549640" y="5120640"/>
+            <a:off x="8823960" y="5715000"/>
             <a:ext cx="1371600" cy="182880"/>
           </a:xfrm>
           <a:prstGeom prst="rect">
@@ -9221,41 +10023,7 @@
       </p:sp>
       <p:sp>
         <p:nvSpPr>
-          <p:cNvPr id="35" name="TextBox 34"/>
-          <p:cNvSpPr txBox="1"/>
-          <p:nvPr/>
-        </p:nvSpPr>
-        <p:spPr>
-          <a:xfrm>
-            <a:off x="6492240" y="5394960"/>
-            <a:ext cx="5029200" cy="731520"/>
-          </a:xfrm>
-          <a:prstGeom prst="rect">
-            <a:avLst/>
-          </a:prstGeom>
-          <a:noFill/>
-        </p:spPr>
-        <p:txBody>
-          <a:bodyPr wrap="square" anchor="t"/>
-          <a:lstStyle/>
-          <a:p>
-            <a:pPr algn="l">
-              <a:defRPr sz="1000" b="0">
-                <a:solidFill>
-                  <a:srgbClr val="1A1A2E"/>
-                </a:solidFill>
-                <a:latin typeface="Calibri"/>
-              </a:defRPr>
-            </a:pPr>
-            <a:r>
-              <a:t>KEY INSIGHT: EAP outperforms the world average in all three components. Education is the strongest pillar (118.1 vs world 107.4). However, a 2:1 gap exists between top (Japan, 284.3) and bottom performers (Lao PDR, 135.6), reflecting wide income and development disparities.</a:t>
-            </a:r>
-          </a:p>
-        </p:txBody>
-      </p:sp>
-      <p:sp>
-        <p:nvSpPr>
-          <p:cNvPr id="36" name="Rectangle 35"/>
+          <p:cNvPr id="35" name="Rectangle 34"/>
           <p:cNvSpPr/>
           <p:nvPr/>
         </p:nvSpPr>
@@ -9298,46 +10066,46 @@
       </p:sp>
       <p:sp>
         <p:nvSpPr>
+          <p:cNvPr id="36" name="TextBox 35"/>
+          <p:cNvSpPr txBox="1"/>
+          <p:nvPr/>
+        </p:nvSpPr>
+        <p:spPr>
+          <a:xfrm>
+            <a:off x="548640" y="6464808"/>
+            <a:ext cx="5486400" cy="320040"/>
+          </a:xfrm>
+          <a:prstGeom prst="rect">
+            <a:avLst/>
+          </a:prstGeom>
+          <a:noFill/>
+        </p:spPr>
+        <p:txBody>
+          <a:bodyPr wrap="square" anchor="t"/>
+          <a:lstStyle/>
+          <a:p>
+            <a:pPr algn="l">
+              <a:defRPr sz="800" b="0">
+                <a:solidFill>
+                  <a:srgbClr val="AABBCC"/>
+                </a:solidFill>
+                <a:latin typeface="Calibri"/>
+              </a:defRPr>
+            </a:pPr>
+            <a:r>
+              <a:t>Source: World Bank Human Capital Index Plus (HCI+) 2025  |  github.com/worldbank/HCI-Plus</a:t>
+            </a:r>
+          </a:p>
+        </p:txBody>
+      </p:sp>
+      <p:sp>
+        <p:nvSpPr>
           <p:cNvPr id="37" name="TextBox 36"/>
           <p:cNvSpPr txBox="1"/>
           <p:nvPr/>
         </p:nvSpPr>
         <p:spPr>
           <a:xfrm>
-            <a:off x="548640" y="6464808"/>
-            <a:ext cx="5486400" cy="320040"/>
-          </a:xfrm>
-          <a:prstGeom prst="rect">
-            <a:avLst/>
-          </a:prstGeom>
-          <a:noFill/>
-        </p:spPr>
-        <p:txBody>
-          <a:bodyPr wrap="square" anchor="t"/>
-          <a:lstStyle/>
-          <a:p>
-            <a:pPr algn="l">
-              <a:defRPr sz="800" b="0">
-                <a:solidFill>
-                  <a:srgbClr val="AABBCC"/>
-                </a:solidFill>
-                <a:latin typeface="Calibri"/>
-              </a:defRPr>
-            </a:pPr>
-            <a:r>
-              <a:t>Source: World Bank Human Capital Index Plus (HCI+) 2025  |  github.com/worldbank/HCI-Plus</a:t>
-            </a:r>
-          </a:p>
-        </p:txBody>
-      </p:sp>
-      <p:sp>
-        <p:nvSpPr>
-          <p:cNvPr id="38" name="TextBox 37"/>
-          <p:cNvSpPr txBox="1"/>
-          <p:nvPr/>
-        </p:nvSpPr>
-        <p:spPr>
-          <a:xfrm>
             <a:off x="9144000" y="6464808"/>
             <a:ext cx="2286000" cy="320040"/>
           </a:xfrm>
@@ -9366,7 +10134,7 @@
       </p:sp>
       <p:sp>
         <p:nvSpPr>
-          <p:cNvPr id="39" name="TextBox 38"/>
+          <p:cNvPr id="38" name="TextBox 37"/>
           <p:cNvSpPr txBox="1"/>
           <p:nvPr/>
         </p:nvSpPr>
@@ -9504,44 +10272,35 @@
       </p:sp>
       <p:sp>
         <p:nvSpPr>
-          <p:cNvPr id="4" name="Rectangle 3"/>
-          <p:cNvSpPr/>
-          <p:nvPr/>
-        </p:nvSpPr>
-        <p:spPr>
-          <a:xfrm>
-            <a:off x="0" y="914400"/>
-            <a:ext cx="12191695" cy="50800"/>
-          </a:xfrm>
-          <a:prstGeom prst="rect">
-            <a:avLst/>
-          </a:prstGeom>
-          <a:solidFill>
-            <a:srgbClr val="00889E"/>
-          </a:solidFill>
-          <a:ln>
-            <a:noFill/>
-          </a:ln>
-        </p:spPr>
-        <p:style>
-          <a:lnRef idx="1">
-            <a:schemeClr val="accent1"/>
-          </a:lnRef>
-          <a:fillRef idx="3">
-            <a:schemeClr val="accent1"/>
-          </a:fillRef>
-          <a:effectRef idx="2">
-            <a:schemeClr val="accent1"/>
-          </a:effectRef>
-          <a:fontRef idx="minor">
-            <a:schemeClr val="lt1"/>
-          </a:fontRef>
-        </p:style>
-        <p:txBody>
-          <a:bodyPr rtlCol="0" anchor="ctr"/>
-          <a:lstStyle/>
-          <a:p>
-            <a:pPr algn="ctr"/>
+          <p:cNvPr id="4" name="TextBox 3"/>
+          <p:cNvSpPr txBox="1"/>
+          <p:nvPr/>
+        </p:nvSpPr>
+        <p:spPr>
+          <a:xfrm>
+            <a:off x="548640" y="137160"/>
+            <a:ext cx="7315200" cy="640080"/>
+          </a:xfrm>
+          <a:prstGeom prst="rect">
+            <a:avLst/>
+          </a:prstGeom>
+          <a:noFill/>
+        </p:spPr>
+        <p:txBody>
+          <a:bodyPr wrap="square" anchor="ctr"/>
+          <a:lstStyle/>
+          <a:p>
+            <a:pPr algn="l">
+              <a:defRPr sz="2400" b="1">
+                <a:solidFill>
+                  <a:srgbClr val="FFFFFF"/>
+                </a:solidFill>
+                <a:latin typeface="Calibri Light"/>
+              </a:defRPr>
+            </a:pPr>
+            <a:r>
+              <a:t>East Asia &amp; Pacific  |  Country Decomposition</a:t>
+            </a:r>
           </a:p>
         </p:txBody>
       </p:sp>
@@ -9553,40 +10312,6 @@
         </p:nvSpPr>
         <p:spPr>
           <a:xfrm>
-            <a:off x="548640" y="137160"/>
-            <a:ext cx="7315200" cy="640080"/>
-          </a:xfrm>
-          <a:prstGeom prst="rect">
-            <a:avLst/>
-          </a:prstGeom>
-          <a:noFill/>
-        </p:spPr>
-        <p:txBody>
-          <a:bodyPr wrap="square" anchor="ctr"/>
-          <a:lstStyle/>
-          <a:p>
-            <a:pPr algn="l">
-              <a:defRPr sz="2400" b="1">
-                <a:solidFill>
-                  <a:srgbClr val="FFFFFF"/>
-                </a:solidFill>
-                <a:latin typeface="Calibri Light"/>
-              </a:defRPr>
-            </a:pPr>
-            <a:r>
-              <a:t>Health Component  |  East Asia &amp; Pacific</a:t>
-            </a:r>
-          </a:p>
-        </p:txBody>
-      </p:sp>
-      <p:sp>
-        <p:nvSpPr>
-          <p:cNvPr id="6" name="TextBox 5"/>
-          <p:cNvSpPr txBox="1"/>
-          <p:nvPr/>
-        </p:nvSpPr>
-        <p:spPr>
-          <a:xfrm>
             <a:off x="8686800" y="137160"/>
             <a:ext cx="3200400" cy="640080"/>
           </a:xfrm>
@@ -9600,63 +10325,29 @@
           <a:lstStyle/>
           <a:p>
             <a:pPr algn="r">
-              <a:defRPr sz="2200" b="1">
-                <a:solidFill>
-                  <a:srgbClr val="00889E"/>
+              <a:defRPr sz="1600" b="1">
+                <a:solidFill>
+                  <a:srgbClr val="006EAF"/>
                 </a:solidFill>
                 <a:latin typeface="Calibri"/>
               </a:defRPr>
             </a:pPr>
             <a:r>
-              <a:t>Avg: 42.8 / 50</a:t>
-            </a:r>
-          </a:p>
-        </p:txBody>
-      </p:sp>
-      <p:sp>
-        <p:nvSpPr>
-          <p:cNvPr id="7" name="TextBox 6"/>
-          <p:cNvSpPr txBox="1"/>
-          <p:nvPr/>
-        </p:nvSpPr>
-        <p:spPr>
-          <a:xfrm>
-            <a:off x="548640" y="1234440"/>
-            <a:ext cx="7315200" cy="365760"/>
-          </a:xfrm>
-          <a:prstGeom prst="rect">
-            <a:avLst/>
-          </a:prstGeom>
-          <a:noFill/>
-        </p:spPr>
-        <p:txBody>
-          <a:bodyPr wrap="square" anchor="t"/>
-          <a:lstStyle/>
-          <a:p>
-            <a:pPr algn="l">
-              <a:defRPr sz="1100" b="0">
-                <a:solidFill>
-                  <a:srgbClr val="7A7A8C"/>
-                </a:solidFill>
-                <a:latin typeface="Calibri"/>
-              </a:defRPr>
-            </a:pPr>
-            <a:r>
-              <a:t>Health outcomes reflect adult survival (ages 15-60) and freedom from childhood stunting.</a:t>
-            </a:r>
-          </a:p>
-        </p:txBody>
-      </p:sp>
-      <p:sp>
-        <p:nvSpPr>
-          <p:cNvPr id="8" name="Rounded Rectangle 7"/>
+              <a:t>Health + Education + Employment</a:t>
+            </a:r>
+          </a:p>
+        </p:txBody>
+      </p:sp>
+      <p:sp>
+        <p:nvSpPr>
+          <p:cNvPr id="6" name="Rounded Rectangle 5"/>
           <p:cNvSpPr/>
           <p:nvPr/>
         </p:nvSpPr>
         <p:spPr>
           <a:xfrm>
-            <a:off x="457200" y="1828800"/>
-            <a:ext cx="5486400" cy="2194560"/>
+            <a:off x="457200" y="1097280"/>
+            <a:ext cx="11247120" cy="5029200"/>
           </a:xfrm>
           <a:prstGeom prst="roundRect">
             <a:avLst/>
@@ -9692,20 +10383,54 @@
       </p:sp>
       <p:sp>
         <p:nvSpPr>
-          <p:cNvPr id="9" name="Rectangle 8"/>
+          <p:cNvPr id="7" name="TextBox 6"/>
+          <p:cNvSpPr txBox="1"/>
+          <p:nvPr/>
+        </p:nvSpPr>
+        <p:spPr>
+          <a:xfrm>
+            <a:off x="731520" y="1234440"/>
+            <a:ext cx="7315200" cy="274320"/>
+          </a:xfrm>
+          <a:prstGeom prst="rect">
+            <a:avLst/>
+          </a:prstGeom>
+          <a:noFill/>
+        </p:spPr>
+        <p:txBody>
+          <a:bodyPr wrap="square" anchor="t"/>
+          <a:lstStyle/>
+          <a:p>
+            <a:pPr algn="l">
+              <a:defRPr sz="1100" b="1">
+                <a:solidFill>
+                  <a:srgbClr val="7A7A8C"/>
+                </a:solidFill>
+                <a:latin typeface="Calibri"/>
+              </a:defRPr>
+            </a:pPr>
+            <a:r>
+              <a:t>COMPONENT DECOMPOSITION BY ECONOMY (sorted by total HCI+)</a:t>
+            </a:r>
+          </a:p>
+        </p:txBody>
+      </p:sp>
+      <p:sp>
+        <p:nvSpPr>
+          <p:cNvPr id="8" name="Rectangle 7"/>
           <p:cNvSpPr/>
           <p:nvPr/>
         </p:nvSpPr>
         <p:spPr>
           <a:xfrm>
-            <a:off x="457200" y="1828800"/>
-            <a:ext cx="5486400" cy="50800"/>
+            <a:off x="731520" y="1508760"/>
+            <a:ext cx="2286000" cy="38100"/>
           </a:xfrm>
           <a:prstGeom prst="rect">
             <a:avLst/>
           </a:prstGeom>
           <a:solidFill>
-            <a:srgbClr val="00889E"/>
+            <a:srgbClr val="006EAF"/>
           </a:solidFill>
           <a:ln>
             <a:noFill/>
@@ -9733,889 +10458,17 @@
           </a:p>
         </p:txBody>
       </p:sp>
-      <p:sp>
-        <p:nvSpPr>
-          <p:cNvPr id="10" name="TextBox 9"/>
-          <p:cNvSpPr txBox="1"/>
-          <p:nvPr/>
-        </p:nvSpPr>
-        <p:spPr>
-          <a:xfrm>
-            <a:off x="731520" y="2011680"/>
-            <a:ext cx="2743200" cy="228600"/>
-          </a:xfrm>
-          <a:prstGeom prst="rect">
-            <a:avLst/>
-          </a:prstGeom>
-          <a:noFill/>
-        </p:spPr>
-        <p:txBody>
-          <a:bodyPr wrap="square" anchor="t"/>
-          <a:lstStyle/>
-          <a:p>
-            <a:pPr algn="l">
-              <a:defRPr sz="1200" b="1">
-                <a:solidFill>
-                  <a:srgbClr val="00889E"/>
-                </a:solidFill>
-                <a:latin typeface="Calibri"/>
-              </a:defRPr>
-            </a:pPr>
-            <a:r>
-              <a:t>ADULT SURVIVAL RATE (EAP AVG)</a:t>
-            </a:r>
-          </a:p>
-        </p:txBody>
-      </p:sp>
-      <p:sp>
-        <p:nvSpPr>
-          <p:cNvPr id="11" name="TextBox 10"/>
-          <p:cNvSpPr txBox="1"/>
-          <p:nvPr/>
-        </p:nvSpPr>
-        <p:spPr>
-          <a:xfrm>
-            <a:off x="731520" y="2286000"/>
-            <a:ext cx="4572000" cy="228600"/>
-          </a:xfrm>
-          <a:prstGeom prst="rect">
-            <a:avLst/>
-          </a:prstGeom>
-          <a:noFill/>
-        </p:spPr>
-        <p:txBody>
-          <a:bodyPr wrap="square" anchor="t"/>
-          <a:lstStyle/>
-          <a:p>
-            <a:pPr algn="l">
-              <a:defRPr sz="1000" b="0">
-                <a:solidFill>
-                  <a:srgbClr val="7A7A8C"/>
-                </a:solidFill>
-                <a:latin typeface="Calibri"/>
-              </a:defRPr>
-            </a:pPr>
-            <a:r>
-              <a:t>Probability of surviving from age 15 to 60</a:t>
-            </a:r>
-          </a:p>
-        </p:txBody>
-      </p:sp>
-      <p:sp>
-        <p:nvSpPr>
-          <p:cNvPr id="12" name="TextBox 11"/>
-          <p:cNvSpPr txBox="1"/>
-          <p:nvPr/>
-        </p:nvSpPr>
-        <p:spPr>
-          <a:xfrm>
-            <a:off x="731520" y="2606040"/>
-            <a:ext cx="2286000" cy="640080"/>
-          </a:xfrm>
-          <a:prstGeom prst="rect">
-            <a:avLst/>
-          </a:prstGeom>
-          <a:noFill/>
-        </p:spPr>
-        <p:txBody>
-          <a:bodyPr wrap="square" anchor="t"/>
-          <a:lstStyle/>
-          <a:p>
-            <a:pPr algn="l">
-              <a:defRPr sz="4400" b="1">
-                <a:solidFill>
-                  <a:srgbClr val="00889E"/>
-                </a:solidFill>
-                <a:latin typeface="Calibri Light"/>
-              </a:defRPr>
-            </a:pPr>
-            <a:r>
-              <a:t>85.3%</a:t>
-            </a:r>
-          </a:p>
-        </p:txBody>
-      </p:sp>
-      <p:sp>
-        <p:nvSpPr>
-          <p:cNvPr id="13" name="Rounded Rectangle 12"/>
-          <p:cNvSpPr/>
-          <p:nvPr/>
-        </p:nvSpPr>
-        <p:spPr>
-          <a:xfrm>
-            <a:off x="731520" y="3337560"/>
-            <a:ext cx="4937760" cy="164592"/>
-          </a:xfrm>
-          <a:prstGeom prst="roundRect">
-            <a:avLst/>
-          </a:prstGeom>
-          <a:solidFill>
-            <a:srgbClr val="E0E2E6"/>
-          </a:solidFill>
-          <a:ln>
-            <a:noFill/>
-          </a:ln>
-        </p:spPr>
-        <p:style>
-          <a:lnRef idx="1">
-            <a:schemeClr val="accent1"/>
-          </a:lnRef>
-          <a:fillRef idx="3">
-            <a:schemeClr val="accent1"/>
-          </a:fillRef>
-          <a:effectRef idx="2">
-            <a:schemeClr val="accent1"/>
-          </a:effectRef>
-          <a:fontRef idx="minor">
-            <a:schemeClr val="lt1"/>
-          </a:fontRef>
-        </p:style>
-        <p:txBody>
-          <a:bodyPr rtlCol="0" anchor="ctr"/>
-          <a:lstStyle/>
-          <a:p>
-            <a:pPr algn="ctr"/>
-          </a:p>
-        </p:txBody>
-      </p:sp>
-      <p:sp>
-        <p:nvSpPr>
-          <p:cNvPr id="14" name="Rounded Rectangle 13"/>
-          <p:cNvSpPr/>
-          <p:nvPr/>
-        </p:nvSpPr>
-        <p:spPr>
-          <a:xfrm>
-            <a:off x="731520" y="3337560"/>
-            <a:ext cx="4211909" cy="164592"/>
-          </a:xfrm>
-          <a:prstGeom prst="roundRect">
-            <a:avLst/>
-          </a:prstGeom>
-          <a:solidFill>
-            <a:srgbClr val="00889E"/>
-          </a:solidFill>
-          <a:ln>
-            <a:noFill/>
-          </a:ln>
-        </p:spPr>
-        <p:style>
-          <a:lnRef idx="1">
-            <a:schemeClr val="accent1"/>
-          </a:lnRef>
-          <a:fillRef idx="3">
-            <a:schemeClr val="accent1"/>
-          </a:fillRef>
-          <a:effectRef idx="2">
-            <a:schemeClr val="accent1"/>
-          </a:effectRef>
-          <a:fontRef idx="minor">
-            <a:schemeClr val="lt1"/>
-          </a:fontRef>
-        </p:style>
-        <p:txBody>
-          <a:bodyPr rtlCol="0" anchor="ctr"/>
-          <a:lstStyle/>
-          <a:p>
-            <a:pPr algn="ctr"/>
-          </a:p>
-        </p:txBody>
-      </p:sp>
-      <p:sp>
-        <p:nvSpPr>
-          <p:cNvPr id="15" name="TextBox 14"/>
-          <p:cNvSpPr txBox="1"/>
-          <p:nvPr/>
-        </p:nvSpPr>
-        <p:spPr>
-          <a:xfrm>
-            <a:off x="3200400" y="2651760"/>
-            <a:ext cx="2286000" cy="228600"/>
-          </a:xfrm>
-          <a:prstGeom prst="rect">
-            <a:avLst/>
-          </a:prstGeom>
-          <a:noFill/>
-        </p:spPr>
-        <p:txBody>
-          <a:bodyPr wrap="square" anchor="t"/>
-          <a:lstStyle/>
-          <a:p>
-            <a:pPr algn="l">
-              <a:defRPr sz="1200" b="0">
-                <a:solidFill>
-                  <a:srgbClr val="7A7A8C"/>
-                </a:solidFill>
-                <a:latin typeface="Calibri"/>
-              </a:defRPr>
-            </a:pPr>
-            <a:r>
-              <a:t>World avg: 81.5%</a:t>
-            </a:r>
-          </a:p>
-        </p:txBody>
-      </p:sp>
-      <p:sp>
-        <p:nvSpPr>
-          <p:cNvPr id="16" name="TextBox 15"/>
-          <p:cNvSpPr txBox="1"/>
-          <p:nvPr/>
-        </p:nvSpPr>
-        <p:spPr>
-          <a:xfrm>
-            <a:off x="3200400" y="2926080"/>
-            <a:ext cx="2286000" cy="228600"/>
-          </a:xfrm>
-          <a:prstGeom prst="rect">
-            <a:avLst/>
-          </a:prstGeom>
-          <a:noFill/>
-        </p:spPr>
-        <p:txBody>
-          <a:bodyPr wrap="square" anchor="t"/>
-          <a:lstStyle/>
-          <a:p>
-            <a:pPr algn="l">
-              <a:defRPr sz="1200" b="0">
-                <a:solidFill>
-                  <a:srgbClr val="006EAF"/>
-                </a:solidFill>
-                <a:latin typeface="Calibri"/>
-              </a:defRPr>
-            </a:pPr>
-            <a:r>
-              <a:t>Best: Korea 96.7%</a:t>
-            </a:r>
-          </a:p>
-        </p:txBody>
-      </p:sp>
-      <p:sp>
-        <p:nvSpPr>
-          <p:cNvPr id="17" name="Rectangle 16"/>
-          <p:cNvSpPr/>
-          <p:nvPr/>
-        </p:nvSpPr>
-        <p:spPr>
-          <a:xfrm>
-            <a:off x="4755794" y="3246120"/>
-            <a:ext cx="25400" cy="347472"/>
-          </a:xfrm>
-          <a:prstGeom prst="rect">
-            <a:avLst/>
-          </a:prstGeom>
-          <a:solidFill>
-            <a:srgbClr val="E87D1E"/>
-          </a:solidFill>
-          <a:ln>
-            <a:noFill/>
-          </a:ln>
-        </p:spPr>
-        <p:style>
-          <a:lnRef idx="1">
-            <a:schemeClr val="accent1"/>
-          </a:lnRef>
-          <a:fillRef idx="3">
-            <a:schemeClr val="accent1"/>
-          </a:fillRef>
-          <a:effectRef idx="2">
-            <a:schemeClr val="accent1"/>
-          </a:effectRef>
-          <a:fontRef idx="minor">
-            <a:schemeClr val="lt1"/>
-          </a:fontRef>
-        </p:style>
-        <p:txBody>
-          <a:bodyPr rtlCol="0" anchor="ctr"/>
-          <a:lstStyle/>
-          <a:p>
-            <a:pPr algn="ctr"/>
-          </a:p>
-        </p:txBody>
-      </p:sp>
-      <p:sp>
-        <p:nvSpPr>
-          <p:cNvPr id="18" name="TextBox 17"/>
-          <p:cNvSpPr txBox="1"/>
-          <p:nvPr/>
-        </p:nvSpPr>
-        <p:spPr>
-          <a:xfrm>
-            <a:off x="4481474" y="3566160"/>
-            <a:ext cx="1097280" cy="182880"/>
-          </a:xfrm>
-          <a:prstGeom prst="rect">
-            <a:avLst/>
-          </a:prstGeom>
-          <a:noFill/>
-        </p:spPr>
-        <p:txBody>
-          <a:bodyPr wrap="square" anchor="t"/>
-          <a:lstStyle/>
-          <a:p>
-            <a:pPr algn="ctr">
-              <a:defRPr sz="700" b="0">
-                <a:solidFill>
-                  <a:srgbClr val="E87D1E"/>
-                </a:solidFill>
-                <a:latin typeface="Calibri"/>
-              </a:defRPr>
-            </a:pPr>
-            <a:r>
-              <a:t>World</a:t>
-            </a:r>
-          </a:p>
-        </p:txBody>
-      </p:sp>
-      <p:sp>
-        <p:nvSpPr>
-          <p:cNvPr id="19" name="Rounded Rectangle 18"/>
-          <p:cNvSpPr/>
-          <p:nvPr/>
-        </p:nvSpPr>
-        <p:spPr>
-          <a:xfrm>
-            <a:off x="6217920" y="1828800"/>
-            <a:ext cx="5486400" cy="2194560"/>
-          </a:xfrm>
-          <a:prstGeom prst="roundRect">
-            <a:avLst/>
-          </a:prstGeom>
-          <a:solidFill>
-            <a:srgbClr val="FFFFFF"/>
-          </a:solidFill>
-          <a:ln>
-            <a:noFill/>
-          </a:ln>
-        </p:spPr>
-        <p:style>
-          <a:lnRef idx="1">
-            <a:schemeClr val="accent1"/>
-          </a:lnRef>
-          <a:fillRef idx="3">
-            <a:schemeClr val="accent1"/>
-          </a:fillRef>
-          <a:effectRef idx="2">
-            <a:schemeClr val="accent1"/>
-          </a:effectRef>
-          <a:fontRef idx="minor">
-            <a:schemeClr val="lt1"/>
-          </a:fontRef>
-        </p:style>
-        <p:txBody>
-          <a:bodyPr rtlCol="0" anchor="ctr"/>
-          <a:lstStyle/>
-          <a:p>
-            <a:pPr algn="ctr"/>
-          </a:p>
-        </p:txBody>
-      </p:sp>
-      <p:sp>
-        <p:nvSpPr>
-          <p:cNvPr id="20" name="Rectangle 19"/>
-          <p:cNvSpPr/>
-          <p:nvPr/>
-        </p:nvSpPr>
-        <p:spPr>
-          <a:xfrm>
-            <a:off x="6217920" y="1828800"/>
-            <a:ext cx="5486400" cy="50800"/>
-          </a:xfrm>
-          <a:prstGeom prst="rect">
-            <a:avLst/>
-          </a:prstGeom>
-          <a:solidFill>
-            <a:srgbClr val="00889E"/>
-          </a:solidFill>
-          <a:ln>
-            <a:noFill/>
-          </a:ln>
-        </p:spPr>
-        <p:style>
-          <a:lnRef idx="1">
-            <a:schemeClr val="accent1"/>
-          </a:lnRef>
-          <a:fillRef idx="3">
-            <a:schemeClr val="accent1"/>
-          </a:fillRef>
-          <a:effectRef idx="2">
-            <a:schemeClr val="accent1"/>
-          </a:effectRef>
-          <a:fontRef idx="minor">
-            <a:schemeClr val="lt1"/>
-          </a:fontRef>
-        </p:style>
-        <p:txBody>
-          <a:bodyPr rtlCol="0" anchor="ctr"/>
-          <a:lstStyle/>
-          <a:p>
-            <a:pPr algn="ctr"/>
-          </a:p>
-        </p:txBody>
-      </p:sp>
-      <p:sp>
-        <p:nvSpPr>
-          <p:cNvPr id="21" name="TextBox 20"/>
-          <p:cNvSpPr txBox="1"/>
-          <p:nvPr/>
-        </p:nvSpPr>
-        <p:spPr>
-          <a:xfrm>
-            <a:off x="6492240" y="2011680"/>
-            <a:ext cx="2743200" cy="228600"/>
-          </a:xfrm>
-          <a:prstGeom prst="rect">
-            <a:avLst/>
-          </a:prstGeom>
-          <a:noFill/>
-        </p:spPr>
-        <p:txBody>
-          <a:bodyPr wrap="square" anchor="t"/>
-          <a:lstStyle/>
-          <a:p>
-            <a:pPr algn="l">
-              <a:defRPr sz="1200" b="1">
-                <a:solidFill>
-                  <a:srgbClr val="00889E"/>
-                </a:solidFill>
-                <a:latin typeface="Calibri"/>
-              </a:defRPr>
-            </a:pPr>
-            <a:r>
-              <a:t>NOT STUNTED RATE (EAP AVG)</a:t>
-            </a:r>
-          </a:p>
-        </p:txBody>
-      </p:sp>
-      <p:sp>
-        <p:nvSpPr>
-          <p:cNvPr id="22" name="TextBox 21"/>
-          <p:cNvSpPr txBox="1"/>
-          <p:nvPr/>
-        </p:nvSpPr>
-        <p:spPr>
-          <a:xfrm>
-            <a:off x="6492240" y="2286000"/>
-            <a:ext cx="4572000" cy="228600"/>
-          </a:xfrm>
-          <a:prstGeom prst="rect">
-            <a:avLst/>
-          </a:prstGeom>
-          <a:noFill/>
-        </p:spPr>
-        <p:txBody>
-          <a:bodyPr wrap="square" anchor="t"/>
-          <a:lstStyle/>
-          <a:p>
-            <a:pPr algn="l">
-              <a:defRPr sz="1000" b="0">
-                <a:solidFill>
-                  <a:srgbClr val="7A7A8C"/>
-                </a:solidFill>
-                <a:latin typeface="Calibri"/>
-              </a:defRPr>
-            </a:pPr>
-            <a:r>
-              <a:t>Share of children under 5 not stunted</a:t>
-            </a:r>
-          </a:p>
-        </p:txBody>
-      </p:sp>
-      <p:sp>
-        <p:nvSpPr>
-          <p:cNvPr id="23" name="TextBox 22"/>
-          <p:cNvSpPr txBox="1"/>
-          <p:nvPr/>
-        </p:nvSpPr>
-        <p:spPr>
-          <a:xfrm>
-            <a:off x="6492240" y="2606040"/>
-            <a:ext cx="2286000" cy="640080"/>
-          </a:xfrm>
-          <a:prstGeom prst="rect">
-            <a:avLst/>
-          </a:prstGeom>
-          <a:noFill/>
-        </p:spPr>
-        <p:txBody>
-          <a:bodyPr wrap="square" anchor="t"/>
-          <a:lstStyle/>
-          <a:p>
-            <a:pPr algn="l">
-              <a:defRPr sz="4400" b="1">
-                <a:solidFill>
-                  <a:srgbClr val="00889E"/>
-                </a:solidFill>
-                <a:latin typeface="Calibri Light"/>
-              </a:defRPr>
-            </a:pPr>
-            <a:r>
-              <a:t>86.6%</a:t>
-            </a:r>
-          </a:p>
-        </p:txBody>
-      </p:sp>
-      <p:sp>
-        <p:nvSpPr>
-          <p:cNvPr id="24" name="Rounded Rectangle 23"/>
-          <p:cNvSpPr/>
-          <p:nvPr/>
-        </p:nvSpPr>
-        <p:spPr>
-          <a:xfrm>
-            <a:off x="6492240" y="3337560"/>
-            <a:ext cx="4937760" cy="164592"/>
-          </a:xfrm>
-          <a:prstGeom prst="roundRect">
-            <a:avLst/>
-          </a:prstGeom>
-          <a:solidFill>
-            <a:srgbClr val="E0E2E6"/>
-          </a:solidFill>
-          <a:ln>
-            <a:noFill/>
-          </a:ln>
-        </p:spPr>
-        <p:style>
-          <a:lnRef idx="1">
-            <a:schemeClr val="accent1"/>
-          </a:lnRef>
-          <a:fillRef idx="3">
-            <a:schemeClr val="accent1"/>
-          </a:fillRef>
-          <a:effectRef idx="2">
-            <a:schemeClr val="accent1"/>
-          </a:effectRef>
-          <a:fontRef idx="minor">
-            <a:schemeClr val="lt1"/>
-          </a:fontRef>
-        </p:style>
-        <p:txBody>
-          <a:bodyPr rtlCol="0" anchor="ctr"/>
-          <a:lstStyle/>
-          <a:p>
-            <a:pPr algn="ctr"/>
-          </a:p>
-        </p:txBody>
-      </p:sp>
-      <p:sp>
-        <p:nvSpPr>
-          <p:cNvPr id="25" name="Rounded Rectangle 24"/>
-          <p:cNvSpPr/>
-          <p:nvPr/>
-        </p:nvSpPr>
-        <p:spPr>
-          <a:xfrm>
-            <a:off x="6492240" y="3337560"/>
-            <a:ext cx="4276100" cy="164592"/>
-          </a:xfrm>
-          <a:prstGeom prst="roundRect">
-            <a:avLst/>
-          </a:prstGeom>
-          <a:solidFill>
-            <a:srgbClr val="00889E"/>
-          </a:solidFill>
-          <a:ln>
-            <a:noFill/>
-          </a:ln>
-        </p:spPr>
-        <p:style>
-          <a:lnRef idx="1">
-            <a:schemeClr val="accent1"/>
-          </a:lnRef>
-          <a:fillRef idx="3">
-            <a:schemeClr val="accent1"/>
-          </a:fillRef>
-          <a:effectRef idx="2">
-            <a:schemeClr val="accent1"/>
-          </a:effectRef>
-          <a:fontRef idx="minor">
-            <a:schemeClr val="lt1"/>
-          </a:fontRef>
-        </p:style>
-        <p:txBody>
-          <a:bodyPr rtlCol="0" anchor="ctr"/>
-          <a:lstStyle/>
-          <a:p>
-            <a:pPr algn="ctr"/>
-          </a:p>
-        </p:txBody>
-      </p:sp>
-      <p:sp>
-        <p:nvSpPr>
-          <p:cNvPr id="26" name="TextBox 25"/>
-          <p:cNvSpPr txBox="1"/>
-          <p:nvPr/>
-        </p:nvSpPr>
-        <p:spPr>
-          <a:xfrm>
-            <a:off x="8961120" y="2651760"/>
-            <a:ext cx="2286000" cy="228600"/>
-          </a:xfrm>
-          <a:prstGeom prst="rect">
-            <a:avLst/>
-          </a:prstGeom>
-          <a:noFill/>
-        </p:spPr>
-        <p:txBody>
-          <a:bodyPr wrap="square" anchor="t"/>
-          <a:lstStyle/>
-          <a:p>
-            <a:pPr algn="l">
-              <a:defRPr sz="1200" b="0">
-                <a:solidFill>
-                  <a:srgbClr val="7A7A8C"/>
-                </a:solidFill>
-                <a:latin typeface="Calibri"/>
-              </a:defRPr>
-            </a:pPr>
-            <a:r>
-              <a:t>World avg: 77.1%</a:t>
-            </a:r>
-          </a:p>
-        </p:txBody>
-      </p:sp>
-      <p:sp>
-        <p:nvSpPr>
-          <p:cNvPr id="27" name="TextBox 26"/>
-          <p:cNvSpPr txBox="1"/>
-          <p:nvPr/>
-        </p:nvSpPr>
-        <p:spPr>
-          <a:xfrm>
-            <a:off x="8961120" y="2926080"/>
-            <a:ext cx="2286000" cy="228600"/>
-          </a:xfrm>
-          <a:prstGeom prst="rect">
-            <a:avLst/>
-          </a:prstGeom>
-          <a:noFill/>
-        </p:spPr>
-        <p:txBody>
-          <a:bodyPr wrap="square" anchor="t"/>
-          <a:lstStyle/>
-          <a:p>
-            <a:pPr algn="l">
-              <a:defRPr sz="1200" b="0">
-                <a:solidFill>
-                  <a:srgbClr val="006EAF"/>
-                </a:solidFill>
-                <a:latin typeface="Calibri"/>
-              </a:defRPr>
-            </a:pPr>
-            <a:r>
-              <a:t>Best: Korea 99.1%</a:t>
-            </a:r>
-          </a:p>
-        </p:txBody>
-      </p:sp>
-      <p:sp>
-        <p:nvSpPr>
-          <p:cNvPr id="28" name="Rectangle 27"/>
-          <p:cNvSpPr/>
-          <p:nvPr/>
-        </p:nvSpPr>
-        <p:spPr>
-          <a:xfrm>
-            <a:off x="10299252" y="3246120"/>
-            <a:ext cx="25400" cy="347472"/>
-          </a:xfrm>
-          <a:prstGeom prst="rect">
-            <a:avLst/>
-          </a:prstGeom>
-          <a:solidFill>
-            <a:srgbClr val="E87D1E"/>
-          </a:solidFill>
-          <a:ln>
-            <a:noFill/>
-          </a:ln>
-        </p:spPr>
-        <p:style>
-          <a:lnRef idx="1">
-            <a:schemeClr val="accent1"/>
-          </a:lnRef>
-          <a:fillRef idx="3">
-            <a:schemeClr val="accent1"/>
-          </a:fillRef>
-          <a:effectRef idx="2">
-            <a:schemeClr val="accent1"/>
-          </a:effectRef>
-          <a:fontRef idx="minor">
-            <a:schemeClr val="lt1"/>
-          </a:fontRef>
-        </p:style>
-        <p:txBody>
-          <a:bodyPr rtlCol="0" anchor="ctr"/>
-          <a:lstStyle/>
-          <a:p>
-            <a:pPr algn="ctr"/>
-          </a:p>
-        </p:txBody>
-      </p:sp>
-      <p:sp>
-        <p:nvSpPr>
-          <p:cNvPr id="29" name="TextBox 28"/>
-          <p:cNvSpPr txBox="1"/>
-          <p:nvPr/>
-        </p:nvSpPr>
-        <p:spPr>
-          <a:xfrm>
-            <a:off x="10024932" y="3566160"/>
-            <a:ext cx="1097280" cy="182880"/>
-          </a:xfrm>
-          <a:prstGeom prst="rect">
-            <a:avLst/>
-          </a:prstGeom>
-          <a:noFill/>
-        </p:spPr>
-        <p:txBody>
-          <a:bodyPr wrap="square" anchor="t"/>
-          <a:lstStyle/>
-          <a:p>
-            <a:pPr algn="ctr">
-              <a:defRPr sz="700" b="0">
-                <a:solidFill>
-                  <a:srgbClr val="E87D1E"/>
-                </a:solidFill>
-                <a:latin typeface="Calibri"/>
-              </a:defRPr>
-            </a:pPr>
-            <a:r>
-              <a:t>World</a:t>
-            </a:r>
-          </a:p>
-        </p:txBody>
-      </p:sp>
-      <p:sp>
-        <p:nvSpPr>
-          <p:cNvPr id="30" name="Rounded Rectangle 29"/>
-          <p:cNvSpPr/>
-          <p:nvPr/>
-        </p:nvSpPr>
-        <p:spPr>
-          <a:xfrm>
-            <a:off x="457200" y="4297680"/>
-            <a:ext cx="11247120" cy="1920240"/>
-          </a:xfrm>
-          <a:prstGeom prst="roundRect">
-            <a:avLst/>
-          </a:prstGeom>
-          <a:solidFill>
-            <a:srgbClr val="FFFFFF"/>
-          </a:solidFill>
-          <a:ln>
-            <a:noFill/>
-          </a:ln>
-        </p:spPr>
-        <p:style>
-          <a:lnRef idx="1">
-            <a:schemeClr val="accent1"/>
-          </a:lnRef>
-          <a:fillRef idx="3">
-            <a:schemeClr val="accent1"/>
-          </a:fillRef>
-          <a:effectRef idx="2">
-            <a:schemeClr val="accent1"/>
-          </a:effectRef>
-          <a:fontRef idx="minor">
-            <a:schemeClr val="lt1"/>
-          </a:fontRef>
-        </p:style>
-        <p:txBody>
-          <a:bodyPr rtlCol="0" anchor="ctr"/>
-          <a:lstStyle/>
-          <a:p>
-            <a:pPr algn="ctr"/>
-          </a:p>
-        </p:txBody>
-      </p:sp>
-      <p:sp>
-        <p:nvSpPr>
-          <p:cNvPr id="31" name="TextBox 30"/>
-          <p:cNvSpPr txBox="1"/>
-          <p:nvPr/>
-        </p:nvSpPr>
-        <p:spPr>
-          <a:xfrm>
-            <a:off x="731520" y="4434840"/>
-            <a:ext cx="4572000" cy="274320"/>
-          </a:xfrm>
-          <a:prstGeom prst="rect">
-            <a:avLst/>
-          </a:prstGeom>
-          <a:noFill/>
-        </p:spPr>
-        <p:txBody>
-          <a:bodyPr wrap="square" anchor="t"/>
-          <a:lstStyle/>
-          <a:p>
-            <a:pPr algn="l">
-              <a:defRPr sz="1100" b="1">
-                <a:solidFill>
-                  <a:srgbClr val="7A7A8C"/>
-                </a:solidFill>
-                <a:latin typeface="Calibri"/>
-              </a:defRPr>
-            </a:pPr>
-            <a:r>
-              <a:t>HEALTH COMPONENT: REGIONAL COMPARISON</a:t>
-            </a:r>
-          </a:p>
-        </p:txBody>
-      </p:sp>
-      <p:sp>
-        <p:nvSpPr>
-          <p:cNvPr id="32" name="Rectangle 31"/>
-          <p:cNvSpPr/>
-          <p:nvPr/>
-        </p:nvSpPr>
-        <p:spPr>
-          <a:xfrm>
-            <a:off x="731520" y="4709160"/>
-            <a:ext cx="1828800" cy="25400"/>
-          </a:xfrm>
-          <a:prstGeom prst="rect">
-            <a:avLst/>
-          </a:prstGeom>
-          <a:solidFill>
-            <a:srgbClr val="00889E"/>
-          </a:solidFill>
-          <a:ln>
-            <a:noFill/>
-          </a:ln>
-        </p:spPr>
-        <p:style>
-          <a:lnRef idx="1">
-            <a:schemeClr val="accent1"/>
-          </a:lnRef>
-          <a:fillRef idx="3">
-            <a:schemeClr val="accent1"/>
-          </a:fillRef>
-          <a:effectRef idx="2">
-            <a:schemeClr val="accent1"/>
-          </a:effectRef>
-          <a:fontRef idx="minor">
-            <a:schemeClr val="lt1"/>
-          </a:fontRef>
-        </p:style>
-        <p:txBody>
-          <a:bodyPr rtlCol="0" anchor="ctr"/>
-          <a:lstStyle/>
-          <a:p>
-            <a:pPr algn="ctr"/>
-          </a:p>
-        </p:txBody>
-      </p:sp>
       <p:graphicFrame>
         <p:nvGraphicFramePr>
-          <p:cNvPr id="33" name="Chart 32"/>
+          <p:cNvPr id="9" name="Chart 8"/>
           <p:cNvGraphicFramePr>
             <a:graphicFrameLocks noGrp="1"/>
           </p:cNvGraphicFramePr>
           <p:nvPr/>
         </p:nvGraphicFramePr>
         <p:xfrm>
-          <a:off x="731520" y="4800600"/>
-          <a:ext cx="10789920" cy="1234440"/>
+          <a:off x="731520" y="1645920"/>
+          <a:ext cx="10789920" cy="4297680"/>
         </p:xfrm>
         <a:graphic>
           <a:graphicData uri="http://schemas.openxmlformats.org/drawingml/2006/chart">
@@ -10625,7 +10478,7 @@
       </p:graphicFrame>
       <p:sp>
         <p:nvSpPr>
-          <p:cNvPr id="34" name="Rectangle 33"/>
+          <p:cNvPr id="10" name="Rectangle 9"/>
           <p:cNvSpPr/>
           <p:nvPr/>
         </p:nvSpPr>
@@ -10668,7 +10521,7 @@
       </p:sp>
       <p:sp>
         <p:nvSpPr>
-          <p:cNvPr id="35" name="TextBox 34"/>
+          <p:cNvPr id="11" name="TextBox 10"/>
           <p:cNvSpPr txBox="1"/>
           <p:nvPr/>
         </p:nvSpPr>
@@ -10702,7 +10555,7 @@
       </p:sp>
       <p:sp>
         <p:nvSpPr>
-          <p:cNvPr id="36" name="TextBox 35"/>
+          <p:cNvPr id="12" name="TextBox 11"/>
           <p:cNvSpPr txBox="1"/>
           <p:nvPr/>
         </p:nvSpPr>
@@ -10736,7 +10589,7 @@
       </p:sp>
       <p:sp>
         <p:nvSpPr>
-          <p:cNvPr id="37" name="TextBox 36"/>
+          <p:cNvPr id="13" name="TextBox 12"/>
           <p:cNvSpPr txBox="1"/>
           <p:nvPr/>
         </p:nvSpPr>
@@ -10887,7 +10740,7 @@
             <a:avLst/>
           </a:prstGeom>
           <a:solidFill>
-            <a:srgbClr val="006EAF"/>
+            <a:srgbClr val="00889E"/>
           </a:solidFill>
           <a:ln>
             <a:noFill/>
@@ -10944,7 +10797,7 @@
               </a:defRPr>
             </a:pPr>
             <a:r>
-              <a:t>Education Component  |  East Asia &amp; Pacific</a:t>
+              <a:t>Health Component  |  East Asia &amp; Pacific</a:t>
             </a:r>
           </a:p>
         </p:txBody>
@@ -10972,13 +10825,13 @@
             <a:pPr algn="r">
               <a:defRPr sz="2200" b="1">
                 <a:solidFill>
-                  <a:srgbClr val="006EAF"/>
+                  <a:srgbClr val="00889E"/>
                 </a:solidFill>
                 <a:latin typeface="Calibri"/>
               </a:defRPr>
             </a:pPr>
             <a:r>
-              <a:t>Avg: 118.1 / 180</a:t>
+              <a:t>Avg: 42.8 / 50</a:t>
             </a:r>
           </a:p>
         </p:txBody>
@@ -11012,7 +10865,7 @@
               </a:defRPr>
             </a:pPr>
             <a:r>
-              <a:t>Education captures learning quality, years of schooling, pre-primary education, and tertiary enrollment.</a:t>
+              <a:t>Health outcomes reflect adult survival (ages 15-60) and freedom from childhood stunting.</a:t>
             </a:r>
           </a:p>
         </p:txBody>
@@ -11026,7 +10879,7 @@
         <p:spPr>
           <a:xfrm>
             <a:off x="457200" y="1828800"/>
-            <a:ext cx="2697480" cy="2286000"/>
+            <a:ext cx="5486400" cy="2194560"/>
           </a:xfrm>
           <a:prstGeom prst="roundRect">
             <a:avLst/>
@@ -11069,13 +10922,13 @@
         <p:spPr>
           <a:xfrm>
             <a:off x="457200" y="1828800"/>
-            <a:ext cx="2697480" cy="50800"/>
+            <a:ext cx="5486400" cy="50800"/>
           </a:xfrm>
           <a:prstGeom prst="rect">
             <a:avLst/>
           </a:prstGeom>
           <a:solidFill>
-            <a:srgbClr val="006EAF"/>
+            <a:srgbClr val="00889E"/>
           </a:solidFill>
           <a:ln>
             <a:noFill/>
@@ -11111,8 +10964,8 @@
         </p:nvSpPr>
         <p:spPr>
           <a:xfrm>
-            <a:off x="594360" y="2011680"/>
-            <a:ext cx="2423160" cy="457200"/>
+            <a:off x="731520" y="2011680"/>
+            <a:ext cx="2743200" cy="228600"/>
           </a:xfrm>
           <a:prstGeom prst="rect">
             <a:avLst/>
@@ -11124,19 +10977,15 @@
           <a:lstStyle/>
           <a:p>
             <a:pPr algn="l">
-              <a:defRPr sz="1100" b="1">
-                <a:solidFill>
-                  <a:srgbClr val="1A1A2E"/>
+              <a:defRPr sz="1200" b="1">
+                <a:solidFill>
+                  <a:srgbClr val="00889E"/>
                 </a:solidFill>
                 <a:latin typeface="Calibri"/>
               </a:defRPr>
             </a:pPr>
             <a:r>
-              <a:t>Expected Years</a:t>
-            </a:r>
-            <a:br/>
-            <a:r>
-              <a:t>of Schooling</a:t>
+              <a:t>ADULT SURVIVAL RATE (EAP AVG)</a:t>
             </a:r>
           </a:p>
         </p:txBody>
@@ -11149,8 +10998,8 @@
         </p:nvSpPr>
         <p:spPr>
           <a:xfrm>
-            <a:off x="594360" y="2560320"/>
-            <a:ext cx="2423160" cy="640080"/>
+            <a:off x="731520" y="2286000"/>
+            <a:ext cx="4572000" cy="228600"/>
           </a:xfrm>
           <a:prstGeom prst="rect">
             <a:avLst/>
@@ -11162,15 +11011,15 @@
           <a:lstStyle/>
           <a:p>
             <a:pPr algn="l">
-              <a:defRPr sz="3600" b="1">
-                <a:solidFill>
-                  <a:srgbClr val="006EAF"/>
-                </a:solidFill>
-                <a:latin typeface="Calibri Light"/>
+              <a:defRPr sz="1000" b="0">
+                <a:solidFill>
+                  <a:srgbClr val="7A7A8C"/>
+                </a:solidFill>
+                <a:latin typeface="Calibri"/>
               </a:defRPr>
             </a:pPr>
             <a:r>
-              <a:t>10.8</a:t>
+              <a:t>Probability of surviving from age 15 to 60</a:t>
             </a:r>
           </a:p>
         </p:txBody>
@@ -11183,8 +11032,8 @@
         </p:nvSpPr>
         <p:spPr>
           <a:xfrm>
-            <a:off x="594360" y="3200400"/>
-            <a:ext cx="2423160" cy="228600"/>
+            <a:off x="731520" y="2606040"/>
+            <a:ext cx="2286000" cy="640080"/>
           </a:xfrm>
           <a:prstGeom prst="rect">
             <a:avLst/>
@@ -11196,15 +11045,15 @@
           <a:lstStyle/>
           <a:p>
             <a:pPr algn="l">
-              <a:defRPr sz="900" b="0">
-                <a:solidFill>
-                  <a:srgbClr val="7A7A8C"/>
-                </a:solidFill>
-                <a:latin typeface="Calibri"/>
+              <a:defRPr sz="4400" b="1">
+                <a:solidFill>
+                  <a:srgbClr val="00889E"/>
+                </a:solidFill>
+                <a:latin typeface="Calibri Light"/>
               </a:defRPr>
             </a:pPr>
             <a:r>
-              <a:t>years (EAP avg)</a:t>
+              <a:t>85.3%</a:t>
             </a:r>
           </a:p>
         </p:txBody>
@@ -11217,8 +11066,8 @@
         </p:nvSpPr>
         <p:spPr>
           <a:xfrm>
-            <a:off x="594360" y="3520440"/>
-            <a:ext cx="2423160" cy="109728"/>
+            <a:off x="731520" y="3337560"/>
+            <a:ext cx="4937760" cy="164592"/>
           </a:xfrm>
           <a:prstGeom prst="roundRect">
             <a:avLst/>
@@ -11260,14 +11109,14 @@
         </p:nvSpPr>
         <p:spPr>
           <a:xfrm>
-            <a:off x="594360" y="3520440"/>
-            <a:ext cx="1869294" cy="109728"/>
+            <a:off x="731520" y="3337560"/>
+            <a:ext cx="4211909" cy="164592"/>
           </a:xfrm>
           <a:prstGeom prst="roundRect">
             <a:avLst/>
           </a:prstGeom>
           <a:solidFill>
-            <a:srgbClr val="006EAF"/>
+            <a:srgbClr val="00889E"/>
           </a:solidFill>
           <a:ln>
             <a:noFill/>
@@ -11303,8 +11152,8 @@
         </p:nvSpPr>
         <p:spPr>
           <a:xfrm>
-            <a:off x="594360" y="3703320"/>
-            <a:ext cx="2423160" cy="182880"/>
+            <a:off x="3200400" y="2651760"/>
+            <a:ext cx="2286000" cy="228600"/>
           </a:xfrm>
           <a:prstGeom prst="rect">
             <a:avLst/>
@@ -11316,7 +11165,7 @@
           <a:lstStyle/>
           <a:p>
             <a:pPr algn="l">
-              <a:defRPr sz="800" b="0">
+              <a:defRPr sz="1200" b="0">
                 <a:solidFill>
                   <a:srgbClr val="7A7A8C"/>
                 </a:solidFill>
@@ -11324,21 +11173,132 @@
               </a:defRPr>
             </a:pPr>
             <a:r>
-              <a:t>77% of maximum</a:t>
-            </a:r>
-          </a:p>
-        </p:txBody>
-      </p:sp>
-      <p:sp>
-        <p:nvSpPr>
-          <p:cNvPr id="16" name="Rounded Rectangle 15"/>
+              <a:t>World avg: 81.5%</a:t>
+            </a:r>
+          </a:p>
+        </p:txBody>
+      </p:sp>
+      <p:sp>
+        <p:nvSpPr>
+          <p:cNvPr id="16" name="TextBox 15"/>
+          <p:cNvSpPr txBox="1"/>
+          <p:nvPr/>
+        </p:nvSpPr>
+        <p:spPr>
+          <a:xfrm>
+            <a:off x="3200400" y="2926080"/>
+            <a:ext cx="2286000" cy="228600"/>
+          </a:xfrm>
+          <a:prstGeom prst="rect">
+            <a:avLst/>
+          </a:prstGeom>
+          <a:noFill/>
+        </p:spPr>
+        <p:txBody>
+          <a:bodyPr wrap="square" anchor="t"/>
+          <a:lstStyle/>
+          <a:p>
+            <a:pPr algn="l">
+              <a:defRPr sz="1200" b="0">
+                <a:solidFill>
+                  <a:srgbClr val="006EAF"/>
+                </a:solidFill>
+                <a:latin typeface="Calibri"/>
+              </a:defRPr>
+            </a:pPr>
+            <a:r>
+              <a:t>Best: Korea 96.7%</a:t>
+            </a:r>
+          </a:p>
+        </p:txBody>
+      </p:sp>
+      <p:sp>
+        <p:nvSpPr>
+          <p:cNvPr id="17" name="Rectangle 16"/>
           <p:cNvSpPr/>
           <p:nvPr/>
         </p:nvSpPr>
         <p:spPr>
           <a:xfrm>
-            <a:off x="3337560" y="1828800"/>
-            <a:ext cx="2697480" cy="2286000"/>
+            <a:off x="4755794" y="3246120"/>
+            <a:ext cx="25400" cy="347472"/>
+          </a:xfrm>
+          <a:prstGeom prst="rect">
+            <a:avLst/>
+          </a:prstGeom>
+          <a:solidFill>
+            <a:srgbClr val="E87D1E"/>
+          </a:solidFill>
+          <a:ln>
+            <a:noFill/>
+          </a:ln>
+        </p:spPr>
+        <p:style>
+          <a:lnRef idx="1">
+            <a:schemeClr val="accent1"/>
+          </a:lnRef>
+          <a:fillRef idx="3">
+            <a:schemeClr val="accent1"/>
+          </a:fillRef>
+          <a:effectRef idx="2">
+            <a:schemeClr val="accent1"/>
+          </a:effectRef>
+          <a:fontRef idx="minor">
+            <a:schemeClr val="lt1"/>
+          </a:fontRef>
+        </p:style>
+        <p:txBody>
+          <a:bodyPr rtlCol="0" anchor="ctr"/>
+          <a:lstStyle/>
+          <a:p>
+            <a:pPr algn="ctr"/>
+          </a:p>
+        </p:txBody>
+      </p:sp>
+      <p:sp>
+        <p:nvSpPr>
+          <p:cNvPr id="18" name="TextBox 17"/>
+          <p:cNvSpPr txBox="1"/>
+          <p:nvPr/>
+        </p:nvSpPr>
+        <p:spPr>
+          <a:xfrm>
+            <a:off x="4481474" y="3566160"/>
+            <a:ext cx="1097280" cy="182880"/>
+          </a:xfrm>
+          <a:prstGeom prst="rect">
+            <a:avLst/>
+          </a:prstGeom>
+          <a:noFill/>
+        </p:spPr>
+        <p:txBody>
+          <a:bodyPr wrap="square" anchor="t"/>
+          <a:lstStyle/>
+          <a:p>
+            <a:pPr algn="ctr">
+              <a:defRPr sz="700" b="0">
+                <a:solidFill>
+                  <a:srgbClr val="E87D1E"/>
+                </a:solidFill>
+                <a:latin typeface="Calibri"/>
+              </a:defRPr>
+            </a:pPr>
+            <a:r>
+              <a:t>World</a:t>
+            </a:r>
+          </a:p>
+        </p:txBody>
+      </p:sp>
+      <p:sp>
+        <p:nvSpPr>
+          <p:cNvPr id="19" name="Rounded Rectangle 18"/>
+          <p:cNvSpPr/>
+          <p:nvPr/>
+        </p:nvSpPr>
+        <p:spPr>
+          <a:xfrm>
+            <a:off x="6217920" y="1828800"/>
+            <a:ext cx="5486400" cy="2194560"/>
           </a:xfrm>
           <a:prstGeom prst="roundRect">
             <a:avLst/>
@@ -11374,20 +11334,20 @@
       </p:sp>
       <p:sp>
         <p:nvSpPr>
-          <p:cNvPr id="17" name="Rectangle 16"/>
+          <p:cNvPr id="20" name="Rectangle 19"/>
           <p:cNvSpPr/>
           <p:nvPr/>
         </p:nvSpPr>
         <p:spPr>
           <a:xfrm>
-            <a:off x="3337560" y="1828800"/>
-            <a:ext cx="2697480" cy="50800"/>
+            <a:off x="6217920" y="1828800"/>
+            <a:ext cx="5486400" cy="50800"/>
           </a:xfrm>
           <a:prstGeom prst="rect">
             <a:avLst/>
           </a:prstGeom>
           <a:solidFill>
-            <a:srgbClr val="005A9E"/>
+            <a:srgbClr val="00889E"/>
           </a:solidFill>
           <a:ln>
             <a:noFill/>
@@ -11417,14 +11377,14 @@
       </p:sp>
       <p:sp>
         <p:nvSpPr>
-          <p:cNvPr id="18" name="TextBox 17"/>
+          <p:cNvPr id="21" name="TextBox 20"/>
           <p:cNvSpPr txBox="1"/>
           <p:nvPr/>
         </p:nvSpPr>
         <p:spPr>
           <a:xfrm>
-            <a:off x="3474720" y="2011680"/>
-            <a:ext cx="2423160" cy="457200"/>
+            <a:off x="6492240" y="2011680"/>
+            <a:ext cx="2743200" cy="228600"/>
           </a:xfrm>
           <a:prstGeom prst="rect">
             <a:avLst/>
@@ -11436,33 +11396,29 @@
           <a:lstStyle/>
           <a:p>
             <a:pPr algn="l">
-              <a:defRPr sz="1100" b="1">
-                <a:solidFill>
-                  <a:srgbClr val="1A1A2E"/>
+              <a:defRPr sz="1200" b="1">
+                <a:solidFill>
+                  <a:srgbClr val="00889E"/>
                 </a:solidFill>
                 <a:latin typeface="Calibri"/>
               </a:defRPr>
             </a:pPr>
             <a:r>
-              <a:t>Harmonized Learning</a:t>
-            </a:r>
-            <a:br/>
-            <a:r>
-              <a:t>Outcomes</a:t>
-            </a:r>
-          </a:p>
-        </p:txBody>
-      </p:sp>
-      <p:sp>
-        <p:nvSpPr>
-          <p:cNvPr id="19" name="TextBox 18"/>
+              <a:t>NOT STUNTED RATE (EAP AVG)</a:t>
+            </a:r>
+          </a:p>
+        </p:txBody>
+      </p:sp>
+      <p:sp>
+        <p:nvSpPr>
+          <p:cNvPr id="22" name="TextBox 21"/>
           <p:cNvSpPr txBox="1"/>
           <p:nvPr/>
         </p:nvSpPr>
         <p:spPr>
           <a:xfrm>
-            <a:off x="3474720" y="2560320"/>
-            <a:ext cx="2423160" cy="640080"/>
+            <a:off x="6492240" y="2286000"/>
+            <a:ext cx="4572000" cy="228600"/>
           </a:xfrm>
           <a:prstGeom prst="rect">
             <a:avLst/>
@@ -11474,63 +11430,63 @@
           <a:lstStyle/>
           <a:p>
             <a:pPr algn="l">
-              <a:defRPr sz="3600" b="1">
-                <a:solidFill>
-                  <a:srgbClr val="005A9E"/>
+              <a:defRPr sz="1000" b="0">
+                <a:solidFill>
+                  <a:srgbClr val="7A7A8C"/>
+                </a:solidFill>
+                <a:latin typeface="Calibri"/>
+              </a:defRPr>
+            </a:pPr>
+            <a:r>
+              <a:t>Share of children under 5 not stunted</a:t>
+            </a:r>
+          </a:p>
+        </p:txBody>
+      </p:sp>
+      <p:sp>
+        <p:nvSpPr>
+          <p:cNvPr id="23" name="TextBox 22"/>
+          <p:cNvSpPr txBox="1"/>
+          <p:nvPr/>
+        </p:nvSpPr>
+        <p:spPr>
+          <a:xfrm>
+            <a:off x="6492240" y="2606040"/>
+            <a:ext cx="2286000" cy="640080"/>
+          </a:xfrm>
+          <a:prstGeom prst="rect">
+            <a:avLst/>
+          </a:prstGeom>
+          <a:noFill/>
+        </p:spPr>
+        <p:txBody>
+          <a:bodyPr wrap="square" anchor="t"/>
+          <a:lstStyle/>
+          <a:p>
+            <a:pPr algn="l">
+              <a:defRPr sz="4400" b="1">
+                <a:solidFill>
+                  <a:srgbClr val="00889E"/>
                 </a:solidFill>
                 <a:latin typeface="Calibri Light"/>
               </a:defRPr>
             </a:pPr>
             <a:r>
-              <a:t>436</a:t>
-            </a:r>
-          </a:p>
-        </p:txBody>
-      </p:sp>
-      <p:sp>
-        <p:nvSpPr>
-          <p:cNvPr id="20" name="TextBox 19"/>
-          <p:cNvSpPr txBox="1"/>
-          <p:nvPr/>
-        </p:nvSpPr>
-        <p:spPr>
-          <a:xfrm>
-            <a:off x="3474720" y="3200400"/>
-            <a:ext cx="2423160" cy="228600"/>
-          </a:xfrm>
-          <a:prstGeom prst="rect">
-            <a:avLst/>
-          </a:prstGeom>
-          <a:noFill/>
-        </p:spPr>
-        <p:txBody>
-          <a:bodyPr wrap="square" anchor="t"/>
-          <a:lstStyle/>
-          <a:p>
-            <a:pPr algn="l">
-              <a:defRPr sz="900" b="0">
-                <a:solidFill>
-                  <a:srgbClr val="7A7A8C"/>
-                </a:solidFill>
-                <a:latin typeface="Calibri"/>
-              </a:defRPr>
-            </a:pPr>
-            <a:r>
-              <a:t>HLO score (out of 625)</a:t>
-            </a:r>
-          </a:p>
-        </p:txBody>
-      </p:sp>
-      <p:sp>
-        <p:nvSpPr>
-          <p:cNvPr id="21" name="Rounded Rectangle 20"/>
+              <a:t>86.6%</a:t>
+            </a:r>
+          </a:p>
+        </p:txBody>
+      </p:sp>
+      <p:sp>
+        <p:nvSpPr>
+          <p:cNvPr id="24" name="Rounded Rectangle 23"/>
           <p:cNvSpPr/>
           <p:nvPr/>
         </p:nvSpPr>
         <p:spPr>
           <a:xfrm>
-            <a:off x="3474720" y="3520440"/>
-            <a:ext cx="2423160" cy="109728"/>
+            <a:off x="6492240" y="3337560"/>
+            <a:ext cx="4937760" cy="164592"/>
           </a:xfrm>
           <a:prstGeom prst="roundRect">
             <a:avLst/>
@@ -11566,20 +11522,20 @@
       </p:sp>
       <p:sp>
         <p:nvSpPr>
-          <p:cNvPr id="22" name="Rounded Rectangle 21"/>
+          <p:cNvPr id="25" name="Rounded Rectangle 24"/>
           <p:cNvSpPr/>
           <p:nvPr/>
         </p:nvSpPr>
         <p:spPr>
           <a:xfrm>
-            <a:off x="3474720" y="3520440"/>
-            <a:ext cx="1690396" cy="109728"/>
+            <a:off x="6492240" y="3337560"/>
+            <a:ext cx="4276100" cy="164592"/>
           </a:xfrm>
           <a:prstGeom prst="roundRect">
             <a:avLst/>
           </a:prstGeom>
           <a:solidFill>
-            <a:srgbClr val="005A9E"/>
+            <a:srgbClr val="00889E"/>
           </a:solidFill>
           <a:ln>
             <a:noFill/>
@@ -11609,14 +11565,14 @@
       </p:sp>
       <p:sp>
         <p:nvSpPr>
-          <p:cNvPr id="23" name="TextBox 22"/>
+          <p:cNvPr id="26" name="TextBox 25"/>
           <p:cNvSpPr txBox="1"/>
           <p:nvPr/>
         </p:nvSpPr>
         <p:spPr>
           <a:xfrm>
-            <a:off x="3474720" y="3703320"/>
-            <a:ext cx="2423160" cy="182880"/>
+            <a:off x="8961120" y="2651760"/>
+            <a:ext cx="2286000" cy="228600"/>
           </a:xfrm>
           <a:prstGeom prst="rect">
             <a:avLst/>
@@ -11628,7 +11584,7 @@
           <a:lstStyle/>
           <a:p>
             <a:pPr algn="l">
-              <a:defRPr sz="800" b="0">
+              <a:defRPr sz="1200" b="0">
                 <a:solidFill>
                   <a:srgbClr val="7A7A8C"/>
                 </a:solidFill>
@@ -11636,21 +11592,132 @@
               </a:defRPr>
             </a:pPr>
             <a:r>
-              <a:t>70% of maximum</a:t>
-            </a:r>
-          </a:p>
-        </p:txBody>
-      </p:sp>
-      <p:sp>
-        <p:nvSpPr>
-          <p:cNvPr id="24" name="Rounded Rectangle 23"/>
+              <a:t>World avg: 77.1%</a:t>
+            </a:r>
+          </a:p>
+        </p:txBody>
+      </p:sp>
+      <p:sp>
+        <p:nvSpPr>
+          <p:cNvPr id="27" name="TextBox 26"/>
+          <p:cNvSpPr txBox="1"/>
+          <p:nvPr/>
+        </p:nvSpPr>
+        <p:spPr>
+          <a:xfrm>
+            <a:off x="8961120" y="2926080"/>
+            <a:ext cx="2286000" cy="228600"/>
+          </a:xfrm>
+          <a:prstGeom prst="rect">
+            <a:avLst/>
+          </a:prstGeom>
+          <a:noFill/>
+        </p:spPr>
+        <p:txBody>
+          <a:bodyPr wrap="square" anchor="t"/>
+          <a:lstStyle/>
+          <a:p>
+            <a:pPr algn="l">
+              <a:defRPr sz="1200" b="0">
+                <a:solidFill>
+                  <a:srgbClr val="006EAF"/>
+                </a:solidFill>
+                <a:latin typeface="Calibri"/>
+              </a:defRPr>
+            </a:pPr>
+            <a:r>
+              <a:t>Best: Korea 99.1%</a:t>
+            </a:r>
+          </a:p>
+        </p:txBody>
+      </p:sp>
+      <p:sp>
+        <p:nvSpPr>
+          <p:cNvPr id="28" name="Rectangle 27"/>
           <p:cNvSpPr/>
           <p:nvPr/>
         </p:nvSpPr>
         <p:spPr>
           <a:xfrm>
-            <a:off x="6217920" y="1828800"/>
-            <a:ext cx="2697480" cy="2286000"/>
+            <a:off x="10299252" y="3246120"/>
+            <a:ext cx="25400" cy="347472"/>
+          </a:xfrm>
+          <a:prstGeom prst="rect">
+            <a:avLst/>
+          </a:prstGeom>
+          <a:solidFill>
+            <a:srgbClr val="E87D1E"/>
+          </a:solidFill>
+          <a:ln>
+            <a:noFill/>
+          </a:ln>
+        </p:spPr>
+        <p:style>
+          <a:lnRef idx="1">
+            <a:schemeClr val="accent1"/>
+          </a:lnRef>
+          <a:fillRef idx="3">
+            <a:schemeClr val="accent1"/>
+          </a:fillRef>
+          <a:effectRef idx="2">
+            <a:schemeClr val="accent1"/>
+          </a:effectRef>
+          <a:fontRef idx="minor">
+            <a:schemeClr val="lt1"/>
+          </a:fontRef>
+        </p:style>
+        <p:txBody>
+          <a:bodyPr rtlCol="0" anchor="ctr"/>
+          <a:lstStyle/>
+          <a:p>
+            <a:pPr algn="ctr"/>
+          </a:p>
+        </p:txBody>
+      </p:sp>
+      <p:sp>
+        <p:nvSpPr>
+          <p:cNvPr id="29" name="TextBox 28"/>
+          <p:cNvSpPr txBox="1"/>
+          <p:nvPr/>
+        </p:nvSpPr>
+        <p:spPr>
+          <a:xfrm>
+            <a:off x="10024932" y="3566160"/>
+            <a:ext cx="1097280" cy="182880"/>
+          </a:xfrm>
+          <a:prstGeom prst="rect">
+            <a:avLst/>
+          </a:prstGeom>
+          <a:noFill/>
+        </p:spPr>
+        <p:txBody>
+          <a:bodyPr wrap="square" anchor="t"/>
+          <a:lstStyle/>
+          <a:p>
+            <a:pPr algn="ctr">
+              <a:defRPr sz="700" b="0">
+                <a:solidFill>
+                  <a:srgbClr val="E87D1E"/>
+                </a:solidFill>
+                <a:latin typeface="Calibri"/>
+              </a:defRPr>
+            </a:pPr>
+            <a:r>
+              <a:t>World</a:t>
+            </a:r>
+          </a:p>
+        </p:txBody>
+      </p:sp>
+      <p:sp>
+        <p:nvSpPr>
+          <p:cNvPr id="30" name="Rounded Rectangle 29"/>
+          <p:cNvSpPr/>
+          <p:nvPr/>
+        </p:nvSpPr>
+        <p:spPr>
+          <a:xfrm>
+            <a:off x="457200" y="4297680"/>
+            <a:ext cx="11247120" cy="1920240"/>
           </a:xfrm>
           <a:prstGeom prst="roundRect">
             <a:avLst/>
@@ -11686,14 +11753,48 @@
       </p:sp>
       <p:sp>
         <p:nvSpPr>
-          <p:cNvPr id="25" name="Rectangle 24"/>
+          <p:cNvPr id="31" name="TextBox 30"/>
+          <p:cNvSpPr txBox="1"/>
+          <p:nvPr/>
+        </p:nvSpPr>
+        <p:spPr>
+          <a:xfrm>
+            <a:off x="731520" y="4434840"/>
+            <a:ext cx="4572000" cy="274320"/>
+          </a:xfrm>
+          <a:prstGeom prst="rect">
+            <a:avLst/>
+          </a:prstGeom>
+          <a:noFill/>
+        </p:spPr>
+        <p:txBody>
+          <a:bodyPr wrap="square" anchor="t"/>
+          <a:lstStyle/>
+          <a:p>
+            <a:pPr algn="l">
+              <a:defRPr sz="1100" b="1">
+                <a:solidFill>
+                  <a:srgbClr val="7A7A8C"/>
+                </a:solidFill>
+                <a:latin typeface="Calibri"/>
+              </a:defRPr>
+            </a:pPr>
+            <a:r>
+              <a:t>HEALTH COMPONENT: REGIONAL COMPARISON</a:t>
+            </a:r>
+          </a:p>
+        </p:txBody>
+      </p:sp>
+      <p:sp>
+        <p:nvSpPr>
+          <p:cNvPr id="32" name="Rectangle 31"/>
           <p:cNvSpPr/>
           <p:nvPr/>
         </p:nvSpPr>
         <p:spPr>
           <a:xfrm>
-            <a:off x="6217920" y="1828800"/>
-            <a:ext cx="2697480" cy="50800"/>
+            <a:off x="731520" y="4709160"/>
+            <a:ext cx="1828800" cy="25400"/>
           </a:xfrm>
           <a:prstGeom prst="rect">
             <a:avLst/>
@@ -11727,675 +11828,17 @@
           </a:p>
         </p:txBody>
       </p:sp>
-      <p:sp>
-        <p:nvSpPr>
-          <p:cNvPr id="26" name="TextBox 25"/>
-          <p:cNvSpPr txBox="1"/>
-          <p:nvPr/>
-        </p:nvSpPr>
-        <p:spPr>
-          <a:xfrm>
-            <a:off x="6355080" y="2011680"/>
-            <a:ext cx="2423160" cy="457200"/>
-          </a:xfrm>
-          <a:prstGeom prst="rect">
-            <a:avLst/>
-          </a:prstGeom>
-          <a:noFill/>
-        </p:spPr>
-        <p:txBody>
-          <a:bodyPr wrap="square" anchor="t"/>
-          <a:lstStyle/>
-          <a:p>
-            <a:pPr algn="l">
-              <a:defRPr sz="1100" b="1">
-                <a:solidFill>
-                  <a:srgbClr val="1A1A2E"/>
-                </a:solidFill>
-                <a:latin typeface="Calibri"/>
-              </a:defRPr>
-            </a:pPr>
-            <a:r>
-              <a:t>Pre-Primary</a:t>
-            </a:r>
-            <a:br/>
-            <a:r>
-              <a:t>Education</a:t>
-            </a:r>
-          </a:p>
-        </p:txBody>
-      </p:sp>
-      <p:sp>
-        <p:nvSpPr>
-          <p:cNvPr id="27" name="TextBox 26"/>
-          <p:cNvSpPr txBox="1"/>
-          <p:nvPr/>
-        </p:nvSpPr>
-        <p:spPr>
-          <a:xfrm>
-            <a:off x="6355080" y="2560320"/>
-            <a:ext cx="2423160" cy="640080"/>
-          </a:xfrm>
-          <a:prstGeom prst="rect">
-            <a:avLst/>
-          </a:prstGeom>
-          <a:noFill/>
-        </p:spPr>
-        <p:txBody>
-          <a:bodyPr wrap="square" anchor="t"/>
-          <a:lstStyle/>
-          <a:p>
-            <a:pPr algn="l">
-              <a:defRPr sz="3600" b="1">
-                <a:solidFill>
-                  <a:srgbClr val="00889E"/>
-                </a:solidFill>
-                <a:latin typeface="Calibri Light"/>
-              </a:defRPr>
-            </a:pPr>
-            <a:r>
-              <a:t>0.59</a:t>
-            </a:r>
-          </a:p>
-        </p:txBody>
-      </p:sp>
-      <p:sp>
-        <p:nvSpPr>
-          <p:cNvPr id="28" name="TextBox 27"/>
-          <p:cNvSpPr txBox="1"/>
-          <p:nvPr/>
-        </p:nvSpPr>
-        <p:spPr>
-          <a:xfrm>
-            <a:off x="6355080" y="3200400"/>
-            <a:ext cx="2423160" cy="228600"/>
-          </a:xfrm>
-          <a:prstGeom prst="rect">
-            <a:avLst/>
-          </a:prstGeom>
-          <a:noFill/>
-        </p:spPr>
-        <p:txBody>
-          <a:bodyPr wrap="square" anchor="t"/>
-          <a:lstStyle/>
-          <a:p>
-            <a:pPr algn="l">
-              <a:defRPr sz="900" b="0">
-                <a:solidFill>
-                  <a:srgbClr val="7A7A8C"/>
-                </a:solidFill>
-                <a:latin typeface="Calibri"/>
-              </a:defRPr>
-            </a:pPr>
-            <a:r>
-              <a:t>learning-adj. years</a:t>
-            </a:r>
-          </a:p>
-        </p:txBody>
-      </p:sp>
-      <p:sp>
-        <p:nvSpPr>
-          <p:cNvPr id="29" name="Rounded Rectangle 28"/>
-          <p:cNvSpPr/>
-          <p:nvPr/>
-        </p:nvSpPr>
-        <p:spPr>
-          <a:xfrm>
-            <a:off x="6355080" y="3520440"/>
-            <a:ext cx="2423160" cy="109728"/>
-          </a:xfrm>
-          <a:prstGeom prst="roundRect">
-            <a:avLst/>
-          </a:prstGeom>
-          <a:solidFill>
-            <a:srgbClr val="E0E2E6"/>
-          </a:solidFill>
-          <a:ln>
-            <a:noFill/>
-          </a:ln>
-        </p:spPr>
-        <p:style>
-          <a:lnRef idx="1">
-            <a:schemeClr val="accent1"/>
-          </a:lnRef>
-          <a:fillRef idx="3">
-            <a:schemeClr val="accent1"/>
-          </a:fillRef>
-          <a:effectRef idx="2">
-            <a:schemeClr val="accent1"/>
-          </a:effectRef>
-          <a:fontRef idx="minor">
-            <a:schemeClr val="lt1"/>
-          </a:fontRef>
-        </p:style>
-        <p:txBody>
-          <a:bodyPr rtlCol="0" anchor="ctr"/>
-          <a:lstStyle/>
-          <a:p>
-            <a:pPr algn="ctr"/>
-          </a:p>
-        </p:txBody>
-      </p:sp>
-      <p:sp>
-        <p:nvSpPr>
-          <p:cNvPr id="30" name="Rounded Rectangle 29"/>
-          <p:cNvSpPr/>
-          <p:nvPr/>
-        </p:nvSpPr>
-        <p:spPr>
-          <a:xfrm>
-            <a:off x="6355080" y="3520440"/>
-            <a:ext cx="1429664" cy="109728"/>
-          </a:xfrm>
-          <a:prstGeom prst="roundRect">
-            <a:avLst/>
-          </a:prstGeom>
-          <a:solidFill>
-            <a:srgbClr val="00889E"/>
-          </a:solidFill>
-          <a:ln>
-            <a:noFill/>
-          </a:ln>
-        </p:spPr>
-        <p:style>
-          <a:lnRef idx="1">
-            <a:schemeClr val="accent1"/>
-          </a:lnRef>
-          <a:fillRef idx="3">
-            <a:schemeClr val="accent1"/>
-          </a:fillRef>
-          <a:effectRef idx="2">
-            <a:schemeClr val="accent1"/>
-          </a:effectRef>
-          <a:fontRef idx="minor">
-            <a:schemeClr val="lt1"/>
-          </a:fontRef>
-        </p:style>
-        <p:txBody>
-          <a:bodyPr rtlCol="0" anchor="ctr"/>
-          <a:lstStyle/>
-          <a:p>
-            <a:pPr algn="ctr"/>
-          </a:p>
-        </p:txBody>
-      </p:sp>
-      <p:sp>
-        <p:nvSpPr>
-          <p:cNvPr id="31" name="TextBox 30"/>
-          <p:cNvSpPr txBox="1"/>
-          <p:nvPr/>
-        </p:nvSpPr>
-        <p:spPr>
-          <a:xfrm>
-            <a:off x="6355080" y="3703320"/>
-            <a:ext cx="2423160" cy="182880"/>
-          </a:xfrm>
-          <a:prstGeom prst="rect">
-            <a:avLst/>
-          </a:prstGeom>
-          <a:noFill/>
-        </p:spPr>
-        <p:txBody>
-          <a:bodyPr wrap="square" anchor="t"/>
-          <a:lstStyle/>
-          <a:p>
-            <a:pPr algn="l">
-              <a:defRPr sz="800" b="0">
-                <a:solidFill>
-                  <a:srgbClr val="7A7A8C"/>
-                </a:solidFill>
-                <a:latin typeface="Calibri"/>
-              </a:defRPr>
-            </a:pPr>
-            <a:r>
-              <a:t>59% of maximum</a:t>
-            </a:r>
-          </a:p>
-        </p:txBody>
-      </p:sp>
-      <p:sp>
-        <p:nvSpPr>
-          <p:cNvPr id="32" name="Rounded Rectangle 31"/>
-          <p:cNvSpPr/>
-          <p:nvPr/>
-        </p:nvSpPr>
-        <p:spPr>
-          <a:xfrm>
-            <a:off x="9098280" y="1828800"/>
-            <a:ext cx="2697480" cy="2286000"/>
-          </a:xfrm>
-          <a:prstGeom prst="roundRect">
-            <a:avLst/>
-          </a:prstGeom>
-          <a:solidFill>
-            <a:srgbClr val="FFFFFF"/>
-          </a:solidFill>
-          <a:ln>
-            <a:noFill/>
-          </a:ln>
-        </p:spPr>
-        <p:style>
-          <a:lnRef idx="1">
-            <a:schemeClr val="accent1"/>
-          </a:lnRef>
-          <a:fillRef idx="3">
-            <a:schemeClr val="accent1"/>
-          </a:fillRef>
-          <a:effectRef idx="2">
-            <a:schemeClr val="accent1"/>
-          </a:effectRef>
-          <a:fontRef idx="minor">
-            <a:schemeClr val="lt1"/>
-          </a:fontRef>
-        </p:style>
-        <p:txBody>
-          <a:bodyPr rtlCol="0" anchor="ctr"/>
-          <a:lstStyle/>
-          <a:p>
-            <a:pPr algn="ctr"/>
-          </a:p>
-        </p:txBody>
-      </p:sp>
-      <p:sp>
-        <p:nvSpPr>
-          <p:cNvPr id="33" name="Rectangle 32"/>
-          <p:cNvSpPr/>
-          <p:nvPr/>
-        </p:nvSpPr>
-        <p:spPr>
-          <a:xfrm>
-            <a:off x="9098280" y="1828800"/>
-            <a:ext cx="2697480" cy="50800"/>
-          </a:xfrm>
-          <a:prstGeom prst="rect">
-            <a:avLst/>
-          </a:prstGeom>
-          <a:solidFill>
-            <a:srgbClr val="E87D1E"/>
-          </a:solidFill>
-          <a:ln>
-            <a:noFill/>
-          </a:ln>
-        </p:spPr>
-        <p:style>
-          <a:lnRef idx="1">
-            <a:schemeClr val="accent1"/>
-          </a:lnRef>
-          <a:fillRef idx="3">
-            <a:schemeClr val="accent1"/>
-          </a:fillRef>
-          <a:effectRef idx="2">
-            <a:schemeClr val="accent1"/>
-          </a:effectRef>
-          <a:fontRef idx="minor">
-            <a:schemeClr val="lt1"/>
-          </a:fontRef>
-        </p:style>
-        <p:txBody>
-          <a:bodyPr rtlCol="0" anchor="ctr"/>
-          <a:lstStyle/>
-          <a:p>
-            <a:pPr algn="ctr"/>
-          </a:p>
-        </p:txBody>
-      </p:sp>
-      <p:sp>
-        <p:nvSpPr>
-          <p:cNvPr id="34" name="TextBox 33"/>
-          <p:cNvSpPr txBox="1"/>
-          <p:nvPr/>
-        </p:nvSpPr>
-        <p:spPr>
-          <a:xfrm>
-            <a:off x="9235440" y="2011680"/>
-            <a:ext cx="2423160" cy="457200"/>
-          </a:xfrm>
-          <a:prstGeom prst="rect">
-            <a:avLst/>
-          </a:prstGeom>
-          <a:noFill/>
-        </p:spPr>
-        <p:txBody>
-          <a:bodyPr wrap="square" anchor="t"/>
-          <a:lstStyle/>
-          <a:p>
-            <a:pPr algn="l">
-              <a:defRPr sz="1100" b="1">
-                <a:solidFill>
-                  <a:srgbClr val="1A1A2E"/>
-                </a:solidFill>
-                <a:latin typeface="Calibri"/>
-              </a:defRPr>
-            </a:pPr>
-            <a:r>
-              <a:t>Tertiary</a:t>
-            </a:r>
-            <a:br/>
-            <a:r>
-              <a:t>Enrollment</a:t>
-            </a:r>
-          </a:p>
-        </p:txBody>
-      </p:sp>
-      <p:sp>
-        <p:nvSpPr>
-          <p:cNvPr id="35" name="TextBox 34"/>
-          <p:cNvSpPr txBox="1"/>
-          <p:nvPr/>
-        </p:nvSpPr>
-        <p:spPr>
-          <a:xfrm>
-            <a:off x="9235440" y="2560320"/>
-            <a:ext cx="2423160" cy="640080"/>
-          </a:xfrm>
-          <a:prstGeom prst="rect">
-            <a:avLst/>
-          </a:prstGeom>
-          <a:noFill/>
-        </p:spPr>
-        <p:txBody>
-          <a:bodyPr wrap="square" anchor="t"/>
-          <a:lstStyle/>
-          <a:p>
-            <a:pPr algn="l">
-              <a:defRPr sz="3600" b="1">
-                <a:solidFill>
-                  <a:srgbClr val="E87D1E"/>
-                </a:solidFill>
-                <a:latin typeface="Calibri Light"/>
-              </a:defRPr>
-            </a:pPr>
-            <a:r>
-              <a:t>37.4%</a:t>
-            </a:r>
-          </a:p>
-        </p:txBody>
-      </p:sp>
-      <p:sp>
-        <p:nvSpPr>
-          <p:cNvPr id="36" name="TextBox 35"/>
-          <p:cNvSpPr txBox="1"/>
-          <p:nvPr/>
-        </p:nvSpPr>
-        <p:spPr>
-          <a:xfrm>
-            <a:off x="9235440" y="3200400"/>
-            <a:ext cx="2423160" cy="228600"/>
-          </a:xfrm>
-          <a:prstGeom prst="rect">
-            <a:avLst/>
-          </a:prstGeom>
-          <a:noFill/>
-        </p:spPr>
-        <p:txBody>
-          <a:bodyPr wrap="square" anchor="t"/>
-          <a:lstStyle/>
-          <a:p>
-            <a:pPr algn="l">
-              <a:defRPr sz="900" b="0">
-                <a:solidFill>
-                  <a:srgbClr val="7A7A8C"/>
-                </a:solidFill>
-                <a:latin typeface="Calibri"/>
-              </a:defRPr>
-            </a:pPr>
-            <a:r>
-              <a:t>gross enrollment rate</a:t>
-            </a:r>
-          </a:p>
-        </p:txBody>
-      </p:sp>
-      <p:sp>
-        <p:nvSpPr>
-          <p:cNvPr id="37" name="Rounded Rectangle 36"/>
-          <p:cNvSpPr/>
-          <p:nvPr/>
-        </p:nvSpPr>
-        <p:spPr>
-          <a:xfrm>
-            <a:off x="9235440" y="3520440"/>
-            <a:ext cx="2423160" cy="109728"/>
-          </a:xfrm>
-          <a:prstGeom prst="roundRect">
-            <a:avLst/>
-          </a:prstGeom>
-          <a:solidFill>
-            <a:srgbClr val="E0E2E6"/>
-          </a:solidFill>
-          <a:ln>
-            <a:noFill/>
-          </a:ln>
-        </p:spPr>
-        <p:style>
-          <a:lnRef idx="1">
-            <a:schemeClr val="accent1"/>
-          </a:lnRef>
-          <a:fillRef idx="3">
-            <a:schemeClr val="accent1"/>
-          </a:fillRef>
-          <a:effectRef idx="2">
-            <a:schemeClr val="accent1"/>
-          </a:effectRef>
-          <a:fontRef idx="minor">
-            <a:schemeClr val="lt1"/>
-          </a:fontRef>
-        </p:style>
-        <p:txBody>
-          <a:bodyPr rtlCol="0" anchor="ctr"/>
-          <a:lstStyle/>
-          <a:p>
-            <a:pPr algn="ctr"/>
-          </a:p>
-        </p:txBody>
-      </p:sp>
-      <p:sp>
-        <p:nvSpPr>
-          <p:cNvPr id="38" name="Rounded Rectangle 37"/>
-          <p:cNvSpPr/>
-          <p:nvPr/>
-        </p:nvSpPr>
-        <p:spPr>
-          <a:xfrm>
-            <a:off x="9235440" y="3520440"/>
-            <a:ext cx="906261" cy="109728"/>
-          </a:xfrm>
-          <a:prstGeom prst="roundRect">
-            <a:avLst/>
-          </a:prstGeom>
-          <a:solidFill>
-            <a:srgbClr val="E87D1E"/>
-          </a:solidFill>
-          <a:ln>
-            <a:noFill/>
-          </a:ln>
-        </p:spPr>
-        <p:style>
-          <a:lnRef idx="1">
-            <a:schemeClr val="accent1"/>
-          </a:lnRef>
-          <a:fillRef idx="3">
-            <a:schemeClr val="accent1"/>
-          </a:fillRef>
-          <a:effectRef idx="2">
-            <a:schemeClr val="accent1"/>
-          </a:effectRef>
-          <a:fontRef idx="minor">
-            <a:schemeClr val="lt1"/>
-          </a:fontRef>
-        </p:style>
-        <p:txBody>
-          <a:bodyPr rtlCol="0" anchor="ctr"/>
-          <a:lstStyle/>
-          <a:p>
-            <a:pPr algn="ctr"/>
-          </a:p>
-        </p:txBody>
-      </p:sp>
-      <p:sp>
-        <p:nvSpPr>
-          <p:cNvPr id="39" name="TextBox 38"/>
-          <p:cNvSpPr txBox="1"/>
-          <p:nvPr/>
-        </p:nvSpPr>
-        <p:spPr>
-          <a:xfrm>
-            <a:off x="9235440" y="3703320"/>
-            <a:ext cx="2423160" cy="182880"/>
-          </a:xfrm>
-          <a:prstGeom prst="rect">
-            <a:avLst/>
-          </a:prstGeom>
-          <a:noFill/>
-        </p:spPr>
-        <p:txBody>
-          <a:bodyPr wrap="square" anchor="t"/>
-          <a:lstStyle/>
-          <a:p>
-            <a:pPr algn="l">
-              <a:defRPr sz="800" b="0">
-                <a:solidFill>
-                  <a:srgbClr val="7A7A8C"/>
-                </a:solidFill>
-                <a:latin typeface="Calibri"/>
-              </a:defRPr>
-            </a:pPr>
-            <a:r>
-              <a:t>37% of maximum</a:t>
-            </a:r>
-          </a:p>
-        </p:txBody>
-      </p:sp>
-      <p:sp>
-        <p:nvSpPr>
-          <p:cNvPr id="40" name="Rounded Rectangle 39"/>
-          <p:cNvSpPr/>
-          <p:nvPr/>
-        </p:nvSpPr>
-        <p:spPr>
-          <a:xfrm>
-            <a:off x="457200" y="4343400"/>
-            <a:ext cx="6858000" cy="1828800"/>
-          </a:xfrm>
-          <a:prstGeom prst="roundRect">
-            <a:avLst/>
-          </a:prstGeom>
-          <a:solidFill>
-            <a:srgbClr val="FFFFFF"/>
-          </a:solidFill>
-          <a:ln>
-            <a:noFill/>
-          </a:ln>
-        </p:spPr>
-        <p:style>
-          <a:lnRef idx="1">
-            <a:schemeClr val="accent1"/>
-          </a:lnRef>
-          <a:fillRef idx="3">
-            <a:schemeClr val="accent1"/>
-          </a:fillRef>
-          <a:effectRef idx="2">
-            <a:schemeClr val="accent1"/>
-          </a:effectRef>
-          <a:fontRef idx="minor">
-            <a:schemeClr val="lt1"/>
-          </a:fontRef>
-        </p:style>
-        <p:txBody>
-          <a:bodyPr rtlCol="0" anchor="ctr"/>
-          <a:lstStyle/>
-          <a:p>
-            <a:pPr algn="ctr"/>
-          </a:p>
-        </p:txBody>
-      </p:sp>
-      <p:sp>
-        <p:nvSpPr>
-          <p:cNvPr id="41" name="TextBox 40"/>
-          <p:cNvSpPr txBox="1"/>
-          <p:nvPr/>
-        </p:nvSpPr>
-        <p:spPr>
-          <a:xfrm>
-            <a:off x="731520" y="4480560"/>
-            <a:ext cx="4572000" cy="274320"/>
-          </a:xfrm>
-          <a:prstGeom prst="rect">
-            <a:avLst/>
-          </a:prstGeom>
-          <a:noFill/>
-        </p:spPr>
-        <p:txBody>
-          <a:bodyPr wrap="square" anchor="t"/>
-          <a:lstStyle/>
-          <a:p>
-            <a:pPr algn="l">
-              <a:defRPr sz="1100" b="1">
-                <a:solidFill>
-                  <a:srgbClr val="7A7A8C"/>
-                </a:solidFill>
-                <a:latin typeface="Calibri"/>
-              </a:defRPr>
-            </a:pPr>
-            <a:r>
-              <a:t>EDUCATION COMPONENT: REGIONAL COMPARISON</a:t>
-            </a:r>
-          </a:p>
-        </p:txBody>
-      </p:sp>
-      <p:sp>
-        <p:nvSpPr>
-          <p:cNvPr id="42" name="Rectangle 41"/>
-          <p:cNvSpPr/>
-          <p:nvPr/>
-        </p:nvSpPr>
-        <p:spPr>
-          <a:xfrm>
-            <a:off x="731520" y="4754880"/>
-            <a:ext cx="1828800" cy="25400"/>
-          </a:xfrm>
-          <a:prstGeom prst="rect">
-            <a:avLst/>
-          </a:prstGeom>
-          <a:solidFill>
-            <a:srgbClr val="006EAF"/>
-          </a:solidFill>
-          <a:ln>
-            <a:noFill/>
-          </a:ln>
-        </p:spPr>
-        <p:style>
-          <a:lnRef idx="1">
-            <a:schemeClr val="accent1"/>
-          </a:lnRef>
-          <a:fillRef idx="3">
-            <a:schemeClr val="accent1"/>
-          </a:fillRef>
-          <a:effectRef idx="2">
-            <a:schemeClr val="accent1"/>
-          </a:effectRef>
-          <a:fontRef idx="minor">
-            <a:schemeClr val="lt1"/>
-          </a:fontRef>
-        </p:style>
-        <p:txBody>
-          <a:bodyPr rtlCol="0" anchor="ctr"/>
-          <a:lstStyle/>
-          <a:p>
-            <a:pPr algn="ctr"/>
-          </a:p>
-        </p:txBody>
-      </p:sp>
       <p:graphicFrame>
         <p:nvGraphicFramePr>
-          <p:cNvPr id="43" name="Chart 42"/>
+          <p:cNvPr id="33" name="Chart 32"/>
           <p:cNvGraphicFramePr>
             <a:graphicFrameLocks noGrp="1"/>
           </p:cNvGraphicFramePr>
           <p:nvPr/>
         </p:nvGraphicFramePr>
         <p:xfrm>
-          <a:off x="731520" y="4846320"/>
-          <a:ext cx="6400800" cy="1188720"/>
+          <a:off x="731520" y="4800600"/>
+          <a:ext cx="10789920" cy="1234440"/>
         </p:xfrm>
         <a:graphic>
           <a:graphicData uri="http://schemas.openxmlformats.org/drawingml/2006/chart">
@@ -12405,161 +11848,7 @@
       </p:graphicFrame>
       <p:sp>
         <p:nvSpPr>
-          <p:cNvPr id="44" name="Rounded Rectangle 43"/>
-          <p:cNvSpPr/>
-          <p:nvPr/>
-        </p:nvSpPr>
-        <p:spPr>
-          <a:xfrm>
-            <a:off x="7589520" y="4343400"/>
-            <a:ext cx="4114800" cy="1828800"/>
-          </a:xfrm>
-          <a:prstGeom prst="roundRect">
-            <a:avLst/>
-          </a:prstGeom>
-          <a:solidFill>
-            <a:srgbClr val="FFFFFF"/>
-          </a:solidFill>
-          <a:ln>
-            <a:noFill/>
-          </a:ln>
-        </p:spPr>
-        <p:style>
-          <a:lnRef idx="1">
-            <a:schemeClr val="accent1"/>
-          </a:lnRef>
-          <a:fillRef idx="3">
-            <a:schemeClr val="accent1"/>
-          </a:fillRef>
-          <a:effectRef idx="2">
-            <a:schemeClr val="accent1"/>
-          </a:effectRef>
-          <a:fontRef idx="minor">
-            <a:schemeClr val="lt1"/>
-          </a:fontRef>
-        </p:style>
-        <p:txBody>
-          <a:bodyPr rtlCol="0" anchor="ctr"/>
-          <a:lstStyle/>
-          <a:p>
-            <a:pPr algn="ctr"/>
-          </a:p>
-        </p:txBody>
-      </p:sp>
-      <p:sp>
-        <p:nvSpPr>
-          <p:cNvPr id="45" name="Rectangle 44"/>
-          <p:cNvSpPr/>
-          <p:nvPr/>
-        </p:nvSpPr>
-        <p:spPr>
-          <a:xfrm>
-            <a:off x="7589520" y="4343400"/>
-            <a:ext cx="63500" cy="1828800"/>
-          </a:xfrm>
-          <a:prstGeom prst="rect">
-            <a:avLst/>
-          </a:prstGeom>
-          <a:solidFill>
-            <a:srgbClr val="006EAF"/>
-          </a:solidFill>
-          <a:ln>
-            <a:noFill/>
-          </a:ln>
-        </p:spPr>
-        <p:style>
-          <a:lnRef idx="1">
-            <a:schemeClr val="accent1"/>
-          </a:lnRef>
-          <a:fillRef idx="3">
-            <a:schemeClr val="accent1"/>
-          </a:fillRef>
-          <a:effectRef idx="2">
-            <a:schemeClr val="accent1"/>
-          </a:effectRef>
-          <a:fontRef idx="minor">
-            <a:schemeClr val="lt1"/>
-          </a:fontRef>
-        </p:style>
-        <p:txBody>
-          <a:bodyPr rtlCol="0" anchor="ctr"/>
-          <a:lstStyle/>
-          <a:p>
-            <a:pPr algn="ctr"/>
-          </a:p>
-        </p:txBody>
-      </p:sp>
-      <p:sp>
-        <p:nvSpPr>
-          <p:cNvPr id="46" name="TextBox 45"/>
-          <p:cNvSpPr txBox="1"/>
-          <p:nvPr/>
-        </p:nvSpPr>
-        <p:spPr>
-          <a:xfrm>
-            <a:off x="7863840" y="4480560"/>
-            <a:ext cx="3657600" cy="228600"/>
-          </a:xfrm>
-          <a:prstGeom prst="rect">
-            <a:avLst/>
-          </a:prstGeom>
-          <a:noFill/>
-        </p:spPr>
-        <p:txBody>
-          <a:bodyPr wrap="square" anchor="t"/>
-          <a:lstStyle/>
-          <a:p>
-            <a:pPr algn="l">
-              <a:defRPr sz="1000" b="1">
-                <a:solidFill>
-                  <a:srgbClr val="006EAF"/>
-                </a:solidFill>
-                <a:latin typeface="Calibri"/>
-              </a:defRPr>
-            </a:pPr>
-            <a:r>
-              <a:t>KEY INSIGHT</a:t>
-            </a:r>
-          </a:p>
-        </p:txBody>
-      </p:sp>
-      <p:sp>
-        <p:nvSpPr>
-          <p:cNvPr id="47" name="TextBox 46"/>
-          <p:cNvSpPr txBox="1"/>
-          <p:nvPr/>
-        </p:nvSpPr>
-        <p:spPr>
-          <a:xfrm>
-            <a:off x="7863840" y="4754880"/>
-            <a:ext cx="3657600" cy="1280160"/>
-          </a:xfrm>
-          <a:prstGeom prst="rect">
-            <a:avLst/>
-          </a:prstGeom>
-          <a:noFill/>
-        </p:spPr>
-        <p:txBody>
-          <a:bodyPr wrap="square" anchor="t"/>
-          <a:lstStyle/>
-          <a:p>
-            <a:pPr algn="l">
-              <a:defRPr sz="1000" b="0">
-                <a:solidFill>
-                  <a:srgbClr val="1A1A2E"/>
-                </a:solidFill>
-                <a:latin typeface="Calibri"/>
-              </a:defRPr>
-            </a:pPr>
-            <a:r>
-              <a:t>Education is EAP's strongest component, scoring 118.1 — well above the world average (107.4) and second only to Europe &amp; Central Asia (140.8). Singapore leads globally with an HLO of 594. EAP averages 10.8 expected years of schooling. Tertiary enrollment (37.4%) and pre-primary (0.59 years) remain areas for growth across the region.</a:t>
-            </a:r>
-          </a:p>
-        </p:txBody>
-      </p:sp>
-      <p:sp>
-        <p:nvSpPr>
-          <p:cNvPr id="48" name="Rectangle 47"/>
+          <p:cNvPr id="34" name="Rectangle 33"/>
           <p:cNvSpPr/>
           <p:nvPr/>
         </p:nvSpPr>
@@ -12602,7 +11891,7 @@
       </p:sp>
       <p:sp>
         <p:nvSpPr>
-          <p:cNvPr id="49" name="TextBox 48"/>
+          <p:cNvPr id="35" name="TextBox 34"/>
           <p:cNvSpPr txBox="1"/>
           <p:nvPr/>
         </p:nvSpPr>
@@ -12636,7 +11925,7 @@
       </p:sp>
       <p:sp>
         <p:nvSpPr>
-          <p:cNvPr id="50" name="TextBox 49"/>
+          <p:cNvPr id="36" name="TextBox 35"/>
           <p:cNvSpPr txBox="1"/>
           <p:nvPr/>
         </p:nvSpPr>
@@ -12670,7 +11959,7 @@
       </p:sp>
       <p:sp>
         <p:nvSpPr>
-          <p:cNvPr id="51" name="TextBox 50"/>
+          <p:cNvPr id="37" name="TextBox 36"/>
           <p:cNvSpPr txBox="1"/>
           <p:nvPr/>
         </p:nvSpPr>
@@ -12821,6 +12110,2076 @@
             <a:avLst/>
           </a:prstGeom>
           <a:solidFill>
+            <a:srgbClr val="006EAF"/>
+          </a:solidFill>
+          <a:ln>
+            <a:noFill/>
+          </a:ln>
+        </p:spPr>
+        <p:style>
+          <a:lnRef idx="1">
+            <a:schemeClr val="accent1"/>
+          </a:lnRef>
+          <a:fillRef idx="3">
+            <a:schemeClr val="accent1"/>
+          </a:fillRef>
+          <a:effectRef idx="2">
+            <a:schemeClr val="accent1"/>
+          </a:effectRef>
+          <a:fontRef idx="minor">
+            <a:schemeClr val="lt1"/>
+          </a:fontRef>
+        </p:style>
+        <p:txBody>
+          <a:bodyPr rtlCol="0" anchor="ctr"/>
+          <a:lstStyle/>
+          <a:p>
+            <a:pPr algn="ctr"/>
+          </a:p>
+        </p:txBody>
+      </p:sp>
+      <p:sp>
+        <p:nvSpPr>
+          <p:cNvPr id="5" name="TextBox 4"/>
+          <p:cNvSpPr txBox="1"/>
+          <p:nvPr/>
+        </p:nvSpPr>
+        <p:spPr>
+          <a:xfrm>
+            <a:off x="548640" y="137160"/>
+            <a:ext cx="7315200" cy="640080"/>
+          </a:xfrm>
+          <a:prstGeom prst="rect">
+            <a:avLst/>
+          </a:prstGeom>
+          <a:noFill/>
+        </p:spPr>
+        <p:txBody>
+          <a:bodyPr wrap="square" anchor="ctr"/>
+          <a:lstStyle/>
+          <a:p>
+            <a:pPr algn="l">
+              <a:defRPr sz="2400" b="1">
+                <a:solidFill>
+                  <a:srgbClr val="FFFFFF"/>
+                </a:solidFill>
+                <a:latin typeface="Calibri Light"/>
+              </a:defRPr>
+            </a:pPr>
+            <a:r>
+              <a:t>Education Component  |  East Asia &amp; Pacific</a:t>
+            </a:r>
+          </a:p>
+        </p:txBody>
+      </p:sp>
+      <p:sp>
+        <p:nvSpPr>
+          <p:cNvPr id="6" name="TextBox 5"/>
+          <p:cNvSpPr txBox="1"/>
+          <p:nvPr/>
+        </p:nvSpPr>
+        <p:spPr>
+          <a:xfrm>
+            <a:off x="8686800" y="137160"/>
+            <a:ext cx="3200400" cy="640080"/>
+          </a:xfrm>
+          <a:prstGeom prst="rect">
+            <a:avLst/>
+          </a:prstGeom>
+          <a:noFill/>
+        </p:spPr>
+        <p:txBody>
+          <a:bodyPr wrap="square" anchor="ctr"/>
+          <a:lstStyle/>
+          <a:p>
+            <a:pPr algn="r">
+              <a:defRPr sz="2200" b="1">
+                <a:solidFill>
+                  <a:srgbClr val="006EAF"/>
+                </a:solidFill>
+                <a:latin typeface="Calibri"/>
+              </a:defRPr>
+            </a:pPr>
+            <a:r>
+              <a:t>Avg: 118.1 / 180</a:t>
+            </a:r>
+          </a:p>
+        </p:txBody>
+      </p:sp>
+      <p:sp>
+        <p:nvSpPr>
+          <p:cNvPr id="7" name="TextBox 6"/>
+          <p:cNvSpPr txBox="1"/>
+          <p:nvPr/>
+        </p:nvSpPr>
+        <p:spPr>
+          <a:xfrm>
+            <a:off x="548640" y="1234440"/>
+            <a:ext cx="7315200" cy="365760"/>
+          </a:xfrm>
+          <a:prstGeom prst="rect">
+            <a:avLst/>
+          </a:prstGeom>
+          <a:noFill/>
+        </p:spPr>
+        <p:txBody>
+          <a:bodyPr wrap="square" anchor="t"/>
+          <a:lstStyle/>
+          <a:p>
+            <a:pPr algn="l">
+              <a:defRPr sz="1100" b="0">
+                <a:solidFill>
+                  <a:srgbClr val="7A7A8C"/>
+                </a:solidFill>
+                <a:latin typeface="Calibri"/>
+              </a:defRPr>
+            </a:pPr>
+            <a:r>
+              <a:t>Education captures learning quality, years of schooling, pre-primary education, and tertiary enrollment.</a:t>
+            </a:r>
+          </a:p>
+        </p:txBody>
+      </p:sp>
+      <p:sp>
+        <p:nvSpPr>
+          <p:cNvPr id="8" name="Rounded Rectangle 7"/>
+          <p:cNvSpPr/>
+          <p:nvPr/>
+        </p:nvSpPr>
+        <p:spPr>
+          <a:xfrm>
+            <a:off x="457200" y="1828800"/>
+            <a:ext cx="2697480" cy="2651760"/>
+          </a:xfrm>
+          <a:prstGeom prst="roundRect">
+            <a:avLst/>
+          </a:prstGeom>
+          <a:solidFill>
+            <a:srgbClr val="FFFFFF"/>
+          </a:solidFill>
+          <a:ln>
+            <a:noFill/>
+          </a:ln>
+        </p:spPr>
+        <p:style>
+          <a:lnRef idx="1">
+            <a:schemeClr val="accent1"/>
+          </a:lnRef>
+          <a:fillRef idx="3">
+            <a:schemeClr val="accent1"/>
+          </a:fillRef>
+          <a:effectRef idx="2">
+            <a:schemeClr val="accent1"/>
+          </a:effectRef>
+          <a:fontRef idx="minor">
+            <a:schemeClr val="lt1"/>
+          </a:fontRef>
+        </p:style>
+        <p:txBody>
+          <a:bodyPr rtlCol="0" anchor="ctr"/>
+          <a:lstStyle/>
+          <a:p>
+            <a:pPr algn="ctr"/>
+          </a:p>
+        </p:txBody>
+      </p:sp>
+      <p:sp>
+        <p:nvSpPr>
+          <p:cNvPr id="9" name="Rectangle 8"/>
+          <p:cNvSpPr/>
+          <p:nvPr/>
+        </p:nvSpPr>
+        <p:spPr>
+          <a:xfrm>
+            <a:off x="457200" y="1828800"/>
+            <a:ext cx="2697480" cy="50800"/>
+          </a:xfrm>
+          <a:prstGeom prst="rect">
+            <a:avLst/>
+          </a:prstGeom>
+          <a:solidFill>
+            <a:srgbClr val="006EAF"/>
+          </a:solidFill>
+          <a:ln>
+            <a:noFill/>
+          </a:ln>
+        </p:spPr>
+        <p:style>
+          <a:lnRef idx="1">
+            <a:schemeClr val="accent1"/>
+          </a:lnRef>
+          <a:fillRef idx="3">
+            <a:schemeClr val="accent1"/>
+          </a:fillRef>
+          <a:effectRef idx="2">
+            <a:schemeClr val="accent1"/>
+          </a:effectRef>
+          <a:fontRef idx="minor">
+            <a:schemeClr val="lt1"/>
+          </a:fontRef>
+        </p:style>
+        <p:txBody>
+          <a:bodyPr rtlCol="0" anchor="ctr"/>
+          <a:lstStyle/>
+          <a:p>
+            <a:pPr algn="ctr"/>
+          </a:p>
+        </p:txBody>
+      </p:sp>
+      <p:sp>
+        <p:nvSpPr>
+          <p:cNvPr id="10" name="TextBox 9"/>
+          <p:cNvSpPr txBox="1"/>
+          <p:nvPr/>
+        </p:nvSpPr>
+        <p:spPr>
+          <a:xfrm>
+            <a:off x="594360" y="2011680"/>
+            <a:ext cx="2423160" cy="457200"/>
+          </a:xfrm>
+          <a:prstGeom prst="rect">
+            <a:avLst/>
+          </a:prstGeom>
+          <a:noFill/>
+        </p:spPr>
+        <p:txBody>
+          <a:bodyPr wrap="square" anchor="t"/>
+          <a:lstStyle/>
+          <a:p>
+            <a:pPr algn="l">
+              <a:defRPr sz="1100" b="1">
+                <a:solidFill>
+                  <a:srgbClr val="1A1A2E"/>
+                </a:solidFill>
+                <a:latin typeface="Calibri"/>
+              </a:defRPr>
+            </a:pPr>
+            <a:r>
+              <a:t>Expected Years</a:t>
+            </a:r>
+            <a:br/>
+            <a:r>
+              <a:t>of Schooling</a:t>
+            </a:r>
+          </a:p>
+        </p:txBody>
+      </p:sp>
+      <p:sp>
+        <p:nvSpPr>
+          <p:cNvPr id="11" name="TextBox 10"/>
+          <p:cNvSpPr txBox="1"/>
+          <p:nvPr/>
+        </p:nvSpPr>
+        <p:spPr>
+          <a:xfrm>
+            <a:off x="594360" y="2560320"/>
+            <a:ext cx="2423160" cy="640080"/>
+          </a:xfrm>
+          <a:prstGeom prst="rect">
+            <a:avLst/>
+          </a:prstGeom>
+          <a:noFill/>
+        </p:spPr>
+        <p:txBody>
+          <a:bodyPr wrap="square" anchor="t"/>
+          <a:lstStyle/>
+          <a:p>
+            <a:pPr algn="l">
+              <a:defRPr sz="3600" b="1">
+                <a:solidFill>
+                  <a:srgbClr val="006EAF"/>
+                </a:solidFill>
+                <a:latin typeface="Calibri Light"/>
+              </a:defRPr>
+            </a:pPr>
+            <a:r>
+              <a:t>10.8</a:t>
+            </a:r>
+          </a:p>
+        </p:txBody>
+      </p:sp>
+      <p:sp>
+        <p:nvSpPr>
+          <p:cNvPr id="12" name="TextBox 11"/>
+          <p:cNvSpPr txBox="1"/>
+          <p:nvPr/>
+        </p:nvSpPr>
+        <p:spPr>
+          <a:xfrm>
+            <a:off x="594360" y="3200400"/>
+            <a:ext cx="2423160" cy="228600"/>
+          </a:xfrm>
+          <a:prstGeom prst="rect">
+            <a:avLst/>
+          </a:prstGeom>
+          <a:noFill/>
+        </p:spPr>
+        <p:txBody>
+          <a:bodyPr wrap="square" anchor="t"/>
+          <a:lstStyle/>
+          <a:p>
+            <a:pPr algn="l">
+              <a:defRPr sz="900" b="0">
+                <a:solidFill>
+                  <a:srgbClr val="7A7A8C"/>
+                </a:solidFill>
+                <a:latin typeface="Calibri"/>
+              </a:defRPr>
+            </a:pPr>
+            <a:r>
+              <a:t>years (EAP avg)</a:t>
+            </a:r>
+          </a:p>
+        </p:txBody>
+      </p:sp>
+      <p:sp>
+        <p:nvSpPr>
+          <p:cNvPr id="13" name="Rounded Rectangle 12"/>
+          <p:cNvSpPr/>
+          <p:nvPr/>
+        </p:nvSpPr>
+        <p:spPr>
+          <a:xfrm>
+            <a:off x="594360" y="3520440"/>
+            <a:ext cx="2423160" cy="109728"/>
+          </a:xfrm>
+          <a:prstGeom prst="roundRect">
+            <a:avLst/>
+          </a:prstGeom>
+          <a:solidFill>
+            <a:srgbClr val="E0E2E6"/>
+          </a:solidFill>
+          <a:ln>
+            <a:noFill/>
+          </a:ln>
+        </p:spPr>
+        <p:style>
+          <a:lnRef idx="1">
+            <a:schemeClr val="accent1"/>
+          </a:lnRef>
+          <a:fillRef idx="3">
+            <a:schemeClr val="accent1"/>
+          </a:fillRef>
+          <a:effectRef idx="2">
+            <a:schemeClr val="accent1"/>
+          </a:effectRef>
+          <a:fontRef idx="minor">
+            <a:schemeClr val="lt1"/>
+          </a:fontRef>
+        </p:style>
+        <p:txBody>
+          <a:bodyPr rtlCol="0" anchor="ctr"/>
+          <a:lstStyle/>
+          <a:p>
+            <a:pPr algn="ctr"/>
+          </a:p>
+        </p:txBody>
+      </p:sp>
+      <p:sp>
+        <p:nvSpPr>
+          <p:cNvPr id="14" name="Rounded Rectangle 13"/>
+          <p:cNvSpPr/>
+          <p:nvPr/>
+        </p:nvSpPr>
+        <p:spPr>
+          <a:xfrm>
+            <a:off x="594360" y="3520440"/>
+            <a:ext cx="1869294" cy="109728"/>
+          </a:xfrm>
+          <a:prstGeom prst="roundRect">
+            <a:avLst/>
+          </a:prstGeom>
+          <a:solidFill>
+            <a:srgbClr val="006EAF"/>
+          </a:solidFill>
+          <a:ln>
+            <a:noFill/>
+          </a:ln>
+        </p:spPr>
+        <p:style>
+          <a:lnRef idx="1">
+            <a:schemeClr val="accent1"/>
+          </a:lnRef>
+          <a:fillRef idx="3">
+            <a:schemeClr val="accent1"/>
+          </a:fillRef>
+          <a:effectRef idx="2">
+            <a:schemeClr val="accent1"/>
+          </a:effectRef>
+          <a:fontRef idx="minor">
+            <a:schemeClr val="lt1"/>
+          </a:fontRef>
+        </p:style>
+        <p:txBody>
+          <a:bodyPr rtlCol="0" anchor="ctr"/>
+          <a:lstStyle/>
+          <a:p>
+            <a:pPr algn="ctr"/>
+          </a:p>
+        </p:txBody>
+      </p:sp>
+      <p:sp>
+        <p:nvSpPr>
+          <p:cNvPr id="15" name="TextBox 14"/>
+          <p:cNvSpPr txBox="1"/>
+          <p:nvPr/>
+        </p:nvSpPr>
+        <p:spPr>
+          <a:xfrm>
+            <a:off x="594360" y="3749039"/>
+            <a:ext cx="2423160" cy="182880"/>
+          </a:xfrm>
+          <a:prstGeom prst="rect">
+            <a:avLst/>
+          </a:prstGeom>
+          <a:noFill/>
+        </p:spPr>
+        <p:txBody>
+          <a:bodyPr wrap="square" anchor="t"/>
+          <a:lstStyle/>
+          <a:p>
+            <a:pPr algn="l">
+              <a:defRPr sz="800" b="0">
+                <a:solidFill>
+                  <a:srgbClr val="7A7A8C"/>
+                </a:solidFill>
+                <a:latin typeface="Calibri"/>
+              </a:defRPr>
+            </a:pPr>
+            <a:r>
+              <a:t>World: 10.1 yrs</a:t>
+            </a:r>
+          </a:p>
+        </p:txBody>
+      </p:sp>
+      <p:sp>
+        <p:nvSpPr>
+          <p:cNvPr id="16" name="TextBox 15"/>
+          <p:cNvSpPr txBox="1"/>
+          <p:nvPr/>
+        </p:nvSpPr>
+        <p:spPr>
+          <a:xfrm>
+            <a:off x="594360" y="3931920"/>
+            <a:ext cx="2423160" cy="182880"/>
+          </a:xfrm>
+          <a:prstGeom prst="rect">
+            <a:avLst/>
+          </a:prstGeom>
+          <a:noFill/>
+        </p:spPr>
+        <p:txBody>
+          <a:bodyPr wrap="square" anchor="t"/>
+          <a:lstStyle/>
+          <a:p>
+            <a:pPr algn="l">
+              <a:defRPr sz="800" b="1">
+                <a:solidFill>
+                  <a:srgbClr val="006EAF"/>
+                </a:solidFill>
+                <a:latin typeface="Calibri"/>
+              </a:defRPr>
+            </a:pPr>
+            <a:r>
+              <a:t>Best: Japan 12.0</a:t>
+            </a:r>
+          </a:p>
+        </p:txBody>
+      </p:sp>
+      <p:sp>
+        <p:nvSpPr>
+          <p:cNvPr id="17" name="Rounded Rectangle 16"/>
+          <p:cNvSpPr/>
+          <p:nvPr/>
+        </p:nvSpPr>
+        <p:spPr>
+          <a:xfrm>
+            <a:off x="3337560" y="1828800"/>
+            <a:ext cx="2697480" cy="2651760"/>
+          </a:xfrm>
+          <a:prstGeom prst="roundRect">
+            <a:avLst/>
+          </a:prstGeom>
+          <a:solidFill>
+            <a:srgbClr val="FFFFFF"/>
+          </a:solidFill>
+          <a:ln>
+            <a:noFill/>
+          </a:ln>
+        </p:spPr>
+        <p:style>
+          <a:lnRef idx="1">
+            <a:schemeClr val="accent1"/>
+          </a:lnRef>
+          <a:fillRef idx="3">
+            <a:schemeClr val="accent1"/>
+          </a:fillRef>
+          <a:effectRef idx="2">
+            <a:schemeClr val="accent1"/>
+          </a:effectRef>
+          <a:fontRef idx="minor">
+            <a:schemeClr val="lt1"/>
+          </a:fontRef>
+        </p:style>
+        <p:txBody>
+          <a:bodyPr rtlCol="0" anchor="ctr"/>
+          <a:lstStyle/>
+          <a:p>
+            <a:pPr algn="ctr"/>
+          </a:p>
+        </p:txBody>
+      </p:sp>
+      <p:sp>
+        <p:nvSpPr>
+          <p:cNvPr id="18" name="Rectangle 17"/>
+          <p:cNvSpPr/>
+          <p:nvPr/>
+        </p:nvSpPr>
+        <p:spPr>
+          <a:xfrm>
+            <a:off x="3337560" y="1828800"/>
+            <a:ext cx="2697480" cy="50800"/>
+          </a:xfrm>
+          <a:prstGeom prst="rect">
+            <a:avLst/>
+          </a:prstGeom>
+          <a:solidFill>
+            <a:srgbClr val="005A9E"/>
+          </a:solidFill>
+          <a:ln>
+            <a:noFill/>
+          </a:ln>
+        </p:spPr>
+        <p:style>
+          <a:lnRef idx="1">
+            <a:schemeClr val="accent1"/>
+          </a:lnRef>
+          <a:fillRef idx="3">
+            <a:schemeClr val="accent1"/>
+          </a:fillRef>
+          <a:effectRef idx="2">
+            <a:schemeClr val="accent1"/>
+          </a:effectRef>
+          <a:fontRef idx="minor">
+            <a:schemeClr val="lt1"/>
+          </a:fontRef>
+        </p:style>
+        <p:txBody>
+          <a:bodyPr rtlCol="0" anchor="ctr"/>
+          <a:lstStyle/>
+          <a:p>
+            <a:pPr algn="ctr"/>
+          </a:p>
+        </p:txBody>
+      </p:sp>
+      <p:sp>
+        <p:nvSpPr>
+          <p:cNvPr id="19" name="TextBox 18"/>
+          <p:cNvSpPr txBox="1"/>
+          <p:nvPr/>
+        </p:nvSpPr>
+        <p:spPr>
+          <a:xfrm>
+            <a:off x="3474720" y="2011680"/>
+            <a:ext cx="2423160" cy="457200"/>
+          </a:xfrm>
+          <a:prstGeom prst="rect">
+            <a:avLst/>
+          </a:prstGeom>
+          <a:noFill/>
+        </p:spPr>
+        <p:txBody>
+          <a:bodyPr wrap="square" anchor="t"/>
+          <a:lstStyle/>
+          <a:p>
+            <a:pPr algn="l">
+              <a:defRPr sz="1100" b="1">
+                <a:solidFill>
+                  <a:srgbClr val="1A1A2E"/>
+                </a:solidFill>
+                <a:latin typeface="Calibri"/>
+              </a:defRPr>
+            </a:pPr>
+            <a:r>
+              <a:t>Harmonized Learning</a:t>
+            </a:r>
+            <a:br/>
+            <a:r>
+              <a:t>Outcomes</a:t>
+            </a:r>
+          </a:p>
+        </p:txBody>
+      </p:sp>
+      <p:sp>
+        <p:nvSpPr>
+          <p:cNvPr id="20" name="TextBox 19"/>
+          <p:cNvSpPr txBox="1"/>
+          <p:nvPr/>
+        </p:nvSpPr>
+        <p:spPr>
+          <a:xfrm>
+            <a:off x="3474720" y="2560320"/>
+            <a:ext cx="2423160" cy="640080"/>
+          </a:xfrm>
+          <a:prstGeom prst="rect">
+            <a:avLst/>
+          </a:prstGeom>
+          <a:noFill/>
+        </p:spPr>
+        <p:txBody>
+          <a:bodyPr wrap="square" anchor="t"/>
+          <a:lstStyle/>
+          <a:p>
+            <a:pPr algn="l">
+              <a:defRPr sz="3600" b="1">
+                <a:solidFill>
+                  <a:srgbClr val="005A9E"/>
+                </a:solidFill>
+                <a:latin typeface="Calibri Light"/>
+              </a:defRPr>
+            </a:pPr>
+            <a:r>
+              <a:t>436</a:t>
+            </a:r>
+          </a:p>
+        </p:txBody>
+      </p:sp>
+      <p:sp>
+        <p:nvSpPr>
+          <p:cNvPr id="21" name="TextBox 20"/>
+          <p:cNvSpPr txBox="1"/>
+          <p:nvPr/>
+        </p:nvSpPr>
+        <p:spPr>
+          <a:xfrm>
+            <a:off x="3474720" y="3200400"/>
+            <a:ext cx="2423160" cy="228600"/>
+          </a:xfrm>
+          <a:prstGeom prst="rect">
+            <a:avLst/>
+          </a:prstGeom>
+          <a:noFill/>
+        </p:spPr>
+        <p:txBody>
+          <a:bodyPr wrap="square" anchor="t"/>
+          <a:lstStyle/>
+          <a:p>
+            <a:pPr algn="l">
+              <a:defRPr sz="900" b="0">
+                <a:solidFill>
+                  <a:srgbClr val="7A7A8C"/>
+                </a:solidFill>
+                <a:latin typeface="Calibri"/>
+              </a:defRPr>
+            </a:pPr>
+            <a:r>
+              <a:t>HLO score (out of 625)</a:t>
+            </a:r>
+          </a:p>
+        </p:txBody>
+      </p:sp>
+      <p:sp>
+        <p:nvSpPr>
+          <p:cNvPr id="22" name="Rounded Rectangle 21"/>
+          <p:cNvSpPr/>
+          <p:nvPr/>
+        </p:nvSpPr>
+        <p:spPr>
+          <a:xfrm>
+            <a:off x="3474720" y="3520440"/>
+            <a:ext cx="2423160" cy="109728"/>
+          </a:xfrm>
+          <a:prstGeom prst="roundRect">
+            <a:avLst/>
+          </a:prstGeom>
+          <a:solidFill>
+            <a:srgbClr val="E0E2E6"/>
+          </a:solidFill>
+          <a:ln>
+            <a:noFill/>
+          </a:ln>
+        </p:spPr>
+        <p:style>
+          <a:lnRef idx="1">
+            <a:schemeClr val="accent1"/>
+          </a:lnRef>
+          <a:fillRef idx="3">
+            <a:schemeClr val="accent1"/>
+          </a:fillRef>
+          <a:effectRef idx="2">
+            <a:schemeClr val="accent1"/>
+          </a:effectRef>
+          <a:fontRef idx="minor">
+            <a:schemeClr val="lt1"/>
+          </a:fontRef>
+        </p:style>
+        <p:txBody>
+          <a:bodyPr rtlCol="0" anchor="ctr"/>
+          <a:lstStyle/>
+          <a:p>
+            <a:pPr algn="ctr"/>
+          </a:p>
+        </p:txBody>
+      </p:sp>
+      <p:sp>
+        <p:nvSpPr>
+          <p:cNvPr id="23" name="Rounded Rectangle 22"/>
+          <p:cNvSpPr/>
+          <p:nvPr/>
+        </p:nvSpPr>
+        <p:spPr>
+          <a:xfrm>
+            <a:off x="3474720" y="3520440"/>
+            <a:ext cx="1690396" cy="109728"/>
+          </a:xfrm>
+          <a:prstGeom prst="roundRect">
+            <a:avLst/>
+          </a:prstGeom>
+          <a:solidFill>
+            <a:srgbClr val="005A9E"/>
+          </a:solidFill>
+          <a:ln>
+            <a:noFill/>
+          </a:ln>
+        </p:spPr>
+        <p:style>
+          <a:lnRef idx="1">
+            <a:schemeClr val="accent1"/>
+          </a:lnRef>
+          <a:fillRef idx="3">
+            <a:schemeClr val="accent1"/>
+          </a:fillRef>
+          <a:effectRef idx="2">
+            <a:schemeClr val="accent1"/>
+          </a:effectRef>
+          <a:fontRef idx="minor">
+            <a:schemeClr val="lt1"/>
+          </a:fontRef>
+        </p:style>
+        <p:txBody>
+          <a:bodyPr rtlCol="0" anchor="ctr"/>
+          <a:lstStyle/>
+          <a:p>
+            <a:pPr algn="ctr"/>
+          </a:p>
+        </p:txBody>
+      </p:sp>
+      <p:sp>
+        <p:nvSpPr>
+          <p:cNvPr id="24" name="TextBox 23"/>
+          <p:cNvSpPr txBox="1"/>
+          <p:nvPr/>
+        </p:nvSpPr>
+        <p:spPr>
+          <a:xfrm>
+            <a:off x="3474720" y="3749039"/>
+            <a:ext cx="2423160" cy="182880"/>
+          </a:xfrm>
+          <a:prstGeom prst="rect">
+            <a:avLst/>
+          </a:prstGeom>
+          <a:noFill/>
+        </p:spPr>
+        <p:txBody>
+          <a:bodyPr wrap="square" anchor="t"/>
+          <a:lstStyle/>
+          <a:p>
+            <a:pPr algn="l">
+              <a:defRPr sz="800" b="0">
+                <a:solidFill>
+                  <a:srgbClr val="7A7A8C"/>
+                </a:solidFill>
+                <a:latin typeface="Calibri"/>
+              </a:defRPr>
+            </a:pPr>
+            <a:r>
+              <a:t>World: 411</a:t>
+            </a:r>
+          </a:p>
+        </p:txBody>
+      </p:sp>
+      <p:sp>
+        <p:nvSpPr>
+          <p:cNvPr id="25" name="TextBox 24"/>
+          <p:cNvSpPr txBox="1"/>
+          <p:nvPr/>
+        </p:nvSpPr>
+        <p:spPr>
+          <a:xfrm>
+            <a:off x="3474720" y="3931920"/>
+            <a:ext cx="2423160" cy="182880"/>
+          </a:xfrm>
+          <a:prstGeom prst="rect">
+            <a:avLst/>
+          </a:prstGeom>
+          <a:noFill/>
+        </p:spPr>
+        <p:txBody>
+          <a:bodyPr wrap="square" anchor="t"/>
+          <a:lstStyle/>
+          <a:p>
+            <a:pPr algn="l">
+              <a:defRPr sz="800" b="1">
+                <a:solidFill>
+                  <a:srgbClr val="006EAF"/>
+                </a:solidFill>
+                <a:latin typeface="Calibri"/>
+              </a:defRPr>
+            </a:pPr>
+            <a:r>
+              <a:t>Best: Singapore 594</a:t>
+            </a:r>
+          </a:p>
+        </p:txBody>
+      </p:sp>
+      <p:sp>
+        <p:nvSpPr>
+          <p:cNvPr id="26" name="Rounded Rectangle 25"/>
+          <p:cNvSpPr/>
+          <p:nvPr/>
+        </p:nvSpPr>
+        <p:spPr>
+          <a:xfrm>
+            <a:off x="6217920" y="1828800"/>
+            <a:ext cx="2697480" cy="2651760"/>
+          </a:xfrm>
+          <a:prstGeom prst="roundRect">
+            <a:avLst/>
+          </a:prstGeom>
+          <a:solidFill>
+            <a:srgbClr val="FFFFFF"/>
+          </a:solidFill>
+          <a:ln>
+            <a:noFill/>
+          </a:ln>
+        </p:spPr>
+        <p:style>
+          <a:lnRef idx="1">
+            <a:schemeClr val="accent1"/>
+          </a:lnRef>
+          <a:fillRef idx="3">
+            <a:schemeClr val="accent1"/>
+          </a:fillRef>
+          <a:effectRef idx="2">
+            <a:schemeClr val="accent1"/>
+          </a:effectRef>
+          <a:fontRef idx="minor">
+            <a:schemeClr val="lt1"/>
+          </a:fontRef>
+        </p:style>
+        <p:txBody>
+          <a:bodyPr rtlCol="0" anchor="ctr"/>
+          <a:lstStyle/>
+          <a:p>
+            <a:pPr algn="ctr"/>
+          </a:p>
+        </p:txBody>
+      </p:sp>
+      <p:sp>
+        <p:nvSpPr>
+          <p:cNvPr id="27" name="Rectangle 26"/>
+          <p:cNvSpPr/>
+          <p:nvPr/>
+        </p:nvSpPr>
+        <p:spPr>
+          <a:xfrm>
+            <a:off x="6217920" y="1828800"/>
+            <a:ext cx="2697480" cy="50800"/>
+          </a:xfrm>
+          <a:prstGeom prst="rect">
+            <a:avLst/>
+          </a:prstGeom>
+          <a:solidFill>
+            <a:srgbClr val="00889E"/>
+          </a:solidFill>
+          <a:ln>
+            <a:noFill/>
+          </a:ln>
+        </p:spPr>
+        <p:style>
+          <a:lnRef idx="1">
+            <a:schemeClr val="accent1"/>
+          </a:lnRef>
+          <a:fillRef idx="3">
+            <a:schemeClr val="accent1"/>
+          </a:fillRef>
+          <a:effectRef idx="2">
+            <a:schemeClr val="accent1"/>
+          </a:effectRef>
+          <a:fontRef idx="minor">
+            <a:schemeClr val="lt1"/>
+          </a:fontRef>
+        </p:style>
+        <p:txBody>
+          <a:bodyPr rtlCol="0" anchor="ctr"/>
+          <a:lstStyle/>
+          <a:p>
+            <a:pPr algn="ctr"/>
+          </a:p>
+        </p:txBody>
+      </p:sp>
+      <p:sp>
+        <p:nvSpPr>
+          <p:cNvPr id="28" name="TextBox 27"/>
+          <p:cNvSpPr txBox="1"/>
+          <p:nvPr/>
+        </p:nvSpPr>
+        <p:spPr>
+          <a:xfrm>
+            <a:off x="6355080" y="2011680"/>
+            <a:ext cx="2423160" cy="457200"/>
+          </a:xfrm>
+          <a:prstGeom prst="rect">
+            <a:avLst/>
+          </a:prstGeom>
+          <a:noFill/>
+        </p:spPr>
+        <p:txBody>
+          <a:bodyPr wrap="square" anchor="t"/>
+          <a:lstStyle/>
+          <a:p>
+            <a:pPr algn="l">
+              <a:defRPr sz="1100" b="1">
+                <a:solidFill>
+                  <a:srgbClr val="1A1A2E"/>
+                </a:solidFill>
+                <a:latin typeface="Calibri"/>
+              </a:defRPr>
+            </a:pPr>
+            <a:r>
+              <a:t>Pre-Primary</a:t>
+            </a:r>
+            <a:br/>
+            <a:r>
+              <a:t>Education</a:t>
+            </a:r>
+          </a:p>
+        </p:txBody>
+      </p:sp>
+      <p:sp>
+        <p:nvSpPr>
+          <p:cNvPr id="29" name="TextBox 28"/>
+          <p:cNvSpPr txBox="1"/>
+          <p:nvPr/>
+        </p:nvSpPr>
+        <p:spPr>
+          <a:xfrm>
+            <a:off x="6355080" y="2560320"/>
+            <a:ext cx="2423160" cy="640080"/>
+          </a:xfrm>
+          <a:prstGeom prst="rect">
+            <a:avLst/>
+          </a:prstGeom>
+          <a:noFill/>
+        </p:spPr>
+        <p:txBody>
+          <a:bodyPr wrap="square" anchor="t"/>
+          <a:lstStyle/>
+          <a:p>
+            <a:pPr algn="l">
+              <a:defRPr sz="3600" b="1">
+                <a:solidFill>
+                  <a:srgbClr val="00889E"/>
+                </a:solidFill>
+                <a:latin typeface="Calibri Light"/>
+              </a:defRPr>
+            </a:pPr>
+            <a:r>
+              <a:t>0.59</a:t>
+            </a:r>
+          </a:p>
+        </p:txBody>
+      </p:sp>
+      <p:sp>
+        <p:nvSpPr>
+          <p:cNvPr id="30" name="TextBox 29"/>
+          <p:cNvSpPr txBox="1"/>
+          <p:nvPr/>
+        </p:nvSpPr>
+        <p:spPr>
+          <a:xfrm>
+            <a:off x="6355080" y="3200400"/>
+            <a:ext cx="2423160" cy="228600"/>
+          </a:xfrm>
+          <a:prstGeom prst="rect">
+            <a:avLst/>
+          </a:prstGeom>
+          <a:noFill/>
+        </p:spPr>
+        <p:txBody>
+          <a:bodyPr wrap="square" anchor="t"/>
+          <a:lstStyle/>
+          <a:p>
+            <a:pPr algn="l">
+              <a:defRPr sz="900" b="0">
+                <a:solidFill>
+                  <a:srgbClr val="7A7A8C"/>
+                </a:solidFill>
+                <a:latin typeface="Calibri"/>
+              </a:defRPr>
+            </a:pPr>
+            <a:r>
+              <a:t>learning-adj. years</a:t>
+            </a:r>
+          </a:p>
+        </p:txBody>
+      </p:sp>
+      <p:sp>
+        <p:nvSpPr>
+          <p:cNvPr id="31" name="Rounded Rectangle 30"/>
+          <p:cNvSpPr/>
+          <p:nvPr/>
+        </p:nvSpPr>
+        <p:spPr>
+          <a:xfrm>
+            <a:off x="6355080" y="3520440"/>
+            <a:ext cx="2423160" cy="109728"/>
+          </a:xfrm>
+          <a:prstGeom prst="roundRect">
+            <a:avLst/>
+          </a:prstGeom>
+          <a:solidFill>
+            <a:srgbClr val="E0E2E6"/>
+          </a:solidFill>
+          <a:ln>
+            <a:noFill/>
+          </a:ln>
+        </p:spPr>
+        <p:style>
+          <a:lnRef idx="1">
+            <a:schemeClr val="accent1"/>
+          </a:lnRef>
+          <a:fillRef idx="3">
+            <a:schemeClr val="accent1"/>
+          </a:fillRef>
+          <a:effectRef idx="2">
+            <a:schemeClr val="accent1"/>
+          </a:effectRef>
+          <a:fontRef idx="minor">
+            <a:schemeClr val="lt1"/>
+          </a:fontRef>
+        </p:style>
+        <p:txBody>
+          <a:bodyPr rtlCol="0" anchor="ctr"/>
+          <a:lstStyle/>
+          <a:p>
+            <a:pPr algn="ctr"/>
+          </a:p>
+        </p:txBody>
+      </p:sp>
+      <p:sp>
+        <p:nvSpPr>
+          <p:cNvPr id="32" name="Rounded Rectangle 31"/>
+          <p:cNvSpPr/>
+          <p:nvPr/>
+        </p:nvSpPr>
+        <p:spPr>
+          <a:xfrm>
+            <a:off x="6355080" y="3520440"/>
+            <a:ext cx="1429664" cy="109728"/>
+          </a:xfrm>
+          <a:prstGeom prst="roundRect">
+            <a:avLst/>
+          </a:prstGeom>
+          <a:solidFill>
+            <a:srgbClr val="00889E"/>
+          </a:solidFill>
+          <a:ln>
+            <a:noFill/>
+          </a:ln>
+        </p:spPr>
+        <p:style>
+          <a:lnRef idx="1">
+            <a:schemeClr val="accent1"/>
+          </a:lnRef>
+          <a:fillRef idx="3">
+            <a:schemeClr val="accent1"/>
+          </a:fillRef>
+          <a:effectRef idx="2">
+            <a:schemeClr val="accent1"/>
+          </a:effectRef>
+          <a:fontRef idx="minor">
+            <a:schemeClr val="lt1"/>
+          </a:fontRef>
+        </p:style>
+        <p:txBody>
+          <a:bodyPr rtlCol="0" anchor="ctr"/>
+          <a:lstStyle/>
+          <a:p>
+            <a:pPr algn="ctr"/>
+          </a:p>
+        </p:txBody>
+      </p:sp>
+      <p:sp>
+        <p:nvSpPr>
+          <p:cNvPr id="33" name="TextBox 32"/>
+          <p:cNvSpPr txBox="1"/>
+          <p:nvPr/>
+        </p:nvSpPr>
+        <p:spPr>
+          <a:xfrm>
+            <a:off x="6355080" y="3749039"/>
+            <a:ext cx="2423160" cy="182880"/>
+          </a:xfrm>
+          <a:prstGeom prst="rect">
+            <a:avLst/>
+          </a:prstGeom>
+          <a:noFill/>
+        </p:spPr>
+        <p:txBody>
+          <a:bodyPr wrap="square" anchor="t"/>
+          <a:lstStyle/>
+          <a:p>
+            <a:pPr algn="l">
+              <a:defRPr sz="800" b="0">
+                <a:solidFill>
+                  <a:srgbClr val="7A7A8C"/>
+                </a:solidFill>
+                <a:latin typeface="Calibri"/>
+              </a:defRPr>
+            </a:pPr>
+            <a:r>
+              <a:t>World: 0.46 yrs</a:t>
+            </a:r>
+          </a:p>
+        </p:txBody>
+      </p:sp>
+      <p:sp>
+        <p:nvSpPr>
+          <p:cNvPr id="34" name="TextBox 33"/>
+          <p:cNvSpPr txBox="1"/>
+          <p:nvPr/>
+        </p:nvSpPr>
+        <p:spPr>
+          <a:xfrm>
+            <a:off x="6355080" y="3931920"/>
+            <a:ext cx="2423160" cy="182880"/>
+          </a:xfrm>
+          <a:prstGeom prst="rect">
+            <a:avLst/>
+          </a:prstGeom>
+          <a:noFill/>
+        </p:spPr>
+        <p:txBody>
+          <a:bodyPr wrap="square" anchor="t"/>
+          <a:lstStyle/>
+          <a:p>
+            <a:pPr algn="l">
+              <a:defRPr sz="800" b="1">
+                <a:solidFill>
+                  <a:srgbClr val="006EAF"/>
+                </a:solidFill>
+                <a:latin typeface="Calibri"/>
+              </a:defRPr>
+            </a:pPr>
+            <a:r>
+              <a:t>Best: Singapore 0.91</a:t>
+            </a:r>
+          </a:p>
+        </p:txBody>
+      </p:sp>
+      <p:sp>
+        <p:nvSpPr>
+          <p:cNvPr id="35" name="Rounded Rectangle 34"/>
+          <p:cNvSpPr/>
+          <p:nvPr/>
+        </p:nvSpPr>
+        <p:spPr>
+          <a:xfrm>
+            <a:off x="9098280" y="1828800"/>
+            <a:ext cx="2697480" cy="2651760"/>
+          </a:xfrm>
+          <a:prstGeom prst="roundRect">
+            <a:avLst/>
+          </a:prstGeom>
+          <a:solidFill>
+            <a:srgbClr val="FFFFFF"/>
+          </a:solidFill>
+          <a:ln>
+            <a:noFill/>
+          </a:ln>
+        </p:spPr>
+        <p:style>
+          <a:lnRef idx="1">
+            <a:schemeClr val="accent1"/>
+          </a:lnRef>
+          <a:fillRef idx="3">
+            <a:schemeClr val="accent1"/>
+          </a:fillRef>
+          <a:effectRef idx="2">
+            <a:schemeClr val="accent1"/>
+          </a:effectRef>
+          <a:fontRef idx="minor">
+            <a:schemeClr val="lt1"/>
+          </a:fontRef>
+        </p:style>
+        <p:txBody>
+          <a:bodyPr rtlCol="0" anchor="ctr"/>
+          <a:lstStyle/>
+          <a:p>
+            <a:pPr algn="ctr"/>
+          </a:p>
+        </p:txBody>
+      </p:sp>
+      <p:sp>
+        <p:nvSpPr>
+          <p:cNvPr id="36" name="Rectangle 35"/>
+          <p:cNvSpPr/>
+          <p:nvPr/>
+        </p:nvSpPr>
+        <p:spPr>
+          <a:xfrm>
+            <a:off x="9098280" y="1828800"/>
+            <a:ext cx="2697480" cy="50800"/>
+          </a:xfrm>
+          <a:prstGeom prst="rect">
+            <a:avLst/>
+          </a:prstGeom>
+          <a:solidFill>
+            <a:srgbClr val="E87D1E"/>
+          </a:solidFill>
+          <a:ln>
+            <a:noFill/>
+          </a:ln>
+        </p:spPr>
+        <p:style>
+          <a:lnRef idx="1">
+            <a:schemeClr val="accent1"/>
+          </a:lnRef>
+          <a:fillRef idx="3">
+            <a:schemeClr val="accent1"/>
+          </a:fillRef>
+          <a:effectRef idx="2">
+            <a:schemeClr val="accent1"/>
+          </a:effectRef>
+          <a:fontRef idx="minor">
+            <a:schemeClr val="lt1"/>
+          </a:fontRef>
+        </p:style>
+        <p:txBody>
+          <a:bodyPr rtlCol="0" anchor="ctr"/>
+          <a:lstStyle/>
+          <a:p>
+            <a:pPr algn="ctr"/>
+          </a:p>
+        </p:txBody>
+      </p:sp>
+      <p:sp>
+        <p:nvSpPr>
+          <p:cNvPr id="37" name="TextBox 36"/>
+          <p:cNvSpPr txBox="1"/>
+          <p:nvPr/>
+        </p:nvSpPr>
+        <p:spPr>
+          <a:xfrm>
+            <a:off x="9235440" y="2011680"/>
+            <a:ext cx="2423160" cy="457200"/>
+          </a:xfrm>
+          <a:prstGeom prst="rect">
+            <a:avLst/>
+          </a:prstGeom>
+          <a:noFill/>
+        </p:spPr>
+        <p:txBody>
+          <a:bodyPr wrap="square" anchor="t"/>
+          <a:lstStyle/>
+          <a:p>
+            <a:pPr algn="l">
+              <a:defRPr sz="1100" b="1">
+                <a:solidFill>
+                  <a:srgbClr val="1A1A2E"/>
+                </a:solidFill>
+                <a:latin typeface="Calibri"/>
+              </a:defRPr>
+            </a:pPr>
+            <a:r>
+              <a:t>Tertiary</a:t>
+            </a:r>
+            <a:br/>
+            <a:r>
+              <a:t>Enrollment</a:t>
+            </a:r>
+          </a:p>
+        </p:txBody>
+      </p:sp>
+      <p:sp>
+        <p:nvSpPr>
+          <p:cNvPr id="38" name="TextBox 37"/>
+          <p:cNvSpPr txBox="1"/>
+          <p:nvPr/>
+        </p:nvSpPr>
+        <p:spPr>
+          <a:xfrm>
+            <a:off x="9235440" y="2560320"/>
+            <a:ext cx="2423160" cy="640080"/>
+          </a:xfrm>
+          <a:prstGeom prst="rect">
+            <a:avLst/>
+          </a:prstGeom>
+          <a:noFill/>
+        </p:spPr>
+        <p:txBody>
+          <a:bodyPr wrap="square" anchor="t"/>
+          <a:lstStyle/>
+          <a:p>
+            <a:pPr algn="l">
+              <a:defRPr sz="3600" b="1">
+                <a:solidFill>
+                  <a:srgbClr val="E87D1E"/>
+                </a:solidFill>
+                <a:latin typeface="Calibri Light"/>
+              </a:defRPr>
+            </a:pPr>
+            <a:r>
+              <a:t>37.4%</a:t>
+            </a:r>
+          </a:p>
+        </p:txBody>
+      </p:sp>
+      <p:sp>
+        <p:nvSpPr>
+          <p:cNvPr id="39" name="TextBox 38"/>
+          <p:cNvSpPr txBox="1"/>
+          <p:nvPr/>
+        </p:nvSpPr>
+        <p:spPr>
+          <a:xfrm>
+            <a:off x="9235440" y="3200400"/>
+            <a:ext cx="2423160" cy="228600"/>
+          </a:xfrm>
+          <a:prstGeom prst="rect">
+            <a:avLst/>
+          </a:prstGeom>
+          <a:noFill/>
+        </p:spPr>
+        <p:txBody>
+          <a:bodyPr wrap="square" anchor="t"/>
+          <a:lstStyle/>
+          <a:p>
+            <a:pPr algn="l">
+              <a:defRPr sz="900" b="0">
+                <a:solidFill>
+                  <a:srgbClr val="7A7A8C"/>
+                </a:solidFill>
+                <a:latin typeface="Calibri"/>
+              </a:defRPr>
+            </a:pPr>
+            <a:r>
+              <a:t>gross enrollment rate</a:t>
+            </a:r>
+          </a:p>
+        </p:txBody>
+      </p:sp>
+      <p:sp>
+        <p:nvSpPr>
+          <p:cNvPr id="40" name="Rounded Rectangle 39"/>
+          <p:cNvSpPr/>
+          <p:nvPr/>
+        </p:nvSpPr>
+        <p:spPr>
+          <a:xfrm>
+            <a:off x="9235440" y="3520440"/>
+            <a:ext cx="2423160" cy="109728"/>
+          </a:xfrm>
+          <a:prstGeom prst="roundRect">
+            <a:avLst/>
+          </a:prstGeom>
+          <a:solidFill>
+            <a:srgbClr val="E0E2E6"/>
+          </a:solidFill>
+          <a:ln>
+            <a:noFill/>
+          </a:ln>
+        </p:spPr>
+        <p:style>
+          <a:lnRef idx="1">
+            <a:schemeClr val="accent1"/>
+          </a:lnRef>
+          <a:fillRef idx="3">
+            <a:schemeClr val="accent1"/>
+          </a:fillRef>
+          <a:effectRef idx="2">
+            <a:schemeClr val="accent1"/>
+          </a:effectRef>
+          <a:fontRef idx="minor">
+            <a:schemeClr val="lt1"/>
+          </a:fontRef>
+        </p:style>
+        <p:txBody>
+          <a:bodyPr rtlCol="0" anchor="ctr"/>
+          <a:lstStyle/>
+          <a:p>
+            <a:pPr algn="ctr"/>
+          </a:p>
+        </p:txBody>
+      </p:sp>
+      <p:sp>
+        <p:nvSpPr>
+          <p:cNvPr id="41" name="Rounded Rectangle 40"/>
+          <p:cNvSpPr/>
+          <p:nvPr/>
+        </p:nvSpPr>
+        <p:spPr>
+          <a:xfrm>
+            <a:off x="9235440" y="3520440"/>
+            <a:ext cx="906261" cy="109728"/>
+          </a:xfrm>
+          <a:prstGeom prst="roundRect">
+            <a:avLst/>
+          </a:prstGeom>
+          <a:solidFill>
+            <a:srgbClr val="E87D1E"/>
+          </a:solidFill>
+          <a:ln>
+            <a:noFill/>
+          </a:ln>
+        </p:spPr>
+        <p:style>
+          <a:lnRef idx="1">
+            <a:schemeClr val="accent1"/>
+          </a:lnRef>
+          <a:fillRef idx="3">
+            <a:schemeClr val="accent1"/>
+          </a:fillRef>
+          <a:effectRef idx="2">
+            <a:schemeClr val="accent1"/>
+          </a:effectRef>
+          <a:fontRef idx="minor">
+            <a:schemeClr val="lt1"/>
+          </a:fontRef>
+        </p:style>
+        <p:txBody>
+          <a:bodyPr rtlCol="0" anchor="ctr"/>
+          <a:lstStyle/>
+          <a:p>
+            <a:pPr algn="ctr"/>
+          </a:p>
+        </p:txBody>
+      </p:sp>
+      <p:sp>
+        <p:nvSpPr>
+          <p:cNvPr id="42" name="TextBox 41"/>
+          <p:cNvSpPr txBox="1"/>
+          <p:nvPr/>
+        </p:nvSpPr>
+        <p:spPr>
+          <a:xfrm>
+            <a:off x="9235440" y="3749039"/>
+            <a:ext cx="2423160" cy="182880"/>
+          </a:xfrm>
+          <a:prstGeom prst="rect">
+            <a:avLst/>
+          </a:prstGeom>
+          <a:noFill/>
+        </p:spPr>
+        <p:txBody>
+          <a:bodyPr wrap="square" anchor="t"/>
+          <a:lstStyle/>
+          <a:p>
+            <a:pPr algn="l">
+              <a:defRPr sz="800" b="0">
+                <a:solidFill>
+                  <a:srgbClr val="7A7A8C"/>
+                </a:solidFill>
+                <a:latin typeface="Calibri"/>
+              </a:defRPr>
+            </a:pPr>
+            <a:r>
+              <a:t>World: 32.6%</a:t>
+            </a:r>
+          </a:p>
+        </p:txBody>
+      </p:sp>
+      <p:sp>
+        <p:nvSpPr>
+          <p:cNvPr id="43" name="TextBox 42"/>
+          <p:cNvSpPr txBox="1"/>
+          <p:nvPr/>
+        </p:nvSpPr>
+        <p:spPr>
+          <a:xfrm>
+            <a:off x="9235440" y="3931920"/>
+            <a:ext cx="2423160" cy="182880"/>
+          </a:xfrm>
+          <a:prstGeom prst="rect">
+            <a:avLst/>
+          </a:prstGeom>
+          <a:noFill/>
+        </p:spPr>
+        <p:txBody>
+          <a:bodyPr wrap="square" anchor="t"/>
+          <a:lstStyle/>
+          <a:p>
+            <a:pPr algn="l">
+              <a:defRPr sz="800" b="1">
+                <a:solidFill>
+                  <a:srgbClr val="006EAF"/>
+                </a:solidFill>
+                <a:latin typeface="Calibri"/>
+              </a:defRPr>
+            </a:pPr>
+            <a:r>
+              <a:t>Best: Korea 76.9%</a:t>
+            </a:r>
+          </a:p>
+        </p:txBody>
+      </p:sp>
+      <p:sp>
+        <p:nvSpPr>
+          <p:cNvPr id="44" name="Rounded Rectangle 43"/>
+          <p:cNvSpPr/>
+          <p:nvPr/>
+        </p:nvSpPr>
+        <p:spPr>
+          <a:xfrm>
+            <a:off x="457200" y="4709160"/>
+            <a:ext cx="6858000" cy="1463040"/>
+          </a:xfrm>
+          <a:prstGeom prst="roundRect">
+            <a:avLst/>
+          </a:prstGeom>
+          <a:solidFill>
+            <a:srgbClr val="FFFFFF"/>
+          </a:solidFill>
+          <a:ln>
+            <a:noFill/>
+          </a:ln>
+        </p:spPr>
+        <p:style>
+          <a:lnRef idx="1">
+            <a:schemeClr val="accent1"/>
+          </a:lnRef>
+          <a:fillRef idx="3">
+            <a:schemeClr val="accent1"/>
+          </a:fillRef>
+          <a:effectRef idx="2">
+            <a:schemeClr val="accent1"/>
+          </a:effectRef>
+          <a:fontRef idx="minor">
+            <a:schemeClr val="lt1"/>
+          </a:fontRef>
+        </p:style>
+        <p:txBody>
+          <a:bodyPr rtlCol="0" anchor="ctr"/>
+          <a:lstStyle/>
+          <a:p>
+            <a:pPr algn="ctr"/>
+          </a:p>
+        </p:txBody>
+      </p:sp>
+      <p:sp>
+        <p:nvSpPr>
+          <p:cNvPr id="45" name="TextBox 44"/>
+          <p:cNvSpPr txBox="1"/>
+          <p:nvPr/>
+        </p:nvSpPr>
+        <p:spPr>
+          <a:xfrm>
+            <a:off x="731520" y="4800600"/>
+            <a:ext cx="4572000" cy="274320"/>
+          </a:xfrm>
+          <a:prstGeom prst="rect">
+            <a:avLst/>
+          </a:prstGeom>
+          <a:noFill/>
+        </p:spPr>
+        <p:txBody>
+          <a:bodyPr wrap="square" anchor="t"/>
+          <a:lstStyle/>
+          <a:p>
+            <a:pPr algn="l">
+              <a:defRPr sz="1100" b="1">
+                <a:solidFill>
+                  <a:srgbClr val="7A7A8C"/>
+                </a:solidFill>
+                <a:latin typeface="Calibri"/>
+              </a:defRPr>
+            </a:pPr>
+            <a:r>
+              <a:t>EDUCATION COMPONENT: REGIONAL COMPARISON</a:t>
+            </a:r>
+          </a:p>
+        </p:txBody>
+      </p:sp>
+      <p:sp>
+        <p:nvSpPr>
+          <p:cNvPr id="46" name="Rectangle 45"/>
+          <p:cNvSpPr/>
+          <p:nvPr/>
+        </p:nvSpPr>
+        <p:spPr>
+          <a:xfrm>
+            <a:off x="731520" y="5074920"/>
+            <a:ext cx="1828800" cy="25400"/>
+          </a:xfrm>
+          <a:prstGeom prst="rect">
+            <a:avLst/>
+          </a:prstGeom>
+          <a:solidFill>
+            <a:srgbClr val="006EAF"/>
+          </a:solidFill>
+          <a:ln>
+            <a:noFill/>
+          </a:ln>
+        </p:spPr>
+        <p:style>
+          <a:lnRef idx="1">
+            <a:schemeClr val="accent1"/>
+          </a:lnRef>
+          <a:fillRef idx="3">
+            <a:schemeClr val="accent1"/>
+          </a:fillRef>
+          <a:effectRef idx="2">
+            <a:schemeClr val="accent1"/>
+          </a:effectRef>
+          <a:fontRef idx="minor">
+            <a:schemeClr val="lt1"/>
+          </a:fontRef>
+        </p:style>
+        <p:txBody>
+          <a:bodyPr rtlCol="0" anchor="ctr"/>
+          <a:lstStyle/>
+          <a:p>
+            <a:pPr algn="ctr"/>
+          </a:p>
+        </p:txBody>
+      </p:sp>
+      <p:graphicFrame>
+        <p:nvGraphicFramePr>
+          <p:cNvPr id="47" name="Chart 46"/>
+          <p:cNvGraphicFramePr>
+            <a:graphicFrameLocks noGrp="1"/>
+          </p:cNvGraphicFramePr>
+          <p:nvPr/>
+        </p:nvGraphicFramePr>
+        <p:xfrm>
+          <a:off x="731520" y="5120640"/>
+          <a:ext cx="6400800" cy="960120"/>
+        </p:xfrm>
+        <a:graphic>
+          <a:graphicData uri="http://schemas.openxmlformats.org/drawingml/2006/chart">
+            <c:chart xmlns:c="http://schemas.openxmlformats.org/drawingml/2006/chart" r:id="rId2"/>
+          </a:graphicData>
+        </a:graphic>
+      </p:graphicFrame>
+      <p:sp>
+        <p:nvSpPr>
+          <p:cNvPr id="48" name="Rounded Rectangle 47"/>
+          <p:cNvSpPr/>
+          <p:nvPr/>
+        </p:nvSpPr>
+        <p:spPr>
+          <a:xfrm>
+            <a:off x="7589520" y="4709160"/>
+            <a:ext cx="4114800" cy="1463040"/>
+          </a:xfrm>
+          <a:prstGeom prst="roundRect">
+            <a:avLst/>
+          </a:prstGeom>
+          <a:solidFill>
+            <a:srgbClr val="FFFFFF"/>
+          </a:solidFill>
+          <a:ln>
+            <a:noFill/>
+          </a:ln>
+        </p:spPr>
+        <p:style>
+          <a:lnRef idx="1">
+            <a:schemeClr val="accent1"/>
+          </a:lnRef>
+          <a:fillRef idx="3">
+            <a:schemeClr val="accent1"/>
+          </a:fillRef>
+          <a:effectRef idx="2">
+            <a:schemeClr val="accent1"/>
+          </a:effectRef>
+          <a:fontRef idx="minor">
+            <a:schemeClr val="lt1"/>
+          </a:fontRef>
+        </p:style>
+        <p:txBody>
+          <a:bodyPr rtlCol="0" anchor="ctr"/>
+          <a:lstStyle/>
+          <a:p>
+            <a:pPr algn="ctr"/>
+          </a:p>
+        </p:txBody>
+      </p:sp>
+      <p:sp>
+        <p:nvSpPr>
+          <p:cNvPr id="49" name="Rectangle 48"/>
+          <p:cNvSpPr/>
+          <p:nvPr/>
+        </p:nvSpPr>
+        <p:spPr>
+          <a:xfrm>
+            <a:off x="7589520" y="4709160"/>
+            <a:ext cx="63500" cy="1463040"/>
+          </a:xfrm>
+          <a:prstGeom prst="rect">
+            <a:avLst/>
+          </a:prstGeom>
+          <a:solidFill>
+            <a:srgbClr val="006EAF"/>
+          </a:solidFill>
+          <a:ln>
+            <a:noFill/>
+          </a:ln>
+        </p:spPr>
+        <p:style>
+          <a:lnRef idx="1">
+            <a:schemeClr val="accent1"/>
+          </a:lnRef>
+          <a:fillRef idx="3">
+            <a:schemeClr val="accent1"/>
+          </a:fillRef>
+          <a:effectRef idx="2">
+            <a:schemeClr val="accent1"/>
+          </a:effectRef>
+          <a:fontRef idx="minor">
+            <a:schemeClr val="lt1"/>
+          </a:fontRef>
+        </p:style>
+        <p:txBody>
+          <a:bodyPr rtlCol="0" anchor="ctr"/>
+          <a:lstStyle/>
+          <a:p>
+            <a:pPr algn="ctr"/>
+          </a:p>
+        </p:txBody>
+      </p:sp>
+      <p:sp>
+        <p:nvSpPr>
+          <p:cNvPr id="50" name="TextBox 49"/>
+          <p:cNvSpPr txBox="1"/>
+          <p:nvPr/>
+        </p:nvSpPr>
+        <p:spPr>
+          <a:xfrm>
+            <a:off x="7863840" y="4800600"/>
+            <a:ext cx="3657600" cy="228600"/>
+          </a:xfrm>
+          <a:prstGeom prst="rect">
+            <a:avLst/>
+          </a:prstGeom>
+          <a:noFill/>
+        </p:spPr>
+        <p:txBody>
+          <a:bodyPr wrap="square" anchor="t"/>
+          <a:lstStyle/>
+          <a:p>
+            <a:pPr algn="l">
+              <a:defRPr sz="1000" b="1">
+                <a:solidFill>
+                  <a:srgbClr val="006EAF"/>
+                </a:solidFill>
+                <a:latin typeface="Calibri"/>
+              </a:defRPr>
+            </a:pPr>
+            <a:r>
+              <a:t>KEY INSIGHT</a:t>
+            </a:r>
+          </a:p>
+        </p:txBody>
+      </p:sp>
+      <p:sp>
+        <p:nvSpPr>
+          <p:cNvPr id="51" name="TextBox 50"/>
+          <p:cNvSpPr txBox="1"/>
+          <p:nvPr/>
+        </p:nvSpPr>
+        <p:spPr>
+          <a:xfrm>
+            <a:off x="7863840" y="5029200"/>
+            <a:ext cx="3657600" cy="1005840"/>
+          </a:xfrm>
+          <a:prstGeom prst="rect">
+            <a:avLst/>
+          </a:prstGeom>
+          <a:noFill/>
+        </p:spPr>
+        <p:txBody>
+          <a:bodyPr wrap="square" anchor="t"/>
+          <a:lstStyle/>
+          <a:p>
+            <a:pPr algn="l">
+              <a:defRPr sz="1000" b="0">
+                <a:solidFill>
+                  <a:srgbClr val="1A1A2E"/>
+                </a:solidFill>
+                <a:latin typeface="Calibri"/>
+              </a:defRPr>
+            </a:pPr>
+            <a:r>
+              <a:t>Education is EAP's strongest component, scoring 118.1 — well above the world average (107.4) and second only to Europe &amp; Central Asia (140.8). Singapore leads globally with an HLO of 594. EAP averages 10.8 expected years of schooling. Tertiary enrollment (37.4%) and pre-primary (0.59 years) remain areas for growth across the region.</a:t>
+            </a:r>
+          </a:p>
+        </p:txBody>
+      </p:sp>
+      <p:sp>
+        <p:nvSpPr>
+          <p:cNvPr id="52" name="Rectangle 51"/>
+          <p:cNvSpPr/>
+          <p:nvPr/>
+        </p:nvSpPr>
+        <p:spPr>
+          <a:xfrm>
+            <a:off x="0" y="6400800"/>
+            <a:ext cx="12191695" cy="457200"/>
+          </a:xfrm>
+          <a:prstGeom prst="rect">
+            <a:avLst/>
+          </a:prstGeom>
+          <a:solidFill>
+            <a:srgbClr val="002B49"/>
+          </a:solidFill>
+          <a:ln>
+            <a:noFill/>
+          </a:ln>
+        </p:spPr>
+        <p:style>
+          <a:lnRef idx="1">
+            <a:schemeClr val="accent1"/>
+          </a:lnRef>
+          <a:fillRef idx="3">
+            <a:schemeClr val="accent1"/>
+          </a:fillRef>
+          <a:effectRef idx="2">
+            <a:schemeClr val="accent1"/>
+          </a:effectRef>
+          <a:fontRef idx="minor">
+            <a:schemeClr val="lt1"/>
+          </a:fontRef>
+        </p:style>
+        <p:txBody>
+          <a:bodyPr rtlCol="0" anchor="ctr"/>
+          <a:lstStyle/>
+          <a:p>
+            <a:pPr algn="ctr"/>
+          </a:p>
+        </p:txBody>
+      </p:sp>
+      <p:sp>
+        <p:nvSpPr>
+          <p:cNvPr id="53" name="TextBox 52"/>
+          <p:cNvSpPr txBox="1"/>
+          <p:nvPr/>
+        </p:nvSpPr>
+        <p:spPr>
+          <a:xfrm>
+            <a:off x="548640" y="6464808"/>
+            <a:ext cx="5486400" cy="320040"/>
+          </a:xfrm>
+          <a:prstGeom prst="rect">
+            <a:avLst/>
+          </a:prstGeom>
+          <a:noFill/>
+        </p:spPr>
+        <p:txBody>
+          <a:bodyPr wrap="square" anchor="t"/>
+          <a:lstStyle/>
+          <a:p>
+            <a:pPr algn="l">
+              <a:defRPr sz="800" b="0">
+                <a:solidFill>
+                  <a:srgbClr val="AABBCC"/>
+                </a:solidFill>
+                <a:latin typeface="Calibri"/>
+              </a:defRPr>
+            </a:pPr>
+            <a:r>
+              <a:t>Source: World Bank Human Capital Index Plus (HCI+) 2025  |  github.com/worldbank/HCI-Plus</a:t>
+            </a:r>
+          </a:p>
+        </p:txBody>
+      </p:sp>
+      <p:sp>
+        <p:nvSpPr>
+          <p:cNvPr id="54" name="TextBox 53"/>
+          <p:cNvSpPr txBox="1"/>
+          <p:nvPr/>
+        </p:nvSpPr>
+        <p:spPr>
+          <a:xfrm>
+            <a:off x="9144000" y="6464808"/>
+            <a:ext cx="2286000" cy="320040"/>
+          </a:xfrm>
+          <a:prstGeom prst="rect">
+            <a:avLst/>
+          </a:prstGeom>
+          <a:noFill/>
+        </p:spPr>
+        <p:txBody>
+          <a:bodyPr wrap="square" anchor="t"/>
+          <a:lstStyle/>
+          <a:p>
+            <a:pPr algn="r">
+              <a:defRPr sz="800" b="0">
+                <a:solidFill>
+                  <a:srgbClr val="00889E"/>
+                </a:solidFill>
+                <a:latin typeface="Calibri"/>
+              </a:defRPr>
+            </a:pPr>
+            <a:r>
+              <a:t>humancapital.worldbank.org/hciplus</a:t>
+            </a:r>
+          </a:p>
+        </p:txBody>
+      </p:sp>
+      <p:sp>
+        <p:nvSpPr>
+          <p:cNvPr id="55" name="TextBox 54"/>
+          <p:cNvSpPr txBox="1"/>
+          <p:nvPr/>
+        </p:nvSpPr>
+        <p:spPr>
+          <a:xfrm>
+            <a:off x="11521440" y="6464808"/>
+            <a:ext cx="457200" cy="320040"/>
+          </a:xfrm>
+          <a:prstGeom prst="rect">
+            <a:avLst/>
+          </a:prstGeom>
+          <a:noFill/>
+        </p:spPr>
+        <p:txBody>
+          <a:bodyPr wrap="square" anchor="t"/>
+          <a:lstStyle/>
+          <a:p>
+            <a:pPr algn="r">
+              <a:defRPr sz="800" b="0">
+                <a:solidFill>
+                  <a:srgbClr val="FFFFFF"/>
+                </a:solidFill>
+                <a:latin typeface="Calibri"/>
+              </a:defRPr>
+            </a:pPr>
+            <a:r>
+              <a:t>5</a:t>
+            </a:r>
+          </a:p>
+        </p:txBody>
+      </p:sp>
+    </p:spTree>
+  </p:cSld>
+  <p:clrMapOvr>
+    <a:masterClrMapping/>
+  </p:clrMapOvr>
+</p:sld>
+</file>
+
+<file path=ppt/slides/slide7.xml><?xml version="1.0" encoding="utf-8"?>
+<p:sld xmlns:a="http://schemas.openxmlformats.org/drawingml/2006/main" xmlns:p="http://schemas.openxmlformats.org/presentationml/2006/main" xmlns:r="http://schemas.openxmlformats.org/officeDocument/2006/relationships">
+  <p:cSld>
+    <p:spTree>
+      <p:nvGrpSpPr>
+        <p:cNvPr id="1" name=""/>
+        <p:cNvGrpSpPr/>
+        <p:nvPr/>
+      </p:nvGrpSpPr>
+      <p:grpSpPr/>
+      <p:sp>
+        <p:nvSpPr>
+          <p:cNvPr id="2" name="Rectangle 1"/>
+          <p:cNvSpPr/>
+          <p:nvPr/>
+        </p:nvSpPr>
+        <p:spPr>
+          <a:xfrm>
+            <a:off x="0" y="0"/>
+            <a:ext cx="12191695" cy="6858000"/>
+          </a:xfrm>
+          <a:prstGeom prst="rect">
+            <a:avLst/>
+          </a:prstGeom>
+          <a:solidFill>
+            <a:srgbClr val="F7F8FA"/>
+          </a:solidFill>
+          <a:ln>
+            <a:noFill/>
+          </a:ln>
+        </p:spPr>
+        <p:style>
+          <a:lnRef idx="1">
+            <a:schemeClr val="accent1"/>
+          </a:lnRef>
+          <a:fillRef idx="3">
+            <a:schemeClr val="accent1"/>
+          </a:fillRef>
+          <a:effectRef idx="2">
+            <a:schemeClr val="accent1"/>
+          </a:effectRef>
+          <a:fontRef idx="minor">
+            <a:schemeClr val="lt1"/>
+          </a:fontRef>
+        </p:style>
+        <p:txBody>
+          <a:bodyPr rtlCol="0" anchor="ctr"/>
+          <a:lstStyle/>
+          <a:p>
+            <a:pPr algn="ctr"/>
+          </a:p>
+        </p:txBody>
+      </p:sp>
+      <p:sp>
+        <p:nvSpPr>
+          <p:cNvPr id="3" name="Rectangle 2"/>
+          <p:cNvSpPr/>
+          <p:nvPr/>
+        </p:nvSpPr>
+        <p:spPr>
+          <a:xfrm>
+            <a:off x="0" y="0"/>
+            <a:ext cx="12191695" cy="914400"/>
+          </a:xfrm>
+          <a:prstGeom prst="rect">
+            <a:avLst/>
+          </a:prstGeom>
+          <a:solidFill>
+            <a:srgbClr val="002B49"/>
+          </a:solidFill>
+          <a:ln>
+            <a:noFill/>
+          </a:ln>
+        </p:spPr>
+        <p:style>
+          <a:lnRef idx="1">
+            <a:schemeClr val="accent1"/>
+          </a:lnRef>
+          <a:fillRef idx="3">
+            <a:schemeClr val="accent1"/>
+          </a:fillRef>
+          <a:effectRef idx="2">
+            <a:schemeClr val="accent1"/>
+          </a:effectRef>
+          <a:fontRef idx="minor">
+            <a:schemeClr val="lt1"/>
+          </a:fontRef>
+        </p:style>
+        <p:txBody>
+          <a:bodyPr rtlCol="0" anchor="ctr"/>
+          <a:lstStyle/>
+          <a:p>
+            <a:pPr algn="ctr"/>
+          </a:p>
+        </p:txBody>
+      </p:sp>
+      <p:sp>
+        <p:nvSpPr>
+          <p:cNvPr id="4" name="Rectangle 3"/>
+          <p:cNvSpPr/>
+          <p:nvPr/>
+        </p:nvSpPr>
+        <p:spPr>
+          <a:xfrm>
+            <a:off x="0" y="914400"/>
+            <a:ext cx="12191695" cy="50800"/>
+          </a:xfrm>
+          <a:prstGeom prst="rect">
+            <a:avLst/>
+          </a:prstGeom>
+          <a:solidFill>
             <a:srgbClr val="E87D1E"/>
           </a:solidFill>
           <a:ln>
@@ -14721,7 +16080,7 @@
               </a:defRPr>
             </a:pPr>
             <a:r>
-              <a:t>5</a:t>
+              <a:t>6</a:t>
             </a:r>
           </a:p>
         </p:txBody>

--- a/EAP_HCI_Plus_2025.pptx
+++ b/EAP_HCI_Plus_2025.pptx
@@ -12,6 +12,7 @@
     <p:sldId id="260" r:id="rId11"/>
     <p:sldId id="261" r:id="rId12"/>
     <p:sldId id="262" r:id="rId13"/>
+    <p:sldId id="263" r:id="rId14"/>
   </p:sldIdLst>
   <p:sldSz cx="12191695" cy="6858000" type="screen4x3"/>
   <p:notesSz cx="6858000" cy="9144000"/>
@@ -396,118 +397,118 @@
                 <c:formatCode>General</c:formatCode>
                 <c:ptCount val="38"/>
                 <c:pt idx="0">
-                  <c:v>5</c:v>
+                  <c:v>1</c:v>
                 </c:pt>
                 <c:pt idx="1">
-                  <c:v>5</c:v>
+                  <c:v>1</c:v>
                 </c:pt>
                 <c:pt idx="2">
-                  <c:v>5</c:v>
+                  <c:v>1</c:v>
                 </c:pt>
                 <c:pt idx="3">
-                  <c:v>5</c:v>
+                  <c:v>1</c:v>
                 </c:pt>
                 <c:pt idx="4">
-                  <c:v>5</c:v>
+                  <c:v>1</c:v>
                 </c:pt>
                 <c:pt idx="5">
-                  <c:v>5</c:v>
+                  <c:v>1</c:v>
                 </c:pt>
                 <c:pt idx="6">
-                  <c:v>5</c:v>
+                  <c:v>1</c:v>
                 </c:pt>
                 <c:pt idx="7">
-                  <c:v>5</c:v>
+                  <c:v>1</c:v>
                 </c:pt>
                 <c:pt idx="8">
-                  <c:v>5</c:v>
+                  <c:v>1</c:v>
                 </c:pt>
                 <c:pt idx="9">
-                  <c:v>5</c:v>
+                  <c:v>1</c:v>
                 </c:pt>
                 <c:pt idx="10">
-                  <c:v>5</c:v>
+                  <c:v>1</c:v>
                 </c:pt>
                 <c:pt idx="11">
-                  <c:v>5</c:v>
+                  <c:v>1</c:v>
                 </c:pt>
                 <c:pt idx="12">
-                  <c:v>5</c:v>
+                  <c:v>1</c:v>
                 </c:pt>
                 <c:pt idx="13">
-                  <c:v>5</c:v>
+                  <c:v>1</c:v>
                 </c:pt>
                 <c:pt idx="14">
-                  <c:v>5</c:v>
+                  <c:v>1</c:v>
                 </c:pt>
                 <c:pt idx="15">
-                  <c:v>5</c:v>
+                  <c:v>1</c:v>
                 </c:pt>
                 <c:pt idx="16">
-                  <c:v>5</c:v>
+                  <c:v>1</c:v>
                 </c:pt>
                 <c:pt idx="17">
-                  <c:v>5</c:v>
+                  <c:v>1</c:v>
                 </c:pt>
                 <c:pt idx="18">
-                  <c:v>5</c:v>
+                  <c:v>1</c:v>
                 </c:pt>
                 <c:pt idx="19">
-                  <c:v>5</c:v>
+                  <c:v>1</c:v>
                 </c:pt>
                 <c:pt idx="20">
-                  <c:v>5</c:v>
+                  <c:v>1</c:v>
                 </c:pt>
                 <c:pt idx="21">
-                  <c:v>5</c:v>
+                  <c:v>1</c:v>
                 </c:pt>
                 <c:pt idx="22">
-                  <c:v>5</c:v>
+                  <c:v>1</c:v>
                 </c:pt>
                 <c:pt idx="23">
-                  <c:v>5</c:v>
+                  <c:v>1</c:v>
                 </c:pt>
                 <c:pt idx="24">
-                  <c:v>5</c:v>
+                  <c:v>1</c:v>
                 </c:pt>
                 <c:pt idx="25">
-                  <c:v>5</c:v>
+                  <c:v>1</c:v>
                 </c:pt>
                 <c:pt idx="26">
-                  <c:v>5</c:v>
+                  <c:v>1</c:v>
                 </c:pt>
                 <c:pt idx="27">
-                  <c:v>5</c:v>
+                  <c:v>1</c:v>
                 </c:pt>
                 <c:pt idx="28">
-                  <c:v>5</c:v>
+                  <c:v>1</c:v>
                 </c:pt>
                 <c:pt idx="29">
-                  <c:v>5</c:v>
+                  <c:v>1</c:v>
                 </c:pt>
                 <c:pt idx="30">
-                  <c:v>5</c:v>
+                  <c:v>1</c:v>
                 </c:pt>
                 <c:pt idx="31">
-                  <c:v>5</c:v>
+                  <c:v>1</c:v>
                 </c:pt>
                 <c:pt idx="32">
-                  <c:v>5</c:v>
+                  <c:v>1</c:v>
                 </c:pt>
                 <c:pt idx="33">
-                  <c:v>5</c:v>
+                  <c:v>1</c:v>
                 </c:pt>
                 <c:pt idx="34">
-                  <c:v>5</c:v>
+                  <c:v>1</c:v>
                 </c:pt>
                 <c:pt idx="35">
-                  <c:v>5</c:v>
+                  <c:v>1</c:v>
                 </c:pt>
                 <c:pt idx="36">
-                  <c:v>5</c:v>
+                  <c:v>1</c:v>
                 </c:pt>
                 <c:pt idx="37">
-                  <c:v>5</c:v>
+                  <c:v>1</c:v>
                 </c:pt>
               </c:numCache>
             </c:numRef>
@@ -697,73 +698,73 @@
                 <c:formatCode>General</c:formatCode>
                 <c:ptCount val="23"/>
                 <c:pt idx="0">
-                  <c:v>5</c:v>
+                  <c:v>1</c:v>
                 </c:pt>
                 <c:pt idx="1">
-                  <c:v>5</c:v>
+                  <c:v>1</c:v>
                 </c:pt>
                 <c:pt idx="2">
-                  <c:v>5</c:v>
+                  <c:v>1</c:v>
                 </c:pt>
                 <c:pt idx="3">
-                  <c:v>5</c:v>
+                  <c:v>1</c:v>
                 </c:pt>
                 <c:pt idx="4">
-                  <c:v>5</c:v>
+                  <c:v>1</c:v>
                 </c:pt>
                 <c:pt idx="5">
-                  <c:v>5</c:v>
+                  <c:v>1</c:v>
                 </c:pt>
                 <c:pt idx="6">
-                  <c:v>5</c:v>
+                  <c:v>1</c:v>
                 </c:pt>
                 <c:pt idx="7">
-                  <c:v>5</c:v>
+                  <c:v>1</c:v>
                 </c:pt>
                 <c:pt idx="8">
-                  <c:v>5</c:v>
+                  <c:v>1</c:v>
                 </c:pt>
                 <c:pt idx="9">
-                  <c:v>5</c:v>
+                  <c:v>1</c:v>
                 </c:pt>
                 <c:pt idx="10">
-                  <c:v>5</c:v>
+                  <c:v>1</c:v>
                 </c:pt>
                 <c:pt idx="11">
-                  <c:v>5</c:v>
+                  <c:v>1</c:v>
                 </c:pt>
                 <c:pt idx="12">
-                  <c:v>5</c:v>
+                  <c:v>1</c:v>
                 </c:pt>
                 <c:pt idx="13">
-                  <c:v>5</c:v>
+                  <c:v>1</c:v>
                 </c:pt>
                 <c:pt idx="14">
-                  <c:v>5</c:v>
+                  <c:v>1</c:v>
                 </c:pt>
                 <c:pt idx="15">
-                  <c:v>5</c:v>
+                  <c:v>1</c:v>
                 </c:pt>
                 <c:pt idx="16">
-                  <c:v>5</c:v>
+                  <c:v>1</c:v>
                 </c:pt>
                 <c:pt idx="17">
-                  <c:v>5</c:v>
+                  <c:v>1</c:v>
                 </c:pt>
                 <c:pt idx="18">
-                  <c:v>5</c:v>
+                  <c:v>1</c:v>
                 </c:pt>
                 <c:pt idx="19">
-                  <c:v>5</c:v>
+                  <c:v>1</c:v>
                 </c:pt>
                 <c:pt idx="20">
-                  <c:v>5</c:v>
+                  <c:v>1</c:v>
                 </c:pt>
                 <c:pt idx="21">
-                  <c:v>5</c:v>
+                  <c:v>1</c:v>
                 </c:pt>
                 <c:pt idx="22">
-                  <c:v>5</c:v>
+                  <c:v>1</c:v>
                 </c:pt>
               </c:numCache>
             </c:numRef>
@@ -2808,208 +2809,6 @@
               <c:strCache>
                 <c:ptCount val="1"/>
                 <c:pt idx="0">
-                  <c:v>Gender Gap</c:v>
-                </c:pt>
-              </c:strCache>
-            </c:strRef>
-          </c:tx>
-          <c:spPr>
-            <a:solidFill>
-              <a:srgbClr val="1B3A5C"/>
-            </a:solidFill>
-          </c:spPr>
-          <c:dPt>
-            <c:idx val="4"/>
-            <c:spPr>
-              <a:solidFill>
-                <a:srgbClr val="006EAF"/>
-              </a:solidFill>
-            </c:spPr>
-          </c:dPt>
-          <c:dPt>
-            <c:idx val="5"/>
-            <c:spPr>
-              <a:solidFill>
-                <a:srgbClr val="E05A4F"/>
-              </a:solidFill>
-            </c:spPr>
-          </c:dPt>
-          <c:dLbls>
-            <c:numFmt formatCode="+0.0;-0.0" sourceLinked="0"/>
-            <c:txPr>
-              <a:bodyPr/>
-              <a:lstStyle/>
-              <a:p>
-                <a:pPr>
-                  <a:defRPr sz="900" b="1"/>
-                </a:pPr>
-              </a:p>
-            </c:txPr>
-            <c:showLegendKey val="0"/>
-            <c:showVal val="0"/>
-            <c:showCatName val="0"/>
-            <c:showSerName val="0"/>
-            <c:showPercent val="0"/>
-            <c:showBubbleSize val="0"/>
-            <c:showLeaderLines val="1"/>
-          </c:dLbls>
-          <c:cat>
-            <c:strRef>
-              <c:f>Sheet1!$A$2:$A$7</c:f>
-              <c:strCache>
-                <c:ptCount val="6"/>
-                <c:pt idx="0">
-                  <c:v>Sub-Saharan
-Africa</c:v>
-                </c:pt>
-                <c:pt idx="1">
-                  <c:v>South
-Asia</c:v>
-                </c:pt>
-                <c:pt idx="2">
-                  <c:v>MENA+</c:v>
-                </c:pt>
-                <c:pt idx="3">
-                  <c:v>Latin America
-&amp; Caribbean</c:v>
-                </c:pt>
-                <c:pt idx="4">
-                  <c:v>East Asia
-&amp; Pacific</c:v>
-                </c:pt>
-                <c:pt idx="5">
-                  <c:v>Europe &amp;
-Central Asia</c:v>
-                </c:pt>
-              </c:strCache>
-            </c:strRef>
-          </c:cat>
-          <c:val>
-            <c:numRef>
-              <c:f>Sheet1!$B$2:$B$7</c:f>
-              <c:numCache>
-                <c:formatCode>General</c:formatCode>
-                <c:ptCount val="6"/>
-                <c:pt idx="0">
-                  <c:v>5.2</c:v>
-                </c:pt>
-                <c:pt idx="1">
-                  <c:v>15.8</c:v>
-                </c:pt>
-                <c:pt idx="2">
-                  <c:v>18.3</c:v>
-                </c:pt>
-                <c:pt idx="3">
-                  <c:v>4.1</c:v>
-                </c:pt>
-                <c:pt idx="4">
-                  <c:v>5.7</c:v>
-                </c:pt>
-                <c:pt idx="5">
-                  <c:v>-1.2</c:v>
-                </c:pt>
-              </c:numCache>
-            </c:numRef>
-          </c:val>
-        </c:ser>
-        <c:gapWidth val="60"/>
-        <c:axId val="-2068027336"/>
-        <c:axId val="-2113994440"/>
-      </c:barChart>
-      <c:catAx>
-        <c:axId val="-2068027336"/>
-        <c:scaling>
-          <c:orientation val="minMax"/>
-        </c:scaling>
-        <c:delete val="0"/>
-        <c:axPos val="l"/>
-        <c:majorTickMark val="out"/>
-        <c:minorTickMark val="none"/>
-        <c:tickLblPos val="nextTo"/>
-        <c:txPr>
-          <a:bodyPr/>
-          <a:lstStyle/>
-          <a:p>
-            <a:pPr>
-              <a:defRPr sz="900">
-                <a:latin typeface="Calibri"/>
-              </a:defRPr>
-            </a:pPr>
-          </a:p>
-        </c:txPr>
-        <c:crossAx val="-2113994440"/>
-        <c:crosses val="autoZero"/>
-        <c:auto val="1"/>
-        <c:lblAlgn val="ctr"/>
-        <c:lblOffset val="100"/>
-        <c:noMultiLvlLbl val="0"/>
-      </c:catAx>
-      <c:valAx>
-        <c:axId val="-2113994440"/>
-        <c:scaling/>
-        <c:delete val="0"/>
-        <c:axPos val="b"/>
-        <c:majorGridlines>
-          <c:spPr>
-            <a:ln>
-              <a:solidFill>
-                <a:srgbClr val="EEEEEE"/>
-              </a:solidFill>
-            </a:ln>
-          </c:spPr>
-        </c:majorGridlines>
-        <c:majorTickMark val="out"/>
-        <c:minorTickMark val="none"/>
-        <c:tickLblPos val="nextTo"/>
-        <c:txPr>
-          <a:bodyPr/>
-          <a:lstStyle/>
-          <a:p>
-            <a:pPr>
-              <a:defRPr sz="800"/>
-            </a:pPr>
-          </a:p>
-        </c:txPr>
-        <c:crossAx val="-2068027336"/>
-        <c:crosses val="autoZero"/>
-      </c:valAx>
-    </c:plotArea>
-    <c:dispBlanksAs val="gap"/>
-  </c:chart>
-  <c:txPr>
-    <a:bodyPr/>
-    <a:lstStyle/>
-    <a:p>
-      <a:pPr>
-        <a:defRPr sz="1800"/>
-      </a:pPr>
-      <a:endParaRPr lang="en-US"/>
-    </a:p>
-  </c:txPr>
-  <c:externalData r:id="rId1">
-    <c:autoUpdate val="0"/>
-  </c:externalData>
-</c:chartSpace>
-</file>
-
-<file path=ppt/charts/chart8.xml><?xml version="1.0" encoding="utf-8"?>
-<c:chartSpace xmlns:c="http://schemas.openxmlformats.org/drawingml/2006/chart" xmlns:a="http://schemas.openxmlformats.org/drawingml/2006/main" xmlns:r="http://schemas.openxmlformats.org/officeDocument/2006/relationships">
-  <c:date1904 val="0"/>
-  <c:chart>
-    <c:autoTitleDeleted val="0"/>
-    <c:plotArea>
-      <c:barChart>
-        <c:barDir val="bar"/>
-        <c:grouping val="clustered"/>
-        <c:ser>
-          <c:idx val="0"/>
-          <c:order val="0"/>
-          <c:tx>
-            <c:strRef>
-              <c:f>Sheet1!$B$1</c:f>
-              <c:strCache>
-                <c:ptCount val="1"/>
-                <c:pt idx="0">
                   <c:v>Employment Score</c:v>
                 </c:pt>
               </c:strCache>
@@ -3163,6 +2962,485 @@
       </c:valAx>
     </c:plotArea>
     <c:dispBlanksAs val="gap"/>
+  </c:chart>
+  <c:txPr>
+    <a:bodyPr/>
+    <a:lstStyle/>
+    <a:p>
+      <a:pPr>
+        <a:defRPr sz="1800"/>
+      </a:pPr>
+      <a:endParaRPr lang="en-US"/>
+    </a:p>
+  </c:txPr>
+  <c:externalData r:id="rId1">
+    <c:autoUpdate val="0"/>
+  </c:externalData>
+</c:chartSpace>
+</file>
+
+<file path=ppt/charts/chart8.xml><?xml version="1.0" encoding="utf-8"?>
+<c:chartSpace xmlns:c="http://schemas.openxmlformats.org/drawingml/2006/chart" xmlns:a="http://schemas.openxmlformats.org/drawingml/2006/main" xmlns:r="http://schemas.openxmlformats.org/officeDocument/2006/relationships">
+  <c:chart>
+    <c:plotArea>
+      <c:scatterChart>
+        <c:scatterStyle val="lineMarker"/>
+        <c:varyColors val="0"/>
+        <c:ser>
+          <c:idx val="0"/>
+          <c:order val="0"/>
+          <c:tx>
+            <c:strRef>
+              <c:f>Sheet1!$B$1</c:f>
+              <c:strCache>
+                <c:ptCount val="1"/>
+                <c:pt idx="0">
+                  <c:v>Male HCI+ &gt; Female HCI+</c:v>
+                </c:pt>
+              </c:strCache>
+            </c:strRef>
+          </c:tx>
+          <c:spPr>
+            <a:solidFill>
+              <a:srgbClr val="6B8CA3"/>
+            </a:solidFill>
+            <a:ln w="47625">
+              <a:solidFill>
+                <a:srgbClr val="6B8CA3"/>
+              </a:solidFill>
+            </a:ln>
+          </c:spPr>
+          <c:marker>
+            <c:symbol val="circle"/>
+            <c:size val="8"/>
+            <c:spPr>
+              <a:solidFill>
+                <a:srgbClr val="6B8CA3"/>
+              </a:solidFill>
+              <a:ln>
+                <a:solidFill>
+                  <a:srgbClr val="6B8CA3"/>
+                </a:solidFill>
+              </a:ln>
+            </c:spPr>
+          </c:marker>
+          <c:xVal>
+            <c:numRef>
+              <c:f>Sheet1!$A$2:$A$16</c:f>
+              <c:numCache>
+                <c:formatCode>General</c:formatCode>
+                <c:ptCount val="15"/>
+                <c:pt idx="0">
+                  <c:v>277.5</c:v>
+                </c:pt>
+                <c:pt idx="1">
+                  <c:v>258.9</c:v>
+                </c:pt>
+                <c:pt idx="2">
+                  <c:v>264.8</c:v>
+                </c:pt>
+                <c:pt idx="3">
+                  <c:v>262.7</c:v>
+                </c:pt>
+                <c:pt idx="4">
+                  <c:v>253.8</c:v>
+                </c:pt>
+                <c:pt idx="5">
+                  <c:v>196.3</c:v>
+                </c:pt>
+                <c:pt idx="6">
+                  <c:v>177.2</c:v>
+                </c:pt>
+                <c:pt idx="7">
+                  <c:v>158.7</c:v>
+                </c:pt>
+                <c:pt idx="8">
+                  <c:v>171.8</c:v>
+                </c:pt>
+                <c:pt idx="9">
+                  <c:v>175.2</c:v>
+                </c:pt>
+                <c:pt idx="10">
+                  <c:v>164.2</c:v>
+                </c:pt>
+                <c:pt idx="11">
+                  <c:v>140.3</c:v>
+                </c:pt>
+                <c:pt idx="12">
+                  <c:v>139.5</c:v>
+                </c:pt>
+                <c:pt idx="13">
+                  <c:v>130.5</c:v>
+                </c:pt>
+                <c:pt idx="14">
+                  <c:v>128.0</c:v>
+                </c:pt>
+              </c:numCache>
+            </c:numRef>
+          </c:xVal>
+          <c:yVal>
+            <c:numRef>
+              <c:f>Sheet1!$B$2:$B$16</c:f>
+              <c:numCache>
+                <c:formatCode>General</c:formatCode>
+                <c:ptCount val="15"/>
+                <c:pt idx="0">
+                  <c:v>290.8</c:v>
+                </c:pt>
+                <c:pt idx="1">
+                  <c:v>274.9</c:v>
+                </c:pt>
+                <c:pt idx="2">
+                  <c:v>275.2</c:v>
+                </c:pt>
+                <c:pt idx="3">
+                  <c:v>263.5</c:v>
+                </c:pt>
+                <c:pt idx="4">
+                  <c:v>263.0</c:v>
+                </c:pt>
+                <c:pt idx="5">
+                  <c:v>206.3</c:v>
+                </c:pt>
+                <c:pt idx="6">
+                  <c:v>208.4</c:v>
+                </c:pt>
+                <c:pt idx="7">
+                  <c:v>192.1</c:v>
+                </c:pt>
+                <c:pt idx="8">
+                  <c:v>179.0</c:v>
+                </c:pt>
+                <c:pt idx="9">
+                  <c:v>176.4</c:v>
+                </c:pt>
+                <c:pt idx="10">
+                  <c:v>164.6</c:v>
+                </c:pt>
+                <c:pt idx="11">
+                  <c:v>158.1</c:v>
+                </c:pt>
+                <c:pt idx="12">
+                  <c:v>150.9</c:v>
+                </c:pt>
+                <c:pt idx="13">
+                  <c:v>140.7</c:v>
+                </c:pt>
+                <c:pt idx="14">
+                  <c:v>144.8</c:v>
+                </c:pt>
+              </c:numCache>
+            </c:numRef>
+          </c:yVal>
+          <c:smooth val="0"/>
+        </c:ser>
+        <c:ser>
+          <c:idx val="1"/>
+          <c:order val="1"/>
+          <c:tx>
+            <c:strRef>
+              <c:f>Sheet1!$B$18</c:f>
+              <c:strCache>
+                <c:ptCount val="1"/>
+                <c:pt idx="0">
+                  <c:v>Female HCI+ ≥ Male HCI+</c:v>
+                </c:pt>
+              </c:strCache>
+            </c:strRef>
+          </c:tx>
+          <c:spPr>
+            <a:solidFill>
+              <a:srgbClr val="E07B73"/>
+            </a:solidFill>
+            <a:ln w="47625">
+              <a:solidFill>
+                <a:srgbClr val="E07B73"/>
+              </a:solidFill>
+            </a:ln>
+          </c:spPr>
+          <c:marker>
+            <c:symbol val="circle"/>
+            <c:size val="8"/>
+            <c:spPr>
+              <a:solidFill>
+                <a:srgbClr val="E07B73"/>
+              </a:solidFill>
+              <a:ln>
+                <a:solidFill>
+                  <a:srgbClr val="E07B73"/>
+                </a:solidFill>
+              </a:ln>
+            </c:spPr>
+          </c:marker>
+          <c:xVal>
+            <c:numRef>
+              <c:f>Sheet1!$A$19:$A$28</c:f>
+              <c:numCache>
+                <c:formatCode>General</c:formatCode>
+                <c:ptCount val="10"/>
+                <c:pt idx="0">
+                  <c:v>284.1</c:v>
+                </c:pt>
+                <c:pt idx="1">
+                  <c:v>260.2</c:v>
+                </c:pt>
+                <c:pt idx="2">
+                  <c:v>225.4</c:v>
+                </c:pt>
+                <c:pt idx="3">
+                  <c:v>220.8</c:v>
+                </c:pt>
+                <c:pt idx="4">
+                  <c:v>214.2</c:v>
+                </c:pt>
+                <c:pt idx="5">
+                  <c:v>211.0</c:v>
+                </c:pt>
+                <c:pt idx="6">
+                  <c:v>210.5</c:v>
+                </c:pt>
+                <c:pt idx="7">
+                  <c:v>173.4</c:v>
+                </c:pt>
+                <c:pt idx="8">
+                  <c:v>163.5</c:v>
+                </c:pt>
+                <c:pt idx="9">
+                  <c:v>150.0</c:v>
+                </c:pt>
+              </c:numCache>
+            </c:numRef>
+          </c:xVal>
+          <c:yVal>
+            <c:numRef>
+              <c:f>Sheet1!$B$19:$B$28</c:f>
+              <c:numCache>
+                <c:formatCode>General</c:formatCode>
+                <c:ptCount val="10"/>
+                <c:pt idx="0">
+                  <c:v>280.6</c:v>
+                </c:pt>
+                <c:pt idx="1">
+                  <c:v>251.6</c:v>
+                </c:pt>
+                <c:pt idx="2">
+                  <c:v>214.2</c:v>
+                </c:pt>
+                <c:pt idx="3">
+                  <c:v>210.8</c:v>
+                </c:pt>
+                <c:pt idx="4">
+                  <c:v>204.8</c:v>
+                </c:pt>
+                <c:pt idx="5">
+                  <c:v>204.2</c:v>
+                </c:pt>
+                <c:pt idx="6">
+                  <c:v>194.1</c:v>
+                </c:pt>
+                <c:pt idx="7">
+                  <c:v>158.8</c:v>
+                </c:pt>
+                <c:pt idx="8">
+                  <c:v>160.3</c:v>
+                </c:pt>
+                <c:pt idx="9">
+                  <c:v>127.8</c:v>
+                </c:pt>
+              </c:numCache>
+            </c:numRef>
+          </c:yVal>
+          <c:smooth val="0"/>
+        </c:ser>
+        <c:axId val="-2128940872"/>
+        <c:axId val="-2129643912"/>
+        <c:ser>
+          <c:idx val="2"/>
+          <c:order val="2"/>
+          <c:tx>
+            <c:strRef>
+              <c:f/>
+              <c:strCache>
+                <c:ptCount val="1"/>
+                <c:pt idx="0">
+                  <c:v>45° line</c:v>
+                </c:pt>
+              </c:strCache>
+            </c:strRef>
+          </c:tx>
+          <c:spPr>
+            <a:ln w="12700">
+              <a:solidFill>
+                <a:srgbClr val="CCCCCC"/>
+              </a:solidFill>
+            </a:ln>
+          </c:spPr>
+          <c:marker>
+            <c:symbol val="none"/>
+          </c:marker>
+          <c:xVal>
+            <c:numRef>
+              <c:f/>
+              <c:numCache>
+                <c:ptCount val="2"/>
+                <c:pt idx="0">
+                  <c:v>120</c:v>
+                </c:pt>
+                <c:pt idx="1">
+                  <c:v>300</c:v>
+                </c:pt>
+              </c:numCache>
+            </c:numRef>
+          </c:xVal>
+          <c:yVal>
+            <c:numRef>
+              <c:f/>
+              <c:numCache>
+                <c:ptCount val="2"/>
+                <c:pt idx="0">
+                  <c:v>120</c:v>
+                </c:pt>
+                <c:pt idx="1">
+                  <c:v>300</c:v>
+                </c:pt>
+              </c:numCache>
+            </c:numRef>
+          </c:yVal>
+          <c:smooth val="0"/>
+        </c:ser>
+      </c:scatterChart>
+      <c:valAx>
+        <c:axId val="-2128940872"/>
+        <c:scaling>
+          <c:orientation val="minMax"/>
+          <c:max val="300.0"/>
+          <c:min val="120.0"/>
+        </c:scaling>
+        <c:delete val="0"/>
+        <c:axPos val="b"/>
+        <c:majorGridlines>
+          <c:spPr>
+            <a:ln>
+              <a:solidFill>
+                <a:srgbClr val="E8E8E8"/>
+              </a:solidFill>
+              <a:prstDash val="dash"/>
+            </a:ln>
+          </c:spPr>
+        </c:majorGridlines>
+        <c:title>
+          <c:tx>
+            <c:rich>
+              <a:bodyPr/>
+              <a:lstStyle/>
+              <a:p>
+                <a:pPr>
+                  <a:defRPr sz="1100" b="1">
+                    <a:latin typeface="Calibri"/>
+                  </a:defRPr>
+                </a:pPr>
+                <a:r>
+                  <a:t>Female HCI+</a:t>
+                </a:r>
+              </a:p>
+            </c:rich>
+          </c:tx>
+          <c:layout/>
+          <c:overlay val="0"/>
+        </c:title>
+        <c:numFmt formatCode="General" sourceLinked="1"/>
+        <c:majorTickMark val="out"/>
+        <c:minorTickMark val="none"/>
+        <c:tickLblPos val="nextTo"/>
+        <c:txPr>
+          <a:bodyPr/>
+          <a:lstStyle/>
+          <a:p>
+            <a:pPr>
+              <a:defRPr sz="900"/>
+            </a:pPr>
+          </a:p>
+        </c:txPr>
+        <c:crossAx val="-2129643912"/>
+        <c:crosses val="autoZero"/>
+        <c:crossBetween val="midCat"/>
+      </c:valAx>
+      <c:valAx>
+        <c:axId val="-2129643912"/>
+        <c:scaling>
+          <c:orientation val="minMax"/>
+          <c:max val="300.0"/>
+          <c:min val="120.0"/>
+        </c:scaling>
+        <c:delete val="0"/>
+        <c:axPos val="l"/>
+        <c:majorGridlines>
+          <c:spPr>
+            <a:ln>
+              <a:solidFill>
+                <a:srgbClr val="E8E8E8"/>
+              </a:solidFill>
+              <a:prstDash val="dash"/>
+            </a:ln>
+          </c:spPr>
+        </c:majorGridlines>
+        <c:title>
+          <c:tx>
+            <c:rich>
+              <a:bodyPr/>
+              <a:lstStyle/>
+              <a:p>
+                <a:pPr>
+                  <a:defRPr sz="1100" b="1">
+                    <a:latin typeface="Calibri"/>
+                  </a:defRPr>
+                </a:pPr>
+                <a:r>
+                  <a:t>Male HCI+</a:t>
+                </a:r>
+              </a:p>
+            </c:rich>
+          </c:tx>
+          <c:layout/>
+          <c:overlay val="0"/>
+        </c:title>
+        <c:numFmt formatCode="General" sourceLinked="1"/>
+        <c:majorTickMark val="out"/>
+        <c:minorTickMark val="none"/>
+        <c:tickLblPos val="nextTo"/>
+        <c:txPr>
+          <a:bodyPr/>
+          <a:lstStyle/>
+          <a:p>
+            <a:pPr>
+              <a:defRPr sz="900"/>
+            </a:pPr>
+          </a:p>
+        </c:txPr>
+        <c:crossAx val="-2128940872"/>
+        <c:crosses val="autoZero"/>
+        <c:crossBetween val="midCat"/>
+      </c:valAx>
+    </c:plotArea>
+    <c:legend>
+      <c:legendPos val="b"/>
+      <c:layout/>
+      <c:overlay val="0"/>
+      <c:txPr>
+        <a:bodyPr/>
+        <a:lstStyle/>
+        <a:p>
+          <a:pPr>
+            <a:defRPr sz="900">
+              <a:latin typeface="Calibri"/>
+            </a:defRPr>
+          </a:pPr>
+        </a:p>
+      </c:txPr>
+    </c:legend>
+    <c:plotVisOnly val="1"/>
+    <c:dispBlanksAs val="gap"/>
+    <c:showDLblsOverMax val="0"/>
   </c:chart>
   <c:txPr>
     <a:bodyPr/>
@@ -14237,7 +14515,7 @@
               </a:defRPr>
             </a:pPr>
             <a:r>
-              <a:t>Employment &amp; Gender Gap  |  East Asia &amp; Pacific</a:t>
+              <a:t>Employment Component  |  East Asia &amp; Pacific</a:t>
             </a:r>
           </a:p>
         </p:txBody>
@@ -14319,7 +14597,7 @@
         <p:spPr>
           <a:xfrm>
             <a:off x="457200" y="1828800"/>
-            <a:ext cx="5486400" cy="2743200"/>
+            <a:ext cx="2697480" cy="2651760"/>
           </a:xfrm>
           <a:prstGeom prst="roundRect">
             <a:avLst/>
@@ -14362,7 +14640,7 @@
         <p:spPr>
           <a:xfrm>
             <a:off x="457200" y="1828800"/>
-            <a:ext cx="5486400" cy="50800"/>
+            <a:ext cx="2697480" cy="50800"/>
           </a:xfrm>
           <a:prstGeom prst="rect">
             <a:avLst/>
@@ -14404,8 +14682,8 @@
         </p:nvSpPr>
         <p:spPr>
           <a:xfrm>
-            <a:off x="731520" y="2011680"/>
-            <a:ext cx="2743200" cy="228600"/>
+            <a:off x="594360" y="2011680"/>
+            <a:ext cx="2423160" cy="457200"/>
           </a:xfrm>
           <a:prstGeom prst="rect">
             <a:avLst/>
@@ -14419,13 +14697,17 @@
             <a:pPr algn="l">
               <a:defRPr sz="1100" b="1">
                 <a:solidFill>
-                  <a:srgbClr val="E87D1E"/>
+                  <a:srgbClr val="1A1A2E"/>
                 </a:solidFill>
                 <a:latin typeface="Calibri"/>
               </a:defRPr>
             </a:pPr>
             <a:r>
-              <a:t>EAP EMPLOYMENT INDICATORS (AVG)</a:t>
+              <a:t>LFP Youth</a:t>
+            </a:r>
+            <a:br/>
+            <a:r>
+              <a:t>(15–24)</a:t>
             </a:r>
           </a:p>
         </p:txBody>
@@ -14438,8 +14720,8 @@
         </p:nvSpPr>
         <p:spPr>
           <a:xfrm>
-            <a:off x="731520" y="2377440"/>
-            <a:ext cx="1828800" cy="228600"/>
+            <a:off x="594360" y="2560320"/>
+            <a:ext cx="2423160" cy="640080"/>
           </a:xfrm>
           <a:prstGeom prst="rect">
             <a:avLst/>
@@ -14451,13 +14733,16 @@
           <a:lstStyle/>
           <a:p>
             <a:pPr algn="l">
-              <a:defRPr sz="1000" b="1">
-                <a:solidFill>
-                  <a:srgbClr val="7A7A8C"/>
-                </a:solidFill>
-                <a:latin typeface="Calibri"/>
-              </a:defRPr>
-            </a:pPr>
+              <a:defRPr sz="3600" b="1">
+                <a:solidFill>
+                  <a:srgbClr val="E87D1E"/>
+                </a:solidFill>
+                <a:latin typeface="Calibri Light"/>
+              </a:defRPr>
+            </a:pPr>
+            <a:r>
+              <a:t>60.0%</a:t>
+            </a:r>
           </a:p>
         </p:txBody>
       </p:sp>
@@ -14469,8 +14754,8 @@
         </p:nvSpPr>
         <p:spPr>
           <a:xfrm>
-            <a:off x="2560320" y="2377440"/>
-            <a:ext cx="731520" cy="228600"/>
+            <a:off x="594360" y="3200400"/>
+            <a:ext cx="2423160" cy="228600"/>
           </a:xfrm>
           <a:prstGeom prst="rect">
             <a:avLst/>
@@ -14481,104 +14766,36 @@
           <a:bodyPr wrap="square" anchor="t"/>
           <a:lstStyle/>
           <a:p>
-            <a:pPr algn="ctr">
-              <a:defRPr sz="1000" b="1">
-                <a:solidFill>
-                  <a:srgbClr val="006EAF"/>
+            <a:pPr algn="l">
+              <a:defRPr sz="900" b="0">
+                <a:solidFill>
+                  <a:srgbClr val="7A7A8C"/>
                 </a:solidFill>
                 <a:latin typeface="Calibri"/>
               </a:defRPr>
             </a:pPr>
             <a:r>
-              <a:t>EAP</a:t>
-            </a:r>
-          </a:p>
-        </p:txBody>
-      </p:sp>
-      <p:sp>
-        <p:nvSpPr>
-          <p:cNvPr id="13" name="TextBox 12"/>
-          <p:cNvSpPr txBox="1"/>
-          <p:nvPr/>
-        </p:nvSpPr>
-        <p:spPr>
-          <a:xfrm>
-            <a:off x="3291840" y="2377440"/>
-            <a:ext cx="731520" cy="228600"/>
-          </a:xfrm>
-          <a:prstGeom prst="rect">
-            <a:avLst/>
-          </a:prstGeom>
-          <a:noFill/>
-        </p:spPr>
-        <p:txBody>
-          <a:bodyPr wrap="square" anchor="t"/>
-          <a:lstStyle/>
-          <a:p>
-            <a:pPr algn="ctr">
-              <a:defRPr sz="1000" b="1">
-                <a:solidFill>
-                  <a:srgbClr val="7A7A8C"/>
-                </a:solidFill>
-                <a:latin typeface="Calibri"/>
-              </a:defRPr>
-            </a:pPr>
-            <a:r>
-              <a:t>World</a:t>
-            </a:r>
-          </a:p>
-        </p:txBody>
-      </p:sp>
-      <p:sp>
-        <p:nvSpPr>
-          <p:cNvPr id="14" name="TextBox 13"/>
-          <p:cNvSpPr txBox="1"/>
-          <p:nvPr/>
-        </p:nvSpPr>
-        <p:spPr>
-          <a:xfrm>
-            <a:off x="4023360" y="2377440"/>
-            <a:ext cx="731520" cy="228600"/>
-          </a:xfrm>
-          <a:prstGeom prst="rect">
-            <a:avLst/>
-          </a:prstGeom>
-          <a:noFill/>
-        </p:spPr>
-        <p:txBody>
-          <a:bodyPr wrap="square" anchor="t"/>
-          <a:lstStyle/>
-          <a:p>
-            <a:pPr algn="ctr">
-              <a:defRPr sz="1000" b="1">
-                <a:solidFill>
-                  <a:srgbClr val="7A7A8C"/>
-                </a:solidFill>
-                <a:latin typeface="Calibri"/>
-              </a:defRPr>
-            </a:pPr>
-            <a:r>
-              <a:t>Europe</a:t>
-            </a:r>
-          </a:p>
-        </p:txBody>
-      </p:sp>
-      <p:sp>
-        <p:nvSpPr>
-          <p:cNvPr id="15" name="Rectangle 14"/>
+              <a:t>EAP average</a:t>
+            </a:r>
+          </a:p>
+        </p:txBody>
+      </p:sp>
+      <p:sp>
+        <p:nvSpPr>
+          <p:cNvPr id="13" name="Rounded Rectangle 12"/>
           <p:cNvSpPr/>
           <p:nvPr/>
         </p:nvSpPr>
         <p:spPr>
           <a:xfrm>
-            <a:off x="731520" y="2606040"/>
-            <a:ext cx="4023360" cy="12700"/>
-          </a:xfrm>
-          <a:prstGeom prst="rect">
+            <a:off x="594360" y="3520440"/>
+            <a:ext cx="2423160" cy="109728"/>
+          </a:xfrm>
+          <a:prstGeom prst="roundRect">
             <a:avLst/>
           </a:prstGeom>
           <a:solidFill>
-            <a:srgbClr val="D0D5DD"/>
+            <a:srgbClr val="E0E2E6"/>
           </a:solidFill>
           <a:ln>
             <a:noFill/>
@@ -14608,16 +14825,127 @@
       </p:sp>
       <p:sp>
         <p:nvSpPr>
-          <p:cNvPr id="16" name="Rectangle 15"/>
+          <p:cNvPr id="14" name="Rounded Rectangle 13"/>
           <p:cNvSpPr/>
           <p:nvPr/>
         </p:nvSpPr>
         <p:spPr>
           <a:xfrm>
-            <a:off x="731520" y="2697480"/>
-            <a:ext cx="4023360" cy="365760"/>
-          </a:xfrm>
-          <a:prstGeom prst="rect">
+            <a:off x="594360" y="3520440"/>
+            <a:ext cx="1453896" cy="109728"/>
+          </a:xfrm>
+          <a:prstGeom prst="roundRect">
+            <a:avLst/>
+          </a:prstGeom>
+          <a:solidFill>
+            <a:srgbClr val="E87D1E"/>
+          </a:solidFill>
+          <a:ln>
+            <a:noFill/>
+          </a:ln>
+        </p:spPr>
+        <p:style>
+          <a:lnRef idx="1">
+            <a:schemeClr val="accent1"/>
+          </a:lnRef>
+          <a:fillRef idx="3">
+            <a:schemeClr val="accent1"/>
+          </a:fillRef>
+          <a:effectRef idx="2">
+            <a:schemeClr val="accent1"/>
+          </a:effectRef>
+          <a:fontRef idx="minor">
+            <a:schemeClr val="lt1"/>
+          </a:fontRef>
+        </p:style>
+        <p:txBody>
+          <a:bodyPr rtlCol="0" anchor="ctr"/>
+          <a:lstStyle/>
+          <a:p>
+            <a:pPr algn="ctr"/>
+          </a:p>
+        </p:txBody>
+      </p:sp>
+      <p:sp>
+        <p:nvSpPr>
+          <p:cNvPr id="15" name="TextBox 14"/>
+          <p:cNvSpPr txBox="1"/>
+          <p:nvPr/>
+        </p:nvSpPr>
+        <p:spPr>
+          <a:xfrm>
+            <a:off x="594360" y="3749039"/>
+            <a:ext cx="2423160" cy="182880"/>
+          </a:xfrm>
+          <a:prstGeom prst="rect">
+            <a:avLst/>
+          </a:prstGeom>
+          <a:noFill/>
+        </p:spPr>
+        <p:txBody>
+          <a:bodyPr wrap="square" anchor="t"/>
+          <a:lstStyle/>
+          <a:p>
+            <a:pPr algn="l">
+              <a:defRPr sz="800" b="0">
+                <a:solidFill>
+                  <a:srgbClr val="7A7A8C"/>
+                </a:solidFill>
+                <a:latin typeface="Calibri"/>
+              </a:defRPr>
+            </a:pPr>
+            <a:r>
+              <a:t>World: 48.2%</a:t>
+            </a:r>
+          </a:p>
+        </p:txBody>
+      </p:sp>
+      <p:sp>
+        <p:nvSpPr>
+          <p:cNvPr id="16" name="TextBox 15"/>
+          <p:cNvSpPr txBox="1"/>
+          <p:nvPr/>
+        </p:nvSpPr>
+        <p:spPr>
+          <a:xfrm>
+            <a:off x="594360" y="3931920"/>
+            <a:ext cx="2423160" cy="182880"/>
+          </a:xfrm>
+          <a:prstGeom prst="rect">
+            <a:avLst/>
+          </a:prstGeom>
+          <a:noFill/>
+        </p:spPr>
+        <p:txBody>
+          <a:bodyPr wrap="square" anchor="t"/>
+          <a:lstStyle/>
+          <a:p>
+            <a:pPr algn="l">
+              <a:defRPr sz="800" b="1">
+                <a:solidFill>
+                  <a:srgbClr val="006EAF"/>
+                </a:solidFill>
+                <a:latin typeface="Calibri"/>
+              </a:defRPr>
+            </a:pPr>
+            <a:r>
+              <a:t>Best: Nauru 79.7%</a:t>
+            </a:r>
+          </a:p>
+        </p:txBody>
+      </p:sp>
+      <p:sp>
+        <p:nvSpPr>
+          <p:cNvPr id="17" name="Rounded Rectangle 16"/>
+          <p:cNvSpPr/>
+          <p:nvPr/>
+        </p:nvSpPr>
+        <p:spPr>
+          <a:xfrm>
+            <a:off x="3337560" y="1828800"/>
+            <a:ext cx="2697480" cy="2651760"/>
+          </a:xfrm>
+          <a:prstGeom prst="roundRect">
             <a:avLst/>
           </a:prstGeom>
           <a:solidFill>
@@ -14651,156 +14979,20 @@
       </p:sp>
       <p:sp>
         <p:nvSpPr>
-          <p:cNvPr id="17" name="TextBox 16"/>
-          <p:cNvSpPr txBox="1"/>
-          <p:nvPr/>
-        </p:nvSpPr>
-        <p:spPr>
-          <a:xfrm>
-            <a:off x="731520" y="2743200"/>
-            <a:ext cx="1828800" cy="274320"/>
-          </a:xfrm>
-          <a:prstGeom prst="rect">
-            <a:avLst/>
-          </a:prstGeom>
-          <a:noFill/>
-        </p:spPr>
-        <p:txBody>
-          <a:bodyPr wrap="square" anchor="t"/>
-          <a:lstStyle/>
-          <a:p>
-            <a:pPr algn="l">
-              <a:defRPr sz="1000" b="0">
-                <a:solidFill>
-                  <a:srgbClr val="1A1A2E"/>
-                </a:solidFill>
-                <a:latin typeface="Calibri"/>
-              </a:defRPr>
-            </a:pPr>
-            <a:r>
-              <a:t>LFP Youth (15–24)</a:t>
-            </a:r>
-          </a:p>
-        </p:txBody>
-      </p:sp>
-      <p:sp>
-        <p:nvSpPr>
-          <p:cNvPr id="18" name="TextBox 17"/>
-          <p:cNvSpPr txBox="1"/>
-          <p:nvPr/>
-        </p:nvSpPr>
-        <p:spPr>
-          <a:xfrm>
-            <a:off x="2560320" y="2743200"/>
-            <a:ext cx="731520" cy="274320"/>
-          </a:xfrm>
-          <a:prstGeom prst="rect">
-            <a:avLst/>
-          </a:prstGeom>
-          <a:noFill/>
-        </p:spPr>
-        <p:txBody>
-          <a:bodyPr wrap="square" anchor="t"/>
-          <a:lstStyle/>
-          <a:p>
-            <a:pPr algn="ctr">
-              <a:defRPr sz="1000" b="1">
-                <a:solidFill>
-                  <a:srgbClr val="006EAF"/>
-                </a:solidFill>
-                <a:latin typeface="Calibri"/>
-              </a:defRPr>
-            </a:pPr>
-            <a:r>
-              <a:t>60.0%</a:t>
-            </a:r>
-          </a:p>
-        </p:txBody>
-      </p:sp>
-      <p:sp>
-        <p:nvSpPr>
-          <p:cNvPr id="19" name="TextBox 18"/>
-          <p:cNvSpPr txBox="1"/>
-          <p:nvPr/>
-        </p:nvSpPr>
-        <p:spPr>
-          <a:xfrm>
-            <a:off x="3291840" y="2743200"/>
-            <a:ext cx="731520" cy="274320"/>
-          </a:xfrm>
-          <a:prstGeom prst="rect">
-            <a:avLst/>
-          </a:prstGeom>
-          <a:noFill/>
-        </p:spPr>
-        <p:txBody>
-          <a:bodyPr wrap="square" anchor="t"/>
-          <a:lstStyle/>
-          <a:p>
-            <a:pPr algn="ctr">
-              <a:defRPr sz="1000" b="0">
-                <a:solidFill>
-                  <a:srgbClr val="7A7A8C"/>
-                </a:solidFill>
-                <a:latin typeface="Calibri"/>
-              </a:defRPr>
-            </a:pPr>
-            <a:r>
-              <a:t>48.2%</a:t>
-            </a:r>
-          </a:p>
-        </p:txBody>
-      </p:sp>
-      <p:sp>
-        <p:nvSpPr>
-          <p:cNvPr id="20" name="TextBox 19"/>
-          <p:cNvSpPr txBox="1"/>
-          <p:nvPr/>
-        </p:nvSpPr>
-        <p:spPr>
-          <a:xfrm>
-            <a:off x="4023360" y="2743200"/>
-            <a:ext cx="731520" cy="274320"/>
-          </a:xfrm>
-          <a:prstGeom prst="rect">
-            <a:avLst/>
-          </a:prstGeom>
-          <a:noFill/>
-        </p:spPr>
-        <p:txBody>
-          <a:bodyPr wrap="square" anchor="t"/>
-          <a:lstStyle/>
-          <a:p>
-            <a:pPr algn="ctr">
-              <a:defRPr sz="1000" b="0">
-                <a:solidFill>
-                  <a:srgbClr val="7A7A8C"/>
-                </a:solidFill>
-                <a:latin typeface="Calibri"/>
-              </a:defRPr>
-            </a:pPr>
-            <a:r>
-              <a:t>46.7%</a:t>
-            </a:r>
-          </a:p>
-        </p:txBody>
-      </p:sp>
-      <p:sp>
-        <p:nvSpPr>
-          <p:cNvPr id="21" name="Rectangle 20"/>
+          <p:cNvPr id="18" name="Rectangle 17"/>
           <p:cNvSpPr/>
           <p:nvPr/>
         </p:nvSpPr>
         <p:spPr>
           <a:xfrm>
-            <a:off x="731520" y="3108960"/>
-            <a:ext cx="4023360" cy="365760"/>
+            <a:off x="3337560" y="1828800"/>
+            <a:ext cx="2697480" cy="50800"/>
           </a:xfrm>
           <a:prstGeom prst="rect">
             <a:avLst/>
           </a:prstGeom>
           <a:solidFill>
-            <a:srgbClr val="F9FAFB"/>
+            <a:srgbClr val="C06510"/>
           </a:solidFill>
           <a:ln>
             <a:noFill/>
@@ -14830,14 +15022,14 @@
       </p:sp>
       <p:sp>
         <p:nvSpPr>
-          <p:cNvPr id="22" name="TextBox 21"/>
+          <p:cNvPr id="19" name="TextBox 18"/>
           <p:cNvSpPr txBox="1"/>
           <p:nvPr/>
         </p:nvSpPr>
         <p:spPr>
           <a:xfrm>
-            <a:off x="731520" y="3154680"/>
-            <a:ext cx="1828800" cy="274320"/>
+            <a:off x="3474720" y="2011680"/>
+            <a:ext cx="2423160" cy="457200"/>
           </a:xfrm>
           <a:prstGeom prst="rect">
             <a:avLst/>
@@ -14849,7 +15041,7 @@
           <a:lstStyle/>
           <a:p>
             <a:pPr algn="l">
-              <a:defRPr sz="1000" b="0">
+              <a:defRPr sz="1100" b="1">
                 <a:solidFill>
                   <a:srgbClr val="1A1A2E"/>
                 </a:solidFill>
@@ -14857,21 +15049,25 @@
               </a:defRPr>
             </a:pPr>
             <a:r>
-              <a:t>Wage Emp. Youth</a:t>
-            </a:r>
-          </a:p>
-        </p:txBody>
-      </p:sp>
-      <p:sp>
-        <p:nvSpPr>
-          <p:cNvPr id="23" name="TextBox 22"/>
+              <a:t>Wage Emp.</a:t>
+            </a:r>
+            <a:br/>
+            <a:r>
+              <a:t>Youth</a:t>
+            </a:r>
+          </a:p>
+        </p:txBody>
+      </p:sp>
+      <p:sp>
+        <p:nvSpPr>
+          <p:cNvPr id="20" name="TextBox 19"/>
           <p:cNvSpPr txBox="1"/>
           <p:nvPr/>
         </p:nvSpPr>
         <p:spPr>
           <a:xfrm>
-            <a:off x="2560320" y="3154680"/>
-            <a:ext cx="731520" cy="274320"/>
+            <a:off x="3474720" y="2560320"/>
+            <a:ext cx="2423160" cy="640080"/>
           </a:xfrm>
           <a:prstGeom prst="rect">
             <a:avLst/>
@@ -14882,17 +15078,137 @@
           <a:bodyPr wrap="square" anchor="t"/>
           <a:lstStyle/>
           <a:p>
-            <a:pPr algn="ctr">
-              <a:defRPr sz="1000" b="1">
-                <a:solidFill>
-                  <a:srgbClr val="006EAF"/>
+            <a:pPr algn="l">
+              <a:defRPr sz="3600" b="1">
+                <a:solidFill>
+                  <a:srgbClr val="C06510"/>
+                </a:solidFill>
+                <a:latin typeface="Calibri Light"/>
+              </a:defRPr>
+            </a:pPr>
+            <a:r>
+              <a:t>75.2%</a:t>
+            </a:r>
+          </a:p>
+        </p:txBody>
+      </p:sp>
+      <p:sp>
+        <p:nvSpPr>
+          <p:cNvPr id="21" name="TextBox 20"/>
+          <p:cNvSpPr txBox="1"/>
+          <p:nvPr/>
+        </p:nvSpPr>
+        <p:spPr>
+          <a:xfrm>
+            <a:off x="3474720" y="3200400"/>
+            <a:ext cx="2423160" cy="228600"/>
+          </a:xfrm>
+          <a:prstGeom prst="rect">
+            <a:avLst/>
+          </a:prstGeom>
+          <a:noFill/>
+        </p:spPr>
+        <p:txBody>
+          <a:bodyPr wrap="square" anchor="t"/>
+          <a:lstStyle/>
+          <a:p>
+            <a:pPr algn="l">
+              <a:defRPr sz="900" b="0">
+                <a:solidFill>
+                  <a:srgbClr val="7A7A8C"/>
                 </a:solidFill>
                 <a:latin typeface="Calibri"/>
               </a:defRPr>
             </a:pPr>
             <a:r>
-              <a:t>75.2%</a:t>
-            </a:r>
+              <a:t>wage share of employment</a:t>
+            </a:r>
+          </a:p>
+        </p:txBody>
+      </p:sp>
+      <p:sp>
+        <p:nvSpPr>
+          <p:cNvPr id="22" name="Rounded Rectangle 21"/>
+          <p:cNvSpPr/>
+          <p:nvPr/>
+        </p:nvSpPr>
+        <p:spPr>
+          <a:xfrm>
+            <a:off x="3474720" y="3520440"/>
+            <a:ext cx="2423160" cy="109728"/>
+          </a:xfrm>
+          <a:prstGeom prst="roundRect">
+            <a:avLst/>
+          </a:prstGeom>
+          <a:solidFill>
+            <a:srgbClr val="E0E2E6"/>
+          </a:solidFill>
+          <a:ln>
+            <a:noFill/>
+          </a:ln>
+        </p:spPr>
+        <p:style>
+          <a:lnRef idx="1">
+            <a:schemeClr val="accent1"/>
+          </a:lnRef>
+          <a:fillRef idx="3">
+            <a:schemeClr val="accent1"/>
+          </a:fillRef>
+          <a:effectRef idx="2">
+            <a:schemeClr val="accent1"/>
+          </a:effectRef>
+          <a:fontRef idx="minor">
+            <a:schemeClr val="lt1"/>
+          </a:fontRef>
+        </p:style>
+        <p:txBody>
+          <a:bodyPr rtlCol="0" anchor="ctr"/>
+          <a:lstStyle/>
+          <a:p>
+            <a:pPr algn="ctr"/>
+          </a:p>
+        </p:txBody>
+      </p:sp>
+      <p:sp>
+        <p:nvSpPr>
+          <p:cNvPr id="23" name="Rounded Rectangle 22"/>
+          <p:cNvSpPr/>
+          <p:nvPr/>
+        </p:nvSpPr>
+        <p:spPr>
+          <a:xfrm>
+            <a:off x="3474720" y="3520440"/>
+            <a:ext cx="1822216" cy="109728"/>
+          </a:xfrm>
+          <a:prstGeom prst="roundRect">
+            <a:avLst/>
+          </a:prstGeom>
+          <a:solidFill>
+            <a:srgbClr val="C06510"/>
+          </a:solidFill>
+          <a:ln>
+            <a:noFill/>
+          </a:ln>
+        </p:spPr>
+        <p:style>
+          <a:lnRef idx="1">
+            <a:schemeClr val="accent1"/>
+          </a:lnRef>
+          <a:fillRef idx="3">
+            <a:schemeClr val="accent1"/>
+          </a:fillRef>
+          <a:effectRef idx="2">
+            <a:schemeClr val="accent1"/>
+          </a:effectRef>
+          <a:fontRef idx="minor">
+            <a:schemeClr val="lt1"/>
+          </a:fontRef>
+        </p:style>
+        <p:txBody>
+          <a:bodyPr rtlCol="0" anchor="ctr"/>
+          <a:lstStyle/>
+          <a:p>
+            <a:pPr algn="ctr"/>
           </a:p>
         </p:txBody>
       </p:sp>
@@ -14904,8 +15220,8 @@
         </p:nvSpPr>
         <p:spPr>
           <a:xfrm>
-            <a:off x="3291840" y="3154680"/>
-            <a:ext cx="731520" cy="274320"/>
+            <a:off x="3474720" y="3749039"/>
+            <a:ext cx="2423160" cy="182880"/>
           </a:xfrm>
           <a:prstGeom prst="rect">
             <a:avLst/>
@@ -14916,8 +15232,8 @@
           <a:bodyPr wrap="square" anchor="t"/>
           <a:lstStyle/>
           <a:p>
-            <a:pPr algn="ctr">
-              <a:defRPr sz="1000" b="0">
+            <a:pPr algn="l">
+              <a:defRPr sz="800" b="0">
                 <a:solidFill>
                   <a:srgbClr val="7A7A8C"/>
                 </a:solidFill>
@@ -14925,7 +15241,7 @@
               </a:defRPr>
             </a:pPr>
             <a:r>
-              <a:t>55.1%</a:t>
+              <a:t>World: 55.1%</a:t>
             </a:r>
           </a:p>
         </p:txBody>
@@ -14938,8 +15254,8 @@
         </p:nvSpPr>
         <p:spPr>
           <a:xfrm>
-            <a:off x="4023360" y="3154680"/>
-            <a:ext cx="731520" cy="274320"/>
+            <a:off x="3474720" y="3931920"/>
+            <a:ext cx="2423160" cy="182880"/>
           </a:xfrm>
           <a:prstGeom prst="rect">
             <a:avLst/>
@@ -14950,32 +15266,32 @@
           <a:bodyPr wrap="square" anchor="t"/>
           <a:lstStyle/>
           <a:p>
-            <a:pPr algn="ctr">
-              <a:defRPr sz="1000" b="0">
-                <a:solidFill>
-                  <a:srgbClr val="7A7A8C"/>
+            <a:pPr algn="l">
+              <a:defRPr sz="800" b="1">
+                <a:solidFill>
+                  <a:srgbClr val="006EAF"/>
                 </a:solidFill>
                 <a:latin typeface="Calibri"/>
               </a:defRPr>
             </a:pPr>
             <a:r>
-              <a:t>80.3%</a:t>
-            </a:r>
-          </a:p>
-        </p:txBody>
-      </p:sp>
-      <p:sp>
-        <p:nvSpPr>
-          <p:cNvPr id="26" name="Rectangle 25"/>
+              <a:t>Best: Japan 93.8%</a:t>
+            </a:r>
+          </a:p>
+        </p:txBody>
+      </p:sp>
+      <p:sp>
+        <p:nvSpPr>
+          <p:cNvPr id="26" name="Rounded Rectangle 25"/>
           <p:cNvSpPr/>
           <p:nvPr/>
         </p:nvSpPr>
         <p:spPr>
           <a:xfrm>
-            <a:off x="731520" y="3520440"/>
-            <a:ext cx="4023360" cy="365760"/>
-          </a:xfrm>
-          <a:prstGeom prst="rect">
+            <a:off x="6217920" y="1828800"/>
+            <a:ext cx="2697480" cy="2651760"/>
+          </a:xfrm>
+          <a:prstGeom prst="roundRect">
             <a:avLst/>
           </a:prstGeom>
           <a:solidFill>
@@ -15009,156 +15325,20 @@
       </p:sp>
       <p:sp>
         <p:nvSpPr>
-          <p:cNvPr id="27" name="TextBox 26"/>
-          <p:cNvSpPr txBox="1"/>
-          <p:nvPr/>
-        </p:nvSpPr>
-        <p:spPr>
-          <a:xfrm>
-            <a:off x="731520" y="3566160"/>
-            <a:ext cx="1828800" cy="274320"/>
-          </a:xfrm>
-          <a:prstGeom prst="rect">
-            <a:avLst/>
-          </a:prstGeom>
-          <a:noFill/>
-        </p:spPr>
-        <p:txBody>
-          <a:bodyPr wrap="square" anchor="t"/>
-          <a:lstStyle/>
-          <a:p>
-            <a:pPr algn="l">
-              <a:defRPr sz="1000" b="0">
-                <a:solidFill>
-                  <a:srgbClr val="1A1A2E"/>
-                </a:solidFill>
-                <a:latin typeface="Calibri"/>
-              </a:defRPr>
-            </a:pPr>
-            <a:r>
-              <a:t>LFP Working Age (25–65)</a:t>
-            </a:r>
-          </a:p>
-        </p:txBody>
-      </p:sp>
-      <p:sp>
-        <p:nvSpPr>
-          <p:cNvPr id="28" name="TextBox 27"/>
-          <p:cNvSpPr txBox="1"/>
-          <p:nvPr/>
-        </p:nvSpPr>
-        <p:spPr>
-          <a:xfrm>
-            <a:off x="2560320" y="3566160"/>
-            <a:ext cx="731520" cy="274320"/>
-          </a:xfrm>
-          <a:prstGeom prst="rect">
-            <a:avLst/>
-          </a:prstGeom>
-          <a:noFill/>
-        </p:spPr>
-        <p:txBody>
-          <a:bodyPr wrap="square" anchor="t"/>
-          <a:lstStyle/>
-          <a:p>
-            <a:pPr algn="ctr">
-              <a:defRPr sz="1000" b="1">
-                <a:solidFill>
-                  <a:srgbClr val="006EAF"/>
-                </a:solidFill>
-                <a:latin typeface="Calibri"/>
-              </a:defRPr>
-            </a:pPr>
-            <a:r>
-              <a:t>75.3%</a:t>
-            </a:r>
-          </a:p>
-        </p:txBody>
-      </p:sp>
-      <p:sp>
-        <p:nvSpPr>
-          <p:cNvPr id="29" name="TextBox 28"/>
-          <p:cNvSpPr txBox="1"/>
-          <p:nvPr/>
-        </p:nvSpPr>
-        <p:spPr>
-          <a:xfrm>
-            <a:off x="3291840" y="3566160"/>
-            <a:ext cx="731520" cy="274320"/>
-          </a:xfrm>
-          <a:prstGeom prst="rect">
-            <a:avLst/>
-          </a:prstGeom>
-          <a:noFill/>
-        </p:spPr>
-        <p:txBody>
-          <a:bodyPr wrap="square" anchor="t"/>
-          <a:lstStyle/>
-          <a:p>
-            <a:pPr algn="ctr">
-              <a:defRPr sz="1000" b="0">
-                <a:solidFill>
-                  <a:srgbClr val="7A7A8C"/>
-                </a:solidFill>
-                <a:latin typeface="Calibri"/>
-              </a:defRPr>
-            </a:pPr>
-            <a:r>
-              <a:t>72.6%</a:t>
-            </a:r>
-          </a:p>
-        </p:txBody>
-      </p:sp>
-      <p:sp>
-        <p:nvSpPr>
-          <p:cNvPr id="30" name="TextBox 29"/>
-          <p:cNvSpPr txBox="1"/>
-          <p:nvPr/>
-        </p:nvSpPr>
-        <p:spPr>
-          <a:xfrm>
-            <a:off x="4023360" y="3566160"/>
-            <a:ext cx="731520" cy="274320"/>
-          </a:xfrm>
-          <a:prstGeom prst="rect">
-            <a:avLst/>
-          </a:prstGeom>
-          <a:noFill/>
-        </p:spPr>
-        <p:txBody>
-          <a:bodyPr wrap="square" anchor="t"/>
-          <a:lstStyle/>
-          <a:p>
-            <a:pPr algn="ctr">
-              <a:defRPr sz="1000" b="0">
-                <a:solidFill>
-                  <a:srgbClr val="7A7A8C"/>
-                </a:solidFill>
-                <a:latin typeface="Calibri"/>
-              </a:defRPr>
-            </a:pPr>
-            <a:r>
-              <a:t>78.2%</a:t>
-            </a:r>
-          </a:p>
-        </p:txBody>
-      </p:sp>
-      <p:sp>
-        <p:nvSpPr>
-          <p:cNvPr id="31" name="Rectangle 30"/>
+          <p:cNvPr id="27" name="Rectangle 26"/>
           <p:cNvSpPr/>
           <p:nvPr/>
         </p:nvSpPr>
         <p:spPr>
           <a:xfrm>
-            <a:off x="731520" y="3931920"/>
-            <a:ext cx="4023360" cy="365760"/>
+            <a:off x="6217920" y="1828800"/>
+            <a:ext cx="2697480" cy="50800"/>
           </a:xfrm>
           <a:prstGeom prst="rect">
             <a:avLst/>
           </a:prstGeom>
           <a:solidFill>
-            <a:srgbClr val="F9FAFB"/>
+            <a:srgbClr val="00889E"/>
           </a:solidFill>
           <a:ln>
             <a:noFill/>
@@ -15188,14 +15368,14 @@
       </p:sp>
       <p:sp>
         <p:nvSpPr>
-          <p:cNvPr id="32" name="TextBox 31"/>
+          <p:cNvPr id="28" name="TextBox 27"/>
           <p:cNvSpPr txBox="1"/>
           <p:nvPr/>
         </p:nvSpPr>
         <p:spPr>
           <a:xfrm>
-            <a:off x="731520" y="3977640"/>
-            <a:ext cx="1828800" cy="274320"/>
+            <a:off x="6355080" y="2011680"/>
+            <a:ext cx="2423160" cy="457200"/>
           </a:xfrm>
           <a:prstGeom prst="rect">
             <a:avLst/>
@@ -15207,7 +15387,7 @@
           <a:lstStyle/>
           <a:p>
             <a:pPr algn="l">
-              <a:defRPr sz="1000" b="0">
+              <a:defRPr sz="1100" b="1">
                 <a:solidFill>
                   <a:srgbClr val="1A1A2E"/>
                 </a:solidFill>
@@ -15215,8 +15395,166 @@
               </a:defRPr>
             </a:pPr>
             <a:r>
-              <a:t>Wage Emp. Working Age</a:t>
-            </a:r>
+              <a:t>LFP Working Age</a:t>
+            </a:r>
+            <a:br/>
+            <a:r>
+              <a:t>(25–65)</a:t>
+            </a:r>
+          </a:p>
+        </p:txBody>
+      </p:sp>
+      <p:sp>
+        <p:nvSpPr>
+          <p:cNvPr id="29" name="TextBox 28"/>
+          <p:cNvSpPr txBox="1"/>
+          <p:nvPr/>
+        </p:nvSpPr>
+        <p:spPr>
+          <a:xfrm>
+            <a:off x="6355080" y="2560320"/>
+            <a:ext cx="2423160" cy="640080"/>
+          </a:xfrm>
+          <a:prstGeom prst="rect">
+            <a:avLst/>
+          </a:prstGeom>
+          <a:noFill/>
+        </p:spPr>
+        <p:txBody>
+          <a:bodyPr wrap="square" anchor="t"/>
+          <a:lstStyle/>
+          <a:p>
+            <a:pPr algn="l">
+              <a:defRPr sz="3600" b="1">
+                <a:solidFill>
+                  <a:srgbClr val="00889E"/>
+                </a:solidFill>
+                <a:latin typeface="Calibri Light"/>
+              </a:defRPr>
+            </a:pPr>
+            <a:r>
+              <a:t>75.3%</a:t>
+            </a:r>
+          </a:p>
+        </p:txBody>
+      </p:sp>
+      <p:sp>
+        <p:nvSpPr>
+          <p:cNvPr id="30" name="TextBox 29"/>
+          <p:cNvSpPr txBox="1"/>
+          <p:nvPr/>
+        </p:nvSpPr>
+        <p:spPr>
+          <a:xfrm>
+            <a:off x="6355080" y="3200400"/>
+            <a:ext cx="2423160" cy="228600"/>
+          </a:xfrm>
+          <a:prstGeom prst="rect">
+            <a:avLst/>
+          </a:prstGeom>
+          <a:noFill/>
+        </p:spPr>
+        <p:txBody>
+          <a:bodyPr wrap="square" anchor="t"/>
+          <a:lstStyle/>
+          <a:p>
+            <a:pPr algn="l">
+              <a:defRPr sz="900" b="0">
+                <a:solidFill>
+                  <a:srgbClr val="7A7A8C"/>
+                </a:solidFill>
+                <a:latin typeface="Calibri"/>
+              </a:defRPr>
+            </a:pPr>
+            <a:r>
+              <a:t>EAP average</a:t>
+            </a:r>
+          </a:p>
+        </p:txBody>
+      </p:sp>
+      <p:sp>
+        <p:nvSpPr>
+          <p:cNvPr id="31" name="Rounded Rectangle 30"/>
+          <p:cNvSpPr/>
+          <p:nvPr/>
+        </p:nvSpPr>
+        <p:spPr>
+          <a:xfrm>
+            <a:off x="6355080" y="3520440"/>
+            <a:ext cx="2423160" cy="109728"/>
+          </a:xfrm>
+          <a:prstGeom prst="roundRect">
+            <a:avLst/>
+          </a:prstGeom>
+          <a:solidFill>
+            <a:srgbClr val="E0E2E6"/>
+          </a:solidFill>
+          <a:ln>
+            <a:noFill/>
+          </a:ln>
+        </p:spPr>
+        <p:style>
+          <a:lnRef idx="1">
+            <a:schemeClr val="accent1"/>
+          </a:lnRef>
+          <a:fillRef idx="3">
+            <a:schemeClr val="accent1"/>
+          </a:fillRef>
+          <a:effectRef idx="2">
+            <a:schemeClr val="accent1"/>
+          </a:effectRef>
+          <a:fontRef idx="minor">
+            <a:schemeClr val="lt1"/>
+          </a:fontRef>
+        </p:style>
+        <p:txBody>
+          <a:bodyPr rtlCol="0" anchor="ctr"/>
+          <a:lstStyle/>
+          <a:p>
+            <a:pPr algn="ctr"/>
+          </a:p>
+        </p:txBody>
+      </p:sp>
+      <p:sp>
+        <p:nvSpPr>
+          <p:cNvPr id="32" name="Rounded Rectangle 31"/>
+          <p:cNvSpPr/>
+          <p:nvPr/>
+        </p:nvSpPr>
+        <p:spPr>
+          <a:xfrm>
+            <a:off x="6355080" y="3520440"/>
+            <a:ext cx="1824639" cy="109728"/>
+          </a:xfrm>
+          <a:prstGeom prst="roundRect">
+            <a:avLst/>
+          </a:prstGeom>
+          <a:solidFill>
+            <a:srgbClr val="00889E"/>
+          </a:solidFill>
+          <a:ln>
+            <a:noFill/>
+          </a:ln>
+        </p:spPr>
+        <p:style>
+          <a:lnRef idx="1">
+            <a:schemeClr val="accent1"/>
+          </a:lnRef>
+          <a:fillRef idx="3">
+            <a:schemeClr val="accent1"/>
+          </a:fillRef>
+          <a:effectRef idx="2">
+            <a:schemeClr val="accent1"/>
+          </a:effectRef>
+          <a:fontRef idx="minor">
+            <a:schemeClr val="lt1"/>
+          </a:fontRef>
+        </p:style>
+        <p:txBody>
+          <a:bodyPr rtlCol="0" anchor="ctr"/>
+          <a:lstStyle/>
+          <a:p>
+            <a:pPr algn="ctr"/>
           </a:p>
         </p:txBody>
       </p:sp>
@@ -15228,8 +15566,8 @@
         </p:nvSpPr>
         <p:spPr>
           <a:xfrm>
-            <a:off x="2560320" y="3977640"/>
-            <a:ext cx="731520" cy="274320"/>
+            <a:off x="6355080" y="3749039"/>
+            <a:ext cx="2423160" cy="182880"/>
           </a:xfrm>
           <a:prstGeom prst="rect">
             <a:avLst/>
@@ -15240,16 +15578,16 @@
           <a:bodyPr wrap="square" anchor="t"/>
           <a:lstStyle/>
           <a:p>
-            <a:pPr algn="ctr">
-              <a:defRPr sz="1000" b="1">
-                <a:solidFill>
-                  <a:srgbClr val="006EAF"/>
+            <a:pPr algn="l">
+              <a:defRPr sz="800" b="0">
+                <a:solidFill>
+                  <a:srgbClr val="7A7A8C"/>
                 </a:solidFill>
                 <a:latin typeface="Calibri"/>
               </a:defRPr>
             </a:pPr>
             <a:r>
-              <a:t>71.0%</a:t>
+              <a:t>World: 72.6%</a:t>
             </a:r>
           </a:p>
         </p:txBody>
@@ -15262,8 +15600,8 @@
         </p:nvSpPr>
         <p:spPr>
           <a:xfrm>
-            <a:off x="3291840" y="3977640"/>
-            <a:ext cx="731520" cy="274320"/>
+            <a:off x="6355080" y="3931920"/>
+            <a:ext cx="2423160" cy="182880"/>
           </a:xfrm>
           <a:prstGeom prst="rect">
             <a:avLst/>
@@ -15274,64 +15612,30 @@
           <a:bodyPr wrap="square" anchor="t"/>
           <a:lstStyle/>
           <a:p>
-            <a:pPr algn="ctr">
-              <a:defRPr sz="1000" b="0">
-                <a:solidFill>
-                  <a:srgbClr val="7A7A8C"/>
+            <a:pPr algn="l">
+              <a:defRPr sz="800" b="1">
+                <a:solidFill>
+                  <a:srgbClr val="006EAF"/>
                 </a:solidFill>
                 <a:latin typeface="Calibri"/>
               </a:defRPr>
             </a:pPr>
             <a:r>
-              <a:t>59.8%</a:t>
-            </a:r>
-          </a:p>
-        </p:txBody>
-      </p:sp>
-      <p:sp>
-        <p:nvSpPr>
-          <p:cNvPr id="35" name="TextBox 34"/>
-          <p:cNvSpPr txBox="1"/>
-          <p:nvPr/>
-        </p:nvSpPr>
-        <p:spPr>
-          <a:xfrm>
-            <a:off x="4023360" y="3977640"/>
-            <a:ext cx="731520" cy="274320"/>
-          </a:xfrm>
-          <a:prstGeom prst="rect">
-            <a:avLst/>
-          </a:prstGeom>
-          <a:noFill/>
-        </p:spPr>
-        <p:txBody>
-          <a:bodyPr wrap="square" anchor="t"/>
-          <a:lstStyle/>
-          <a:p>
-            <a:pPr algn="ctr">
-              <a:defRPr sz="1000" b="0">
-                <a:solidFill>
-                  <a:srgbClr val="7A7A8C"/>
-                </a:solidFill>
-                <a:latin typeface="Calibri"/>
-              </a:defRPr>
-            </a:pPr>
-            <a:r>
-              <a:t>82.1%</a:t>
-            </a:r>
-          </a:p>
-        </p:txBody>
-      </p:sp>
-      <p:sp>
-        <p:nvSpPr>
-          <p:cNvPr id="36" name="Rounded Rectangle 35"/>
+              <a:t>Best: Palau 87.8%</a:t>
+            </a:r>
+          </a:p>
+        </p:txBody>
+      </p:sp>
+      <p:sp>
+        <p:nvSpPr>
+          <p:cNvPr id="35" name="Rounded Rectangle 34"/>
           <p:cNvSpPr/>
           <p:nvPr/>
         </p:nvSpPr>
         <p:spPr>
           <a:xfrm>
-            <a:off x="6217920" y="1828800"/>
-            <a:ext cx="5486400" cy="2743200"/>
+            <a:off x="9098280" y="1828800"/>
+            <a:ext cx="2697480" cy="2651760"/>
           </a:xfrm>
           <a:prstGeom prst="roundRect">
             <a:avLst/>
@@ -15367,14 +15671,394 @@
       </p:sp>
       <p:sp>
         <p:nvSpPr>
-          <p:cNvPr id="37" name="Rectangle 36"/>
+          <p:cNvPr id="36" name="Rectangle 35"/>
           <p:cNvSpPr/>
           <p:nvPr/>
         </p:nvSpPr>
         <p:spPr>
           <a:xfrm>
-            <a:off x="6217920" y="1828800"/>
-            <a:ext cx="5486400" cy="50800"/>
+            <a:off x="9098280" y="1828800"/>
+            <a:ext cx="2697480" cy="50800"/>
+          </a:xfrm>
+          <a:prstGeom prst="rect">
+            <a:avLst/>
+          </a:prstGeom>
+          <a:solidFill>
+            <a:srgbClr val="006EAF"/>
+          </a:solidFill>
+          <a:ln>
+            <a:noFill/>
+          </a:ln>
+        </p:spPr>
+        <p:style>
+          <a:lnRef idx="1">
+            <a:schemeClr val="accent1"/>
+          </a:lnRef>
+          <a:fillRef idx="3">
+            <a:schemeClr val="accent1"/>
+          </a:fillRef>
+          <a:effectRef idx="2">
+            <a:schemeClr val="accent1"/>
+          </a:effectRef>
+          <a:fontRef idx="minor">
+            <a:schemeClr val="lt1"/>
+          </a:fontRef>
+        </p:style>
+        <p:txBody>
+          <a:bodyPr rtlCol="0" anchor="ctr"/>
+          <a:lstStyle/>
+          <a:p>
+            <a:pPr algn="ctr"/>
+          </a:p>
+        </p:txBody>
+      </p:sp>
+      <p:sp>
+        <p:nvSpPr>
+          <p:cNvPr id="37" name="TextBox 36"/>
+          <p:cNvSpPr txBox="1"/>
+          <p:nvPr/>
+        </p:nvSpPr>
+        <p:spPr>
+          <a:xfrm>
+            <a:off x="9235440" y="2011680"/>
+            <a:ext cx="2423160" cy="457200"/>
+          </a:xfrm>
+          <a:prstGeom prst="rect">
+            <a:avLst/>
+          </a:prstGeom>
+          <a:noFill/>
+        </p:spPr>
+        <p:txBody>
+          <a:bodyPr wrap="square" anchor="t"/>
+          <a:lstStyle/>
+          <a:p>
+            <a:pPr algn="l">
+              <a:defRPr sz="1100" b="1">
+                <a:solidFill>
+                  <a:srgbClr val="1A1A2E"/>
+                </a:solidFill>
+                <a:latin typeface="Calibri"/>
+              </a:defRPr>
+            </a:pPr>
+            <a:r>
+              <a:t>Wage Emp.</a:t>
+            </a:r>
+            <a:br/>
+            <a:r>
+              <a:t>Working Age</a:t>
+            </a:r>
+          </a:p>
+        </p:txBody>
+      </p:sp>
+      <p:sp>
+        <p:nvSpPr>
+          <p:cNvPr id="38" name="TextBox 37"/>
+          <p:cNvSpPr txBox="1"/>
+          <p:nvPr/>
+        </p:nvSpPr>
+        <p:spPr>
+          <a:xfrm>
+            <a:off x="9235440" y="2560320"/>
+            <a:ext cx="2423160" cy="640080"/>
+          </a:xfrm>
+          <a:prstGeom prst="rect">
+            <a:avLst/>
+          </a:prstGeom>
+          <a:noFill/>
+        </p:spPr>
+        <p:txBody>
+          <a:bodyPr wrap="square" anchor="t"/>
+          <a:lstStyle/>
+          <a:p>
+            <a:pPr algn="l">
+              <a:defRPr sz="3600" b="1">
+                <a:solidFill>
+                  <a:srgbClr val="006EAF"/>
+                </a:solidFill>
+                <a:latin typeface="Calibri Light"/>
+              </a:defRPr>
+            </a:pPr>
+            <a:r>
+              <a:t>71.0%</a:t>
+            </a:r>
+          </a:p>
+        </p:txBody>
+      </p:sp>
+      <p:sp>
+        <p:nvSpPr>
+          <p:cNvPr id="39" name="TextBox 38"/>
+          <p:cNvSpPr txBox="1"/>
+          <p:nvPr/>
+        </p:nvSpPr>
+        <p:spPr>
+          <a:xfrm>
+            <a:off x="9235440" y="3200400"/>
+            <a:ext cx="2423160" cy="228600"/>
+          </a:xfrm>
+          <a:prstGeom prst="rect">
+            <a:avLst/>
+          </a:prstGeom>
+          <a:noFill/>
+        </p:spPr>
+        <p:txBody>
+          <a:bodyPr wrap="square" anchor="t"/>
+          <a:lstStyle/>
+          <a:p>
+            <a:pPr algn="l">
+              <a:defRPr sz="900" b="0">
+                <a:solidFill>
+                  <a:srgbClr val="7A7A8C"/>
+                </a:solidFill>
+                <a:latin typeface="Calibri"/>
+              </a:defRPr>
+            </a:pPr>
+            <a:r>
+              <a:t>wage share of employment</a:t>
+            </a:r>
+          </a:p>
+        </p:txBody>
+      </p:sp>
+      <p:sp>
+        <p:nvSpPr>
+          <p:cNvPr id="40" name="Rounded Rectangle 39"/>
+          <p:cNvSpPr/>
+          <p:nvPr/>
+        </p:nvSpPr>
+        <p:spPr>
+          <a:xfrm>
+            <a:off x="9235440" y="3520440"/>
+            <a:ext cx="2423160" cy="109728"/>
+          </a:xfrm>
+          <a:prstGeom prst="roundRect">
+            <a:avLst/>
+          </a:prstGeom>
+          <a:solidFill>
+            <a:srgbClr val="E0E2E6"/>
+          </a:solidFill>
+          <a:ln>
+            <a:noFill/>
+          </a:ln>
+        </p:spPr>
+        <p:style>
+          <a:lnRef idx="1">
+            <a:schemeClr val="accent1"/>
+          </a:lnRef>
+          <a:fillRef idx="3">
+            <a:schemeClr val="accent1"/>
+          </a:fillRef>
+          <a:effectRef idx="2">
+            <a:schemeClr val="accent1"/>
+          </a:effectRef>
+          <a:fontRef idx="minor">
+            <a:schemeClr val="lt1"/>
+          </a:fontRef>
+        </p:style>
+        <p:txBody>
+          <a:bodyPr rtlCol="0" anchor="ctr"/>
+          <a:lstStyle/>
+          <a:p>
+            <a:pPr algn="ctr"/>
+          </a:p>
+        </p:txBody>
+      </p:sp>
+      <p:sp>
+        <p:nvSpPr>
+          <p:cNvPr id="41" name="Rounded Rectangle 40"/>
+          <p:cNvSpPr/>
+          <p:nvPr/>
+        </p:nvSpPr>
+        <p:spPr>
+          <a:xfrm>
+            <a:off x="9235440" y="3520440"/>
+            <a:ext cx="1720443" cy="109728"/>
+          </a:xfrm>
+          <a:prstGeom prst="roundRect">
+            <a:avLst/>
+          </a:prstGeom>
+          <a:solidFill>
+            <a:srgbClr val="006EAF"/>
+          </a:solidFill>
+          <a:ln>
+            <a:noFill/>
+          </a:ln>
+        </p:spPr>
+        <p:style>
+          <a:lnRef idx="1">
+            <a:schemeClr val="accent1"/>
+          </a:lnRef>
+          <a:fillRef idx="3">
+            <a:schemeClr val="accent1"/>
+          </a:fillRef>
+          <a:effectRef idx="2">
+            <a:schemeClr val="accent1"/>
+          </a:effectRef>
+          <a:fontRef idx="minor">
+            <a:schemeClr val="lt1"/>
+          </a:fontRef>
+        </p:style>
+        <p:txBody>
+          <a:bodyPr rtlCol="0" anchor="ctr"/>
+          <a:lstStyle/>
+          <a:p>
+            <a:pPr algn="ctr"/>
+          </a:p>
+        </p:txBody>
+      </p:sp>
+      <p:sp>
+        <p:nvSpPr>
+          <p:cNvPr id="42" name="TextBox 41"/>
+          <p:cNvSpPr txBox="1"/>
+          <p:nvPr/>
+        </p:nvSpPr>
+        <p:spPr>
+          <a:xfrm>
+            <a:off x="9235440" y="3749039"/>
+            <a:ext cx="2423160" cy="182880"/>
+          </a:xfrm>
+          <a:prstGeom prst="rect">
+            <a:avLst/>
+          </a:prstGeom>
+          <a:noFill/>
+        </p:spPr>
+        <p:txBody>
+          <a:bodyPr wrap="square" anchor="t"/>
+          <a:lstStyle/>
+          <a:p>
+            <a:pPr algn="l">
+              <a:defRPr sz="800" b="0">
+                <a:solidFill>
+                  <a:srgbClr val="7A7A8C"/>
+                </a:solidFill>
+                <a:latin typeface="Calibri"/>
+              </a:defRPr>
+            </a:pPr>
+            <a:r>
+              <a:t>World: 59.8%</a:t>
+            </a:r>
+          </a:p>
+        </p:txBody>
+      </p:sp>
+      <p:sp>
+        <p:nvSpPr>
+          <p:cNvPr id="43" name="TextBox 42"/>
+          <p:cNvSpPr txBox="1"/>
+          <p:nvPr/>
+        </p:nvSpPr>
+        <p:spPr>
+          <a:xfrm>
+            <a:off x="9235440" y="3931920"/>
+            <a:ext cx="2423160" cy="182880"/>
+          </a:xfrm>
+          <a:prstGeom prst="rect">
+            <a:avLst/>
+          </a:prstGeom>
+          <a:noFill/>
+        </p:spPr>
+        <p:txBody>
+          <a:bodyPr wrap="square" anchor="t"/>
+          <a:lstStyle/>
+          <a:p>
+            <a:pPr algn="l">
+              <a:defRPr sz="800" b="1">
+                <a:solidFill>
+                  <a:srgbClr val="006EAF"/>
+                </a:solidFill>
+                <a:latin typeface="Calibri"/>
+              </a:defRPr>
+            </a:pPr>
+            <a:r>
+              <a:t>Best: Japan 92.4%</a:t>
+            </a:r>
+          </a:p>
+        </p:txBody>
+      </p:sp>
+      <p:sp>
+        <p:nvSpPr>
+          <p:cNvPr id="44" name="Rounded Rectangle 43"/>
+          <p:cNvSpPr/>
+          <p:nvPr/>
+        </p:nvSpPr>
+        <p:spPr>
+          <a:xfrm>
+            <a:off x="457200" y="4709160"/>
+            <a:ext cx="6858000" cy="1463040"/>
+          </a:xfrm>
+          <a:prstGeom prst="roundRect">
+            <a:avLst/>
+          </a:prstGeom>
+          <a:solidFill>
+            <a:srgbClr val="FFFFFF"/>
+          </a:solidFill>
+          <a:ln>
+            <a:noFill/>
+          </a:ln>
+        </p:spPr>
+        <p:style>
+          <a:lnRef idx="1">
+            <a:schemeClr val="accent1"/>
+          </a:lnRef>
+          <a:fillRef idx="3">
+            <a:schemeClr val="accent1"/>
+          </a:fillRef>
+          <a:effectRef idx="2">
+            <a:schemeClr val="accent1"/>
+          </a:effectRef>
+          <a:fontRef idx="minor">
+            <a:schemeClr val="lt1"/>
+          </a:fontRef>
+        </p:style>
+        <p:txBody>
+          <a:bodyPr rtlCol="0" anchor="ctr"/>
+          <a:lstStyle/>
+          <a:p>
+            <a:pPr algn="ctr"/>
+          </a:p>
+        </p:txBody>
+      </p:sp>
+      <p:sp>
+        <p:nvSpPr>
+          <p:cNvPr id="45" name="TextBox 44"/>
+          <p:cNvSpPr txBox="1"/>
+          <p:nvPr/>
+        </p:nvSpPr>
+        <p:spPr>
+          <a:xfrm>
+            <a:off x="731520" y="4800600"/>
+            <a:ext cx="4572000" cy="274320"/>
+          </a:xfrm>
+          <a:prstGeom prst="rect">
+            <a:avLst/>
+          </a:prstGeom>
+          <a:noFill/>
+        </p:spPr>
+        <p:txBody>
+          <a:bodyPr wrap="square" anchor="t"/>
+          <a:lstStyle/>
+          <a:p>
+            <a:pPr algn="l">
+              <a:defRPr sz="1100" b="1">
+                <a:solidFill>
+                  <a:srgbClr val="7A7A8C"/>
+                </a:solidFill>
+                <a:latin typeface="Calibri"/>
+              </a:defRPr>
+            </a:pPr>
+            <a:r>
+              <a:t>EMPLOYMENT COMPONENT: REGIONAL COMPARISON</a:t>
+            </a:r>
+          </a:p>
+        </p:txBody>
+      </p:sp>
+      <p:sp>
+        <p:nvSpPr>
+          <p:cNvPr id="46" name="Rectangle 45"/>
+          <p:cNvSpPr/>
+          <p:nvPr/>
+        </p:nvSpPr>
+        <p:spPr>
+          <a:xfrm>
+            <a:off x="731520" y="5074920"/>
+            <a:ext cx="1828800" cy="25400"/>
           </a:xfrm>
           <a:prstGeom prst="rect">
             <a:avLst/>
@@ -15408,85 +16092,17 @@
           </a:p>
         </p:txBody>
       </p:sp>
-      <p:sp>
-        <p:nvSpPr>
-          <p:cNvPr id="38" name="TextBox 37"/>
-          <p:cNvSpPr txBox="1"/>
-          <p:nvPr/>
-        </p:nvSpPr>
-        <p:spPr>
-          <a:xfrm>
-            <a:off x="6492240" y="1965960"/>
-            <a:ext cx="4572000" cy="274320"/>
-          </a:xfrm>
-          <a:prstGeom prst="rect">
-            <a:avLst/>
-          </a:prstGeom>
-          <a:noFill/>
-        </p:spPr>
-        <p:txBody>
-          <a:bodyPr wrap="square" anchor="t"/>
-          <a:lstStyle/>
-          <a:p>
-            <a:pPr algn="l">
-              <a:defRPr sz="1100" b="1">
-                <a:solidFill>
-                  <a:srgbClr val="E87D1E"/>
-                </a:solidFill>
-                <a:latin typeface="Calibri"/>
-              </a:defRPr>
-            </a:pPr>
-            <a:r>
-              <a:t>GENDER GAP BY REGION (Male − Female HCI+)</a:t>
-            </a:r>
-          </a:p>
-        </p:txBody>
-      </p:sp>
-      <p:sp>
-        <p:nvSpPr>
-          <p:cNvPr id="39" name="TextBox 38"/>
-          <p:cNvSpPr txBox="1"/>
-          <p:nvPr/>
-        </p:nvSpPr>
-        <p:spPr>
-          <a:xfrm>
-            <a:off x="6492240" y="2194560"/>
-            <a:ext cx="5029200" cy="228600"/>
-          </a:xfrm>
-          <a:prstGeom prst="rect">
-            <a:avLst/>
-          </a:prstGeom>
-          <a:noFill/>
-        </p:spPr>
-        <p:txBody>
-          <a:bodyPr wrap="square" anchor="t"/>
-          <a:lstStyle/>
-          <a:p>
-            <a:pPr algn="l">
-              <a:defRPr sz="900" b="0">
-                <a:solidFill>
-                  <a:srgbClr val="7A7A8C"/>
-                </a:solidFill>
-                <a:latin typeface="Calibri"/>
-              </a:defRPr>
-            </a:pPr>
-            <a:r>
-              <a:t>Positive = men outperform; Negative = women outperform</a:t>
-            </a:r>
-          </a:p>
-        </p:txBody>
-      </p:sp>
       <p:graphicFrame>
         <p:nvGraphicFramePr>
-          <p:cNvPr id="40" name="Chart 39"/>
+          <p:cNvPr id="47" name="Chart 46"/>
           <p:cNvGraphicFramePr>
             <a:graphicFrameLocks noGrp="1"/>
           </p:cNvGraphicFramePr>
           <p:nvPr/>
         </p:nvGraphicFramePr>
         <p:xfrm>
-          <a:off x="6492240" y="2468880"/>
-          <a:ext cx="4937760" cy="1920240"/>
+          <a:off x="731520" y="5120640"/>
+          <a:ext cx="6400800" cy="960120"/>
         </p:xfrm>
         <a:graphic>
           <a:graphicData uri="http://schemas.openxmlformats.org/drawingml/2006/chart">
@@ -15496,168 +16112,14 @@
       </p:graphicFrame>
       <p:sp>
         <p:nvSpPr>
-          <p:cNvPr id="41" name="Rectangle 40"/>
+          <p:cNvPr id="48" name="Rounded Rectangle 47"/>
           <p:cNvSpPr/>
           <p:nvPr/>
         </p:nvSpPr>
         <p:spPr>
           <a:xfrm>
-            <a:off x="8229600" y="4297680"/>
-            <a:ext cx="274320" cy="137160"/>
-          </a:xfrm>
-          <a:prstGeom prst="rect">
-            <a:avLst/>
-          </a:prstGeom>
-          <a:solidFill>
-            <a:srgbClr val="1B3A5C"/>
-          </a:solidFill>
-          <a:ln>
-            <a:noFill/>
-          </a:ln>
-        </p:spPr>
-        <p:style>
-          <a:lnRef idx="1">
-            <a:schemeClr val="accent1"/>
-          </a:lnRef>
-          <a:fillRef idx="3">
-            <a:schemeClr val="accent1"/>
-          </a:fillRef>
-          <a:effectRef idx="2">
-            <a:schemeClr val="accent1"/>
-          </a:effectRef>
-          <a:fontRef idx="minor">
-            <a:schemeClr val="lt1"/>
-          </a:fontRef>
-        </p:style>
-        <p:txBody>
-          <a:bodyPr rtlCol="0" anchor="ctr"/>
-          <a:lstStyle/>
-          <a:p>
-            <a:pPr algn="ctr"/>
-          </a:p>
-        </p:txBody>
-      </p:sp>
-      <p:sp>
-        <p:nvSpPr>
-          <p:cNvPr id="42" name="TextBox 41"/>
-          <p:cNvSpPr txBox="1"/>
-          <p:nvPr/>
-        </p:nvSpPr>
-        <p:spPr>
-          <a:xfrm>
-            <a:off x="8595360" y="4251960"/>
-            <a:ext cx="1371600" cy="182880"/>
-          </a:xfrm>
-          <a:prstGeom prst="rect">
-            <a:avLst/>
-          </a:prstGeom>
-          <a:noFill/>
-        </p:spPr>
-        <p:txBody>
-          <a:bodyPr wrap="square" anchor="t"/>
-          <a:lstStyle/>
-          <a:p>
-            <a:pPr algn="l">
-              <a:defRPr sz="800" b="0">
-                <a:solidFill>
-                  <a:srgbClr val="1A1A2E"/>
-                </a:solidFill>
-                <a:latin typeface="Calibri"/>
-              </a:defRPr>
-            </a:pPr>
-            <a:r>
-              <a:t>Men outperform</a:t>
-            </a:r>
-          </a:p>
-        </p:txBody>
-      </p:sp>
-      <p:sp>
-        <p:nvSpPr>
-          <p:cNvPr id="43" name="Rectangle 42"/>
-          <p:cNvSpPr/>
-          <p:nvPr/>
-        </p:nvSpPr>
-        <p:spPr>
-          <a:xfrm>
-            <a:off x="9875520" y="4297680"/>
-            <a:ext cx="274320" cy="137160"/>
-          </a:xfrm>
-          <a:prstGeom prst="rect">
-            <a:avLst/>
-          </a:prstGeom>
-          <a:solidFill>
-            <a:srgbClr val="E05A4F"/>
-          </a:solidFill>
-          <a:ln>
-            <a:noFill/>
-          </a:ln>
-        </p:spPr>
-        <p:style>
-          <a:lnRef idx="1">
-            <a:schemeClr val="accent1"/>
-          </a:lnRef>
-          <a:fillRef idx="3">
-            <a:schemeClr val="accent1"/>
-          </a:fillRef>
-          <a:effectRef idx="2">
-            <a:schemeClr val="accent1"/>
-          </a:effectRef>
-          <a:fontRef idx="minor">
-            <a:schemeClr val="lt1"/>
-          </a:fontRef>
-        </p:style>
-        <p:txBody>
-          <a:bodyPr rtlCol="0" anchor="ctr"/>
-          <a:lstStyle/>
-          <a:p>
-            <a:pPr algn="ctr"/>
-          </a:p>
-        </p:txBody>
-      </p:sp>
-      <p:sp>
-        <p:nvSpPr>
-          <p:cNvPr id="44" name="TextBox 43"/>
-          <p:cNvSpPr txBox="1"/>
-          <p:nvPr/>
-        </p:nvSpPr>
-        <p:spPr>
-          <a:xfrm>
-            <a:off x="10241280" y="4251960"/>
-            <a:ext cx="1371600" cy="182880"/>
-          </a:xfrm>
-          <a:prstGeom prst="rect">
-            <a:avLst/>
-          </a:prstGeom>
-          <a:noFill/>
-        </p:spPr>
-        <p:txBody>
-          <a:bodyPr wrap="square" anchor="t"/>
-          <a:lstStyle/>
-          <a:p>
-            <a:pPr algn="l">
-              <a:defRPr sz="800" b="0">
-                <a:solidFill>
-                  <a:srgbClr val="1A1A2E"/>
-                </a:solidFill>
-                <a:latin typeface="Calibri"/>
-              </a:defRPr>
-            </a:pPr>
-            <a:r>
-              <a:t>Women outperform</a:t>
-            </a:r>
-          </a:p>
-        </p:txBody>
-      </p:sp>
-      <p:sp>
-        <p:nvSpPr>
-          <p:cNvPr id="45" name="Rounded Rectangle 44"/>
-          <p:cNvSpPr/>
-          <p:nvPr/>
-        </p:nvSpPr>
-        <p:spPr>
-          <a:xfrm>
-            <a:off x="457200" y="4754880"/>
-            <a:ext cx="6858000" cy="1463040"/>
+            <a:off x="7589520" y="4709160"/>
+            <a:ext cx="4114800" cy="1463040"/>
           </a:xfrm>
           <a:prstGeom prst="roundRect">
             <a:avLst/>
@@ -15693,48 +16155,14 @@
       </p:sp>
       <p:sp>
         <p:nvSpPr>
-          <p:cNvPr id="46" name="TextBox 45"/>
-          <p:cNvSpPr txBox="1"/>
-          <p:nvPr/>
-        </p:nvSpPr>
-        <p:spPr>
-          <a:xfrm>
-            <a:off x="731520" y="4846320"/>
-            <a:ext cx="4572000" cy="228600"/>
-          </a:xfrm>
-          <a:prstGeom prst="rect">
-            <a:avLst/>
-          </a:prstGeom>
-          <a:noFill/>
-        </p:spPr>
-        <p:txBody>
-          <a:bodyPr wrap="square" anchor="t"/>
-          <a:lstStyle/>
-          <a:p>
-            <a:pPr algn="l">
-              <a:defRPr sz="1000" b="1">
-                <a:solidFill>
-                  <a:srgbClr val="7A7A8C"/>
-                </a:solidFill>
-                <a:latin typeface="Calibri"/>
-              </a:defRPr>
-            </a:pPr>
-            <a:r>
-              <a:t>EMPLOYMENT COMPONENT: REGIONAL COMPARISON</a:t>
-            </a:r>
-          </a:p>
-        </p:txBody>
-      </p:sp>
-      <p:sp>
-        <p:nvSpPr>
-          <p:cNvPr id="47" name="Rectangle 46"/>
+          <p:cNvPr id="49" name="Rectangle 48"/>
           <p:cNvSpPr/>
           <p:nvPr/>
         </p:nvSpPr>
         <p:spPr>
           <a:xfrm>
-            <a:off x="731520" y="5074920"/>
-            <a:ext cx="1371600" cy="25400"/>
+            <a:off x="7589520" y="4709160"/>
+            <a:ext cx="63500" cy="1463040"/>
           </a:xfrm>
           <a:prstGeom prst="rect">
             <a:avLst/>
@@ -15768,34 +16196,401 @@
           </a:p>
         </p:txBody>
       </p:sp>
-      <p:graphicFrame>
-        <p:nvGraphicFramePr>
-          <p:cNvPr id="48" name="Chart 47"/>
-          <p:cNvGraphicFramePr>
-            <a:graphicFrameLocks noGrp="1"/>
-          </p:cNvGraphicFramePr>
-          <p:nvPr/>
-        </p:nvGraphicFramePr>
-        <p:xfrm>
-          <a:off x="731520" y="5120640"/>
-          <a:ext cx="6400800" cy="1005840"/>
-        </p:xfrm>
-        <a:graphic>
-          <a:graphicData uri="http://schemas.openxmlformats.org/drawingml/2006/chart">
-            <c:chart xmlns:c="http://schemas.openxmlformats.org/drawingml/2006/chart" r:id="rId3"/>
-          </a:graphicData>
-        </a:graphic>
-      </p:graphicFrame>
-      <p:sp>
-        <p:nvSpPr>
-          <p:cNvPr id="49" name="Rounded Rectangle 48"/>
+      <p:sp>
+        <p:nvSpPr>
+          <p:cNvPr id="50" name="TextBox 49"/>
+          <p:cNvSpPr txBox="1"/>
+          <p:nvPr/>
+        </p:nvSpPr>
+        <p:spPr>
+          <a:xfrm>
+            <a:off x="7863840" y="4800600"/>
+            <a:ext cx="3657600" cy="228600"/>
+          </a:xfrm>
+          <a:prstGeom prst="rect">
+            <a:avLst/>
+          </a:prstGeom>
+          <a:noFill/>
+        </p:spPr>
+        <p:txBody>
+          <a:bodyPr wrap="square" anchor="t"/>
+          <a:lstStyle/>
+          <a:p>
+            <a:pPr algn="l">
+              <a:defRPr sz="1000" b="1">
+                <a:solidFill>
+                  <a:srgbClr val="E87D1E"/>
+                </a:solidFill>
+                <a:latin typeface="Calibri"/>
+              </a:defRPr>
+            </a:pPr>
+            <a:r>
+              <a:t>KEY INSIGHT</a:t>
+            </a:r>
+          </a:p>
+        </p:txBody>
+      </p:sp>
+      <p:sp>
+        <p:nvSpPr>
+          <p:cNvPr id="51" name="TextBox 50"/>
+          <p:cNvSpPr txBox="1"/>
+          <p:nvPr/>
+        </p:nvSpPr>
+        <p:spPr>
+          <a:xfrm>
+            <a:off x="7863840" y="5029200"/>
+            <a:ext cx="3657600" cy="1005840"/>
+          </a:xfrm>
+          <a:prstGeom prst="rect">
+            <a:avLst/>
+          </a:prstGeom>
+          <a:noFill/>
+        </p:spPr>
+        <p:txBody>
+          <a:bodyPr wrap="square" anchor="t"/>
+          <a:lstStyle/>
+          <a:p>
+            <a:pPr algn="l">
+              <a:defRPr sz="1000" b="0">
+                <a:solidFill>
+                  <a:srgbClr val="1A1A2E"/>
+                </a:solidFill>
+                <a:latin typeface="Calibri"/>
+              </a:defRPr>
+            </a:pPr>
+            <a:r>
+              <a:t>EAP's employment score (40.7) ranks 3rd among regions and exceeds the world average (37.2). Youth LFP (60.0%) is notably high — well above the global average of 48.2%. Wage employment for working-age adults (71.0%) also surpasses the world average (59.8%). Japan leads in wage employment, while Palau and Nauru post strong labor force participation rates.</a:t>
+            </a:r>
+          </a:p>
+        </p:txBody>
+      </p:sp>
+      <p:sp>
+        <p:nvSpPr>
+          <p:cNvPr id="52" name="Rectangle 51"/>
           <p:cNvSpPr/>
           <p:nvPr/>
         </p:nvSpPr>
         <p:spPr>
           <a:xfrm>
-            <a:off x="7589520" y="4754880"/>
-            <a:ext cx="4114800" cy="1463040"/>
+            <a:off x="0" y="6400800"/>
+            <a:ext cx="12191695" cy="457200"/>
+          </a:xfrm>
+          <a:prstGeom prst="rect">
+            <a:avLst/>
+          </a:prstGeom>
+          <a:solidFill>
+            <a:srgbClr val="002B49"/>
+          </a:solidFill>
+          <a:ln>
+            <a:noFill/>
+          </a:ln>
+        </p:spPr>
+        <p:style>
+          <a:lnRef idx="1">
+            <a:schemeClr val="accent1"/>
+          </a:lnRef>
+          <a:fillRef idx="3">
+            <a:schemeClr val="accent1"/>
+          </a:fillRef>
+          <a:effectRef idx="2">
+            <a:schemeClr val="accent1"/>
+          </a:effectRef>
+          <a:fontRef idx="minor">
+            <a:schemeClr val="lt1"/>
+          </a:fontRef>
+        </p:style>
+        <p:txBody>
+          <a:bodyPr rtlCol="0" anchor="ctr"/>
+          <a:lstStyle/>
+          <a:p>
+            <a:pPr algn="ctr"/>
+          </a:p>
+        </p:txBody>
+      </p:sp>
+      <p:sp>
+        <p:nvSpPr>
+          <p:cNvPr id="53" name="TextBox 52"/>
+          <p:cNvSpPr txBox="1"/>
+          <p:nvPr/>
+        </p:nvSpPr>
+        <p:spPr>
+          <a:xfrm>
+            <a:off x="548640" y="6464808"/>
+            <a:ext cx="5486400" cy="320040"/>
+          </a:xfrm>
+          <a:prstGeom prst="rect">
+            <a:avLst/>
+          </a:prstGeom>
+          <a:noFill/>
+        </p:spPr>
+        <p:txBody>
+          <a:bodyPr wrap="square" anchor="t"/>
+          <a:lstStyle/>
+          <a:p>
+            <a:pPr algn="l">
+              <a:defRPr sz="800" b="0">
+                <a:solidFill>
+                  <a:srgbClr val="AABBCC"/>
+                </a:solidFill>
+                <a:latin typeface="Calibri"/>
+              </a:defRPr>
+            </a:pPr>
+            <a:r>
+              <a:t>Source: World Bank Human Capital Index Plus (HCI+) 2025  |  github.com/worldbank/HCI-Plus</a:t>
+            </a:r>
+          </a:p>
+        </p:txBody>
+      </p:sp>
+      <p:sp>
+        <p:nvSpPr>
+          <p:cNvPr id="54" name="TextBox 53"/>
+          <p:cNvSpPr txBox="1"/>
+          <p:nvPr/>
+        </p:nvSpPr>
+        <p:spPr>
+          <a:xfrm>
+            <a:off x="9144000" y="6464808"/>
+            <a:ext cx="2286000" cy="320040"/>
+          </a:xfrm>
+          <a:prstGeom prst="rect">
+            <a:avLst/>
+          </a:prstGeom>
+          <a:noFill/>
+        </p:spPr>
+        <p:txBody>
+          <a:bodyPr wrap="square" anchor="t"/>
+          <a:lstStyle/>
+          <a:p>
+            <a:pPr algn="r">
+              <a:defRPr sz="800" b="0">
+                <a:solidFill>
+                  <a:srgbClr val="00889E"/>
+                </a:solidFill>
+                <a:latin typeface="Calibri"/>
+              </a:defRPr>
+            </a:pPr>
+            <a:r>
+              <a:t>humancapital.worldbank.org/hciplus</a:t>
+            </a:r>
+          </a:p>
+        </p:txBody>
+      </p:sp>
+      <p:sp>
+        <p:nvSpPr>
+          <p:cNvPr id="55" name="TextBox 54"/>
+          <p:cNvSpPr txBox="1"/>
+          <p:nvPr/>
+        </p:nvSpPr>
+        <p:spPr>
+          <a:xfrm>
+            <a:off x="11521440" y="6464808"/>
+            <a:ext cx="457200" cy="320040"/>
+          </a:xfrm>
+          <a:prstGeom prst="rect">
+            <a:avLst/>
+          </a:prstGeom>
+          <a:noFill/>
+        </p:spPr>
+        <p:txBody>
+          <a:bodyPr wrap="square" anchor="t"/>
+          <a:lstStyle/>
+          <a:p>
+            <a:pPr algn="r">
+              <a:defRPr sz="800" b="0">
+                <a:solidFill>
+                  <a:srgbClr val="FFFFFF"/>
+                </a:solidFill>
+                <a:latin typeface="Calibri"/>
+              </a:defRPr>
+            </a:pPr>
+            <a:r>
+              <a:t>6</a:t>
+            </a:r>
+          </a:p>
+        </p:txBody>
+      </p:sp>
+    </p:spTree>
+  </p:cSld>
+  <p:clrMapOvr>
+    <a:masterClrMapping/>
+  </p:clrMapOvr>
+</p:sld>
+</file>
+
+<file path=ppt/slides/slide8.xml><?xml version="1.0" encoding="utf-8"?>
+<p:sld xmlns:a="http://schemas.openxmlformats.org/drawingml/2006/main" xmlns:p="http://schemas.openxmlformats.org/presentationml/2006/main" xmlns:r="http://schemas.openxmlformats.org/officeDocument/2006/relationships">
+  <p:cSld>
+    <p:spTree>
+      <p:nvGrpSpPr>
+        <p:cNvPr id="1" name=""/>
+        <p:cNvGrpSpPr/>
+        <p:nvPr/>
+      </p:nvGrpSpPr>
+      <p:grpSpPr/>
+      <p:sp>
+        <p:nvSpPr>
+          <p:cNvPr id="2" name="Rectangle 1"/>
+          <p:cNvSpPr/>
+          <p:nvPr/>
+        </p:nvSpPr>
+        <p:spPr>
+          <a:xfrm>
+            <a:off x="0" y="0"/>
+            <a:ext cx="12191695" cy="6858000"/>
+          </a:xfrm>
+          <a:prstGeom prst="rect">
+            <a:avLst/>
+          </a:prstGeom>
+          <a:solidFill>
+            <a:srgbClr val="F7F8FA"/>
+          </a:solidFill>
+          <a:ln>
+            <a:noFill/>
+          </a:ln>
+        </p:spPr>
+        <p:style>
+          <a:lnRef idx="1">
+            <a:schemeClr val="accent1"/>
+          </a:lnRef>
+          <a:fillRef idx="3">
+            <a:schemeClr val="accent1"/>
+          </a:fillRef>
+          <a:effectRef idx="2">
+            <a:schemeClr val="accent1"/>
+          </a:effectRef>
+          <a:fontRef idx="minor">
+            <a:schemeClr val="lt1"/>
+          </a:fontRef>
+        </p:style>
+        <p:txBody>
+          <a:bodyPr rtlCol="0" anchor="ctr"/>
+          <a:lstStyle/>
+          <a:p>
+            <a:pPr algn="ctr"/>
+          </a:p>
+        </p:txBody>
+      </p:sp>
+      <p:sp>
+        <p:nvSpPr>
+          <p:cNvPr id="3" name="Rectangle 2"/>
+          <p:cNvSpPr/>
+          <p:nvPr/>
+        </p:nvSpPr>
+        <p:spPr>
+          <a:xfrm>
+            <a:off x="0" y="0"/>
+            <a:ext cx="12191695" cy="914400"/>
+          </a:xfrm>
+          <a:prstGeom prst="rect">
+            <a:avLst/>
+          </a:prstGeom>
+          <a:solidFill>
+            <a:srgbClr val="002B49"/>
+          </a:solidFill>
+          <a:ln>
+            <a:noFill/>
+          </a:ln>
+        </p:spPr>
+        <p:style>
+          <a:lnRef idx="1">
+            <a:schemeClr val="accent1"/>
+          </a:lnRef>
+          <a:fillRef idx="3">
+            <a:schemeClr val="accent1"/>
+          </a:fillRef>
+          <a:effectRef idx="2">
+            <a:schemeClr val="accent1"/>
+          </a:effectRef>
+          <a:fontRef idx="minor">
+            <a:schemeClr val="lt1"/>
+          </a:fontRef>
+        </p:style>
+        <p:txBody>
+          <a:bodyPr rtlCol="0" anchor="ctr"/>
+          <a:lstStyle/>
+          <a:p>
+            <a:pPr algn="ctr"/>
+          </a:p>
+        </p:txBody>
+      </p:sp>
+      <p:sp>
+        <p:nvSpPr>
+          <p:cNvPr id="4" name="TextBox 3"/>
+          <p:cNvSpPr txBox="1"/>
+          <p:nvPr/>
+        </p:nvSpPr>
+        <p:spPr>
+          <a:xfrm>
+            <a:off x="548640" y="137160"/>
+            <a:ext cx="7315200" cy="640080"/>
+          </a:xfrm>
+          <a:prstGeom prst="rect">
+            <a:avLst/>
+          </a:prstGeom>
+          <a:noFill/>
+        </p:spPr>
+        <p:txBody>
+          <a:bodyPr wrap="square" anchor="ctr"/>
+          <a:lstStyle/>
+          <a:p>
+            <a:pPr algn="l">
+              <a:defRPr sz="2400" b="1">
+                <a:solidFill>
+                  <a:srgbClr val="FFFFFF"/>
+                </a:solidFill>
+                <a:latin typeface="Calibri Light"/>
+              </a:defRPr>
+            </a:pPr>
+            <a:r>
+              <a:t>Gender Analysis  |  Male vs Female HCI+</a:t>
+            </a:r>
+          </a:p>
+        </p:txBody>
+      </p:sp>
+      <p:sp>
+        <p:nvSpPr>
+          <p:cNvPr id="5" name="TextBox 4"/>
+          <p:cNvSpPr txBox="1"/>
+          <p:nvPr/>
+        </p:nvSpPr>
+        <p:spPr>
+          <a:xfrm>
+            <a:off x="8686800" y="137160"/>
+            <a:ext cx="3200400" cy="640080"/>
+          </a:xfrm>
+          <a:prstGeom prst="rect">
+            <a:avLst/>
+          </a:prstGeom>
+          <a:noFill/>
+        </p:spPr>
+        <p:txBody>
+          <a:bodyPr wrap="square" anchor="ctr"/>
+          <a:lstStyle/>
+          <a:p>
+            <a:pPr algn="r">
+              <a:defRPr sz="2200" b="1">
+                <a:solidFill>
+                  <a:srgbClr val="006EAF"/>
+                </a:solidFill>
+                <a:latin typeface="Calibri"/>
+              </a:defRPr>
+            </a:pPr>
+            <a:r>
+              <a:t>East Asia &amp; Pacific</a:t>
+            </a:r>
+          </a:p>
+        </p:txBody>
+      </p:sp>
+      <p:sp>
+        <p:nvSpPr>
+          <p:cNvPr id="6" name="Rounded Rectangle 5"/>
+          <p:cNvSpPr/>
+          <p:nvPr/>
+        </p:nvSpPr>
+        <p:spPr>
+          <a:xfrm>
+            <a:off x="457200" y="1188720"/>
+            <a:ext cx="8229600" cy="5303520"/>
           </a:xfrm>
           <a:prstGeom prst="roundRect">
             <a:avLst/>
@@ -15831,20 +16626,54 @@
       </p:sp>
       <p:sp>
         <p:nvSpPr>
-          <p:cNvPr id="50" name="Rectangle 49"/>
+          <p:cNvPr id="7" name="TextBox 6"/>
+          <p:cNvSpPr txBox="1"/>
+          <p:nvPr/>
+        </p:nvSpPr>
+        <p:spPr>
+          <a:xfrm>
+            <a:off x="731520" y="1371600"/>
+            <a:ext cx="6400800" cy="274320"/>
+          </a:xfrm>
+          <a:prstGeom prst="rect">
+            <a:avLst/>
+          </a:prstGeom>
+          <a:noFill/>
+        </p:spPr>
+        <p:txBody>
+          <a:bodyPr wrap="square" anchor="t"/>
+          <a:lstStyle/>
+          <a:p>
+            <a:pPr algn="l">
+              <a:defRPr sz="1100" b="1">
+                <a:solidFill>
+                  <a:srgbClr val="7A7A8C"/>
+                </a:solidFill>
+                <a:latin typeface="Calibri"/>
+              </a:defRPr>
+            </a:pPr>
+            <a:r>
+              <a:t>MALE HCI+ vs FEMALE HCI+ BY ECONOMY</a:t>
+            </a:r>
+          </a:p>
+        </p:txBody>
+      </p:sp>
+      <p:sp>
+        <p:nvSpPr>
+          <p:cNvPr id="8" name="Rectangle 7"/>
           <p:cNvSpPr/>
           <p:nvPr/>
         </p:nvSpPr>
         <p:spPr>
           <a:xfrm>
-            <a:off x="7589520" y="4754880"/>
-            <a:ext cx="63500" cy="1463040"/>
+            <a:off x="731520" y="1691640"/>
+            <a:ext cx="2286000" cy="38100"/>
           </a:xfrm>
           <a:prstGeom prst="rect">
             <a:avLst/>
           </a:prstGeom>
           <a:solidFill>
-            <a:srgbClr val="E87D1E"/>
+            <a:srgbClr val="006EAF"/>
           </a:solidFill>
           <a:ln>
             <a:noFill/>
@@ -15874,14 +16703,1509 @@
       </p:sp>
       <p:sp>
         <p:nvSpPr>
+          <p:cNvPr id="9" name="TextBox 8"/>
+          <p:cNvSpPr txBox="1"/>
+          <p:nvPr/>
+        </p:nvSpPr>
+        <p:spPr>
+          <a:xfrm>
+            <a:off x="731520" y="1783080"/>
+            <a:ext cx="6400800" cy="228600"/>
+          </a:xfrm>
+          <a:prstGeom prst="rect">
+            <a:avLst/>
+          </a:prstGeom>
+          <a:noFill/>
+        </p:spPr>
+        <p:txBody>
+          <a:bodyPr wrap="square" anchor="t"/>
+          <a:lstStyle/>
+          <a:p>
+            <a:pPr algn="l">
+              <a:defRPr sz="900" b="0">
+                <a:solidFill>
+                  <a:srgbClr val="7A7A8C"/>
+                </a:solidFill>
+                <a:latin typeface="Calibri"/>
+              </a:defRPr>
+            </a:pPr>
+            <a:r>
+              <a:t>Countries above the 45° line: Male HCI+ &gt; Female HCI+. Below: Female HCI+ &gt; Male HCI+.</a:t>
+            </a:r>
+          </a:p>
+        </p:txBody>
+      </p:sp>
+      <p:graphicFrame>
+        <p:nvGraphicFramePr>
+          <p:cNvPr id="10" name="Chart 9"/>
+          <p:cNvGraphicFramePr>
+            <a:graphicFrameLocks noGrp="1"/>
+          </p:cNvGraphicFramePr>
+          <p:nvPr/>
+        </p:nvGraphicFramePr>
+        <p:xfrm>
+          <a:off x="731520" y="2011680"/>
+          <a:ext cx="7680960" cy="4206240"/>
+        </p:xfrm>
+        <a:graphic>
+          <a:graphicData uri="http://schemas.openxmlformats.org/drawingml/2006/chart">
+            <c:chart xmlns:c="http://schemas.openxmlformats.org/drawingml/2006/chart" r:id="rId2"/>
+          </a:graphicData>
+        </a:graphic>
+      </p:graphicFrame>
+      <p:sp>
+        <p:nvSpPr>
+          <p:cNvPr id="11" name="TextBox 10"/>
+          <p:cNvSpPr txBox="1"/>
+          <p:nvPr/>
+        </p:nvSpPr>
+        <p:spPr>
+          <a:xfrm>
+            <a:off x="7018020" y="2129942"/>
+            <a:ext cx="548640" cy="182880"/>
+          </a:xfrm>
+          <a:prstGeom prst="rect">
+            <a:avLst/>
+          </a:prstGeom>
+          <a:noFill/>
+        </p:spPr>
+        <p:txBody>
+          <a:bodyPr wrap="square" anchor="t"/>
+          <a:lstStyle/>
+          <a:p>
+            <a:pPr algn="ctr">
+              <a:defRPr sz="700" b="1">
+                <a:solidFill>
+                  <a:srgbClr val="6B8CA3"/>
+                </a:solidFill>
+                <a:latin typeface="Calibri"/>
+              </a:defRPr>
+            </a:pPr>
+            <a:r>
+              <a:t>JPN</a:t>
+            </a:r>
+          </a:p>
+        </p:txBody>
+      </p:sp>
+      <p:sp>
+        <p:nvSpPr>
+          <p:cNvPr id="12" name="TextBox 11"/>
+          <p:cNvSpPr txBox="1"/>
+          <p:nvPr/>
+        </p:nvSpPr>
+        <p:spPr>
+          <a:xfrm>
+            <a:off x="7266127" y="2332024"/>
+            <a:ext cx="548640" cy="182880"/>
+          </a:xfrm>
+          <a:prstGeom prst="rect">
+            <a:avLst/>
+          </a:prstGeom>
+          <a:noFill/>
+        </p:spPr>
+        <p:txBody>
+          <a:bodyPr wrap="square" anchor="t"/>
+          <a:lstStyle/>
+          <a:p>
+            <a:pPr algn="ctr">
+              <a:defRPr sz="700" b="1">
+                <a:solidFill>
+                  <a:srgbClr val="E07B73"/>
+                </a:solidFill>
+                <a:latin typeface="Calibri"/>
+              </a:defRPr>
+            </a:pPr>
+            <a:r>
+              <a:t>SGP</a:t>
+            </a:r>
+          </a:p>
+        </p:txBody>
+      </p:sp>
+      <p:sp>
+        <p:nvSpPr>
+          <p:cNvPr id="13" name="TextBox 12"/>
+          <p:cNvSpPr txBox="1"/>
+          <p:nvPr/>
+        </p:nvSpPr>
+        <p:spPr>
+          <a:xfrm>
+            <a:off x="6318808" y="2444953"/>
+            <a:ext cx="548640" cy="182880"/>
+          </a:xfrm>
+          <a:prstGeom prst="rect">
+            <a:avLst/>
+          </a:prstGeom>
+          <a:noFill/>
+        </p:spPr>
+        <p:txBody>
+          <a:bodyPr wrap="square" anchor="t"/>
+          <a:lstStyle/>
+          <a:p>
+            <a:pPr algn="ctr">
+              <a:defRPr sz="700" b="1">
+                <a:solidFill>
+                  <a:srgbClr val="6B8CA3"/>
+                </a:solidFill>
+                <a:latin typeface="Calibri"/>
+              </a:defRPr>
+            </a:pPr>
+            <a:r>
+              <a:t>KOR</a:t>
+            </a:r>
+          </a:p>
+        </p:txBody>
+      </p:sp>
+      <p:sp>
+        <p:nvSpPr>
+          <p:cNvPr id="14" name="TextBox 13"/>
+          <p:cNvSpPr txBox="1"/>
+          <p:nvPr/>
+        </p:nvSpPr>
+        <p:spPr>
+          <a:xfrm>
+            <a:off x="6540601" y="2439009"/>
+            <a:ext cx="548640" cy="182880"/>
+          </a:xfrm>
+          <a:prstGeom prst="rect">
+            <a:avLst/>
+          </a:prstGeom>
+          <a:noFill/>
+        </p:spPr>
+        <p:txBody>
+          <a:bodyPr wrap="square" anchor="t"/>
+          <a:lstStyle/>
+          <a:p>
+            <a:pPr algn="ctr">
+              <a:defRPr sz="700" b="1">
+                <a:solidFill>
+                  <a:srgbClr val="6B8CA3"/>
+                </a:solidFill>
+                <a:latin typeface="Calibri"/>
+              </a:defRPr>
+            </a:pPr>
+            <a:r>
+              <a:t>AUS</a:t>
+            </a:r>
+          </a:p>
+        </p:txBody>
+      </p:sp>
+      <p:sp>
+        <p:nvSpPr>
+          <p:cNvPr id="15" name="TextBox 14"/>
+          <p:cNvSpPr txBox="1"/>
+          <p:nvPr/>
+        </p:nvSpPr>
+        <p:spPr>
+          <a:xfrm>
+            <a:off x="6461658" y="2670809"/>
+            <a:ext cx="548640" cy="182880"/>
+          </a:xfrm>
+          <a:prstGeom prst="rect">
+            <a:avLst/>
+          </a:prstGeom>
+          <a:noFill/>
+        </p:spPr>
+        <p:txBody>
+          <a:bodyPr wrap="square" anchor="t"/>
+          <a:lstStyle/>
+          <a:p>
+            <a:pPr algn="ctr">
+              <a:defRPr sz="700" b="1">
+                <a:solidFill>
+                  <a:srgbClr val="6B8CA3"/>
+                </a:solidFill>
+                <a:latin typeface="Calibri"/>
+              </a:defRPr>
+            </a:pPr>
+            <a:r>
+              <a:t>NZL</a:t>
+            </a:r>
+          </a:p>
+        </p:txBody>
+      </p:sp>
+      <p:sp>
+        <p:nvSpPr>
+          <p:cNvPr id="16" name="TextBox 15"/>
+          <p:cNvSpPr txBox="1"/>
+          <p:nvPr/>
+        </p:nvSpPr>
+        <p:spPr>
+          <a:xfrm>
+            <a:off x="6127089" y="2680716"/>
+            <a:ext cx="548640" cy="182880"/>
+          </a:xfrm>
+          <a:prstGeom prst="rect">
+            <a:avLst/>
+          </a:prstGeom>
+          <a:noFill/>
+        </p:spPr>
+        <p:txBody>
+          <a:bodyPr wrap="square" anchor="t"/>
+          <a:lstStyle/>
+          <a:p>
+            <a:pPr algn="ctr">
+              <a:defRPr sz="700" b="1">
+                <a:solidFill>
+                  <a:srgbClr val="6B8CA3"/>
+                </a:solidFill>
+                <a:latin typeface="Calibri"/>
+              </a:defRPr>
+            </a:pPr>
+            <a:r>
+              <a:t>HKG</a:t>
+            </a:r>
+          </a:p>
+        </p:txBody>
+      </p:sp>
+      <p:sp>
+        <p:nvSpPr>
+          <p:cNvPr id="17" name="TextBox 16"/>
+          <p:cNvSpPr txBox="1"/>
+          <p:nvPr/>
+        </p:nvSpPr>
+        <p:spPr>
+          <a:xfrm>
+            <a:off x="6367678" y="2906572"/>
+            <a:ext cx="548640" cy="182880"/>
+          </a:xfrm>
+          <a:prstGeom prst="rect">
+            <a:avLst/>
+          </a:prstGeom>
+          <a:noFill/>
+        </p:spPr>
+        <p:txBody>
+          <a:bodyPr wrap="square" anchor="t"/>
+          <a:lstStyle/>
+          <a:p>
+            <a:pPr algn="ctr">
+              <a:defRPr sz="700" b="1">
+                <a:solidFill>
+                  <a:srgbClr val="E07B73"/>
+                </a:solidFill>
+                <a:latin typeface="Calibri"/>
+              </a:defRPr>
+            </a:pPr>
+            <a:r>
+              <a:t>MAC</a:t>
+            </a:r>
+          </a:p>
+        </p:txBody>
+      </p:sp>
+      <p:sp>
+        <p:nvSpPr>
+          <p:cNvPr id="18" name="TextBox 17"/>
+          <p:cNvSpPr txBox="1"/>
+          <p:nvPr/>
+        </p:nvSpPr>
+        <p:spPr>
+          <a:xfrm>
+            <a:off x="5059476" y="3647541"/>
+            <a:ext cx="548640" cy="182880"/>
+          </a:xfrm>
+          <a:prstGeom prst="rect">
+            <a:avLst/>
+          </a:prstGeom>
+          <a:noFill/>
+        </p:spPr>
+        <p:txBody>
+          <a:bodyPr wrap="square" anchor="t"/>
+          <a:lstStyle/>
+          <a:p>
+            <a:pPr algn="ctr">
+              <a:defRPr sz="700" b="1">
+                <a:solidFill>
+                  <a:srgbClr val="E07B73"/>
+                </a:solidFill>
+                <a:latin typeface="Calibri"/>
+              </a:defRPr>
+            </a:pPr>
+            <a:r>
+              <a:t>CHN</a:t>
+            </a:r>
+          </a:p>
+        </p:txBody>
+      </p:sp>
+      <p:sp>
+        <p:nvSpPr>
+          <p:cNvPr id="19" name="TextBox 18"/>
+          <p:cNvSpPr txBox="1"/>
+          <p:nvPr/>
+        </p:nvSpPr>
+        <p:spPr>
+          <a:xfrm>
+            <a:off x="4886553" y="3714902"/>
+            <a:ext cx="548640" cy="182880"/>
+          </a:xfrm>
+          <a:prstGeom prst="rect">
+            <a:avLst/>
+          </a:prstGeom>
+          <a:noFill/>
+        </p:spPr>
+        <p:txBody>
+          <a:bodyPr wrap="square" anchor="t"/>
+          <a:lstStyle/>
+          <a:p>
+            <a:pPr algn="ctr">
+              <a:defRPr sz="700" b="1">
+                <a:solidFill>
+                  <a:srgbClr val="E07B73"/>
+                </a:solidFill>
+                <a:latin typeface="Calibri"/>
+              </a:defRPr>
+            </a:pPr>
+            <a:r>
+              <a:t>VNM</a:t>
+            </a:r>
+          </a:p>
+        </p:txBody>
+      </p:sp>
+      <p:sp>
+        <p:nvSpPr>
+          <p:cNvPr id="20" name="TextBox 19"/>
+          <p:cNvSpPr txBox="1"/>
+          <p:nvPr/>
+        </p:nvSpPr>
+        <p:spPr>
+          <a:xfrm>
+            <a:off x="4638446" y="3833774"/>
+            <a:ext cx="548640" cy="182880"/>
+          </a:xfrm>
+          <a:prstGeom prst="rect">
+            <a:avLst/>
+          </a:prstGeom>
+          <a:noFill/>
+        </p:spPr>
+        <p:txBody>
+          <a:bodyPr wrap="square" anchor="t"/>
+          <a:lstStyle/>
+          <a:p>
+            <a:pPr algn="ctr">
+              <a:defRPr sz="700" b="1">
+                <a:solidFill>
+                  <a:srgbClr val="E07B73"/>
+                </a:solidFill>
+                <a:latin typeface="Calibri"/>
+              </a:defRPr>
+            </a:pPr>
+            <a:r>
+              <a:t>MNG</a:t>
+            </a:r>
+          </a:p>
+        </p:txBody>
+      </p:sp>
+      <p:sp>
+        <p:nvSpPr>
+          <p:cNvPr id="21" name="TextBox 20"/>
+          <p:cNvSpPr txBox="1"/>
+          <p:nvPr/>
+        </p:nvSpPr>
+        <p:spPr>
+          <a:xfrm>
+            <a:off x="4518152" y="3845661"/>
+            <a:ext cx="548640" cy="182880"/>
+          </a:xfrm>
+          <a:prstGeom prst="rect">
+            <a:avLst/>
+          </a:prstGeom>
+          <a:noFill/>
+        </p:spPr>
+        <p:txBody>
+          <a:bodyPr wrap="square" anchor="t"/>
+          <a:lstStyle/>
+          <a:p>
+            <a:pPr algn="ctr">
+              <a:defRPr sz="700" b="1">
+                <a:solidFill>
+                  <a:srgbClr val="E07B73"/>
+                </a:solidFill>
+                <a:latin typeface="Calibri"/>
+              </a:defRPr>
+            </a:pPr>
+            <a:r>
+              <a:t>BRN</a:t>
+            </a:r>
+          </a:p>
+        </p:txBody>
+      </p:sp>
+      <p:sp>
+        <p:nvSpPr>
+          <p:cNvPr id="22" name="TextBox 21"/>
+          <p:cNvSpPr txBox="1"/>
+          <p:nvPr/>
+        </p:nvSpPr>
+        <p:spPr>
+          <a:xfrm>
+            <a:off x="4499356" y="4045762"/>
+            <a:ext cx="548640" cy="182880"/>
+          </a:xfrm>
+          <a:prstGeom prst="rect">
+            <a:avLst/>
+          </a:prstGeom>
+          <a:noFill/>
+        </p:spPr>
+        <p:txBody>
+          <a:bodyPr wrap="square" anchor="t"/>
+          <a:lstStyle/>
+          <a:p>
+            <a:pPr algn="ctr">
+              <a:defRPr sz="700" b="1">
+                <a:solidFill>
+                  <a:srgbClr val="E07B73"/>
+                </a:solidFill>
+                <a:latin typeface="Calibri"/>
+              </a:defRPr>
+            </a:pPr>
+            <a:r>
+              <a:t>THA</a:t>
+            </a:r>
+          </a:p>
+        </p:txBody>
+      </p:sp>
+      <p:sp>
+        <p:nvSpPr>
+          <p:cNvPr id="23" name="TextBox 22"/>
+          <p:cNvSpPr txBox="1"/>
+          <p:nvPr/>
+        </p:nvSpPr>
+        <p:spPr>
+          <a:xfrm>
+            <a:off x="3965549" y="3804056"/>
+            <a:ext cx="548640" cy="182880"/>
+          </a:xfrm>
+          <a:prstGeom prst="rect">
+            <a:avLst/>
+          </a:prstGeom>
+          <a:noFill/>
+        </p:spPr>
+        <p:txBody>
+          <a:bodyPr wrap="square" anchor="t"/>
+          <a:lstStyle/>
+          <a:p>
+            <a:pPr algn="ctr">
+              <a:defRPr sz="700" b="1">
+                <a:solidFill>
+                  <a:srgbClr val="6B8CA3"/>
+                </a:solidFill>
+                <a:latin typeface="Calibri"/>
+              </a:defRPr>
+            </a:pPr>
+            <a:r>
+              <a:t>MYS</a:t>
+            </a:r>
+          </a:p>
+        </p:txBody>
+      </p:sp>
+      <p:sp>
+        <p:nvSpPr>
+          <p:cNvPr id="24" name="TextBox 23"/>
+          <p:cNvSpPr txBox="1"/>
+          <p:nvPr/>
+        </p:nvSpPr>
+        <p:spPr>
+          <a:xfrm>
+            <a:off x="3247542" y="3762451"/>
+            <a:ext cx="548640" cy="182880"/>
+          </a:xfrm>
+          <a:prstGeom prst="rect">
+            <a:avLst/>
+          </a:prstGeom>
+          <a:noFill/>
+        </p:spPr>
+        <p:txBody>
+          <a:bodyPr wrap="square" anchor="t"/>
+          <a:lstStyle/>
+          <a:p>
+            <a:pPr algn="ctr">
+              <a:defRPr sz="700" b="1">
+                <a:solidFill>
+                  <a:srgbClr val="6B8CA3"/>
+                </a:solidFill>
+                <a:latin typeface="Calibri"/>
+              </a:defRPr>
+            </a:pPr>
+            <a:r>
+              <a:t>FJI</a:t>
+            </a:r>
+          </a:p>
+        </p:txBody>
+      </p:sp>
+      <p:sp>
+        <p:nvSpPr>
+          <p:cNvPr id="25" name="TextBox 24"/>
+          <p:cNvSpPr txBox="1"/>
+          <p:nvPr/>
+        </p:nvSpPr>
+        <p:spPr>
+          <a:xfrm>
+            <a:off x="2552090" y="4085386"/>
+            <a:ext cx="548640" cy="182880"/>
+          </a:xfrm>
+          <a:prstGeom prst="rect">
+            <a:avLst/>
+          </a:prstGeom>
+          <a:noFill/>
+        </p:spPr>
+        <p:txBody>
+          <a:bodyPr wrap="square" anchor="t"/>
+          <a:lstStyle/>
+          <a:p>
+            <a:pPr algn="ctr">
+              <a:defRPr sz="700" b="1">
+                <a:solidFill>
+                  <a:srgbClr val="6B8CA3"/>
+                </a:solidFill>
+                <a:latin typeface="Calibri"/>
+              </a:defRPr>
+            </a:pPr>
+            <a:r>
+              <a:t>IDN</a:t>
+            </a:r>
+          </a:p>
+        </p:txBody>
+      </p:sp>
+      <p:sp>
+        <p:nvSpPr>
+          <p:cNvPr id="26" name="TextBox 25"/>
+          <p:cNvSpPr txBox="1"/>
+          <p:nvPr/>
+        </p:nvSpPr>
+        <p:spPr>
+          <a:xfrm>
+            <a:off x="3044545" y="4344924"/>
+            <a:ext cx="548640" cy="182880"/>
+          </a:xfrm>
+          <a:prstGeom prst="rect">
+            <a:avLst/>
+          </a:prstGeom>
+          <a:noFill/>
+        </p:spPr>
+        <p:txBody>
+          <a:bodyPr wrap="square" anchor="t"/>
+          <a:lstStyle/>
+          <a:p>
+            <a:pPr algn="ctr">
+              <a:defRPr sz="700" b="1">
+                <a:solidFill>
+                  <a:srgbClr val="6B8CA3"/>
+                </a:solidFill>
+                <a:latin typeface="Calibri"/>
+              </a:defRPr>
+            </a:pPr>
+            <a:r>
+              <a:t>PHL</a:t>
+            </a:r>
+          </a:p>
+        </p:txBody>
+      </p:sp>
+      <p:sp>
+        <p:nvSpPr>
+          <p:cNvPr id="27" name="TextBox 26"/>
+          <p:cNvSpPr txBox="1"/>
+          <p:nvPr/>
+        </p:nvSpPr>
+        <p:spPr>
+          <a:xfrm>
+            <a:off x="3172358" y="4396435"/>
+            <a:ext cx="548640" cy="182880"/>
+          </a:xfrm>
+          <a:prstGeom prst="rect">
+            <a:avLst/>
+          </a:prstGeom>
+          <a:noFill/>
+        </p:spPr>
+        <p:txBody>
+          <a:bodyPr wrap="square" anchor="t"/>
+          <a:lstStyle/>
+          <a:p>
+            <a:pPr algn="ctr">
+              <a:defRPr sz="700" b="1">
+                <a:solidFill>
+                  <a:srgbClr val="6B8CA3"/>
+                </a:solidFill>
+                <a:latin typeface="Calibri"/>
+              </a:defRPr>
+            </a:pPr>
+            <a:r>
+              <a:t>TON</a:t>
+            </a:r>
+          </a:p>
+        </p:txBody>
+      </p:sp>
+      <p:sp>
+        <p:nvSpPr>
+          <p:cNvPr id="28" name="TextBox 27"/>
+          <p:cNvSpPr txBox="1"/>
+          <p:nvPr/>
+        </p:nvSpPr>
+        <p:spPr>
+          <a:xfrm>
+            <a:off x="3104692" y="4745126"/>
+            <a:ext cx="548640" cy="182880"/>
+          </a:xfrm>
+          <a:prstGeom prst="rect">
+            <a:avLst/>
+          </a:prstGeom>
+          <a:noFill/>
+        </p:spPr>
+        <p:txBody>
+          <a:bodyPr wrap="square" anchor="t"/>
+          <a:lstStyle/>
+          <a:p>
+            <a:pPr algn="ctr">
+              <a:defRPr sz="700" b="1">
+                <a:solidFill>
+                  <a:srgbClr val="E07B73"/>
+                </a:solidFill>
+                <a:latin typeface="Calibri"/>
+              </a:defRPr>
+            </a:pPr>
+            <a:r>
+              <a:t>TUV</a:t>
+            </a:r>
+          </a:p>
+        </p:txBody>
+      </p:sp>
+      <p:sp>
+        <p:nvSpPr>
+          <p:cNvPr id="29" name="TextBox 28"/>
+          <p:cNvSpPr txBox="1"/>
+          <p:nvPr/>
+        </p:nvSpPr>
+        <p:spPr>
+          <a:xfrm>
+            <a:off x="2758846" y="4630216"/>
+            <a:ext cx="548640" cy="182880"/>
+          </a:xfrm>
+          <a:prstGeom prst="rect">
+            <a:avLst/>
+          </a:prstGeom>
+          <a:noFill/>
+        </p:spPr>
+        <p:txBody>
+          <a:bodyPr wrap="square" anchor="t"/>
+          <a:lstStyle/>
+          <a:p>
+            <a:pPr algn="ctr">
+              <a:defRPr sz="700" b="1">
+                <a:solidFill>
+                  <a:srgbClr val="6B8CA3"/>
+                </a:solidFill>
+                <a:latin typeface="Calibri"/>
+              </a:defRPr>
+            </a:pPr>
+            <a:r>
+              <a:t>WSM</a:t>
+            </a:r>
+          </a:p>
+        </p:txBody>
+      </p:sp>
+      <p:sp>
+        <p:nvSpPr>
+          <p:cNvPr id="30" name="TextBox 29"/>
+          <p:cNvSpPr txBox="1"/>
+          <p:nvPr/>
+        </p:nvSpPr>
+        <p:spPr>
+          <a:xfrm>
+            <a:off x="2732532" y="4715408"/>
+            <a:ext cx="548640" cy="182880"/>
+          </a:xfrm>
+          <a:prstGeom prst="rect">
+            <a:avLst/>
+          </a:prstGeom>
+          <a:noFill/>
+        </p:spPr>
+        <p:txBody>
+          <a:bodyPr wrap="square" anchor="t"/>
+          <a:lstStyle/>
+          <a:p>
+            <a:pPr algn="ctr">
+              <a:defRPr sz="700" b="1">
+                <a:solidFill>
+                  <a:srgbClr val="E07B73"/>
+                </a:solidFill>
+                <a:latin typeface="Calibri"/>
+              </a:defRPr>
+            </a:pPr>
+            <a:r>
+              <a:t>KIR</a:t>
+            </a:r>
+          </a:p>
+        </p:txBody>
+      </p:sp>
+      <p:sp>
+        <p:nvSpPr>
+          <p:cNvPr id="31" name="TextBox 30"/>
+          <p:cNvSpPr txBox="1"/>
+          <p:nvPr/>
+        </p:nvSpPr>
+        <p:spPr>
+          <a:xfrm>
+            <a:off x="1860397" y="4758994"/>
+            <a:ext cx="548640" cy="182880"/>
+          </a:xfrm>
+          <a:prstGeom prst="rect">
+            <a:avLst/>
+          </a:prstGeom>
+          <a:noFill/>
+        </p:spPr>
+        <p:txBody>
+          <a:bodyPr wrap="square" anchor="t"/>
+          <a:lstStyle/>
+          <a:p>
+            <a:pPr algn="ctr">
+              <a:defRPr sz="700" b="1">
+                <a:solidFill>
+                  <a:srgbClr val="6B8CA3"/>
+                </a:solidFill>
+                <a:latin typeface="Calibri"/>
+              </a:defRPr>
+            </a:pPr>
+            <a:r>
+              <a:t>MMR</a:t>
+            </a:r>
+          </a:p>
+        </p:txBody>
+      </p:sp>
+      <p:sp>
+        <p:nvSpPr>
+          <p:cNvPr id="32" name="TextBox 31"/>
+          <p:cNvSpPr txBox="1"/>
+          <p:nvPr/>
+        </p:nvSpPr>
+        <p:spPr>
+          <a:xfrm>
+            <a:off x="1830324" y="4901641"/>
+            <a:ext cx="548640" cy="182880"/>
+          </a:xfrm>
+          <a:prstGeom prst="rect">
+            <a:avLst/>
+          </a:prstGeom>
+          <a:noFill/>
+        </p:spPr>
+        <p:txBody>
+          <a:bodyPr wrap="square" anchor="t"/>
+          <a:lstStyle/>
+          <a:p>
+            <a:pPr algn="ctr">
+              <a:defRPr sz="700" b="1">
+                <a:solidFill>
+                  <a:srgbClr val="6B8CA3"/>
+                </a:solidFill>
+                <a:latin typeface="Calibri"/>
+              </a:defRPr>
+            </a:pPr>
+            <a:r>
+              <a:t>MHL</a:t>
+            </a:r>
+          </a:p>
+        </p:txBody>
+      </p:sp>
+      <p:sp>
+        <p:nvSpPr>
+          <p:cNvPr id="33" name="TextBox 32"/>
+          <p:cNvSpPr txBox="1"/>
+          <p:nvPr/>
+        </p:nvSpPr>
+        <p:spPr>
+          <a:xfrm>
+            <a:off x="2225040" y="5359298"/>
+            <a:ext cx="548640" cy="182880"/>
+          </a:xfrm>
+          <a:prstGeom prst="rect">
+            <a:avLst/>
+          </a:prstGeom>
+          <a:noFill/>
+        </p:spPr>
+        <p:txBody>
+          <a:bodyPr wrap="square" anchor="t"/>
+          <a:lstStyle/>
+          <a:p>
+            <a:pPr algn="ctr">
+              <a:defRPr sz="700" b="1">
+                <a:solidFill>
+                  <a:srgbClr val="E07B73"/>
+                </a:solidFill>
+                <a:latin typeface="Calibri"/>
+              </a:defRPr>
+            </a:pPr>
+            <a:r>
+              <a:t>KHM</a:t>
+            </a:r>
+          </a:p>
+        </p:txBody>
+      </p:sp>
+      <p:sp>
+        <p:nvSpPr>
+          <p:cNvPr id="34" name="TextBox 33"/>
+          <p:cNvSpPr txBox="1"/>
+          <p:nvPr/>
+        </p:nvSpPr>
+        <p:spPr>
+          <a:xfrm>
+            <a:off x="1491996" y="5103723"/>
+            <a:ext cx="548640" cy="182880"/>
+          </a:xfrm>
+          <a:prstGeom prst="rect">
+            <a:avLst/>
+          </a:prstGeom>
+          <a:noFill/>
+        </p:spPr>
+        <p:txBody>
+          <a:bodyPr wrap="square" anchor="t"/>
+          <a:lstStyle/>
+          <a:p>
+            <a:pPr algn="ctr">
+              <a:defRPr sz="700" b="1">
+                <a:solidFill>
+                  <a:srgbClr val="6B8CA3"/>
+                </a:solidFill>
+                <a:latin typeface="Calibri"/>
+              </a:defRPr>
+            </a:pPr>
+            <a:r>
+              <a:t>LAO</a:t>
+            </a:r>
+          </a:p>
+        </p:txBody>
+      </p:sp>
+      <p:sp>
+        <p:nvSpPr>
+          <p:cNvPr id="35" name="TextBox 34"/>
+          <p:cNvSpPr txBox="1"/>
+          <p:nvPr/>
+        </p:nvSpPr>
+        <p:spPr>
+          <a:xfrm>
+            <a:off x="1398016" y="5022494"/>
+            <a:ext cx="548640" cy="182880"/>
+          </a:xfrm>
+          <a:prstGeom prst="rect">
+            <a:avLst/>
+          </a:prstGeom>
+          <a:noFill/>
+        </p:spPr>
+        <p:txBody>
+          <a:bodyPr wrap="square" anchor="t"/>
+          <a:lstStyle/>
+          <a:p>
+            <a:pPr algn="ctr">
+              <a:defRPr sz="700" b="1">
+                <a:solidFill>
+                  <a:srgbClr val="6B8CA3"/>
+                </a:solidFill>
+                <a:latin typeface="Calibri"/>
+              </a:defRPr>
+            </a:pPr>
+            <a:r>
+              <a:t>VUT</a:t>
+            </a:r>
+          </a:p>
+        </p:txBody>
+      </p:sp>
+      <p:sp>
+        <p:nvSpPr>
+          <p:cNvPr id="36" name="Rounded Rectangle 35"/>
+          <p:cNvSpPr/>
+          <p:nvPr/>
+        </p:nvSpPr>
+        <p:spPr>
+          <a:xfrm>
+            <a:off x="8961120" y="1188720"/>
+            <a:ext cx="2834640" cy="5303520"/>
+          </a:xfrm>
+          <a:prstGeom prst="roundRect">
+            <a:avLst/>
+          </a:prstGeom>
+          <a:solidFill>
+            <a:srgbClr val="FFFFFF"/>
+          </a:solidFill>
+          <a:ln>
+            <a:noFill/>
+          </a:ln>
+        </p:spPr>
+        <p:style>
+          <a:lnRef idx="1">
+            <a:schemeClr val="accent1"/>
+          </a:lnRef>
+          <a:fillRef idx="3">
+            <a:schemeClr val="accent1"/>
+          </a:fillRef>
+          <a:effectRef idx="2">
+            <a:schemeClr val="accent1"/>
+          </a:effectRef>
+          <a:fontRef idx="minor">
+            <a:schemeClr val="lt1"/>
+          </a:fontRef>
+        </p:style>
+        <p:txBody>
+          <a:bodyPr rtlCol="0" anchor="ctr"/>
+          <a:lstStyle/>
+          <a:p>
+            <a:pPr algn="ctr"/>
+          </a:p>
+        </p:txBody>
+      </p:sp>
+      <p:sp>
+        <p:nvSpPr>
+          <p:cNvPr id="37" name="Rectangle 36"/>
+          <p:cNvSpPr/>
+          <p:nvPr/>
+        </p:nvSpPr>
+        <p:spPr>
+          <a:xfrm>
+            <a:off x="8961120" y="1188720"/>
+            <a:ext cx="63500" cy="5303520"/>
+          </a:xfrm>
+          <a:prstGeom prst="rect">
+            <a:avLst/>
+          </a:prstGeom>
+          <a:solidFill>
+            <a:srgbClr val="006EAF"/>
+          </a:solidFill>
+          <a:ln>
+            <a:noFill/>
+          </a:ln>
+        </p:spPr>
+        <p:style>
+          <a:lnRef idx="1">
+            <a:schemeClr val="accent1"/>
+          </a:lnRef>
+          <a:fillRef idx="3">
+            <a:schemeClr val="accent1"/>
+          </a:fillRef>
+          <a:effectRef idx="2">
+            <a:schemeClr val="accent1"/>
+          </a:effectRef>
+          <a:fontRef idx="minor">
+            <a:schemeClr val="lt1"/>
+          </a:fontRef>
+        </p:style>
+        <p:txBody>
+          <a:bodyPr rtlCol="0" anchor="ctr"/>
+          <a:lstStyle/>
+          <a:p>
+            <a:pPr algn="ctr"/>
+          </a:p>
+        </p:txBody>
+      </p:sp>
+      <p:sp>
+        <p:nvSpPr>
+          <p:cNvPr id="38" name="TextBox 37"/>
+          <p:cNvSpPr txBox="1"/>
+          <p:nvPr/>
+        </p:nvSpPr>
+        <p:spPr>
+          <a:xfrm>
+            <a:off x="9235440" y="1371600"/>
+            <a:ext cx="2468880" cy="228600"/>
+          </a:xfrm>
+          <a:prstGeom prst="rect">
+            <a:avLst/>
+          </a:prstGeom>
+          <a:noFill/>
+        </p:spPr>
+        <p:txBody>
+          <a:bodyPr wrap="square" anchor="t"/>
+          <a:lstStyle/>
+          <a:p>
+            <a:pPr algn="l">
+              <a:defRPr sz="1100" b="1">
+                <a:solidFill>
+                  <a:srgbClr val="006EAF"/>
+                </a:solidFill>
+                <a:latin typeface="Calibri"/>
+              </a:defRPr>
+            </a:pPr>
+            <a:r>
+              <a:t>GENDER ANALYSIS</a:t>
+            </a:r>
+          </a:p>
+        </p:txBody>
+      </p:sp>
+      <p:sp>
+        <p:nvSpPr>
+          <p:cNvPr id="39" name="Rectangle 38"/>
+          <p:cNvSpPr/>
+          <p:nvPr/>
+        </p:nvSpPr>
+        <p:spPr>
+          <a:xfrm>
+            <a:off x="9235440" y="1737360"/>
+            <a:ext cx="228600" cy="137160"/>
+          </a:xfrm>
+          <a:prstGeom prst="rect">
+            <a:avLst/>
+          </a:prstGeom>
+          <a:solidFill>
+            <a:srgbClr val="6B8CA3"/>
+          </a:solidFill>
+          <a:ln>
+            <a:noFill/>
+          </a:ln>
+        </p:spPr>
+        <p:style>
+          <a:lnRef idx="1">
+            <a:schemeClr val="accent1"/>
+          </a:lnRef>
+          <a:fillRef idx="3">
+            <a:schemeClr val="accent1"/>
+          </a:fillRef>
+          <a:effectRef idx="2">
+            <a:schemeClr val="accent1"/>
+          </a:effectRef>
+          <a:fontRef idx="minor">
+            <a:schemeClr val="lt1"/>
+          </a:fontRef>
+        </p:style>
+        <p:txBody>
+          <a:bodyPr rtlCol="0" anchor="ctr"/>
+          <a:lstStyle/>
+          <a:p>
+            <a:pPr algn="ctr"/>
+          </a:p>
+        </p:txBody>
+      </p:sp>
+      <p:sp>
+        <p:nvSpPr>
+          <p:cNvPr id="40" name="TextBox 39"/>
+          <p:cNvSpPr txBox="1"/>
+          <p:nvPr/>
+        </p:nvSpPr>
+        <p:spPr>
+          <a:xfrm>
+            <a:off x="9555480" y="1709928"/>
+            <a:ext cx="2103120" cy="182880"/>
+          </a:xfrm>
+          <a:prstGeom prst="rect">
+            <a:avLst/>
+          </a:prstGeom>
+          <a:noFill/>
+        </p:spPr>
+        <p:txBody>
+          <a:bodyPr wrap="square" anchor="t"/>
+          <a:lstStyle/>
+          <a:p>
+            <a:pPr algn="l">
+              <a:defRPr sz="800" b="0">
+                <a:solidFill>
+                  <a:srgbClr val="1A1A2E"/>
+                </a:solidFill>
+                <a:latin typeface="Calibri"/>
+              </a:defRPr>
+            </a:pPr>
+            <a:r>
+              <a:t>Male HCI+ &gt; Female HCI+</a:t>
+            </a:r>
+          </a:p>
+        </p:txBody>
+      </p:sp>
+      <p:sp>
+        <p:nvSpPr>
+          <p:cNvPr id="41" name="Rectangle 40"/>
+          <p:cNvSpPr/>
+          <p:nvPr/>
+        </p:nvSpPr>
+        <p:spPr>
+          <a:xfrm>
+            <a:off x="9235440" y="1965960"/>
+            <a:ext cx="228600" cy="137160"/>
+          </a:xfrm>
+          <a:prstGeom prst="rect">
+            <a:avLst/>
+          </a:prstGeom>
+          <a:solidFill>
+            <a:srgbClr val="E07B73"/>
+          </a:solidFill>
+          <a:ln>
+            <a:noFill/>
+          </a:ln>
+        </p:spPr>
+        <p:style>
+          <a:lnRef idx="1">
+            <a:schemeClr val="accent1"/>
+          </a:lnRef>
+          <a:fillRef idx="3">
+            <a:schemeClr val="accent1"/>
+          </a:fillRef>
+          <a:effectRef idx="2">
+            <a:schemeClr val="accent1"/>
+          </a:effectRef>
+          <a:fontRef idx="minor">
+            <a:schemeClr val="lt1"/>
+          </a:fontRef>
+        </p:style>
+        <p:txBody>
+          <a:bodyPr rtlCol="0" anchor="ctr"/>
+          <a:lstStyle/>
+          <a:p>
+            <a:pPr algn="ctr"/>
+          </a:p>
+        </p:txBody>
+      </p:sp>
+      <p:sp>
+        <p:nvSpPr>
+          <p:cNvPr id="42" name="TextBox 41"/>
+          <p:cNvSpPr txBox="1"/>
+          <p:nvPr/>
+        </p:nvSpPr>
+        <p:spPr>
+          <a:xfrm>
+            <a:off x="9555480" y="1938528"/>
+            <a:ext cx="2103120" cy="182880"/>
+          </a:xfrm>
+          <a:prstGeom prst="rect">
+            <a:avLst/>
+          </a:prstGeom>
+          <a:noFill/>
+        </p:spPr>
+        <p:txBody>
+          <a:bodyPr wrap="square" anchor="t"/>
+          <a:lstStyle/>
+          <a:p>
+            <a:pPr algn="l">
+              <a:defRPr sz="800" b="0">
+                <a:solidFill>
+                  <a:srgbClr val="1A1A2E"/>
+                </a:solidFill>
+                <a:latin typeface="Calibri"/>
+              </a:defRPr>
+            </a:pPr>
+            <a:r>
+              <a:t>Female HCI+ ≥ Male HCI+</a:t>
+            </a:r>
+          </a:p>
+        </p:txBody>
+      </p:sp>
+      <p:sp>
+        <p:nvSpPr>
+          <p:cNvPr id="43" name="Rectangle 42"/>
+          <p:cNvSpPr/>
+          <p:nvPr/>
+        </p:nvSpPr>
+        <p:spPr>
+          <a:xfrm>
+            <a:off x="9235440" y="2240280"/>
+            <a:ext cx="2468880" cy="12700"/>
+          </a:xfrm>
+          <a:prstGeom prst="rect">
+            <a:avLst/>
+          </a:prstGeom>
+          <a:solidFill>
+            <a:srgbClr val="D0D5DD"/>
+          </a:solidFill>
+          <a:ln>
+            <a:noFill/>
+          </a:ln>
+        </p:spPr>
+        <p:style>
+          <a:lnRef idx="1">
+            <a:schemeClr val="accent1"/>
+          </a:lnRef>
+          <a:fillRef idx="3">
+            <a:schemeClr val="accent1"/>
+          </a:fillRef>
+          <a:effectRef idx="2">
+            <a:schemeClr val="accent1"/>
+          </a:effectRef>
+          <a:fontRef idx="minor">
+            <a:schemeClr val="lt1"/>
+          </a:fontRef>
+        </p:style>
+        <p:txBody>
+          <a:bodyPr rtlCol="0" anchor="ctr"/>
+          <a:lstStyle/>
+          <a:p>
+            <a:pPr algn="ctr"/>
+          </a:p>
+        </p:txBody>
+      </p:sp>
+      <p:sp>
+        <p:nvSpPr>
+          <p:cNvPr id="44" name="TextBox 43"/>
+          <p:cNvSpPr txBox="1"/>
+          <p:nvPr/>
+        </p:nvSpPr>
+        <p:spPr>
+          <a:xfrm>
+            <a:off x="9235440" y="2377440"/>
+            <a:ext cx="2468880" cy="228600"/>
+          </a:xfrm>
+          <a:prstGeom prst="rect">
+            <a:avLst/>
+          </a:prstGeom>
+          <a:noFill/>
+        </p:spPr>
+        <p:txBody>
+          <a:bodyPr wrap="square" anchor="t"/>
+          <a:lstStyle/>
+          <a:p>
+            <a:pPr algn="l">
+              <a:defRPr sz="1000" b="1">
+                <a:solidFill>
+                  <a:srgbClr val="006EAF"/>
+                </a:solidFill>
+                <a:latin typeface="Calibri"/>
+              </a:defRPr>
+            </a:pPr>
+            <a:r>
+              <a:t>KEY FINDINGS</a:t>
+            </a:r>
+          </a:p>
+        </p:txBody>
+      </p:sp>
+      <p:sp>
+        <p:nvSpPr>
+          <p:cNvPr id="45" name="TextBox 44"/>
+          <p:cNvSpPr txBox="1"/>
+          <p:nvPr/>
+        </p:nvSpPr>
+        <p:spPr>
+          <a:xfrm>
+            <a:off x="9235440" y="2651760"/>
+            <a:ext cx="2468880" cy="274320"/>
+          </a:xfrm>
+          <a:prstGeom prst="rect">
+            <a:avLst/>
+          </a:prstGeom>
+          <a:noFill/>
+        </p:spPr>
+        <p:txBody>
+          <a:bodyPr wrap="square" anchor="t"/>
+          <a:lstStyle/>
+          <a:p>
+            <a:pPr algn="l">
+              <a:defRPr sz="900" b="0">
+                <a:solidFill>
+                  <a:srgbClr val="7A7A8C"/>
+                </a:solidFill>
+                <a:latin typeface="Calibri"/>
+              </a:defRPr>
+            </a:pPr>
+            <a:r>
+              <a:t>Above 45° line</a:t>
+            </a:r>
+          </a:p>
+        </p:txBody>
+      </p:sp>
+      <p:sp>
+        <p:nvSpPr>
+          <p:cNvPr id="46" name="TextBox 45"/>
+          <p:cNvSpPr txBox="1"/>
+          <p:nvPr/>
+        </p:nvSpPr>
+        <p:spPr>
+          <a:xfrm>
+            <a:off x="9235440" y="2880360"/>
+            <a:ext cx="2468880" cy="320040"/>
+          </a:xfrm>
+          <a:prstGeom prst="rect">
+            <a:avLst/>
+          </a:prstGeom>
+          <a:noFill/>
+        </p:spPr>
+        <p:txBody>
+          <a:bodyPr wrap="square" anchor="t"/>
+          <a:lstStyle/>
+          <a:p>
+            <a:pPr algn="l">
+              <a:defRPr sz="1000" b="1">
+                <a:solidFill>
+                  <a:srgbClr val="1A1A2E"/>
+                </a:solidFill>
+                <a:latin typeface="Calibri"/>
+              </a:defRPr>
+            </a:pPr>
+            <a:r>
+              <a:t>15 economies</a:t>
+            </a:r>
+          </a:p>
+        </p:txBody>
+      </p:sp>
+      <p:sp>
+        <p:nvSpPr>
+          <p:cNvPr id="47" name="TextBox 46"/>
+          <p:cNvSpPr txBox="1"/>
+          <p:nvPr/>
+        </p:nvSpPr>
+        <p:spPr>
+          <a:xfrm>
+            <a:off x="9235440" y="3154680"/>
+            <a:ext cx="2468880" cy="182880"/>
+          </a:xfrm>
+          <a:prstGeom prst="rect">
+            <a:avLst/>
+          </a:prstGeom>
+          <a:noFill/>
+        </p:spPr>
+        <p:txBody>
+          <a:bodyPr wrap="square" anchor="t"/>
+          <a:lstStyle/>
+          <a:p>
+            <a:pPr algn="l">
+              <a:defRPr sz="800" b="0">
+                <a:solidFill>
+                  <a:srgbClr val="7A7A8C"/>
+                </a:solidFill>
+                <a:latin typeface="Calibri"/>
+              </a:defRPr>
+            </a:pPr>
+            <a:r>
+              <a:t>Male HCI+ exceeds Female</a:t>
+            </a:r>
+          </a:p>
+        </p:txBody>
+      </p:sp>
+      <p:sp>
+        <p:nvSpPr>
+          <p:cNvPr id="48" name="TextBox 47"/>
+          <p:cNvSpPr txBox="1"/>
+          <p:nvPr/>
+        </p:nvSpPr>
+        <p:spPr>
+          <a:xfrm>
+            <a:off x="9235440" y="3337560"/>
+            <a:ext cx="2468880" cy="274320"/>
+          </a:xfrm>
+          <a:prstGeom prst="rect">
+            <a:avLst/>
+          </a:prstGeom>
+          <a:noFill/>
+        </p:spPr>
+        <p:txBody>
+          <a:bodyPr wrap="square" anchor="t"/>
+          <a:lstStyle/>
+          <a:p>
+            <a:pPr algn="l">
+              <a:defRPr sz="900" b="0">
+                <a:solidFill>
+                  <a:srgbClr val="7A7A8C"/>
+                </a:solidFill>
+                <a:latin typeface="Calibri"/>
+              </a:defRPr>
+            </a:pPr>
+            <a:r>
+              <a:t>Below 45° line</a:t>
+            </a:r>
+          </a:p>
+        </p:txBody>
+      </p:sp>
+      <p:sp>
+        <p:nvSpPr>
+          <p:cNvPr id="49" name="TextBox 48"/>
+          <p:cNvSpPr txBox="1"/>
+          <p:nvPr/>
+        </p:nvSpPr>
+        <p:spPr>
+          <a:xfrm>
+            <a:off x="9235440" y="3566160"/>
+            <a:ext cx="2468880" cy="320040"/>
+          </a:xfrm>
+          <a:prstGeom prst="rect">
+            <a:avLst/>
+          </a:prstGeom>
+          <a:noFill/>
+        </p:spPr>
+        <p:txBody>
+          <a:bodyPr wrap="square" anchor="t"/>
+          <a:lstStyle/>
+          <a:p>
+            <a:pPr algn="l">
+              <a:defRPr sz="1000" b="1">
+                <a:solidFill>
+                  <a:srgbClr val="1A1A2E"/>
+                </a:solidFill>
+                <a:latin typeface="Calibri"/>
+              </a:defRPr>
+            </a:pPr>
+            <a:r>
+              <a:t>10 economies</a:t>
+            </a:r>
+          </a:p>
+        </p:txBody>
+      </p:sp>
+      <p:sp>
+        <p:nvSpPr>
+          <p:cNvPr id="50" name="TextBox 49"/>
+          <p:cNvSpPr txBox="1"/>
+          <p:nvPr/>
+        </p:nvSpPr>
+        <p:spPr>
+          <a:xfrm>
+            <a:off x="9235440" y="3840480"/>
+            <a:ext cx="2468880" cy="182880"/>
+          </a:xfrm>
+          <a:prstGeom prst="rect">
+            <a:avLst/>
+          </a:prstGeom>
+          <a:noFill/>
+        </p:spPr>
+        <p:txBody>
+          <a:bodyPr wrap="square" anchor="t"/>
+          <a:lstStyle/>
+          <a:p>
+            <a:pPr algn="l">
+              <a:defRPr sz="800" b="0">
+                <a:solidFill>
+                  <a:srgbClr val="7A7A8C"/>
+                </a:solidFill>
+                <a:latin typeface="Calibri"/>
+              </a:defRPr>
+            </a:pPr>
+            <a:r>
+              <a:t>Female HCI+ exceeds Male</a:t>
+            </a:r>
+          </a:p>
+        </p:txBody>
+      </p:sp>
+      <p:sp>
+        <p:nvSpPr>
           <p:cNvPr id="51" name="TextBox 50"/>
           <p:cNvSpPr txBox="1"/>
           <p:nvPr/>
         </p:nvSpPr>
         <p:spPr>
           <a:xfrm>
-            <a:off x="7863840" y="4846320"/>
-            <a:ext cx="3657600" cy="228600"/>
+            <a:off x="9235440" y="4023360"/>
+            <a:ext cx="2468880" cy="274320"/>
+          </a:xfrm>
+          <a:prstGeom prst="rect">
+            <a:avLst/>
+          </a:prstGeom>
+          <a:noFill/>
+        </p:spPr>
+        <p:txBody>
+          <a:bodyPr wrap="square" anchor="t"/>
+          <a:lstStyle/>
+          <a:p>
+            <a:pPr algn="l">
+              <a:defRPr sz="900" b="0">
+                <a:solidFill>
+                  <a:srgbClr val="7A7A8C"/>
+                </a:solidFill>
+                <a:latin typeface="Calibri"/>
+              </a:defRPr>
+            </a:pPr>
+            <a:r>
+              <a:t>Largest male</a:t>
+            </a:r>
+            <a:br/>
+            <a:r>
+              <a:t>advantage</a:t>
+            </a:r>
+          </a:p>
+        </p:txBody>
+      </p:sp>
+      <p:sp>
+        <p:nvSpPr>
+          <p:cNvPr id="52" name="TextBox 51"/>
+          <p:cNvSpPr txBox="1"/>
+          <p:nvPr/>
+        </p:nvSpPr>
+        <p:spPr>
+          <a:xfrm>
+            <a:off x="9235440" y="4251960"/>
+            <a:ext cx="2468880" cy="320040"/>
           </a:xfrm>
           <a:prstGeom prst="rect">
             <a:avLst/>
@@ -15895,27 +18219,31 @@
             <a:pPr algn="l">
               <a:defRPr sz="1000" b="1">
                 <a:solidFill>
-                  <a:srgbClr val="E87D1E"/>
+                  <a:srgbClr val="1A1A2E"/>
                 </a:solidFill>
                 <a:latin typeface="Calibri"/>
               </a:defRPr>
             </a:pPr>
             <a:r>
-              <a:t>KEY TAKEAWAY</a:t>
-            </a:r>
-          </a:p>
-        </p:txBody>
-      </p:sp>
-      <p:sp>
-        <p:nvSpPr>
-          <p:cNvPr id="52" name="TextBox 51"/>
+              <a:t>Indonesia (+33.4)</a:t>
+            </a:r>
+            <a:br/>
+            <a:r>
+              <a:t>Fiji (+31.2)</a:t>
+            </a:r>
+          </a:p>
+        </p:txBody>
+      </p:sp>
+      <p:sp>
+        <p:nvSpPr>
+          <p:cNvPr id="53" name="TextBox 52"/>
           <p:cNvSpPr txBox="1"/>
           <p:nvPr/>
         </p:nvSpPr>
         <p:spPr>
           <a:xfrm>
-            <a:off x="7863840" y="5120640"/>
-            <a:ext cx="3657600" cy="1005840"/>
+            <a:off x="9235440" y="4709160"/>
+            <a:ext cx="2468880" cy="274320"/>
           </a:xfrm>
           <a:prstGeom prst="rect">
             <a:avLst/>
@@ -15927,7 +18255,45 @@
           <a:lstStyle/>
           <a:p>
             <a:pPr algn="l">
-              <a:defRPr sz="1000" b="0">
+              <a:defRPr sz="900" b="0">
+                <a:solidFill>
+                  <a:srgbClr val="7A7A8C"/>
+                </a:solidFill>
+                <a:latin typeface="Calibri"/>
+              </a:defRPr>
+            </a:pPr>
+            <a:r>
+              <a:t>Largest female</a:t>
+            </a:r>
+            <a:br/>
+            <a:r>
+              <a:t>advantage</a:t>
+            </a:r>
+          </a:p>
+        </p:txBody>
+      </p:sp>
+      <p:sp>
+        <p:nvSpPr>
+          <p:cNvPr id="54" name="TextBox 53"/>
+          <p:cNvSpPr txBox="1"/>
+          <p:nvPr/>
+        </p:nvSpPr>
+        <p:spPr>
+          <a:xfrm>
+            <a:off x="9235440" y="4937760"/>
+            <a:ext cx="2468880" cy="320040"/>
+          </a:xfrm>
+          <a:prstGeom prst="rect">
+            <a:avLst/>
+          </a:prstGeom>
+          <a:noFill/>
+        </p:spPr>
+        <p:txBody>
+          <a:bodyPr wrap="square" anchor="t"/>
+          <a:lstStyle/>
+          <a:p>
+            <a:pPr algn="l">
+              <a:defRPr sz="1000" b="1">
                 <a:solidFill>
                   <a:srgbClr val="1A1A2E"/>
                 </a:solidFill>
@@ -15935,14 +18301,129 @@
               </a:defRPr>
             </a:pPr>
             <a:r>
-              <a:t>EAP's employment score (40.7) ranks 3rd among regions and exceeds the world average (37.2). Youth LFP (60.0%) is notably high. The EAP gender gap (+5.7) is moderate — better than South Asia (+15.8) and MENA (+18.3), but wider than Europe (−1.2). Countries like Indonesia (+22.6) and Fiji (+25.2) drive the gap, while Cambodia (−14.2) and Thailand (−8.1) favor women.</a:t>
-            </a:r>
-          </a:p>
-        </p:txBody>
-      </p:sp>
-      <p:sp>
-        <p:nvSpPr>
-          <p:cNvPr id="53" name="Rectangle 52"/>
+              <a:t>Cambodia (−22.2)</a:t>
+            </a:r>
+            <a:br/>
+            <a:r>
+              <a:t>Thailand (−16.4)</a:t>
+            </a:r>
+          </a:p>
+        </p:txBody>
+      </p:sp>
+      <p:sp>
+        <p:nvSpPr>
+          <p:cNvPr id="55" name="Rectangle 54"/>
+          <p:cNvSpPr/>
+          <p:nvPr/>
+        </p:nvSpPr>
+        <p:spPr>
+          <a:xfrm>
+            <a:off x="9235440" y="5394960"/>
+            <a:ext cx="2468880" cy="12700"/>
+          </a:xfrm>
+          <a:prstGeom prst="rect">
+            <a:avLst/>
+          </a:prstGeom>
+          <a:solidFill>
+            <a:srgbClr val="D0D5DD"/>
+          </a:solidFill>
+          <a:ln>
+            <a:noFill/>
+          </a:ln>
+        </p:spPr>
+        <p:style>
+          <a:lnRef idx="1">
+            <a:schemeClr val="accent1"/>
+          </a:lnRef>
+          <a:fillRef idx="3">
+            <a:schemeClr val="accent1"/>
+          </a:fillRef>
+          <a:effectRef idx="2">
+            <a:schemeClr val="accent1"/>
+          </a:effectRef>
+          <a:fontRef idx="minor">
+            <a:schemeClr val="lt1"/>
+          </a:fontRef>
+        </p:style>
+        <p:txBody>
+          <a:bodyPr rtlCol="0" anchor="ctr"/>
+          <a:lstStyle/>
+          <a:p>
+            <a:pPr algn="ctr"/>
+          </a:p>
+        </p:txBody>
+      </p:sp>
+      <p:sp>
+        <p:nvSpPr>
+          <p:cNvPr id="56" name="TextBox 55"/>
+          <p:cNvSpPr txBox="1"/>
+          <p:nvPr/>
+        </p:nvSpPr>
+        <p:spPr>
+          <a:xfrm>
+            <a:off x="9235440" y="5532120"/>
+            <a:ext cx="2468880" cy="228600"/>
+          </a:xfrm>
+          <a:prstGeom prst="rect">
+            <a:avLst/>
+          </a:prstGeom>
+          <a:noFill/>
+        </p:spPr>
+        <p:txBody>
+          <a:bodyPr wrap="square" anchor="t"/>
+          <a:lstStyle/>
+          <a:p>
+            <a:pPr algn="l">
+              <a:defRPr sz="1000" b="1">
+                <a:solidFill>
+                  <a:srgbClr val="006EAF"/>
+                </a:solidFill>
+                <a:latin typeface="Calibri"/>
+              </a:defRPr>
+            </a:pPr>
+            <a:r>
+              <a:t>KEY INSIGHT</a:t>
+            </a:r>
+          </a:p>
+        </p:txBody>
+      </p:sp>
+      <p:sp>
+        <p:nvSpPr>
+          <p:cNvPr id="57" name="TextBox 56"/>
+          <p:cNvSpPr txBox="1"/>
+          <p:nvPr/>
+        </p:nvSpPr>
+        <p:spPr>
+          <a:xfrm>
+            <a:off x="9235440" y="5806440"/>
+            <a:ext cx="2468880" cy="1371600"/>
+          </a:xfrm>
+          <a:prstGeom prst="rect">
+            <a:avLst/>
+          </a:prstGeom>
+          <a:noFill/>
+        </p:spPr>
+        <p:txBody>
+          <a:bodyPr wrap="square" anchor="t"/>
+          <a:lstStyle/>
+          <a:p>
+            <a:pPr algn="l">
+              <a:defRPr sz="900" b="0">
+                <a:solidFill>
+                  <a:srgbClr val="1A1A2E"/>
+                </a:solidFill>
+                <a:latin typeface="Calibri"/>
+              </a:defRPr>
+            </a:pPr>
+            <a:r>
+              <a:t>Most EAP economies show higher male HCI+, driven largely by employment gaps. However, several countries — notably Cambodia, Thailand, China, and Vietnam — show female advantage, reflecting higher female education outcomes and labor force participation in these economies.</a:t>
+            </a:r>
+          </a:p>
+        </p:txBody>
+      </p:sp>
+      <p:sp>
+        <p:nvSpPr>
+          <p:cNvPr id="58" name="Rectangle 57"/>
           <p:cNvSpPr/>
           <p:nvPr/>
         </p:nvSpPr>
@@ -15985,7 +18466,7 @@
       </p:sp>
       <p:sp>
         <p:nvSpPr>
-          <p:cNvPr id="54" name="TextBox 53"/>
+          <p:cNvPr id="59" name="TextBox 58"/>
           <p:cNvSpPr txBox="1"/>
           <p:nvPr/>
         </p:nvSpPr>
@@ -16019,7 +18500,7 @@
       </p:sp>
       <p:sp>
         <p:nvSpPr>
-          <p:cNvPr id="55" name="TextBox 54"/>
+          <p:cNvPr id="60" name="TextBox 59"/>
           <p:cNvSpPr txBox="1"/>
           <p:nvPr/>
         </p:nvSpPr>
@@ -16053,7 +18534,7 @@
       </p:sp>
       <p:sp>
         <p:nvSpPr>
-          <p:cNvPr id="56" name="TextBox 55"/>
+          <p:cNvPr id="61" name="TextBox 60"/>
           <p:cNvSpPr txBox="1"/>
           <p:nvPr/>
         </p:nvSpPr>
@@ -16080,7 +18561,7 @@
               </a:defRPr>
             </a:pPr>
             <a:r>
-              <a:t>6</a:t>
+              <a:t>7</a:t>
             </a:r>
           </a:p>
         </p:txBody>

--- a/EAP_HCI_Plus_2025.pptx
+++ b/EAP_HCI_Plus_2025.pptx
@@ -13,6 +13,7 @@
     <p:sldId id="261" r:id="rId12"/>
     <p:sldId id="262" r:id="rId13"/>
     <p:sldId id="263" r:id="rId14"/>
+    <p:sldId id="264" r:id="rId15"/>
   </p:sldIdLst>
   <p:sldSz cx="12191695" cy="6858000" type="screen4x3"/>
   <p:notesSz cx="6858000" cy="9144000"/>
@@ -397,118 +398,118 @@
                 <c:formatCode>General</c:formatCode>
                 <c:ptCount val="38"/>
                 <c:pt idx="0">
-                  <c:v>1</c:v>
+                  <c:v>0.3</c:v>
                 </c:pt>
                 <c:pt idx="1">
-                  <c:v>1</c:v>
+                  <c:v>0.3</c:v>
                 </c:pt>
                 <c:pt idx="2">
-                  <c:v>1</c:v>
+                  <c:v>0.3</c:v>
                 </c:pt>
                 <c:pt idx="3">
-                  <c:v>1</c:v>
+                  <c:v>0.3</c:v>
                 </c:pt>
                 <c:pt idx="4">
-                  <c:v>1</c:v>
+                  <c:v>0.3</c:v>
                 </c:pt>
                 <c:pt idx="5">
-                  <c:v>1</c:v>
+                  <c:v>0.3</c:v>
                 </c:pt>
                 <c:pt idx="6">
-                  <c:v>1</c:v>
+                  <c:v>0.3</c:v>
                 </c:pt>
                 <c:pt idx="7">
-                  <c:v>1</c:v>
+                  <c:v>0.3</c:v>
                 </c:pt>
                 <c:pt idx="8">
-                  <c:v>1</c:v>
+                  <c:v>0.3</c:v>
                 </c:pt>
                 <c:pt idx="9">
-                  <c:v>1</c:v>
+                  <c:v>0.3</c:v>
                 </c:pt>
                 <c:pt idx="10">
-                  <c:v>1</c:v>
+                  <c:v>0.3</c:v>
                 </c:pt>
                 <c:pt idx="11">
-                  <c:v>1</c:v>
+                  <c:v>0.3</c:v>
                 </c:pt>
                 <c:pt idx="12">
-                  <c:v>1</c:v>
+                  <c:v>0.3</c:v>
                 </c:pt>
                 <c:pt idx="13">
-                  <c:v>1</c:v>
+                  <c:v>0.3</c:v>
                 </c:pt>
                 <c:pt idx="14">
-                  <c:v>1</c:v>
+                  <c:v>0.3</c:v>
                 </c:pt>
                 <c:pt idx="15">
-                  <c:v>1</c:v>
+                  <c:v>0.3</c:v>
                 </c:pt>
                 <c:pt idx="16">
-                  <c:v>1</c:v>
+                  <c:v>0.3</c:v>
                 </c:pt>
                 <c:pt idx="17">
-                  <c:v>1</c:v>
+                  <c:v>0.3</c:v>
                 </c:pt>
                 <c:pt idx="18">
-                  <c:v>1</c:v>
+                  <c:v>0.3</c:v>
                 </c:pt>
                 <c:pt idx="19">
-                  <c:v>1</c:v>
+                  <c:v>0.3</c:v>
                 </c:pt>
                 <c:pt idx="20">
-                  <c:v>1</c:v>
+                  <c:v>0.3</c:v>
                 </c:pt>
                 <c:pt idx="21">
-                  <c:v>1</c:v>
+                  <c:v>0.3</c:v>
                 </c:pt>
                 <c:pt idx="22">
-                  <c:v>1</c:v>
+                  <c:v>0.3</c:v>
                 </c:pt>
                 <c:pt idx="23">
-                  <c:v>1</c:v>
+                  <c:v>0.3</c:v>
                 </c:pt>
                 <c:pt idx="24">
-                  <c:v>1</c:v>
+                  <c:v>0.3</c:v>
                 </c:pt>
                 <c:pt idx="25">
-                  <c:v>1</c:v>
+                  <c:v>0.3</c:v>
                 </c:pt>
                 <c:pt idx="26">
-                  <c:v>1</c:v>
+                  <c:v>0.3</c:v>
                 </c:pt>
                 <c:pt idx="27">
-                  <c:v>1</c:v>
+                  <c:v>0.3</c:v>
                 </c:pt>
                 <c:pt idx="28">
-                  <c:v>1</c:v>
+                  <c:v>0.3</c:v>
                 </c:pt>
                 <c:pt idx="29">
-                  <c:v>1</c:v>
+                  <c:v>0.3</c:v>
                 </c:pt>
                 <c:pt idx="30">
-                  <c:v>1</c:v>
+                  <c:v>0.3</c:v>
                 </c:pt>
                 <c:pt idx="31">
-                  <c:v>1</c:v>
+                  <c:v>0.3</c:v>
                 </c:pt>
                 <c:pt idx="32">
-                  <c:v>1</c:v>
+                  <c:v>0.3</c:v>
                 </c:pt>
                 <c:pt idx="33">
-                  <c:v>1</c:v>
+                  <c:v>0.3</c:v>
                 </c:pt>
                 <c:pt idx="34">
-                  <c:v>1</c:v>
+                  <c:v>0.3</c:v>
                 </c:pt>
                 <c:pt idx="35">
-                  <c:v>1</c:v>
+                  <c:v>0.3</c:v>
                 </c:pt>
                 <c:pt idx="36">
-                  <c:v>1</c:v>
+                  <c:v>0.3</c:v>
                 </c:pt>
                 <c:pt idx="37">
-                  <c:v>1</c:v>
+                  <c:v>0.3</c:v>
                 </c:pt>
               </c:numCache>
             </c:numRef>
@@ -698,73 +699,73 @@
                 <c:formatCode>General</c:formatCode>
                 <c:ptCount val="23"/>
                 <c:pt idx="0">
-                  <c:v>1</c:v>
+                  <c:v>0.3</c:v>
                 </c:pt>
                 <c:pt idx="1">
-                  <c:v>1</c:v>
+                  <c:v>0.3</c:v>
                 </c:pt>
                 <c:pt idx="2">
-                  <c:v>1</c:v>
+                  <c:v>0.3</c:v>
                 </c:pt>
                 <c:pt idx="3">
-                  <c:v>1</c:v>
+                  <c:v>0.3</c:v>
                 </c:pt>
                 <c:pt idx="4">
-                  <c:v>1</c:v>
+                  <c:v>0.3</c:v>
                 </c:pt>
                 <c:pt idx="5">
-                  <c:v>1</c:v>
+                  <c:v>0.3</c:v>
                 </c:pt>
                 <c:pt idx="6">
-                  <c:v>1</c:v>
+                  <c:v>0.3</c:v>
                 </c:pt>
                 <c:pt idx="7">
-                  <c:v>1</c:v>
+                  <c:v>0.3</c:v>
                 </c:pt>
                 <c:pt idx="8">
-                  <c:v>1</c:v>
+                  <c:v>0.3</c:v>
                 </c:pt>
                 <c:pt idx="9">
-                  <c:v>1</c:v>
+                  <c:v>0.3</c:v>
                 </c:pt>
                 <c:pt idx="10">
-                  <c:v>1</c:v>
+                  <c:v>0.3</c:v>
                 </c:pt>
                 <c:pt idx="11">
-                  <c:v>1</c:v>
+                  <c:v>0.3</c:v>
                 </c:pt>
                 <c:pt idx="12">
-                  <c:v>1</c:v>
+                  <c:v>0.3</c:v>
                 </c:pt>
                 <c:pt idx="13">
-                  <c:v>1</c:v>
+                  <c:v>0.3</c:v>
                 </c:pt>
                 <c:pt idx="14">
-                  <c:v>1</c:v>
+                  <c:v>0.3</c:v>
                 </c:pt>
                 <c:pt idx="15">
-                  <c:v>1</c:v>
+                  <c:v>0.3</c:v>
                 </c:pt>
                 <c:pt idx="16">
-                  <c:v>1</c:v>
+                  <c:v>0.3</c:v>
                 </c:pt>
                 <c:pt idx="17">
-                  <c:v>1</c:v>
+                  <c:v>0.3</c:v>
                 </c:pt>
                 <c:pt idx="18">
-                  <c:v>1</c:v>
+                  <c:v>0.3</c:v>
                 </c:pt>
                 <c:pt idx="19">
-                  <c:v>1</c:v>
+                  <c:v>0.3</c:v>
                 </c:pt>
                 <c:pt idx="20">
-                  <c:v>1</c:v>
+                  <c:v>0.3</c:v>
                 </c:pt>
                 <c:pt idx="21">
-                  <c:v>1</c:v>
+                  <c:v>0.3</c:v>
                 </c:pt>
                 <c:pt idx="22">
-                  <c:v>1</c:v>
+                  <c:v>0.3</c:v>
                 </c:pt>
               </c:numCache>
             </c:numRef>
@@ -779,7 +780,7 @@
           <c:showPercent val="0"/>
           <c:showBubbleSize val="0"/>
         </c:dLbls>
-        <c:bubbleScale val="100"/>
+        <c:bubbleScale val="15"/>
         <c:showNegBubbles val="0"/>
         <c:axId val="-2115720072"/>
         <c:axId val="-2115723560"/>
@@ -834,8 +835,8 @@
         <c:axId val="-2115723560"/>
         <c:scaling>
           <c:orientation val="minMax"/>
-          <c:max val="300.0"/>
-          <c:min val="80.0"/>
+          <c:max val="310.0"/>
+          <c:min val="60.0"/>
         </c:scaling>
         <c:delete val="0"/>
         <c:axPos val="l"/>
@@ -18562,6 +18563,347 @@
             </a:pPr>
             <a:r>
               <a:t>7</a:t>
+            </a:r>
+          </a:p>
+        </p:txBody>
+      </p:sp>
+    </p:spTree>
+  </p:cSld>
+  <p:clrMapOvr>
+    <a:masterClrMapping/>
+  </p:clrMapOvr>
+</p:sld>
+</file>
+
+<file path=ppt/slides/slide9.xml><?xml version="1.0" encoding="utf-8"?>
+<p:sld xmlns:a="http://schemas.openxmlformats.org/drawingml/2006/main" xmlns:p="http://schemas.openxmlformats.org/presentationml/2006/main" xmlns:r="http://schemas.openxmlformats.org/officeDocument/2006/relationships">
+  <p:cSld>
+    <p:spTree>
+      <p:nvGrpSpPr>
+        <p:cNvPr id="1" name=""/>
+        <p:cNvGrpSpPr/>
+        <p:nvPr/>
+      </p:nvGrpSpPr>
+      <p:grpSpPr/>
+      <p:sp>
+        <p:nvSpPr>
+          <p:cNvPr id="2" name="Rectangle 1"/>
+          <p:cNvSpPr/>
+          <p:nvPr/>
+        </p:nvSpPr>
+        <p:spPr>
+          <a:xfrm>
+            <a:off x="0" y="0"/>
+            <a:ext cx="12191695" cy="6858000"/>
+          </a:xfrm>
+          <a:prstGeom prst="rect">
+            <a:avLst/>
+          </a:prstGeom>
+          <a:solidFill>
+            <a:srgbClr val="F7F8FA"/>
+          </a:solidFill>
+          <a:ln>
+            <a:noFill/>
+          </a:ln>
+        </p:spPr>
+        <p:style>
+          <a:lnRef idx="1">
+            <a:schemeClr val="accent1"/>
+          </a:lnRef>
+          <a:fillRef idx="3">
+            <a:schemeClr val="accent1"/>
+          </a:fillRef>
+          <a:effectRef idx="2">
+            <a:schemeClr val="accent1"/>
+          </a:effectRef>
+          <a:fontRef idx="minor">
+            <a:schemeClr val="lt1"/>
+          </a:fontRef>
+        </p:style>
+        <p:txBody>
+          <a:bodyPr rtlCol="0" anchor="ctr"/>
+          <a:lstStyle/>
+          <a:p>
+            <a:pPr algn="ctr"/>
+          </a:p>
+        </p:txBody>
+      </p:sp>
+      <p:sp>
+        <p:nvSpPr>
+          <p:cNvPr id="3" name="Rectangle 2"/>
+          <p:cNvSpPr/>
+          <p:nvPr/>
+        </p:nvSpPr>
+        <p:spPr>
+          <a:xfrm>
+            <a:off x="0" y="0"/>
+            <a:ext cx="12191695" cy="914400"/>
+          </a:xfrm>
+          <a:prstGeom prst="rect">
+            <a:avLst/>
+          </a:prstGeom>
+          <a:solidFill>
+            <a:srgbClr val="002B49"/>
+          </a:solidFill>
+          <a:ln>
+            <a:noFill/>
+          </a:ln>
+        </p:spPr>
+        <p:style>
+          <a:lnRef idx="1">
+            <a:schemeClr val="accent1"/>
+          </a:lnRef>
+          <a:fillRef idx="3">
+            <a:schemeClr val="accent1"/>
+          </a:fillRef>
+          <a:effectRef idx="2">
+            <a:schemeClr val="accent1"/>
+          </a:effectRef>
+          <a:fontRef idx="minor">
+            <a:schemeClr val="lt1"/>
+          </a:fontRef>
+        </p:style>
+        <p:txBody>
+          <a:bodyPr rtlCol="0" anchor="ctr"/>
+          <a:lstStyle/>
+          <a:p>
+            <a:pPr algn="ctr"/>
+          </a:p>
+        </p:txBody>
+      </p:sp>
+      <p:sp>
+        <p:nvSpPr>
+          <p:cNvPr id="4" name="TextBox 3"/>
+          <p:cNvSpPr txBox="1"/>
+          <p:nvPr/>
+        </p:nvSpPr>
+        <p:spPr>
+          <a:xfrm>
+            <a:off x="548640" y="137160"/>
+            <a:ext cx="7315200" cy="640080"/>
+          </a:xfrm>
+          <a:prstGeom prst="rect">
+            <a:avLst/>
+          </a:prstGeom>
+          <a:noFill/>
+        </p:spPr>
+        <p:txBody>
+          <a:bodyPr wrap="square" anchor="ctr"/>
+          <a:lstStyle/>
+          <a:p>
+            <a:pPr algn="l">
+              <a:defRPr sz="2400" b="1">
+                <a:solidFill>
+                  <a:srgbClr val="FFFFFF"/>
+                </a:solidFill>
+                <a:latin typeface="Calibri Light"/>
+              </a:defRPr>
+            </a:pPr>
+            <a:r>
+              <a:t>East Asia &amp; Pacific  |  HCI+ Map</a:t>
+            </a:r>
+          </a:p>
+        </p:txBody>
+      </p:sp>
+      <p:sp>
+        <p:nvSpPr>
+          <p:cNvPr id="5" name="TextBox 4"/>
+          <p:cNvSpPr txBox="1"/>
+          <p:nvPr/>
+        </p:nvSpPr>
+        <p:spPr>
+          <a:xfrm>
+            <a:off x="8686800" y="137160"/>
+            <a:ext cx="3200400" cy="640080"/>
+          </a:xfrm>
+          <a:prstGeom prst="rect">
+            <a:avLst/>
+          </a:prstGeom>
+          <a:noFill/>
+        </p:spPr>
+        <p:txBody>
+          <a:bodyPr wrap="square" anchor="ctr"/>
+          <a:lstStyle/>
+          <a:p>
+            <a:pPr algn="r">
+              <a:defRPr sz="2200" b="1">
+                <a:solidFill>
+                  <a:srgbClr val="006EAF"/>
+                </a:solidFill>
+                <a:latin typeface="Calibri"/>
+              </a:defRPr>
+            </a:pPr>
+            <a:r>
+              <a:t>2025</a:t>
+            </a:r>
+          </a:p>
+        </p:txBody>
+      </p:sp>
+      <p:pic>
+        <p:nvPicPr>
+          <p:cNvPr id="6" name="Picture 5" descr="eap_hci_map.png"/>
+          <p:cNvPicPr>
+            <a:picLocks noChangeAspect="1"/>
+          </p:cNvPicPr>
+          <p:nvPr/>
+        </p:nvPicPr>
+        <p:blipFill>
+          <a:blip r:embed="rId2"/>
+          <a:stretch>
+            <a:fillRect/>
+          </a:stretch>
+        </p:blipFill>
+        <p:spPr>
+          <a:xfrm>
+            <a:off x="274320" y="1005840"/>
+            <a:ext cx="11612880" cy="5303520"/>
+          </a:xfrm>
+          <a:prstGeom prst="rect">
+            <a:avLst/>
+          </a:prstGeom>
+        </p:spPr>
+      </p:pic>
+      <p:sp>
+        <p:nvSpPr>
+          <p:cNvPr id="7" name="Rectangle 6"/>
+          <p:cNvSpPr/>
+          <p:nvPr/>
+        </p:nvSpPr>
+        <p:spPr>
+          <a:xfrm>
+            <a:off x="0" y="6400800"/>
+            <a:ext cx="12191695" cy="457200"/>
+          </a:xfrm>
+          <a:prstGeom prst="rect">
+            <a:avLst/>
+          </a:prstGeom>
+          <a:solidFill>
+            <a:srgbClr val="002B49"/>
+          </a:solidFill>
+          <a:ln>
+            <a:noFill/>
+          </a:ln>
+        </p:spPr>
+        <p:style>
+          <a:lnRef idx="1">
+            <a:schemeClr val="accent1"/>
+          </a:lnRef>
+          <a:fillRef idx="3">
+            <a:schemeClr val="accent1"/>
+          </a:fillRef>
+          <a:effectRef idx="2">
+            <a:schemeClr val="accent1"/>
+          </a:effectRef>
+          <a:fontRef idx="minor">
+            <a:schemeClr val="lt1"/>
+          </a:fontRef>
+        </p:style>
+        <p:txBody>
+          <a:bodyPr rtlCol="0" anchor="ctr"/>
+          <a:lstStyle/>
+          <a:p>
+            <a:pPr algn="ctr"/>
+          </a:p>
+        </p:txBody>
+      </p:sp>
+      <p:sp>
+        <p:nvSpPr>
+          <p:cNvPr id="8" name="TextBox 7"/>
+          <p:cNvSpPr txBox="1"/>
+          <p:nvPr/>
+        </p:nvSpPr>
+        <p:spPr>
+          <a:xfrm>
+            <a:off x="548640" y="6464808"/>
+            <a:ext cx="5486400" cy="320040"/>
+          </a:xfrm>
+          <a:prstGeom prst="rect">
+            <a:avLst/>
+          </a:prstGeom>
+          <a:noFill/>
+        </p:spPr>
+        <p:txBody>
+          <a:bodyPr wrap="square" anchor="t"/>
+          <a:lstStyle/>
+          <a:p>
+            <a:pPr algn="l">
+              <a:defRPr sz="800" b="0">
+                <a:solidFill>
+                  <a:srgbClr val="AABBCC"/>
+                </a:solidFill>
+                <a:latin typeface="Calibri"/>
+              </a:defRPr>
+            </a:pPr>
+            <a:r>
+              <a:t>Source: World Bank Human Capital Index Plus (HCI+) 2025  |  github.com/worldbank/HCI-Plus</a:t>
+            </a:r>
+          </a:p>
+        </p:txBody>
+      </p:sp>
+      <p:sp>
+        <p:nvSpPr>
+          <p:cNvPr id="9" name="TextBox 8"/>
+          <p:cNvSpPr txBox="1"/>
+          <p:nvPr/>
+        </p:nvSpPr>
+        <p:spPr>
+          <a:xfrm>
+            <a:off x="9144000" y="6464808"/>
+            <a:ext cx="2286000" cy="320040"/>
+          </a:xfrm>
+          <a:prstGeom prst="rect">
+            <a:avLst/>
+          </a:prstGeom>
+          <a:noFill/>
+        </p:spPr>
+        <p:txBody>
+          <a:bodyPr wrap="square" anchor="t"/>
+          <a:lstStyle/>
+          <a:p>
+            <a:pPr algn="r">
+              <a:defRPr sz="800" b="0">
+                <a:solidFill>
+                  <a:srgbClr val="00889E"/>
+                </a:solidFill>
+                <a:latin typeface="Calibri"/>
+              </a:defRPr>
+            </a:pPr>
+            <a:r>
+              <a:t>humancapital.worldbank.org/hciplus</a:t>
+            </a:r>
+          </a:p>
+        </p:txBody>
+      </p:sp>
+      <p:sp>
+        <p:nvSpPr>
+          <p:cNvPr id="10" name="TextBox 9"/>
+          <p:cNvSpPr txBox="1"/>
+          <p:nvPr/>
+        </p:nvSpPr>
+        <p:spPr>
+          <a:xfrm>
+            <a:off x="11521440" y="6464808"/>
+            <a:ext cx="457200" cy="320040"/>
+          </a:xfrm>
+          <a:prstGeom prst="rect">
+            <a:avLst/>
+          </a:prstGeom>
+          <a:noFill/>
+        </p:spPr>
+        <p:txBody>
+          <a:bodyPr wrap="square" anchor="t"/>
+          <a:lstStyle/>
+          <a:p>
+            <a:pPr algn="r">
+              <a:defRPr sz="800" b="0">
+                <a:solidFill>
+                  <a:srgbClr val="FFFFFF"/>
+                </a:solidFill>
+                <a:latin typeface="Calibri"/>
+              </a:defRPr>
+            </a:pPr>
+            <a:r>
+              <a:t>8</a:t>
             </a:r>
           </a:p>
         </p:txBody>
